--- a/docs/curso/slides/m06-contratos-e-alocacao.pptx
+++ b/docs/curso/slides/m06-contratos-e-alocacao.pptx
@@ -3156,6 +3156,54 @@
           <a:chExt cx="0" cy="0"/>
         </a:xfrm>
       </p:grpSpPr>
+      <p:sp>
+        <p:nvSpPr>
+          <p:cNvPr id="25" name="Slide Number Placeholder 0"/>
+          <p:cNvSpPr>
+            <a:spLocks noGrp="1"/>
+          </p:cNvSpPr>
+          <p:nvPr>
+            <p:ph type="sldNum" sz="quarter" idx="4294967295"/>
+          </p:nvPr>
+        </p:nvSpPr>
+        <p:spPr>
+          <a:xfrm>
+            <a:off x="11292840" y="6556248"/>
+            <a:ext cx="548640" cy="256032"/>
+          </a:xfrm>
+          <a:prstGeom prst="rect">
+            <a:avLst/>
+          </a:prstGeom>
+          <a:extLst>
+            <a:ext uri="{C572A759-6A51-4108-AA02-DFA0A04FC94B}">
+              <ma14:wrappingTextBoxFlag xmlns:ma14="http://schemas.microsoft.com/office/mac/drawingml/2011/main" val="0"/>
+            </a:ext>
+          </a:extLst>
+        </p:spPr>
+        <p:txBody>
+          <a:bodyPr/>
+          <a:lstStyle>
+            <a:lvl1pPr>
+              <a:defRPr sz="900">
+                <a:solidFill>
+                  <a:srgbClr val="1B3A6B"/>
+                </a:solidFill>
+                <a:latin typeface="Arial"/>
+                <a:ea typeface="Arial"/>
+                <a:cs typeface="Arial"/>
+              </a:defRPr>
+            </a:lvl1pPr>
+          </a:lstStyle>
+          <a:p>
+            <a:pPr algn="r"/>
+            <a:fld id="{F7021451-1387-4CA6-816F-3879F97B5CBC}" type="slidenum">
+              <a:rPr b="1" lang="en-US"/>
+              <a:t>1000</a:t>
+            </a:fld>
+            <a:endParaRPr lang="en-US"/>
+          </a:p>
+        </p:txBody>
+      </p:sp>
     </p:spTree>
   </p:cSld>
   <p:clrMapOvr>
@@ -3181,6 +3229,54 @@
           <a:chExt cx="0" cy="0"/>
         </a:xfrm>
       </p:grpSpPr>
+      <p:sp>
+        <p:nvSpPr>
+          <p:cNvPr id="25" name="Slide Number Placeholder 0"/>
+          <p:cNvSpPr>
+            <a:spLocks noGrp="1"/>
+          </p:cNvSpPr>
+          <p:nvPr>
+            <p:ph type="sldNum" sz="quarter" idx="4294967295"/>
+          </p:nvPr>
+        </p:nvSpPr>
+        <p:spPr>
+          <a:xfrm>
+            <a:off x="11292840" y="6556248"/>
+            <a:ext cx="548640" cy="256032"/>
+          </a:xfrm>
+          <a:prstGeom prst="rect">
+            <a:avLst/>
+          </a:prstGeom>
+          <a:extLst>
+            <a:ext uri="{C572A759-6A51-4108-AA02-DFA0A04FC94B}">
+              <ma14:wrappingTextBoxFlag xmlns:ma14="http://schemas.microsoft.com/office/mac/drawingml/2011/main" val="0"/>
+            </a:ext>
+          </a:extLst>
+        </p:spPr>
+        <p:txBody>
+          <a:bodyPr/>
+          <a:lstStyle>
+            <a:lvl1pPr>
+              <a:defRPr sz="900">
+                <a:solidFill>
+                  <a:srgbClr val="1B3A6B"/>
+                </a:solidFill>
+                <a:latin typeface="Arial"/>
+                <a:ea typeface="Arial"/>
+                <a:cs typeface="Arial"/>
+              </a:defRPr>
+            </a:lvl1pPr>
+          </a:lstStyle>
+          <a:p>
+            <a:pPr algn="r"/>
+            <a:fld id="{F7021451-1387-4CA6-816F-3879F97B5CBC}" type="slidenum">
+              <a:rPr b="1" lang="en-US"/>
+              <a:t>null</a:t>
+            </a:fld>
+            <a:endParaRPr lang="en-US"/>
+          </a:p>
+        </p:txBody>
+      </p:sp>
     </p:spTree>
   </p:cSld>
   <p:clrMap bg1="lt1" tx1="dk1" bg2="lt2" tx2="dk2" accent1="accent1" accent2="accent2" accent3="accent3" accent4="accent4" accent5="accent5" accent6="accent6" hlink="hlink" folHlink="folHlink"/>
@@ -4014,7 +4110,7 @@
         </p:blipFill>
         <p:spPr>
           <a:xfrm>
-            <a:off x="411480" y="6547104"/>
+            <a:off x="548640" y="6547104"/>
             <a:ext cx="274320" cy="274320"/>
           </a:xfrm>
           <a:prstGeom prst="rect">
@@ -4030,7 +4126,7 @@
         </p:nvSpPr>
         <p:spPr>
           <a:xfrm>
-            <a:off x="749808" y="6528816"/>
+            <a:off x="886968" y="6528816"/>
             <a:ext cx="6400800" cy="310896"/>
           </a:xfrm>
           <a:prstGeom prst="rect">
@@ -4070,7 +4166,7 @@
         <p:spPr>
           <a:xfrm>
             <a:off x="7132320" y="6528816"/>
-            <a:ext cx="4663440" cy="310896"/>
+            <a:ext cx="4023360" cy="310896"/>
           </a:xfrm>
           <a:prstGeom prst="rect">
             <a:avLst/>
@@ -4108,7 +4204,7 @@
         </p:nvSpPr>
         <p:spPr>
           <a:xfrm>
-            <a:off x="411480" y="384048"/>
+            <a:off x="548640" y="384048"/>
             <a:ext cx="82296" cy="658368"/>
           </a:xfrm>
           <a:prstGeom prst="rect">
@@ -4128,7 +4224,7 @@
         </p:nvSpPr>
         <p:spPr>
           <a:xfrm>
-            <a:off x="640080" y="292608"/>
+            <a:off x="777240" y="292608"/>
             <a:ext cx="10972800" cy="274320"/>
           </a:xfrm>
           <a:prstGeom prst="rect">
@@ -4167,8 +4263,8 @@
         </p:nvSpPr>
         <p:spPr>
           <a:xfrm>
-            <a:off x="640080" y="530352"/>
-            <a:ext cx="11155680" cy="566928"/>
+            <a:off x="777240" y="530352"/>
+            <a:ext cx="10881360" cy="566928"/>
           </a:xfrm>
           <a:prstGeom prst="rect">
             <a:avLst/>
@@ -4208,8 +4304,8 @@
         </p:nvSpPr>
         <p:spPr>
           <a:xfrm>
-            <a:off x="411480" y="1325880"/>
-            <a:ext cx="5554980" cy="4937760"/>
+            <a:off x="548640" y="1325880"/>
+            <a:ext cx="5408676" cy="4937760"/>
           </a:xfrm>
           <a:prstGeom prst="roundRect">
             <a:avLst>
@@ -4242,8 +4338,8 @@
         </p:nvSpPr>
         <p:spPr>
           <a:xfrm>
-            <a:off x="411480" y="1325880"/>
-            <a:ext cx="5554980" cy="109728"/>
+            <a:off x="548640" y="1325880"/>
+            <a:ext cx="5408676" cy="109728"/>
           </a:xfrm>
           <a:prstGeom prst="rect">
             <a:avLst/>
@@ -4262,8 +4358,8 @@
         </p:nvSpPr>
         <p:spPr>
           <a:xfrm>
-            <a:off x="685800" y="1554480"/>
-            <a:ext cx="5006340" cy="685800"/>
+            <a:off x="822960" y="1554480"/>
+            <a:ext cx="4860036" cy="685800"/>
           </a:xfrm>
           <a:prstGeom prst="rect">
             <a:avLst/>
@@ -4303,8 +4399,8 @@
         </p:nvSpPr>
         <p:spPr>
           <a:xfrm>
-            <a:off x="685800" y="2286000"/>
-            <a:ext cx="5006340" cy="3749040"/>
+            <a:off x="822960" y="2286000"/>
+            <a:ext cx="4860036" cy="3749040"/>
           </a:xfrm>
           <a:prstGeom prst="rect">
             <a:avLst/>
@@ -4390,8 +4486,8 @@
         </p:nvSpPr>
         <p:spPr>
           <a:xfrm>
-            <a:off x="6240780" y="1325880"/>
-            <a:ext cx="5554980" cy="4937760"/>
+            <a:off x="6231636" y="1325880"/>
+            <a:ext cx="5408676" cy="4937760"/>
           </a:xfrm>
           <a:prstGeom prst="roundRect">
             <a:avLst>
@@ -4424,8 +4520,8 @@
         </p:nvSpPr>
         <p:spPr>
           <a:xfrm>
-            <a:off x="6240780" y="1325880"/>
-            <a:ext cx="5554980" cy="109728"/>
+            <a:off x="6231636" y="1325880"/>
+            <a:ext cx="5408676" cy="109728"/>
           </a:xfrm>
           <a:prstGeom prst="rect">
             <a:avLst/>
@@ -4444,8 +4540,8 @@
         </p:nvSpPr>
         <p:spPr>
           <a:xfrm>
-            <a:off x="6515100" y="1554480"/>
-            <a:ext cx="5006340" cy="685800"/>
+            <a:off x="6505956" y="1554480"/>
+            <a:ext cx="4860036" cy="685800"/>
           </a:xfrm>
           <a:prstGeom prst="rect">
             <a:avLst/>
@@ -4485,8 +4581,8 @@
         </p:nvSpPr>
         <p:spPr>
           <a:xfrm>
-            <a:off x="6515100" y="2286000"/>
-            <a:ext cx="5006340" cy="3749040"/>
+            <a:off x="6505956" y="2286000"/>
+            <a:ext cx="4860036" cy="3749040"/>
           </a:xfrm>
           <a:prstGeom prst="rect">
             <a:avLst/>
@@ -4508,7 +4604,7 @@
               <a:buChar char="●"/>
             </a:pPr>
             <a:r>
-              <a:rPr lang="en-US" sz="1600" dirty="0">
+              <a:rPr lang="en-US" sz="1700" dirty="0">
                 <a:solidFill>
                   <a:srgbClr val="1F2937"/>
                 </a:solidFill>
@@ -4518,7 +4614,7 @@
               </a:rPr>
               <a:t>Acesso por perfil (carteira)</a:t>
             </a:r>
-            <a:endParaRPr lang="en-US" sz="1600" dirty="0"/>
+            <a:endParaRPr lang="en-US" sz="1700" dirty="0"/>
           </a:p>
           <a:p>
             <a:pPr marL="342900" indent="-342900">
@@ -4529,7 +4625,7 @@
               <a:buChar char="●"/>
             </a:pPr>
             <a:r>
-              <a:rPr lang="en-US" sz="1600" dirty="0">
+              <a:rPr lang="en-US" sz="1700" dirty="0">
                 <a:solidFill>
                   <a:srgbClr val="1F2937"/>
                 </a:solidFill>
@@ -4539,7 +4635,7 @@
               </a:rPr>
               <a:t>senhas fortes</a:t>
             </a:r>
-            <a:endParaRPr lang="en-US" sz="1600" dirty="0"/>
+            <a:endParaRPr lang="en-US" sz="1700" dirty="0"/>
           </a:p>
           <a:p>
             <a:pPr marL="342900" indent="-342900">
@@ -4550,7 +4646,7 @@
               <a:buChar char="●"/>
             </a:pPr>
             <a:r>
-              <a:rPr lang="en-US" sz="1600" dirty="0">
+              <a:rPr lang="en-US" sz="1700" dirty="0">
                 <a:solidFill>
                   <a:srgbClr val="1F2937"/>
                 </a:solidFill>
@@ -4560,7 +4656,7 @@
               </a:rPr>
               <a:t>faturas fora de pastas públicas</a:t>
             </a:r>
-            <a:endParaRPr lang="en-US" sz="1600" dirty="0"/>
+            <a:endParaRPr lang="en-US" sz="1700" dirty="0"/>
           </a:p>
           <a:p>
             <a:pPr marL="342900" indent="-342900">
@@ -4571,7 +4667,7 @@
               <a:buChar char="●"/>
             </a:pPr>
             <a:r>
-              <a:rPr lang="en-US" sz="1600" dirty="0">
+              <a:rPr lang="en-US" sz="1700" dirty="0">
                 <a:solidFill>
                   <a:srgbClr val="1F2937"/>
                 </a:solidFill>
@@ -4581,7 +4677,7 @@
               </a:rPr>
               <a:t>nada de planilha no WhatsApp</a:t>
             </a:r>
-            <a:endParaRPr lang="en-US" sz="1600" dirty="0"/>
+            <a:endParaRPr lang="en-US" sz="1700" dirty="0"/>
           </a:p>
           <a:p>
             <a:pPr marL="342900" indent="-342900">
@@ -4592,7 +4688,7 @@
               <a:buChar char="●"/>
             </a:pPr>
             <a:r>
-              <a:rPr lang="en-US" sz="1600" dirty="0">
+              <a:rPr lang="en-US" sz="1700" dirty="0">
                 <a:solidFill>
                   <a:srgbClr val="1F2937"/>
                 </a:solidFill>
@@ -4602,7 +4698,55 @@
               </a:rPr>
               <a:t>registro de quem acessou</a:t>
             </a:r>
-            <a:endParaRPr lang="en-US" sz="1600" dirty="0"/>
+            <a:endParaRPr lang="en-US" sz="1700" dirty="0"/>
+          </a:p>
+        </p:txBody>
+      </p:sp>
+      <p:sp>
+        <p:nvSpPr>
+          <p:cNvPr id="25" name="Slide Number Placeholder 0"/>
+          <p:cNvSpPr>
+            <a:spLocks noGrp="1"/>
+          </p:cNvSpPr>
+          <p:nvPr>
+            <p:ph type="sldNum" sz="quarter" idx="4294967295"/>
+          </p:nvPr>
+        </p:nvSpPr>
+        <p:spPr>
+          <a:xfrm>
+            <a:off x="11292840" y="6556248"/>
+            <a:ext cx="548640" cy="256032"/>
+          </a:xfrm>
+          <a:prstGeom prst="rect">
+            <a:avLst/>
+          </a:prstGeom>
+          <a:extLst>
+            <a:ext uri="{C572A759-6A51-4108-AA02-DFA0A04FC94B}">
+              <ma14:wrappingTextBoxFlag xmlns:ma14="http://schemas.microsoft.com/office/mac/drawingml/2011/main" val="0"/>
+            </a:ext>
+          </a:extLst>
+        </p:spPr>
+        <p:txBody>
+          <a:bodyPr/>
+          <a:lstStyle>
+            <a:lvl1pPr>
+              <a:defRPr sz="900">
+                <a:solidFill>
+                  <a:srgbClr val="1B3A6B"/>
+                </a:solidFill>
+                <a:latin typeface="Arial"/>
+                <a:ea typeface="Arial"/>
+                <a:cs typeface="Arial"/>
+              </a:defRPr>
+            </a:lvl1pPr>
+          </a:lstStyle>
+          <a:p>
+            <a:pPr algn="r"/>
+            <a:fld id="{F7021451-1387-4CA6-816F-3879F97B5CBC}" type="slidenum">
+              <a:rPr b="1" lang="en-US"/>
+              <a:t>10</a:t>
+            </a:fld>
+            <a:endParaRPr lang="en-US"/>
           </a:p>
         </p:txBody>
       </p:sp>
@@ -4679,7 +4823,7 @@
         </p:blipFill>
         <p:spPr>
           <a:xfrm>
-            <a:off x="411480" y="6547104"/>
+            <a:off x="548640" y="6547104"/>
             <a:ext cx="274320" cy="274320"/>
           </a:xfrm>
           <a:prstGeom prst="rect">
@@ -4695,7 +4839,7 @@
         </p:nvSpPr>
         <p:spPr>
           <a:xfrm>
-            <a:off x="749808" y="6528816"/>
+            <a:off x="886968" y="6528816"/>
             <a:ext cx="6400800" cy="310896"/>
           </a:xfrm>
           <a:prstGeom prst="rect">
@@ -4735,7 +4879,7 @@
         <p:spPr>
           <a:xfrm>
             <a:off x="7132320" y="6528816"/>
-            <a:ext cx="4663440" cy="310896"/>
+            <a:ext cx="4023360" cy="310896"/>
           </a:xfrm>
           <a:prstGeom prst="rect">
             <a:avLst/>
@@ -4773,7 +4917,7 @@
         </p:nvSpPr>
         <p:spPr>
           <a:xfrm>
-            <a:off x="411480" y="384048"/>
+            <a:off x="548640" y="384048"/>
             <a:ext cx="82296" cy="658368"/>
           </a:xfrm>
           <a:prstGeom prst="rect">
@@ -4793,7 +4937,7 @@
         </p:nvSpPr>
         <p:spPr>
           <a:xfrm>
-            <a:off x="640080" y="292608"/>
+            <a:off x="777240" y="292608"/>
             <a:ext cx="10972800" cy="274320"/>
           </a:xfrm>
           <a:prstGeom prst="rect">
@@ -4832,8 +4976,8 @@
         </p:nvSpPr>
         <p:spPr>
           <a:xfrm>
-            <a:off x="640080" y="530352"/>
-            <a:ext cx="11155680" cy="566928"/>
+            <a:off x="777240" y="530352"/>
+            <a:ext cx="10881360" cy="566928"/>
           </a:xfrm>
           <a:prstGeom prst="rect">
             <a:avLst/>
@@ -4873,8 +5017,8 @@
         </p:nvSpPr>
         <p:spPr>
           <a:xfrm>
-            <a:off x="411480" y="1325880"/>
-            <a:ext cx="3642360" cy="2331720"/>
+            <a:off x="548640" y="1325880"/>
+            <a:ext cx="3544824" cy="2331720"/>
           </a:xfrm>
           <a:prstGeom prst="roundRect">
             <a:avLst>
@@ -4907,7 +5051,7 @@
         </p:nvSpPr>
         <p:spPr>
           <a:xfrm>
-            <a:off x="594360" y="1508760"/>
+            <a:off x="731520" y="1508760"/>
             <a:ext cx="457200" cy="457200"/>
           </a:xfrm>
           <a:prstGeom prst="ellipse">
@@ -4927,7 +5071,7 @@
         </p:nvSpPr>
         <p:spPr>
           <a:xfrm>
-            <a:off x="594360" y="1508760"/>
+            <a:off x="731520" y="1508760"/>
             <a:ext cx="457200" cy="457200"/>
           </a:xfrm>
           <a:prstGeom prst="rect">
@@ -4966,8 +5110,8 @@
         </p:nvSpPr>
         <p:spPr>
           <a:xfrm>
-            <a:off x="1188720" y="1435608"/>
-            <a:ext cx="2727960" cy="2112264"/>
+            <a:off x="1325880" y="1435608"/>
+            <a:ext cx="2630424" cy="2112264"/>
           </a:xfrm>
           <a:prstGeom prst="rect">
             <a:avLst/>
@@ -5007,8 +5151,8 @@
         </p:nvSpPr>
         <p:spPr>
           <a:xfrm>
-            <a:off x="4282440" y="1325880"/>
-            <a:ext cx="3642360" cy="2331720"/>
+            <a:off x="4322064" y="1325880"/>
+            <a:ext cx="3544824" cy="2331720"/>
           </a:xfrm>
           <a:prstGeom prst="roundRect">
             <a:avLst>
@@ -5041,7 +5185,7 @@
         </p:nvSpPr>
         <p:spPr>
           <a:xfrm>
-            <a:off x="4465320" y="1508760"/>
+            <a:off x="4504944" y="1508760"/>
             <a:ext cx="457200" cy="457200"/>
           </a:xfrm>
           <a:prstGeom prst="ellipse">
@@ -5061,7 +5205,7 @@
         </p:nvSpPr>
         <p:spPr>
           <a:xfrm>
-            <a:off x="4465320" y="1508760"/>
+            <a:off x="4504944" y="1508760"/>
             <a:ext cx="457200" cy="457200"/>
           </a:xfrm>
           <a:prstGeom prst="rect">
@@ -5100,8 +5244,8 @@
         </p:nvSpPr>
         <p:spPr>
           <a:xfrm>
-            <a:off x="5059680" y="1435608"/>
-            <a:ext cx="2727960" cy="2112264"/>
+            <a:off x="5099304" y="1435608"/>
+            <a:ext cx="2630424" cy="2112264"/>
           </a:xfrm>
           <a:prstGeom prst="rect">
             <a:avLst/>
@@ -5141,8 +5285,8 @@
         </p:nvSpPr>
         <p:spPr>
           <a:xfrm>
-            <a:off x="8153400" y="1325880"/>
-            <a:ext cx="3642360" cy="2331720"/>
+            <a:off x="8095488" y="1325880"/>
+            <a:ext cx="3544824" cy="2331720"/>
           </a:xfrm>
           <a:prstGeom prst="roundRect">
             <a:avLst>
@@ -5175,7 +5319,7 @@
         </p:nvSpPr>
         <p:spPr>
           <a:xfrm>
-            <a:off x="8336280" y="1508760"/>
+            <a:off x="8278368" y="1508760"/>
             <a:ext cx="457200" cy="457200"/>
           </a:xfrm>
           <a:prstGeom prst="ellipse">
@@ -5195,7 +5339,7 @@
         </p:nvSpPr>
         <p:spPr>
           <a:xfrm>
-            <a:off x="8336280" y="1508760"/>
+            <a:off x="8278368" y="1508760"/>
             <a:ext cx="457200" cy="457200"/>
           </a:xfrm>
           <a:prstGeom prst="rect">
@@ -5234,8 +5378,8 @@
         </p:nvSpPr>
         <p:spPr>
           <a:xfrm>
-            <a:off x="8930640" y="1435608"/>
-            <a:ext cx="2727960" cy="2112264"/>
+            <a:off x="8872728" y="1435608"/>
+            <a:ext cx="2630424" cy="2112264"/>
           </a:xfrm>
           <a:prstGeom prst="rect">
             <a:avLst/>
@@ -5275,8 +5419,8 @@
         </p:nvSpPr>
         <p:spPr>
           <a:xfrm>
-            <a:off x="411480" y="3886200"/>
-            <a:ext cx="3642360" cy="2331720"/>
+            <a:off x="548640" y="3886200"/>
+            <a:ext cx="3544824" cy="2331720"/>
           </a:xfrm>
           <a:prstGeom prst="roundRect">
             <a:avLst>
@@ -5309,7 +5453,7 @@
         </p:nvSpPr>
         <p:spPr>
           <a:xfrm>
-            <a:off x="594360" y="4069080"/>
+            <a:off x="731520" y="4069080"/>
             <a:ext cx="457200" cy="457200"/>
           </a:xfrm>
           <a:prstGeom prst="ellipse">
@@ -5329,7 +5473,7 @@
         </p:nvSpPr>
         <p:spPr>
           <a:xfrm>
-            <a:off x="594360" y="4069080"/>
+            <a:off x="731520" y="4069080"/>
             <a:ext cx="457200" cy="457200"/>
           </a:xfrm>
           <a:prstGeom prst="rect">
@@ -5368,8 +5512,8 @@
         </p:nvSpPr>
         <p:spPr>
           <a:xfrm>
-            <a:off x="1188720" y="3995928"/>
-            <a:ext cx="2727960" cy="2112264"/>
+            <a:off x="1325880" y="3995928"/>
+            <a:ext cx="2630424" cy="2112264"/>
           </a:xfrm>
           <a:prstGeom prst="rect">
             <a:avLst/>
@@ -5409,8 +5553,8 @@
         </p:nvSpPr>
         <p:spPr>
           <a:xfrm>
-            <a:off x="4282440" y="3886200"/>
-            <a:ext cx="3642360" cy="2331720"/>
+            <a:off x="4322064" y="3886200"/>
+            <a:ext cx="3544824" cy="2331720"/>
           </a:xfrm>
           <a:prstGeom prst="roundRect">
             <a:avLst>
@@ -5443,7 +5587,7 @@
         </p:nvSpPr>
         <p:spPr>
           <a:xfrm>
-            <a:off x="4465320" y="4069080"/>
+            <a:off x="4504944" y="4069080"/>
             <a:ext cx="457200" cy="457200"/>
           </a:xfrm>
           <a:prstGeom prst="ellipse">
@@ -5463,7 +5607,7 @@
         </p:nvSpPr>
         <p:spPr>
           <a:xfrm>
-            <a:off x="4465320" y="4069080"/>
+            <a:off x="4504944" y="4069080"/>
             <a:ext cx="457200" cy="457200"/>
           </a:xfrm>
           <a:prstGeom prst="rect">
@@ -5502,8 +5646,8 @@
         </p:nvSpPr>
         <p:spPr>
           <a:xfrm>
-            <a:off x="5059680" y="3995928"/>
-            <a:ext cx="2727960" cy="2112264"/>
+            <a:off x="5099304" y="3995928"/>
+            <a:ext cx="2630424" cy="2112264"/>
           </a:xfrm>
           <a:prstGeom prst="rect">
             <a:avLst/>
@@ -5543,8 +5687,8 @@
         </p:nvSpPr>
         <p:spPr>
           <a:xfrm>
-            <a:off x="8153400" y="3886200"/>
-            <a:ext cx="3642360" cy="2331720"/>
+            <a:off x="8095488" y="3886200"/>
+            <a:ext cx="3544824" cy="2331720"/>
           </a:xfrm>
           <a:prstGeom prst="roundRect">
             <a:avLst>
@@ -5577,7 +5721,7 @@
         </p:nvSpPr>
         <p:spPr>
           <a:xfrm>
-            <a:off x="8336280" y="4069080"/>
+            <a:off x="8278368" y="4069080"/>
             <a:ext cx="457200" cy="457200"/>
           </a:xfrm>
           <a:prstGeom prst="ellipse">
@@ -5597,7 +5741,7 @@
         </p:nvSpPr>
         <p:spPr>
           <a:xfrm>
-            <a:off x="8336280" y="4069080"/>
+            <a:off x="8278368" y="4069080"/>
             <a:ext cx="457200" cy="457200"/>
           </a:xfrm>
           <a:prstGeom prst="rect">
@@ -5636,8 +5780,8 @@
         </p:nvSpPr>
         <p:spPr>
           <a:xfrm>
-            <a:off x="8930640" y="3995928"/>
-            <a:ext cx="2727960" cy="2112264"/>
+            <a:off x="8872728" y="3995928"/>
+            <a:ext cx="2630424" cy="2112264"/>
           </a:xfrm>
           <a:prstGeom prst="rect">
             <a:avLst/>
@@ -5666,6 +5810,54 @@
               <a:t>prazo de retenção definido</a:t>
             </a:r>
             <a:endParaRPr lang="en-US" sz="1800" dirty="0"/>
+          </a:p>
+        </p:txBody>
+      </p:sp>
+      <p:sp>
+        <p:nvSpPr>
+          <p:cNvPr id="25" name="Slide Number Placeholder 0"/>
+          <p:cNvSpPr>
+            <a:spLocks noGrp="1"/>
+          </p:cNvSpPr>
+          <p:nvPr>
+            <p:ph type="sldNum" sz="quarter" idx="4294967295"/>
+          </p:nvPr>
+        </p:nvSpPr>
+        <p:spPr>
+          <a:xfrm>
+            <a:off x="11292840" y="6556248"/>
+            <a:ext cx="548640" cy="256032"/>
+          </a:xfrm>
+          <a:prstGeom prst="rect">
+            <a:avLst/>
+          </a:prstGeom>
+          <a:extLst>
+            <a:ext uri="{C572A759-6A51-4108-AA02-DFA0A04FC94B}">
+              <ma14:wrappingTextBoxFlag xmlns:ma14="http://schemas.microsoft.com/office/mac/drawingml/2011/main" val="0"/>
+            </a:ext>
+          </a:extLst>
+        </p:spPr>
+        <p:txBody>
+          <a:bodyPr/>
+          <a:lstStyle>
+            <a:lvl1pPr>
+              <a:defRPr sz="900">
+                <a:solidFill>
+                  <a:srgbClr val="1B3A6B"/>
+                </a:solidFill>
+                <a:latin typeface="Arial"/>
+                <a:ea typeface="Arial"/>
+                <a:cs typeface="Arial"/>
+              </a:defRPr>
+            </a:lvl1pPr>
+          </a:lstStyle>
+          <a:p>
+            <a:pPr algn="r"/>
+            <a:fld id="{F7021451-1387-4CA6-816F-3879F97B5CBC}" type="slidenum">
+              <a:rPr b="1" lang="en-US"/>
+              <a:t>11</a:t>
+            </a:fld>
+            <a:endParaRPr lang="en-US"/>
           </a:p>
         </p:txBody>
       </p:sp>
@@ -5742,7 +5934,7 @@
         </p:blipFill>
         <p:spPr>
           <a:xfrm>
-            <a:off x="411480" y="6547104"/>
+            <a:off x="548640" y="6547104"/>
             <a:ext cx="274320" cy="274320"/>
           </a:xfrm>
           <a:prstGeom prst="rect">
@@ -5758,7 +5950,7 @@
         </p:nvSpPr>
         <p:spPr>
           <a:xfrm>
-            <a:off x="749808" y="6528816"/>
+            <a:off x="886968" y="6528816"/>
             <a:ext cx="6400800" cy="310896"/>
           </a:xfrm>
           <a:prstGeom prst="rect">
@@ -5798,7 +5990,7 @@
         <p:spPr>
           <a:xfrm>
             <a:off x="7132320" y="6528816"/>
-            <a:ext cx="4663440" cy="310896"/>
+            <a:ext cx="4023360" cy="310896"/>
           </a:xfrm>
           <a:prstGeom prst="rect">
             <a:avLst/>
@@ -5836,7 +6028,7 @@
         </p:nvSpPr>
         <p:spPr>
           <a:xfrm>
-            <a:off x="411480" y="384048"/>
+            <a:off x="548640" y="384048"/>
             <a:ext cx="82296" cy="658368"/>
           </a:xfrm>
           <a:prstGeom prst="rect">
@@ -5856,7 +6048,7 @@
         </p:nvSpPr>
         <p:spPr>
           <a:xfrm>
-            <a:off x="640080" y="292608"/>
+            <a:off x="777240" y="292608"/>
             <a:ext cx="10972800" cy="274320"/>
           </a:xfrm>
           <a:prstGeom prst="rect">
@@ -5895,8 +6087,8 @@
         </p:nvSpPr>
         <p:spPr>
           <a:xfrm>
-            <a:off x="640080" y="530352"/>
-            <a:ext cx="11155680" cy="566928"/>
+            <a:off x="777240" y="530352"/>
+            <a:ext cx="10881360" cy="566928"/>
           </a:xfrm>
           <a:prstGeom prst="rect">
             <a:avLst/>
@@ -5936,8 +6128,8 @@
         </p:nvSpPr>
         <p:spPr>
           <a:xfrm>
-            <a:off x="411480" y="1325880"/>
-            <a:ext cx="3642360" cy="2331720"/>
+            <a:off x="548640" y="1325880"/>
+            <a:ext cx="3544824" cy="2331720"/>
           </a:xfrm>
           <a:prstGeom prst="roundRect">
             <a:avLst>
@@ -5970,7 +6162,7 @@
         </p:nvSpPr>
         <p:spPr>
           <a:xfrm>
-            <a:off x="594360" y="1508760"/>
+            <a:off x="731520" y="1508760"/>
             <a:ext cx="457200" cy="457200"/>
           </a:xfrm>
           <a:prstGeom prst="ellipse">
@@ -5990,7 +6182,7 @@
         </p:nvSpPr>
         <p:spPr>
           <a:xfrm>
-            <a:off x="594360" y="1508760"/>
+            <a:off x="731520" y="1508760"/>
             <a:ext cx="457200" cy="457200"/>
           </a:xfrm>
           <a:prstGeom prst="rect">
@@ -6029,8 +6221,8 @@
         </p:nvSpPr>
         <p:spPr>
           <a:xfrm>
-            <a:off x="1188720" y="1435608"/>
-            <a:ext cx="2727960" cy="2112264"/>
+            <a:off x="1325880" y="1435608"/>
+            <a:ext cx="2630424" cy="2112264"/>
           </a:xfrm>
           <a:prstGeom prst="rect">
             <a:avLst/>
@@ -6070,8 +6262,8 @@
         </p:nvSpPr>
         <p:spPr>
           <a:xfrm>
-            <a:off x="4282440" y="1325880"/>
-            <a:ext cx="3642360" cy="2331720"/>
+            <a:off x="4322064" y="1325880"/>
+            <a:ext cx="3544824" cy="2331720"/>
           </a:xfrm>
           <a:prstGeom prst="roundRect">
             <a:avLst>
@@ -6104,7 +6296,7 @@
         </p:nvSpPr>
         <p:spPr>
           <a:xfrm>
-            <a:off x="4465320" y="1508760"/>
+            <a:off x="4504944" y="1508760"/>
             <a:ext cx="457200" cy="457200"/>
           </a:xfrm>
           <a:prstGeom prst="ellipse">
@@ -6124,7 +6316,7 @@
         </p:nvSpPr>
         <p:spPr>
           <a:xfrm>
-            <a:off x="4465320" y="1508760"/>
+            <a:off x="4504944" y="1508760"/>
             <a:ext cx="457200" cy="457200"/>
           </a:xfrm>
           <a:prstGeom prst="rect">
@@ -6163,8 +6355,8 @@
         </p:nvSpPr>
         <p:spPr>
           <a:xfrm>
-            <a:off x="5059680" y="1435608"/>
-            <a:ext cx="2727960" cy="2112264"/>
+            <a:off x="5099304" y="1435608"/>
+            <a:ext cx="2630424" cy="2112264"/>
           </a:xfrm>
           <a:prstGeom prst="rect">
             <a:avLst/>
@@ -6204,8 +6396,8 @@
         </p:nvSpPr>
         <p:spPr>
           <a:xfrm>
-            <a:off x="8153400" y="1325880"/>
-            <a:ext cx="3642360" cy="2331720"/>
+            <a:off x="8095488" y="1325880"/>
+            <a:ext cx="3544824" cy="2331720"/>
           </a:xfrm>
           <a:prstGeom prst="roundRect">
             <a:avLst>
@@ -6238,7 +6430,7 @@
         </p:nvSpPr>
         <p:spPr>
           <a:xfrm>
-            <a:off x="8336280" y="1508760"/>
+            <a:off x="8278368" y="1508760"/>
             <a:ext cx="457200" cy="457200"/>
           </a:xfrm>
           <a:prstGeom prst="ellipse">
@@ -6258,7 +6450,7 @@
         </p:nvSpPr>
         <p:spPr>
           <a:xfrm>
-            <a:off x="8336280" y="1508760"/>
+            <a:off x="8278368" y="1508760"/>
             <a:ext cx="457200" cy="457200"/>
           </a:xfrm>
           <a:prstGeom prst="rect">
@@ -6297,8 +6489,8 @@
         </p:nvSpPr>
         <p:spPr>
           <a:xfrm>
-            <a:off x="8930640" y="1435608"/>
-            <a:ext cx="2727960" cy="2112264"/>
+            <a:off x="8872728" y="1435608"/>
+            <a:ext cx="2630424" cy="2112264"/>
           </a:xfrm>
           <a:prstGeom prst="rect">
             <a:avLst/>
@@ -6338,8 +6530,8 @@
         </p:nvSpPr>
         <p:spPr>
           <a:xfrm>
-            <a:off x="411480" y="3886200"/>
-            <a:ext cx="3642360" cy="2331720"/>
+            <a:off x="548640" y="3886200"/>
+            <a:ext cx="3544824" cy="2331720"/>
           </a:xfrm>
           <a:prstGeom prst="roundRect">
             <a:avLst>
@@ -6372,7 +6564,7 @@
         </p:nvSpPr>
         <p:spPr>
           <a:xfrm>
-            <a:off x="594360" y="4069080"/>
+            <a:off x="731520" y="4069080"/>
             <a:ext cx="457200" cy="457200"/>
           </a:xfrm>
           <a:prstGeom prst="ellipse">
@@ -6392,7 +6584,7 @@
         </p:nvSpPr>
         <p:spPr>
           <a:xfrm>
-            <a:off x="594360" y="4069080"/>
+            <a:off x="731520" y="4069080"/>
             <a:ext cx="457200" cy="457200"/>
           </a:xfrm>
           <a:prstGeom prst="rect">
@@ -6431,8 +6623,8 @@
         </p:nvSpPr>
         <p:spPr>
           <a:xfrm>
-            <a:off x="1188720" y="3995928"/>
-            <a:ext cx="2727960" cy="2112264"/>
+            <a:off x="1325880" y="3995928"/>
+            <a:ext cx="2630424" cy="2112264"/>
           </a:xfrm>
           <a:prstGeom prst="rect">
             <a:avLst/>
@@ -6472,8 +6664,8 @@
         </p:nvSpPr>
         <p:spPr>
           <a:xfrm>
-            <a:off x="4282440" y="3886200"/>
-            <a:ext cx="3642360" cy="2331720"/>
+            <a:off x="4322064" y="3886200"/>
+            <a:ext cx="3544824" cy="2331720"/>
           </a:xfrm>
           <a:prstGeom prst="roundRect">
             <a:avLst>
@@ -6506,7 +6698,7 @@
         </p:nvSpPr>
         <p:spPr>
           <a:xfrm>
-            <a:off x="4465320" y="4069080"/>
+            <a:off x="4504944" y="4069080"/>
             <a:ext cx="457200" cy="457200"/>
           </a:xfrm>
           <a:prstGeom prst="ellipse">
@@ -6526,7 +6718,7 @@
         </p:nvSpPr>
         <p:spPr>
           <a:xfrm>
-            <a:off x="4465320" y="4069080"/>
+            <a:off x="4504944" y="4069080"/>
             <a:ext cx="457200" cy="457200"/>
           </a:xfrm>
           <a:prstGeom prst="rect">
@@ -6565,8 +6757,8 @@
         </p:nvSpPr>
         <p:spPr>
           <a:xfrm>
-            <a:off x="5059680" y="3995928"/>
-            <a:ext cx="2727960" cy="2112264"/>
+            <a:off x="5099304" y="3995928"/>
+            <a:ext cx="2630424" cy="2112264"/>
           </a:xfrm>
           <a:prstGeom prst="rect">
             <a:avLst/>
@@ -6606,8 +6798,8 @@
         </p:nvSpPr>
         <p:spPr>
           <a:xfrm>
-            <a:off x="8153400" y="3886200"/>
-            <a:ext cx="3642360" cy="2331720"/>
+            <a:off x="8095488" y="3886200"/>
+            <a:ext cx="3544824" cy="2331720"/>
           </a:xfrm>
           <a:prstGeom prst="roundRect">
             <a:avLst>
@@ -6640,7 +6832,7 @@
         </p:nvSpPr>
         <p:spPr>
           <a:xfrm>
-            <a:off x="8336280" y="4069080"/>
+            <a:off x="8278368" y="4069080"/>
             <a:ext cx="457200" cy="457200"/>
           </a:xfrm>
           <a:prstGeom prst="ellipse">
@@ -6660,7 +6852,7 @@
         </p:nvSpPr>
         <p:spPr>
           <a:xfrm>
-            <a:off x="8336280" y="4069080"/>
+            <a:off x="8278368" y="4069080"/>
             <a:ext cx="457200" cy="457200"/>
           </a:xfrm>
           <a:prstGeom prst="rect">
@@ -6699,8 +6891,8 @@
         </p:nvSpPr>
         <p:spPr>
           <a:xfrm>
-            <a:off x="8930640" y="3995928"/>
-            <a:ext cx="2727960" cy="2112264"/>
+            <a:off x="8872728" y="3995928"/>
+            <a:ext cx="2630424" cy="2112264"/>
           </a:xfrm>
           <a:prstGeom prst="rect">
             <a:avLst/>
@@ -6729,6 +6921,54 @@
               <a:t>retenção definida</a:t>
             </a:r>
             <a:endParaRPr lang="en-US" sz="1800" dirty="0"/>
+          </a:p>
+        </p:txBody>
+      </p:sp>
+      <p:sp>
+        <p:nvSpPr>
+          <p:cNvPr id="25" name="Slide Number Placeholder 0"/>
+          <p:cNvSpPr>
+            <a:spLocks noGrp="1"/>
+          </p:cNvSpPr>
+          <p:nvPr>
+            <p:ph type="sldNum" sz="quarter" idx="4294967295"/>
+          </p:nvPr>
+        </p:nvSpPr>
+        <p:spPr>
+          <a:xfrm>
+            <a:off x="11292840" y="6556248"/>
+            <a:ext cx="548640" cy="256032"/>
+          </a:xfrm>
+          <a:prstGeom prst="rect">
+            <a:avLst/>
+          </a:prstGeom>
+          <a:extLst>
+            <a:ext uri="{C572A759-6A51-4108-AA02-DFA0A04FC94B}">
+              <ma14:wrappingTextBoxFlag xmlns:ma14="http://schemas.microsoft.com/office/mac/drawingml/2011/main" val="0"/>
+            </a:ext>
+          </a:extLst>
+        </p:spPr>
+        <p:txBody>
+          <a:bodyPr/>
+          <a:lstStyle>
+            <a:lvl1pPr>
+              <a:defRPr sz="900">
+                <a:solidFill>
+                  <a:srgbClr val="1B3A6B"/>
+                </a:solidFill>
+                <a:latin typeface="Arial"/>
+                <a:ea typeface="Arial"/>
+                <a:cs typeface="Arial"/>
+              </a:defRPr>
+            </a:lvl1pPr>
+          </a:lstStyle>
+          <a:p>
+            <a:pPr algn="r"/>
+            <a:fld id="{F7021451-1387-4CA6-816F-3879F97B5CBC}" type="slidenum">
+              <a:rPr b="1" lang="en-US"/>
+              <a:t>12</a:t>
+            </a:fld>
+            <a:endParaRPr lang="en-US"/>
           </a:p>
         </p:txBody>
       </p:sp>
@@ -6792,6 +7032,45 @@
         </p:nvSpPr>
         <p:spPr>
           <a:xfrm>
+            <a:off x="457200" y="548640"/>
+            <a:ext cx="3474720" cy="1737360"/>
+          </a:xfrm>
+          <a:prstGeom prst="rect">
+            <a:avLst/>
+          </a:prstGeom>
+          <a:noFill/>
+          <a:ln/>
+        </p:spPr>
+        <p:txBody>
+          <a:bodyPr wrap="square" rtlCol="0" anchor="ctr"/>
+          <a:lstStyle/>
+          <a:p>
+            <a:pPr indent="0" marL="0">
+              <a:buNone/>
+            </a:pPr>
+            <a:r>
+              <a:rPr lang="en-US" sz="11000" b="1" dirty="0">
+                <a:solidFill>
+                  <a:srgbClr val="11396F"/>
+                </a:solidFill>
+                <a:latin typeface="Arial" pitchFamily="34" charset="0"/>
+                <a:ea typeface="Arial" pitchFamily="34" charset="-122"/>
+                <a:cs typeface="Arial" pitchFamily="34" charset="-120"/>
+              </a:rPr>
+              <a:t>03</a:t>
+            </a:r>
+            <a:endParaRPr lang="en-US" sz="11000" dirty="0"/>
+          </a:p>
+        </p:txBody>
+      </p:sp>
+      <p:sp>
+        <p:nvSpPr>
+          <p:cNvPr id="4" name="Text 2"/>
+          <p:cNvSpPr/>
+          <p:nvPr/>
+        </p:nvSpPr>
+        <p:spPr>
+          <a:xfrm>
             <a:off x="548640" y="2194560"/>
             <a:ext cx="3291840" cy="548640"/>
           </a:xfrm>
@@ -6825,7 +7104,46 @@
       </p:sp>
       <p:sp>
         <p:nvSpPr>
-          <p:cNvPr id="4" name="Text 2"/>
+          <p:cNvPr id="5" name="Text 3"/>
+          <p:cNvSpPr/>
+          <p:nvPr/>
+        </p:nvSpPr>
+        <p:spPr>
+          <a:xfrm>
+            <a:off x="548640" y="3200400"/>
+            <a:ext cx="3383280" cy="457200"/>
+          </a:xfrm>
+          <a:prstGeom prst="rect">
+            <a:avLst/>
+          </a:prstGeom>
+          <a:noFill/>
+          <a:ln/>
+        </p:spPr>
+        <p:txBody>
+          <a:bodyPr wrap="square" rtlCol="0" anchor="ctr"/>
+          <a:lstStyle/>
+          <a:p>
+            <a:pPr indent="0" marL="0">
+              <a:buNone/>
+            </a:pPr>
+            <a:r>
+              <a:rPr lang="en-US" sz="1100" dirty="0">
+                <a:solidFill>
+                  <a:srgbClr val="C7D2E3"/>
+                </a:solidFill>
+                <a:latin typeface="Arial" pitchFamily="34" charset="0"/>
+                <a:ea typeface="Arial" pitchFamily="34" charset="-122"/>
+                <a:cs typeface="Arial" pitchFamily="34" charset="-120"/>
+              </a:rPr>
+              <a:t>M6 · Etapa 3 · Operação ponta a ponta</a:t>
+            </a:r>
+            <a:endParaRPr lang="en-US" sz="1100" dirty="0"/>
+          </a:p>
+        </p:txBody>
+      </p:sp>
+      <p:sp>
+        <p:nvSpPr>
+          <p:cNvPr id="6" name="Text 4"/>
           <p:cNvSpPr/>
           <p:nvPr/>
         </p:nvSpPr>
@@ -6864,7 +7182,7 @@
       </p:sp>
       <p:pic>
         <p:nvPicPr>
-          <p:cNvPr id="5" name="Image 0" descr="/www/wwwroot/rexar/gdsolar/docs/curso/slides/assets/logo-gdsolar.png">    </p:cNvPr>
+          <p:cNvPr id="7" name="Image 0" descr="/www/wwwroot/rexar/gdsolar/docs/curso/slides/assets/logo-gdsolar.png">    </p:cNvPr>
           <p:cNvPicPr>
             <a:picLocks noChangeAspect="1"/>
           </p:cNvPicPr>
@@ -6888,7 +7206,7 @@
       </p:pic>
       <p:sp>
         <p:nvSpPr>
-          <p:cNvPr id="6" name="Text 3"/>
+          <p:cNvPr id="8" name="Text 5"/>
           <p:cNvSpPr/>
           <p:nvPr/>
         </p:nvSpPr>
@@ -6929,7 +7247,7 @@
       </p:sp>
       <p:sp>
         <p:nvSpPr>
-          <p:cNvPr id="7" name="Text 4"/>
+          <p:cNvPr id="9" name="Text 6"/>
           <p:cNvSpPr/>
           <p:nvPr/>
         </p:nvSpPr>
@@ -6970,7 +7288,7 @@
       </p:sp>
       <p:sp>
         <p:nvSpPr>
-          <p:cNvPr id="8" name="Text 5"/>
+          <p:cNvPr id="10" name="Text 7"/>
           <p:cNvSpPr/>
           <p:nvPr/>
         </p:nvSpPr>
@@ -7149,7 +7467,7 @@
         </p:blipFill>
         <p:spPr>
           <a:xfrm>
-            <a:off x="411480" y="6547104"/>
+            <a:off x="548640" y="6547104"/>
             <a:ext cx="274320" cy="274320"/>
           </a:xfrm>
           <a:prstGeom prst="rect">
@@ -7165,7 +7483,7 @@
         </p:nvSpPr>
         <p:spPr>
           <a:xfrm>
-            <a:off x="749808" y="6528816"/>
+            <a:off x="886968" y="6528816"/>
             <a:ext cx="6400800" cy="310896"/>
           </a:xfrm>
           <a:prstGeom prst="rect">
@@ -7205,7 +7523,7 @@
         <p:spPr>
           <a:xfrm>
             <a:off x="7132320" y="6528816"/>
-            <a:ext cx="4663440" cy="310896"/>
+            <a:ext cx="4023360" cy="310896"/>
           </a:xfrm>
           <a:prstGeom prst="rect">
             <a:avLst/>
@@ -7243,7 +7561,7 @@
         </p:nvSpPr>
         <p:spPr>
           <a:xfrm>
-            <a:off x="411480" y="384048"/>
+            <a:off x="548640" y="384048"/>
             <a:ext cx="82296" cy="658368"/>
           </a:xfrm>
           <a:prstGeom prst="rect">
@@ -7263,7 +7581,7 @@
         </p:nvSpPr>
         <p:spPr>
           <a:xfrm>
-            <a:off x="640080" y="292608"/>
+            <a:off x="777240" y="292608"/>
             <a:ext cx="10972800" cy="274320"/>
           </a:xfrm>
           <a:prstGeom prst="rect">
@@ -7302,8 +7620,8 @@
         </p:nvSpPr>
         <p:spPr>
           <a:xfrm>
-            <a:off x="640080" y="530352"/>
-            <a:ext cx="11155680" cy="566928"/>
+            <a:off x="777240" y="530352"/>
+            <a:ext cx="10881360" cy="566928"/>
           </a:xfrm>
           <a:prstGeom prst="rect">
             <a:avLst/>
@@ -7343,8 +7661,8 @@
         </p:nvSpPr>
         <p:spPr>
           <a:xfrm>
-            <a:off x="411480" y="1325880"/>
-            <a:ext cx="5577840" cy="2331720"/>
+            <a:off x="548640" y="1325880"/>
+            <a:ext cx="5431536" cy="2331720"/>
           </a:xfrm>
           <a:prstGeom prst="roundRect">
             <a:avLst>
@@ -7377,7 +7695,7 @@
         </p:nvSpPr>
         <p:spPr>
           <a:xfrm>
-            <a:off x="594360" y="1508760"/>
+            <a:off x="731520" y="1508760"/>
             <a:ext cx="457200" cy="457200"/>
           </a:xfrm>
           <a:prstGeom prst="ellipse">
@@ -7397,7 +7715,7 @@
         </p:nvSpPr>
         <p:spPr>
           <a:xfrm>
-            <a:off x="594360" y="1508760"/>
+            <a:off x="731520" y="1508760"/>
             <a:ext cx="457200" cy="457200"/>
           </a:xfrm>
           <a:prstGeom prst="rect">
@@ -7436,8 +7754,8 @@
         </p:nvSpPr>
         <p:spPr>
           <a:xfrm>
-            <a:off x="1188720" y="1435608"/>
-            <a:ext cx="4663440" cy="2112264"/>
+            <a:off x="1325880" y="1435608"/>
+            <a:ext cx="4517136" cy="2112264"/>
           </a:xfrm>
           <a:prstGeom prst="rect">
             <a:avLst/>
@@ -7477,8 +7795,8 @@
         </p:nvSpPr>
         <p:spPr>
           <a:xfrm>
-            <a:off x="6217920" y="1325880"/>
-            <a:ext cx="5577840" cy="2331720"/>
+            <a:off x="6208776" y="1325880"/>
+            <a:ext cx="5431536" cy="2331720"/>
           </a:xfrm>
           <a:prstGeom prst="roundRect">
             <a:avLst>
@@ -7511,7 +7829,7 @@
         </p:nvSpPr>
         <p:spPr>
           <a:xfrm>
-            <a:off x="6400800" y="1508760"/>
+            <a:off x="6391656" y="1508760"/>
             <a:ext cx="457200" cy="457200"/>
           </a:xfrm>
           <a:prstGeom prst="ellipse">
@@ -7531,7 +7849,7 @@
         </p:nvSpPr>
         <p:spPr>
           <a:xfrm>
-            <a:off x="6400800" y="1508760"/>
+            <a:off x="6391656" y="1508760"/>
             <a:ext cx="457200" cy="457200"/>
           </a:xfrm>
           <a:prstGeom prst="rect">
@@ -7570,8 +7888,8 @@
         </p:nvSpPr>
         <p:spPr>
           <a:xfrm>
-            <a:off x="6995160" y="1435608"/>
-            <a:ext cx="4663440" cy="2112264"/>
+            <a:off x="6986016" y="1435608"/>
+            <a:ext cx="4517136" cy="2112264"/>
           </a:xfrm>
           <a:prstGeom prst="rect">
             <a:avLst/>
@@ -7611,8 +7929,8 @@
         </p:nvSpPr>
         <p:spPr>
           <a:xfrm>
-            <a:off x="411480" y="3886200"/>
-            <a:ext cx="5577840" cy="2331720"/>
+            <a:off x="548640" y="3886200"/>
+            <a:ext cx="5431536" cy="2331720"/>
           </a:xfrm>
           <a:prstGeom prst="roundRect">
             <a:avLst>
@@ -7645,7 +7963,7 @@
         </p:nvSpPr>
         <p:spPr>
           <a:xfrm>
-            <a:off x="594360" y="4069080"/>
+            <a:off x="731520" y="4069080"/>
             <a:ext cx="457200" cy="457200"/>
           </a:xfrm>
           <a:prstGeom prst="ellipse">
@@ -7665,7 +7983,7 @@
         </p:nvSpPr>
         <p:spPr>
           <a:xfrm>
-            <a:off x="594360" y="4069080"/>
+            <a:off x="731520" y="4069080"/>
             <a:ext cx="457200" cy="457200"/>
           </a:xfrm>
           <a:prstGeom prst="rect">
@@ -7704,8 +8022,8 @@
         </p:nvSpPr>
         <p:spPr>
           <a:xfrm>
-            <a:off x="1188720" y="3995928"/>
-            <a:ext cx="4663440" cy="2112264"/>
+            <a:off x="1325880" y="3995928"/>
+            <a:ext cx="4517136" cy="2112264"/>
           </a:xfrm>
           <a:prstGeom prst="rect">
             <a:avLst/>
@@ -7745,8 +8063,8 @@
         </p:nvSpPr>
         <p:spPr>
           <a:xfrm>
-            <a:off x="6217920" y="3886200"/>
-            <a:ext cx="5577840" cy="2331720"/>
+            <a:off x="6208776" y="3886200"/>
+            <a:ext cx="5431536" cy="2331720"/>
           </a:xfrm>
           <a:prstGeom prst="roundRect">
             <a:avLst>
@@ -7779,7 +8097,7 @@
         </p:nvSpPr>
         <p:spPr>
           <a:xfrm>
-            <a:off x="6400800" y="4069080"/>
+            <a:off x="6391656" y="4069080"/>
             <a:ext cx="457200" cy="457200"/>
           </a:xfrm>
           <a:prstGeom prst="ellipse">
@@ -7799,7 +8117,7 @@
         </p:nvSpPr>
         <p:spPr>
           <a:xfrm>
-            <a:off x="6400800" y="4069080"/>
+            <a:off x="6391656" y="4069080"/>
             <a:ext cx="457200" cy="457200"/>
           </a:xfrm>
           <a:prstGeom prst="rect">
@@ -7838,8 +8156,8 @@
         </p:nvSpPr>
         <p:spPr>
           <a:xfrm>
-            <a:off x="6995160" y="3995928"/>
-            <a:ext cx="4663440" cy="2112264"/>
+            <a:off x="6986016" y="3995928"/>
+            <a:ext cx="4517136" cy="2112264"/>
           </a:xfrm>
           <a:prstGeom prst="rect">
             <a:avLst/>
@@ -7868,6 +8186,54 @@
               <a:t>… soma ≤ 100%</a:t>
             </a:r>
             <a:endParaRPr lang="en-US" sz="1800" dirty="0"/>
+          </a:p>
+        </p:txBody>
+      </p:sp>
+      <p:sp>
+        <p:nvSpPr>
+          <p:cNvPr id="25" name="Slide Number Placeholder 0"/>
+          <p:cNvSpPr>
+            <a:spLocks noGrp="1"/>
+          </p:cNvSpPr>
+          <p:nvPr>
+            <p:ph type="sldNum" sz="quarter" idx="4294967295"/>
+          </p:nvPr>
+        </p:nvSpPr>
+        <p:spPr>
+          <a:xfrm>
+            <a:off x="11292840" y="6556248"/>
+            <a:ext cx="548640" cy="256032"/>
+          </a:xfrm>
+          <a:prstGeom prst="rect">
+            <a:avLst/>
+          </a:prstGeom>
+          <a:extLst>
+            <a:ext uri="{C572A759-6A51-4108-AA02-DFA0A04FC94B}">
+              <ma14:wrappingTextBoxFlag xmlns:ma14="http://schemas.microsoft.com/office/mac/drawingml/2011/main" val="0"/>
+            </a:ext>
+          </a:extLst>
+        </p:spPr>
+        <p:txBody>
+          <a:bodyPr/>
+          <a:lstStyle>
+            <a:lvl1pPr>
+              <a:defRPr sz="900">
+                <a:solidFill>
+                  <a:srgbClr val="1B3A6B"/>
+                </a:solidFill>
+                <a:latin typeface="Arial"/>
+                <a:ea typeface="Arial"/>
+                <a:cs typeface="Arial"/>
+              </a:defRPr>
+            </a:lvl1pPr>
+          </a:lstStyle>
+          <a:p>
+            <a:pPr algn="r"/>
+            <a:fld id="{F7021451-1387-4CA6-816F-3879F97B5CBC}" type="slidenum">
+              <a:rPr b="1" lang="en-US"/>
+              <a:t>14</a:t>
+            </a:fld>
+            <a:endParaRPr lang="en-US"/>
           </a:p>
         </p:txBody>
       </p:sp>
@@ -7944,7 +8310,7 @@
         </p:blipFill>
         <p:spPr>
           <a:xfrm>
-            <a:off x="411480" y="6547104"/>
+            <a:off x="548640" y="6547104"/>
             <a:ext cx="274320" cy="274320"/>
           </a:xfrm>
           <a:prstGeom prst="rect">
@@ -7960,7 +8326,7 @@
         </p:nvSpPr>
         <p:spPr>
           <a:xfrm>
-            <a:off x="749808" y="6528816"/>
+            <a:off x="886968" y="6528816"/>
             <a:ext cx="6400800" cy="310896"/>
           </a:xfrm>
           <a:prstGeom prst="rect">
@@ -8000,7 +8366,7 @@
         <p:spPr>
           <a:xfrm>
             <a:off x="7132320" y="6528816"/>
-            <a:ext cx="4663440" cy="310896"/>
+            <a:ext cx="4023360" cy="310896"/>
           </a:xfrm>
           <a:prstGeom prst="rect">
             <a:avLst/>
@@ -8038,7 +8404,7 @@
         </p:nvSpPr>
         <p:spPr>
           <a:xfrm>
-            <a:off x="411480" y="384048"/>
+            <a:off x="548640" y="384048"/>
             <a:ext cx="82296" cy="658368"/>
           </a:xfrm>
           <a:prstGeom prst="rect">
@@ -8058,7 +8424,7 @@
         </p:nvSpPr>
         <p:spPr>
           <a:xfrm>
-            <a:off x="640080" y="292608"/>
+            <a:off x="777240" y="292608"/>
             <a:ext cx="10972800" cy="274320"/>
           </a:xfrm>
           <a:prstGeom prst="rect">
@@ -8097,8 +8463,8 @@
         </p:nvSpPr>
         <p:spPr>
           <a:xfrm>
-            <a:off x="640080" y="530352"/>
-            <a:ext cx="11155680" cy="566928"/>
+            <a:off x="777240" y="530352"/>
+            <a:ext cx="10881360" cy="566928"/>
           </a:xfrm>
           <a:prstGeom prst="rect">
             <a:avLst/>
@@ -8138,8 +8504,8 @@
         </p:nvSpPr>
         <p:spPr>
           <a:xfrm>
-            <a:off x="411480" y="2651760"/>
-            <a:ext cx="2944368" cy="1463040"/>
+            <a:off x="548640" y="2651760"/>
+            <a:ext cx="2852928" cy="1463040"/>
           </a:xfrm>
           <a:prstGeom prst="chevron">
             <a:avLst/>
@@ -8163,8 +8529,8 @@
         </p:nvSpPr>
         <p:spPr>
           <a:xfrm>
-            <a:off x="731520" y="2651760"/>
-            <a:ext cx="2423160" cy="1463040"/>
+            <a:off x="868680" y="2651760"/>
+            <a:ext cx="2331720" cy="1463040"/>
           </a:xfrm>
           <a:prstGeom prst="rect">
             <a:avLst/>
@@ -8204,8 +8570,8 @@
         </p:nvSpPr>
         <p:spPr>
           <a:xfrm>
-            <a:off x="3246120" y="2651760"/>
-            <a:ext cx="2944368" cy="1463040"/>
+            <a:off x="3291840" y="2651760"/>
+            <a:ext cx="2852928" cy="1463040"/>
           </a:xfrm>
           <a:prstGeom prst="chevron">
             <a:avLst/>
@@ -8229,8 +8595,8 @@
         </p:nvSpPr>
         <p:spPr>
           <a:xfrm>
-            <a:off x="3566160" y="2651760"/>
-            <a:ext cx="2423160" cy="1463040"/>
+            <a:off x="3611880" y="2651760"/>
+            <a:ext cx="2331720" cy="1463040"/>
           </a:xfrm>
           <a:prstGeom prst="rect">
             <a:avLst/>
@@ -8270,8 +8636,8 @@
         </p:nvSpPr>
         <p:spPr>
           <a:xfrm>
-            <a:off x="6080760" y="2651760"/>
-            <a:ext cx="2944368" cy="1463040"/>
+            <a:off x="6035040" y="2651760"/>
+            <a:ext cx="2852928" cy="1463040"/>
           </a:xfrm>
           <a:prstGeom prst="chevron">
             <a:avLst/>
@@ -8295,8 +8661,8 @@
         </p:nvSpPr>
         <p:spPr>
           <a:xfrm>
-            <a:off x="6400800" y="2651760"/>
-            <a:ext cx="2423160" cy="1463040"/>
+            <a:off x="6355080" y="2651760"/>
+            <a:ext cx="2331720" cy="1463040"/>
           </a:xfrm>
           <a:prstGeom prst="rect">
             <a:avLst/>
@@ -8336,8 +8702,8 @@
         </p:nvSpPr>
         <p:spPr>
           <a:xfrm>
-            <a:off x="8915400" y="2651760"/>
-            <a:ext cx="2944368" cy="1463040"/>
+            <a:off x="8778240" y="2651760"/>
+            <a:ext cx="2852928" cy="1463040"/>
           </a:xfrm>
           <a:prstGeom prst="chevron">
             <a:avLst/>
@@ -8361,8 +8727,8 @@
         </p:nvSpPr>
         <p:spPr>
           <a:xfrm>
-            <a:off x="9235440" y="2651760"/>
-            <a:ext cx="2423160" cy="1463040"/>
+            <a:off x="9098280" y="2651760"/>
+            <a:ext cx="2331720" cy="1463040"/>
           </a:xfrm>
           <a:prstGeom prst="rect">
             <a:avLst/>
@@ -8391,6 +8757,54 @@
               <a:t>confirmar na fatura</a:t>
             </a:r>
             <a:endParaRPr lang="en-US" sz="1500" dirty="0"/>
+          </a:p>
+        </p:txBody>
+      </p:sp>
+      <p:sp>
+        <p:nvSpPr>
+          <p:cNvPr id="25" name="Slide Number Placeholder 0"/>
+          <p:cNvSpPr>
+            <a:spLocks noGrp="1"/>
+          </p:cNvSpPr>
+          <p:nvPr>
+            <p:ph type="sldNum" sz="quarter" idx="4294967295"/>
+          </p:nvPr>
+        </p:nvSpPr>
+        <p:spPr>
+          <a:xfrm>
+            <a:off x="11292840" y="6556248"/>
+            <a:ext cx="548640" cy="256032"/>
+          </a:xfrm>
+          <a:prstGeom prst="rect">
+            <a:avLst/>
+          </a:prstGeom>
+          <a:extLst>
+            <a:ext uri="{C572A759-6A51-4108-AA02-DFA0A04FC94B}">
+              <ma14:wrappingTextBoxFlag xmlns:ma14="http://schemas.microsoft.com/office/mac/drawingml/2011/main" val="0"/>
+            </a:ext>
+          </a:extLst>
+        </p:spPr>
+        <p:txBody>
+          <a:bodyPr/>
+          <a:lstStyle>
+            <a:lvl1pPr>
+              <a:defRPr sz="900">
+                <a:solidFill>
+                  <a:srgbClr val="1B3A6B"/>
+                </a:solidFill>
+                <a:latin typeface="Arial"/>
+                <a:ea typeface="Arial"/>
+                <a:cs typeface="Arial"/>
+              </a:defRPr>
+            </a:lvl1pPr>
+          </a:lstStyle>
+          <a:p>
+            <a:pPr algn="r"/>
+            <a:fld id="{F7021451-1387-4CA6-816F-3879F97B5CBC}" type="slidenum">
+              <a:rPr b="1" lang="en-US"/>
+              <a:t>15</a:t>
+            </a:fld>
+            <a:endParaRPr lang="en-US"/>
           </a:p>
         </p:txBody>
       </p:sp>
@@ -8467,7 +8881,7 @@
         </p:blipFill>
         <p:spPr>
           <a:xfrm>
-            <a:off x="411480" y="6547104"/>
+            <a:off x="548640" y="6547104"/>
             <a:ext cx="274320" cy="274320"/>
           </a:xfrm>
           <a:prstGeom prst="rect">
@@ -8483,7 +8897,7 @@
         </p:nvSpPr>
         <p:spPr>
           <a:xfrm>
-            <a:off x="749808" y="6528816"/>
+            <a:off x="886968" y="6528816"/>
             <a:ext cx="6400800" cy="310896"/>
           </a:xfrm>
           <a:prstGeom prst="rect">
@@ -8523,7 +8937,7 @@
         <p:spPr>
           <a:xfrm>
             <a:off x="7132320" y="6528816"/>
-            <a:ext cx="4663440" cy="310896"/>
+            <a:ext cx="4023360" cy="310896"/>
           </a:xfrm>
           <a:prstGeom prst="rect">
             <a:avLst/>
@@ -8561,7 +8975,7 @@
         </p:nvSpPr>
         <p:spPr>
           <a:xfrm>
-            <a:off x="411480" y="384048"/>
+            <a:off x="548640" y="384048"/>
             <a:ext cx="82296" cy="658368"/>
           </a:xfrm>
           <a:prstGeom prst="rect">
@@ -8581,7 +8995,7 @@
         </p:nvSpPr>
         <p:spPr>
           <a:xfrm>
-            <a:off x="640080" y="292608"/>
+            <a:off x="777240" y="292608"/>
             <a:ext cx="10972800" cy="274320"/>
           </a:xfrm>
           <a:prstGeom prst="rect">
@@ -8620,8 +9034,8 @@
         </p:nvSpPr>
         <p:spPr>
           <a:xfrm>
-            <a:off x="640080" y="530352"/>
-            <a:ext cx="11155680" cy="566928"/>
+            <a:off x="777240" y="530352"/>
+            <a:ext cx="10881360" cy="566928"/>
           </a:xfrm>
           <a:prstGeom prst="rect">
             <a:avLst/>
@@ -8661,8 +9075,8 @@
         </p:nvSpPr>
         <p:spPr>
           <a:xfrm>
-            <a:off x="411480" y="1325880"/>
-            <a:ext cx="11384280" cy="4937760"/>
+            <a:off x="548640" y="1325880"/>
+            <a:ext cx="11091672" cy="4937760"/>
           </a:xfrm>
           <a:prstGeom prst="roundRect">
             <a:avLst>
@@ -8683,8 +9097,8 @@
         </p:nvSpPr>
         <p:spPr>
           <a:xfrm>
-            <a:off x="777240" y="1554480"/>
-            <a:ext cx="10652760" cy="4480560"/>
+            <a:off x="914400" y="1554480"/>
+            <a:ext cx="10360152" cy="4480560"/>
           </a:xfrm>
           <a:prstGeom prst="rect">
             <a:avLst/>
@@ -8705,7 +9119,7 @@
               <a:buNone/>
             </a:pPr>
             <a:r>
-              <a:rPr lang="en-US" sz="1800" b="1" dirty="0">
+              <a:rPr lang="en-US" sz="2400" b="1" dirty="0">
                 <a:solidFill>
                   <a:srgbClr val="FFFFFF"/>
                 </a:solidFill>
@@ -8715,7 +9129,7 @@
               </a:rPr>
               <a:t>Saiu um cliente de 4% → 4% sem dono → crédito fica acumulado na usina</a:t>
             </a:r>
-            <a:endParaRPr lang="en-US" sz="1800" dirty="0"/>
+            <a:endParaRPr lang="en-US" sz="2400" dirty="0"/>
           </a:p>
           <a:p>
             <a:pPr indent="0" marL="0">
@@ -8725,7 +9139,7 @@
               <a:buNone/>
             </a:pPr>
             <a:r>
-              <a:rPr lang="en-US" sz="1800" b="1" dirty="0">
+              <a:rPr lang="en-US" sz="2400" b="1" dirty="0">
                 <a:solidFill>
                   <a:srgbClr val="F7A23B"/>
                 </a:solidFill>
@@ -8735,7 +9149,55 @@
               </a:rPr>
               <a:t>Ação: vender a cota liberada rápido ou redistribuir aos clientes com espaço</a:t>
             </a:r>
-            <a:endParaRPr lang="en-US" sz="1800" dirty="0"/>
+            <a:endParaRPr lang="en-US" sz="2400" dirty="0"/>
+          </a:p>
+        </p:txBody>
+      </p:sp>
+      <p:sp>
+        <p:nvSpPr>
+          <p:cNvPr id="25" name="Slide Number Placeholder 0"/>
+          <p:cNvSpPr>
+            <a:spLocks noGrp="1"/>
+          </p:cNvSpPr>
+          <p:nvPr>
+            <p:ph type="sldNum" sz="quarter" idx="4294967295"/>
+          </p:nvPr>
+        </p:nvSpPr>
+        <p:spPr>
+          <a:xfrm>
+            <a:off x="11292840" y="6556248"/>
+            <a:ext cx="548640" cy="256032"/>
+          </a:xfrm>
+          <a:prstGeom prst="rect">
+            <a:avLst/>
+          </a:prstGeom>
+          <a:extLst>
+            <a:ext uri="{C572A759-6A51-4108-AA02-DFA0A04FC94B}">
+              <ma14:wrappingTextBoxFlag xmlns:ma14="http://schemas.microsoft.com/office/mac/drawingml/2011/main" val="0"/>
+            </a:ext>
+          </a:extLst>
+        </p:spPr>
+        <p:txBody>
+          <a:bodyPr/>
+          <a:lstStyle>
+            <a:lvl1pPr>
+              <a:defRPr sz="900">
+                <a:solidFill>
+                  <a:srgbClr val="1B3A6B"/>
+                </a:solidFill>
+                <a:latin typeface="Arial"/>
+                <a:ea typeface="Arial"/>
+                <a:cs typeface="Arial"/>
+              </a:defRPr>
+            </a:lvl1pPr>
+          </a:lstStyle>
+          <a:p>
+            <a:pPr algn="r"/>
+            <a:fld id="{F7021451-1387-4CA6-816F-3879F97B5CBC}" type="slidenum">
+              <a:rPr b="1" lang="en-US"/>
+              <a:t>16</a:t>
+            </a:fld>
+            <a:endParaRPr lang="en-US"/>
           </a:p>
         </p:txBody>
       </p:sp>
@@ -8812,7 +9274,7 @@
         </p:blipFill>
         <p:spPr>
           <a:xfrm>
-            <a:off x="411480" y="6547104"/>
+            <a:off x="548640" y="6547104"/>
             <a:ext cx="274320" cy="274320"/>
           </a:xfrm>
           <a:prstGeom prst="rect">
@@ -8828,7 +9290,7 @@
         </p:nvSpPr>
         <p:spPr>
           <a:xfrm>
-            <a:off x="749808" y="6528816"/>
+            <a:off x="886968" y="6528816"/>
             <a:ext cx="6400800" cy="310896"/>
           </a:xfrm>
           <a:prstGeom prst="rect">
@@ -8868,7 +9330,7 @@
         <p:spPr>
           <a:xfrm>
             <a:off x="7132320" y="6528816"/>
-            <a:ext cx="4663440" cy="310896"/>
+            <a:ext cx="4023360" cy="310896"/>
           </a:xfrm>
           <a:prstGeom prst="rect">
             <a:avLst/>
@@ -8906,7 +9368,7 @@
         </p:nvSpPr>
         <p:spPr>
           <a:xfrm>
-            <a:off x="411480" y="384048"/>
+            <a:off x="548640" y="384048"/>
             <a:ext cx="82296" cy="658368"/>
           </a:xfrm>
           <a:prstGeom prst="rect">
@@ -8926,7 +9388,7 @@
         </p:nvSpPr>
         <p:spPr>
           <a:xfrm>
-            <a:off x="640080" y="292608"/>
+            <a:off x="777240" y="292608"/>
             <a:ext cx="10972800" cy="274320"/>
           </a:xfrm>
           <a:prstGeom prst="rect">
@@ -8965,8 +9427,8 @@
         </p:nvSpPr>
         <p:spPr>
           <a:xfrm>
-            <a:off x="640080" y="530352"/>
-            <a:ext cx="11155680" cy="566928"/>
+            <a:off x="777240" y="530352"/>
+            <a:ext cx="10881360" cy="566928"/>
           </a:xfrm>
           <a:prstGeom prst="rect">
             <a:avLst/>
@@ -9006,8 +9468,8 @@
         </p:nvSpPr>
         <p:spPr>
           <a:xfrm>
-            <a:off x="411480" y="1325880"/>
-            <a:ext cx="3642360" cy="2331720"/>
+            <a:off x="548640" y="1325880"/>
+            <a:ext cx="3544824" cy="2331720"/>
           </a:xfrm>
           <a:prstGeom prst="roundRect">
             <a:avLst>
@@ -9040,7 +9502,7 @@
         </p:nvSpPr>
         <p:spPr>
           <a:xfrm>
-            <a:off x="594360" y="1508760"/>
+            <a:off x="731520" y="1508760"/>
             <a:ext cx="457200" cy="457200"/>
           </a:xfrm>
           <a:prstGeom prst="ellipse">
@@ -9060,7 +9522,7 @@
         </p:nvSpPr>
         <p:spPr>
           <a:xfrm>
-            <a:off x="594360" y="1508760"/>
+            <a:off x="731520" y="1508760"/>
             <a:ext cx="457200" cy="457200"/>
           </a:xfrm>
           <a:prstGeom prst="rect">
@@ -9099,8 +9561,8 @@
         </p:nvSpPr>
         <p:spPr>
           <a:xfrm>
-            <a:off x="1188720" y="1435608"/>
-            <a:ext cx="2727960" cy="2112264"/>
+            <a:off x="1325880" y="1435608"/>
+            <a:ext cx="2630424" cy="2112264"/>
           </a:xfrm>
           <a:prstGeom prst="rect">
             <a:avLst/>
@@ -9140,8 +9602,8 @@
         </p:nvSpPr>
         <p:spPr>
           <a:xfrm>
-            <a:off x="4282440" y="1325880"/>
-            <a:ext cx="3642360" cy="2331720"/>
+            <a:off x="4322064" y="1325880"/>
+            <a:ext cx="3544824" cy="2331720"/>
           </a:xfrm>
           <a:prstGeom prst="roundRect">
             <a:avLst>
@@ -9174,7 +9636,7 @@
         </p:nvSpPr>
         <p:spPr>
           <a:xfrm>
-            <a:off x="4465320" y="1508760"/>
+            <a:off x="4504944" y="1508760"/>
             <a:ext cx="457200" cy="457200"/>
           </a:xfrm>
           <a:prstGeom prst="ellipse">
@@ -9194,7 +9656,7 @@
         </p:nvSpPr>
         <p:spPr>
           <a:xfrm>
-            <a:off x="4465320" y="1508760"/>
+            <a:off x="4504944" y="1508760"/>
             <a:ext cx="457200" cy="457200"/>
           </a:xfrm>
           <a:prstGeom prst="rect">
@@ -9233,8 +9695,8 @@
         </p:nvSpPr>
         <p:spPr>
           <a:xfrm>
-            <a:off x="5059680" y="1435608"/>
-            <a:ext cx="2727960" cy="2112264"/>
+            <a:off x="5099304" y="1435608"/>
+            <a:ext cx="2630424" cy="2112264"/>
           </a:xfrm>
           <a:prstGeom prst="rect">
             <a:avLst/>
@@ -9274,8 +9736,8 @@
         </p:nvSpPr>
         <p:spPr>
           <a:xfrm>
-            <a:off x="8153400" y="1325880"/>
-            <a:ext cx="3642360" cy="2331720"/>
+            <a:off x="8095488" y="1325880"/>
+            <a:ext cx="3544824" cy="2331720"/>
           </a:xfrm>
           <a:prstGeom prst="roundRect">
             <a:avLst>
@@ -9308,7 +9770,7 @@
         </p:nvSpPr>
         <p:spPr>
           <a:xfrm>
-            <a:off x="8336280" y="1508760"/>
+            <a:off x="8278368" y="1508760"/>
             <a:ext cx="457200" cy="457200"/>
           </a:xfrm>
           <a:prstGeom prst="ellipse">
@@ -9328,7 +9790,7 @@
         </p:nvSpPr>
         <p:spPr>
           <a:xfrm>
-            <a:off x="8336280" y="1508760"/>
+            <a:off x="8278368" y="1508760"/>
             <a:ext cx="457200" cy="457200"/>
           </a:xfrm>
           <a:prstGeom prst="rect">
@@ -9367,8 +9829,8 @@
         </p:nvSpPr>
         <p:spPr>
           <a:xfrm>
-            <a:off x="8930640" y="1435608"/>
-            <a:ext cx="2727960" cy="2112264"/>
+            <a:off x="8872728" y="1435608"/>
+            <a:ext cx="2630424" cy="2112264"/>
           </a:xfrm>
           <a:prstGeom prst="rect">
             <a:avLst/>
@@ -9408,8 +9870,8 @@
         </p:nvSpPr>
         <p:spPr>
           <a:xfrm>
-            <a:off x="411480" y="3886200"/>
-            <a:ext cx="3642360" cy="2331720"/>
+            <a:off x="548640" y="3886200"/>
+            <a:ext cx="3544824" cy="2331720"/>
           </a:xfrm>
           <a:prstGeom prst="roundRect">
             <a:avLst>
@@ -9442,7 +9904,7 @@
         </p:nvSpPr>
         <p:spPr>
           <a:xfrm>
-            <a:off x="594360" y="4069080"/>
+            <a:off x="731520" y="4069080"/>
             <a:ext cx="457200" cy="457200"/>
           </a:xfrm>
           <a:prstGeom prst="ellipse">
@@ -9462,7 +9924,7 @@
         </p:nvSpPr>
         <p:spPr>
           <a:xfrm>
-            <a:off x="594360" y="4069080"/>
+            <a:off x="731520" y="4069080"/>
             <a:ext cx="457200" cy="457200"/>
           </a:xfrm>
           <a:prstGeom prst="rect">
@@ -9501,8 +9963,8 @@
         </p:nvSpPr>
         <p:spPr>
           <a:xfrm>
-            <a:off x="1188720" y="3995928"/>
-            <a:ext cx="2727960" cy="2112264"/>
+            <a:off x="1325880" y="3995928"/>
+            <a:ext cx="2630424" cy="2112264"/>
           </a:xfrm>
           <a:prstGeom prst="rect">
             <a:avLst/>
@@ -9542,8 +10004,8 @@
         </p:nvSpPr>
         <p:spPr>
           <a:xfrm>
-            <a:off x="4282440" y="3886200"/>
-            <a:ext cx="3642360" cy="2331720"/>
+            <a:off x="4322064" y="3886200"/>
+            <a:ext cx="3544824" cy="2331720"/>
           </a:xfrm>
           <a:prstGeom prst="roundRect">
             <a:avLst>
@@ -9576,7 +10038,7 @@
         </p:nvSpPr>
         <p:spPr>
           <a:xfrm>
-            <a:off x="4465320" y="4069080"/>
+            <a:off x="4504944" y="4069080"/>
             <a:ext cx="457200" cy="457200"/>
           </a:xfrm>
           <a:prstGeom prst="ellipse">
@@ -9596,7 +10058,7 @@
         </p:nvSpPr>
         <p:spPr>
           <a:xfrm>
-            <a:off x="4465320" y="4069080"/>
+            <a:off x="4504944" y="4069080"/>
             <a:ext cx="457200" cy="457200"/>
           </a:xfrm>
           <a:prstGeom prst="rect">
@@ -9635,8 +10097,8 @@
         </p:nvSpPr>
         <p:spPr>
           <a:xfrm>
-            <a:off x="5059680" y="3995928"/>
-            <a:ext cx="2727960" cy="2112264"/>
+            <a:off x="5099304" y="3995928"/>
+            <a:ext cx="2630424" cy="2112264"/>
           </a:xfrm>
           <a:prstGeom prst="rect">
             <a:avLst/>
@@ -9665,6 +10127,54 @@
               <a:t>guardar protocolos</a:t>
             </a:r>
             <a:endParaRPr lang="en-US" sz="1800" dirty="0"/>
+          </a:p>
+        </p:txBody>
+      </p:sp>
+      <p:sp>
+        <p:nvSpPr>
+          <p:cNvPr id="25" name="Slide Number Placeholder 0"/>
+          <p:cNvSpPr>
+            <a:spLocks noGrp="1"/>
+          </p:cNvSpPr>
+          <p:nvPr>
+            <p:ph type="sldNum" sz="quarter" idx="4294967295"/>
+          </p:nvPr>
+        </p:nvSpPr>
+        <p:spPr>
+          <a:xfrm>
+            <a:off x="11292840" y="6556248"/>
+            <a:ext cx="548640" cy="256032"/>
+          </a:xfrm>
+          <a:prstGeom prst="rect">
+            <a:avLst/>
+          </a:prstGeom>
+          <a:extLst>
+            <a:ext uri="{C572A759-6A51-4108-AA02-DFA0A04FC94B}">
+              <ma14:wrappingTextBoxFlag xmlns:ma14="http://schemas.microsoft.com/office/mac/drawingml/2011/main" val="0"/>
+            </a:ext>
+          </a:extLst>
+        </p:spPr>
+        <p:txBody>
+          <a:bodyPr/>
+          <a:lstStyle>
+            <a:lvl1pPr>
+              <a:defRPr sz="900">
+                <a:solidFill>
+                  <a:srgbClr val="1B3A6B"/>
+                </a:solidFill>
+                <a:latin typeface="Arial"/>
+                <a:ea typeface="Arial"/>
+                <a:cs typeface="Arial"/>
+              </a:defRPr>
+            </a:lvl1pPr>
+          </a:lstStyle>
+          <a:p>
+            <a:pPr algn="r"/>
+            <a:fld id="{F7021451-1387-4CA6-816F-3879F97B5CBC}" type="slidenum">
+              <a:rPr b="1" lang="en-US"/>
+              <a:t>17</a:t>
+            </a:fld>
+            <a:endParaRPr lang="en-US"/>
           </a:p>
         </p:txBody>
       </p:sp>
@@ -9741,7 +10251,7 @@
         </p:blipFill>
         <p:spPr>
           <a:xfrm>
-            <a:off x="411480" y="6547104"/>
+            <a:off x="548640" y="6547104"/>
             <a:ext cx="274320" cy="274320"/>
           </a:xfrm>
           <a:prstGeom prst="rect">
@@ -9757,7 +10267,7 @@
         </p:nvSpPr>
         <p:spPr>
           <a:xfrm>
-            <a:off x="749808" y="6528816"/>
+            <a:off x="886968" y="6528816"/>
             <a:ext cx="6400800" cy="310896"/>
           </a:xfrm>
           <a:prstGeom prst="rect">
@@ -9797,7 +10307,7 @@
         <p:spPr>
           <a:xfrm>
             <a:off x="7132320" y="6528816"/>
-            <a:ext cx="4663440" cy="310896"/>
+            <a:ext cx="4023360" cy="310896"/>
           </a:xfrm>
           <a:prstGeom prst="rect">
             <a:avLst/>
@@ -9835,7 +10345,7 @@
         </p:nvSpPr>
         <p:spPr>
           <a:xfrm>
-            <a:off x="411480" y="384048"/>
+            <a:off x="548640" y="384048"/>
             <a:ext cx="82296" cy="658368"/>
           </a:xfrm>
           <a:prstGeom prst="rect">
@@ -9855,7 +10365,7 @@
         </p:nvSpPr>
         <p:spPr>
           <a:xfrm>
-            <a:off x="640080" y="292608"/>
+            <a:off x="777240" y="292608"/>
             <a:ext cx="10972800" cy="274320"/>
           </a:xfrm>
           <a:prstGeom prst="rect">
@@ -9894,8 +10404,8 @@
         </p:nvSpPr>
         <p:spPr>
           <a:xfrm>
-            <a:off x="640080" y="530352"/>
-            <a:ext cx="11155680" cy="566928"/>
+            <a:off x="777240" y="530352"/>
+            <a:ext cx="10881360" cy="566928"/>
           </a:xfrm>
           <a:prstGeom prst="rect">
             <a:avLst/>
@@ -9935,8 +10445,8 @@
         </p:nvSpPr>
         <p:spPr>
           <a:xfrm>
-            <a:off x="411480" y="1325880"/>
-            <a:ext cx="5577840" cy="2331720"/>
+            <a:off x="548640" y="1325880"/>
+            <a:ext cx="5431536" cy="2331720"/>
           </a:xfrm>
           <a:prstGeom prst="roundRect">
             <a:avLst>
@@ -9969,7 +10479,7 @@
         </p:nvSpPr>
         <p:spPr>
           <a:xfrm>
-            <a:off x="594360" y="1508760"/>
+            <a:off x="731520" y="1508760"/>
             <a:ext cx="457200" cy="457200"/>
           </a:xfrm>
           <a:prstGeom prst="ellipse">
@@ -9989,7 +10499,7 @@
         </p:nvSpPr>
         <p:spPr>
           <a:xfrm>
-            <a:off x="594360" y="1508760"/>
+            <a:off x="731520" y="1508760"/>
             <a:ext cx="457200" cy="457200"/>
           </a:xfrm>
           <a:prstGeom prst="rect">
@@ -10028,8 +10538,8 @@
         </p:nvSpPr>
         <p:spPr>
           <a:xfrm>
-            <a:off x="1188720" y="1435608"/>
-            <a:ext cx="4663440" cy="2112264"/>
+            <a:off x="1325880" y="1435608"/>
+            <a:ext cx="4517136" cy="2112264"/>
           </a:xfrm>
           <a:prstGeom prst="rect">
             <a:avLst/>
@@ -10069,8 +10579,8 @@
         </p:nvSpPr>
         <p:spPr>
           <a:xfrm>
-            <a:off x="6217920" y="1325880"/>
-            <a:ext cx="5577840" cy="2331720"/>
+            <a:off x="6208776" y="1325880"/>
+            <a:ext cx="5431536" cy="2331720"/>
           </a:xfrm>
           <a:prstGeom prst="roundRect">
             <a:avLst>
@@ -10103,7 +10613,7 @@
         </p:nvSpPr>
         <p:spPr>
           <a:xfrm>
-            <a:off x="6400800" y="1508760"/>
+            <a:off x="6391656" y="1508760"/>
             <a:ext cx="457200" cy="457200"/>
           </a:xfrm>
           <a:prstGeom prst="ellipse">
@@ -10123,7 +10633,7 @@
         </p:nvSpPr>
         <p:spPr>
           <a:xfrm>
-            <a:off x="6400800" y="1508760"/>
+            <a:off x="6391656" y="1508760"/>
             <a:ext cx="457200" cy="457200"/>
           </a:xfrm>
           <a:prstGeom prst="rect">
@@ -10162,8 +10672,8 @@
         </p:nvSpPr>
         <p:spPr>
           <a:xfrm>
-            <a:off x="6995160" y="1435608"/>
-            <a:ext cx="4663440" cy="2112264"/>
+            <a:off x="6986016" y="1435608"/>
+            <a:ext cx="4517136" cy="2112264"/>
           </a:xfrm>
           <a:prstGeom prst="rect">
             <a:avLst/>
@@ -10203,8 +10713,8 @@
         </p:nvSpPr>
         <p:spPr>
           <a:xfrm>
-            <a:off x="411480" y="3886200"/>
-            <a:ext cx="5577840" cy="2331720"/>
+            <a:off x="548640" y="3886200"/>
+            <a:ext cx="5431536" cy="2331720"/>
           </a:xfrm>
           <a:prstGeom prst="roundRect">
             <a:avLst>
@@ -10237,7 +10747,7 @@
         </p:nvSpPr>
         <p:spPr>
           <a:xfrm>
-            <a:off x="594360" y="4069080"/>
+            <a:off x="731520" y="4069080"/>
             <a:ext cx="457200" cy="457200"/>
           </a:xfrm>
           <a:prstGeom prst="ellipse">
@@ -10257,7 +10767,7 @@
         </p:nvSpPr>
         <p:spPr>
           <a:xfrm>
-            <a:off x="594360" y="4069080"/>
+            <a:off x="731520" y="4069080"/>
             <a:ext cx="457200" cy="457200"/>
           </a:xfrm>
           <a:prstGeom prst="rect">
@@ -10296,8 +10806,8 @@
         </p:nvSpPr>
         <p:spPr>
           <a:xfrm>
-            <a:off x="1188720" y="3995928"/>
-            <a:ext cx="4663440" cy="2112264"/>
+            <a:off x="1325880" y="3995928"/>
+            <a:ext cx="4517136" cy="2112264"/>
           </a:xfrm>
           <a:prstGeom prst="rect">
             <a:avLst/>
@@ -10337,8 +10847,8 @@
         </p:nvSpPr>
         <p:spPr>
           <a:xfrm>
-            <a:off x="6217920" y="3886200"/>
-            <a:ext cx="5577840" cy="2331720"/>
+            <a:off x="6208776" y="3886200"/>
+            <a:ext cx="5431536" cy="2331720"/>
           </a:xfrm>
           <a:prstGeom prst="roundRect">
             <a:avLst>
@@ -10371,7 +10881,7 @@
         </p:nvSpPr>
         <p:spPr>
           <a:xfrm>
-            <a:off x="6400800" y="4069080"/>
+            <a:off x="6391656" y="4069080"/>
             <a:ext cx="457200" cy="457200"/>
           </a:xfrm>
           <a:prstGeom prst="ellipse">
@@ -10391,7 +10901,7 @@
         </p:nvSpPr>
         <p:spPr>
           <a:xfrm>
-            <a:off x="6400800" y="4069080"/>
+            <a:off x="6391656" y="4069080"/>
             <a:ext cx="457200" cy="457200"/>
           </a:xfrm>
           <a:prstGeom prst="rect">
@@ -10430,8 +10940,8 @@
         </p:nvSpPr>
         <p:spPr>
           <a:xfrm>
-            <a:off x="6995160" y="3995928"/>
-            <a:ext cx="4663440" cy="2112264"/>
+            <a:off x="6986016" y="3995928"/>
+            <a:ext cx="4517136" cy="2112264"/>
           </a:xfrm>
           <a:prstGeom prst="rect">
             <a:avLst/>
@@ -10460,6 +10970,54 @@
               <a:t>protocolos guardados</a:t>
             </a:r>
             <a:endParaRPr lang="en-US" sz="1800" dirty="0"/>
+          </a:p>
+        </p:txBody>
+      </p:sp>
+      <p:sp>
+        <p:nvSpPr>
+          <p:cNvPr id="25" name="Slide Number Placeholder 0"/>
+          <p:cNvSpPr>
+            <a:spLocks noGrp="1"/>
+          </p:cNvSpPr>
+          <p:nvPr>
+            <p:ph type="sldNum" sz="quarter" idx="4294967295"/>
+          </p:nvPr>
+        </p:nvSpPr>
+        <p:spPr>
+          <a:xfrm>
+            <a:off x="11292840" y="6556248"/>
+            <a:ext cx="548640" cy="256032"/>
+          </a:xfrm>
+          <a:prstGeom prst="rect">
+            <a:avLst/>
+          </a:prstGeom>
+          <a:extLst>
+            <a:ext uri="{C572A759-6A51-4108-AA02-DFA0A04FC94B}">
+              <ma14:wrappingTextBoxFlag xmlns:ma14="http://schemas.microsoft.com/office/mac/drawingml/2011/main" val="0"/>
+            </a:ext>
+          </a:extLst>
+        </p:spPr>
+        <p:txBody>
+          <a:bodyPr/>
+          <a:lstStyle>
+            <a:lvl1pPr>
+              <a:defRPr sz="900">
+                <a:solidFill>
+                  <a:srgbClr val="1B3A6B"/>
+                </a:solidFill>
+                <a:latin typeface="Arial"/>
+                <a:ea typeface="Arial"/>
+                <a:cs typeface="Arial"/>
+              </a:defRPr>
+            </a:lvl1pPr>
+          </a:lstStyle>
+          <a:p>
+            <a:pPr algn="r"/>
+            <a:fld id="{F7021451-1387-4CA6-816F-3879F97B5CBC}" type="slidenum">
+              <a:rPr b="1" lang="en-US"/>
+              <a:t>18</a:t>
+            </a:fld>
+            <a:endParaRPr lang="en-US"/>
           </a:p>
         </p:txBody>
       </p:sp>
@@ -10523,6 +11081,45 @@
         </p:nvSpPr>
         <p:spPr>
           <a:xfrm>
+            <a:off x="457200" y="548640"/>
+            <a:ext cx="3474720" cy="1737360"/>
+          </a:xfrm>
+          <a:prstGeom prst="rect">
+            <a:avLst/>
+          </a:prstGeom>
+          <a:noFill/>
+          <a:ln/>
+        </p:spPr>
+        <p:txBody>
+          <a:bodyPr wrap="square" rtlCol="0" anchor="ctr"/>
+          <a:lstStyle/>
+          <a:p>
+            <a:pPr indent="0" marL="0">
+              <a:buNone/>
+            </a:pPr>
+            <a:r>
+              <a:rPr lang="en-US" sz="11000" b="1" dirty="0">
+                <a:solidFill>
+                  <a:srgbClr val="11396F"/>
+                </a:solidFill>
+                <a:latin typeface="Arial" pitchFamily="34" charset="0"/>
+                <a:ea typeface="Arial" pitchFamily="34" charset="-122"/>
+                <a:cs typeface="Arial" pitchFamily="34" charset="-120"/>
+              </a:rPr>
+              <a:t>04</a:t>
+            </a:r>
+            <a:endParaRPr lang="en-US" sz="11000" dirty="0"/>
+          </a:p>
+        </p:txBody>
+      </p:sp>
+      <p:sp>
+        <p:nvSpPr>
+          <p:cNvPr id="4" name="Text 2"/>
+          <p:cNvSpPr/>
+          <p:nvPr/>
+        </p:nvSpPr>
+        <p:spPr>
+          <a:xfrm>
             <a:off x="548640" y="2194560"/>
             <a:ext cx="3291840" cy="548640"/>
           </a:xfrm>
@@ -10556,7 +11153,46 @@
       </p:sp>
       <p:sp>
         <p:nvSpPr>
-          <p:cNvPr id="4" name="Text 2"/>
+          <p:cNvPr id="5" name="Text 3"/>
+          <p:cNvSpPr/>
+          <p:nvPr/>
+        </p:nvSpPr>
+        <p:spPr>
+          <a:xfrm>
+            <a:off x="548640" y="3200400"/>
+            <a:ext cx="3383280" cy="457200"/>
+          </a:xfrm>
+          <a:prstGeom prst="rect">
+            <a:avLst/>
+          </a:prstGeom>
+          <a:noFill/>
+          <a:ln/>
+        </p:spPr>
+        <p:txBody>
+          <a:bodyPr wrap="square" rtlCol="0" anchor="ctr"/>
+          <a:lstStyle/>
+          <a:p>
+            <a:pPr indent="0" marL="0">
+              <a:buNone/>
+            </a:pPr>
+            <a:r>
+              <a:rPr lang="en-US" sz="1100" dirty="0">
+                <a:solidFill>
+                  <a:srgbClr val="C7D2E3"/>
+                </a:solidFill>
+                <a:latin typeface="Arial" pitchFamily="34" charset="0"/>
+                <a:ea typeface="Arial" pitchFamily="34" charset="-122"/>
+                <a:cs typeface="Arial" pitchFamily="34" charset="-120"/>
+              </a:rPr>
+              <a:t>M6 · Etapa 3 · Operação ponta a ponta</a:t>
+            </a:r>
+            <a:endParaRPr lang="en-US" sz="1100" dirty="0"/>
+          </a:p>
+        </p:txBody>
+      </p:sp>
+      <p:sp>
+        <p:nvSpPr>
+          <p:cNvPr id="6" name="Text 4"/>
           <p:cNvSpPr/>
           <p:nvPr/>
         </p:nvSpPr>
@@ -10595,7 +11231,7 @@
       </p:sp>
       <p:pic>
         <p:nvPicPr>
-          <p:cNvPr id="5" name="Image 0" descr="/www/wwwroot/rexar/gdsolar/docs/curso/slides/assets/logo-gdsolar.png">    </p:cNvPr>
+          <p:cNvPr id="7" name="Image 0" descr="/www/wwwroot/rexar/gdsolar/docs/curso/slides/assets/logo-gdsolar.png">    </p:cNvPr>
           <p:cNvPicPr>
             <a:picLocks noChangeAspect="1"/>
           </p:cNvPicPr>
@@ -10619,7 +11255,7 @@
       </p:pic>
       <p:sp>
         <p:nvSpPr>
-          <p:cNvPr id="6" name="Text 3"/>
+          <p:cNvPr id="8" name="Text 5"/>
           <p:cNvSpPr/>
           <p:nvPr/>
         </p:nvSpPr>
@@ -10660,7 +11296,7 @@
       </p:sp>
       <p:sp>
         <p:nvSpPr>
-          <p:cNvPr id="7" name="Text 4"/>
+          <p:cNvPr id="9" name="Text 6"/>
           <p:cNvSpPr/>
           <p:nvPr/>
         </p:nvSpPr>
@@ -10701,7 +11337,7 @@
       </p:sp>
       <p:sp>
         <p:nvSpPr>
-          <p:cNvPr id="8" name="Text 5"/>
+          <p:cNvPr id="10" name="Text 7"/>
           <p:cNvSpPr/>
           <p:nvPr/>
         </p:nvSpPr>
@@ -10888,6 +11524,45 @@
         </p:nvSpPr>
         <p:spPr>
           <a:xfrm>
+            <a:off x="457200" y="548640"/>
+            <a:ext cx="3474720" cy="1737360"/>
+          </a:xfrm>
+          <a:prstGeom prst="rect">
+            <a:avLst/>
+          </a:prstGeom>
+          <a:noFill/>
+          <a:ln/>
+        </p:spPr>
+        <p:txBody>
+          <a:bodyPr wrap="square" rtlCol="0" anchor="ctr"/>
+          <a:lstStyle/>
+          <a:p>
+            <a:pPr indent="0" marL="0">
+              <a:buNone/>
+            </a:pPr>
+            <a:r>
+              <a:rPr lang="en-US" sz="11000" b="1" dirty="0">
+                <a:solidFill>
+                  <a:srgbClr val="11396F"/>
+                </a:solidFill>
+                <a:latin typeface="Arial" pitchFamily="34" charset="0"/>
+                <a:ea typeface="Arial" pitchFamily="34" charset="-122"/>
+                <a:cs typeface="Arial" pitchFamily="34" charset="-120"/>
+              </a:rPr>
+              <a:t>01</a:t>
+            </a:r>
+            <a:endParaRPr lang="en-US" sz="11000" dirty="0"/>
+          </a:p>
+        </p:txBody>
+      </p:sp>
+      <p:sp>
+        <p:nvSpPr>
+          <p:cNvPr id="4" name="Text 2"/>
+          <p:cNvSpPr/>
+          <p:nvPr/>
+        </p:nvSpPr>
+        <p:spPr>
+          <a:xfrm>
             <a:off x="548640" y="2194560"/>
             <a:ext cx="3291840" cy="548640"/>
           </a:xfrm>
@@ -10921,7 +11596,46 @@
       </p:sp>
       <p:sp>
         <p:nvSpPr>
-          <p:cNvPr id="4" name="Text 2"/>
+          <p:cNvPr id="5" name="Text 3"/>
+          <p:cNvSpPr/>
+          <p:nvPr/>
+        </p:nvSpPr>
+        <p:spPr>
+          <a:xfrm>
+            <a:off x="548640" y="3200400"/>
+            <a:ext cx="3383280" cy="457200"/>
+          </a:xfrm>
+          <a:prstGeom prst="rect">
+            <a:avLst/>
+          </a:prstGeom>
+          <a:noFill/>
+          <a:ln/>
+        </p:spPr>
+        <p:txBody>
+          <a:bodyPr wrap="square" rtlCol="0" anchor="ctr"/>
+          <a:lstStyle/>
+          <a:p>
+            <a:pPr indent="0" marL="0">
+              <a:buNone/>
+            </a:pPr>
+            <a:r>
+              <a:rPr lang="en-US" sz="1100" dirty="0">
+                <a:solidFill>
+                  <a:srgbClr val="C7D2E3"/>
+                </a:solidFill>
+                <a:latin typeface="Arial" pitchFamily="34" charset="0"/>
+                <a:ea typeface="Arial" pitchFamily="34" charset="-122"/>
+                <a:cs typeface="Arial" pitchFamily="34" charset="-120"/>
+              </a:rPr>
+              <a:t>M6 · Etapa 3 · Operação ponta a ponta</a:t>
+            </a:r>
+            <a:endParaRPr lang="en-US" sz="1100" dirty="0"/>
+          </a:p>
+        </p:txBody>
+      </p:sp>
+      <p:sp>
+        <p:nvSpPr>
+          <p:cNvPr id="6" name="Text 4"/>
           <p:cNvSpPr/>
           <p:nvPr/>
         </p:nvSpPr>
@@ -10960,7 +11674,7 @@
       </p:sp>
       <p:pic>
         <p:nvPicPr>
-          <p:cNvPr id="5" name="Image 0" descr="/www/wwwroot/rexar/gdsolar/docs/curso/slides/assets/logo-gdsolar.png">    </p:cNvPr>
+          <p:cNvPr id="7" name="Image 0" descr="/www/wwwroot/rexar/gdsolar/docs/curso/slides/assets/logo-gdsolar.png">    </p:cNvPr>
           <p:cNvPicPr>
             <a:picLocks noChangeAspect="1"/>
           </p:cNvPicPr>
@@ -10984,7 +11698,7 @@
       </p:pic>
       <p:sp>
         <p:nvSpPr>
-          <p:cNvPr id="6" name="Text 3"/>
+          <p:cNvPr id="8" name="Text 5"/>
           <p:cNvSpPr/>
           <p:nvPr/>
         </p:nvSpPr>
@@ -11025,7 +11739,7 @@
       </p:sp>
       <p:sp>
         <p:nvSpPr>
-          <p:cNvPr id="7" name="Text 4"/>
+          <p:cNvPr id="9" name="Text 6"/>
           <p:cNvSpPr/>
           <p:nvPr/>
         </p:nvSpPr>
@@ -11066,7 +11780,7 @@
       </p:sp>
       <p:sp>
         <p:nvSpPr>
-          <p:cNvPr id="8" name="Text 5"/>
+          <p:cNvPr id="10" name="Text 7"/>
           <p:cNvSpPr/>
           <p:nvPr/>
         </p:nvSpPr>
@@ -11245,7 +11959,7 @@
         </p:blipFill>
         <p:spPr>
           <a:xfrm>
-            <a:off x="411480" y="6547104"/>
+            <a:off x="548640" y="6547104"/>
             <a:ext cx="274320" cy="274320"/>
           </a:xfrm>
           <a:prstGeom prst="rect">
@@ -11261,7 +11975,7 @@
         </p:nvSpPr>
         <p:spPr>
           <a:xfrm>
-            <a:off x="749808" y="6528816"/>
+            <a:off x="886968" y="6528816"/>
             <a:ext cx="6400800" cy="310896"/>
           </a:xfrm>
           <a:prstGeom prst="rect">
@@ -11301,7 +12015,7 @@
         <p:spPr>
           <a:xfrm>
             <a:off x="7132320" y="6528816"/>
-            <a:ext cx="4663440" cy="310896"/>
+            <a:ext cx="4023360" cy="310896"/>
           </a:xfrm>
           <a:prstGeom prst="rect">
             <a:avLst/>
@@ -11339,7 +12053,7 @@
         </p:nvSpPr>
         <p:spPr>
           <a:xfrm>
-            <a:off x="411480" y="384048"/>
+            <a:off x="548640" y="384048"/>
             <a:ext cx="82296" cy="658368"/>
           </a:xfrm>
           <a:prstGeom prst="rect">
@@ -11359,7 +12073,7 @@
         </p:nvSpPr>
         <p:spPr>
           <a:xfrm>
-            <a:off x="640080" y="292608"/>
+            <a:off x="777240" y="292608"/>
             <a:ext cx="10972800" cy="274320"/>
           </a:xfrm>
           <a:prstGeom prst="rect">
@@ -11398,8 +12112,8 @@
         </p:nvSpPr>
         <p:spPr>
           <a:xfrm>
-            <a:off x="640080" y="530352"/>
-            <a:ext cx="11155680" cy="566928"/>
+            <a:off x="777240" y="530352"/>
+            <a:ext cx="10881360" cy="566928"/>
           </a:xfrm>
           <a:prstGeom prst="rect">
             <a:avLst/>
@@ -11439,12 +12153,12 @@
         </p:nvSpPr>
         <p:spPr>
           <a:xfrm>
-            <a:off x="411480" y="1325880"/>
-            <a:ext cx="3611880" cy="4937760"/>
+            <a:off x="548640" y="1325880"/>
+            <a:ext cx="3514344" cy="4937760"/>
           </a:xfrm>
           <a:prstGeom prst="roundRect">
             <a:avLst>
-              <a:gd name="adj" fmla="val 2025"/>
+              <a:gd name="adj" fmla="val 2082"/>
             </a:avLst>
           </a:prstGeom>
           <a:solidFill>
@@ -11473,8 +12187,8 @@
         </p:nvSpPr>
         <p:spPr>
           <a:xfrm>
-            <a:off x="411480" y="1325880"/>
-            <a:ext cx="3611880" cy="109728"/>
+            <a:off x="548640" y="1325880"/>
+            <a:ext cx="3514344" cy="109728"/>
           </a:xfrm>
           <a:prstGeom prst="rect">
             <a:avLst/>
@@ -11493,8 +12207,8 @@
         </p:nvSpPr>
         <p:spPr>
           <a:xfrm>
-            <a:off x="685800" y="1554480"/>
-            <a:ext cx="3063240" cy="685800"/>
+            <a:off x="822960" y="1554480"/>
+            <a:ext cx="2965704" cy="685800"/>
           </a:xfrm>
           <a:prstGeom prst="rect">
             <a:avLst/>
@@ -11534,8 +12248,8 @@
         </p:nvSpPr>
         <p:spPr>
           <a:xfrm>
-            <a:off x="685800" y="2286000"/>
-            <a:ext cx="3063240" cy="3749040"/>
+            <a:off x="822960" y="2286000"/>
+            <a:ext cx="2965704" cy="3749040"/>
           </a:xfrm>
           <a:prstGeom prst="rect">
             <a:avLst/>
@@ -11600,12 +12314,12 @@
         </p:nvSpPr>
         <p:spPr>
           <a:xfrm>
-            <a:off x="4297680" y="1325880"/>
-            <a:ext cx="3611880" cy="4937760"/>
+            <a:off x="4337304" y="1325880"/>
+            <a:ext cx="3514344" cy="4937760"/>
           </a:xfrm>
           <a:prstGeom prst="roundRect">
             <a:avLst>
-              <a:gd name="adj" fmla="val 2025"/>
+              <a:gd name="adj" fmla="val 2082"/>
             </a:avLst>
           </a:prstGeom>
           <a:solidFill>
@@ -11634,8 +12348,8 @@
         </p:nvSpPr>
         <p:spPr>
           <a:xfrm>
-            <a:off x="4297680" y="1325880"/>
-            <a:ext cx="3611880" cy="109728"/>
+            <a:off x="4337304" y="1325880"/>
+            <a:ext cx="3514344" cy="109728"/>
           </a:xfrm>
           <a:prstGeom prst="rect">
             <a:avLst/>
@@ -11654,8 +12368,8 @@
         </p:nvSpPr>
         <p:spPr>
           <a:xfrm>
-            <a:off x="4572000" y="1554480"/>
-            <a:ext cx="3063240" cy="685800"/>
+            <a:off x="4611624" y="1554480"/>
+            <a:ext cx="2965704" cy="685800"/>
           </a:xfrm>
           <a:prstGeom prst="rect">
             <a:avLst/>
@@ -11695,8 +12409,8 @@
         </p:nvSpPr>
         <p:spPr>
           <a:xfrm>
-            <a:off x="4572000" y="2286000"/>
-            <a:ext cx="3063240" cy="3749040"/>
+            <a:off x="4611624" y="2286000"/>
+            <a:ext cx="2965704" cy="3749040"/>
           </a:xfrm>
           <a:prstGeom prst="rect">
             <a:avLst/>
@@ -11718,7 +12432,7 @@
               <a:buChar char="●"/>
             </a:pPr>
             <a:r>
-              <a:rPr lang="en-US" sz="1600" dirty="0">
+              <a:rPr lang="en-US" sz="1700" dirty="0">
                 <a:solidFill>
                   <a:srgbClr val="1F2937"/>
                 </a:solidFill>
@@ -11728,7 +12442,7 @@
               </a:rPr>
               <a:t>Usina &gt; 500 kW: nenhum participante ≥ 25%</a:t>
             </a:r>
-            <a:endParaRPr lang="en-US" sz="1600" dirty="0"/>
+            <a:endParaRPr lang="en-US" sz="1700" dirty="0"/>
           </a:p>
           <a:p>
             <a:pPr marL="342900" indent="-342900">
@@ -11739,7 +12453,7 @@
               <a:buChar char="●"/>
             </a:pPr>
             <a:r>
-              <a:rPr lang="en-US" sz="1600" dirty="0">
+              <a:rPr lang="en-US" sz="1700" dirty="0">
                 <a:solidFill>
                   <a:srgbClr val="1F2937"/>
                 </a:solidFill>
@@ -11749,7 +12463,7 @@
               </a:rPr>
               <a:t>diversifique: risco de inadimplência e de saída também</a:t>
             </a:r>
-            <a:endParaRPr lang="en-US" sz="1600" dirty="0"/>
+            <a:endParaRPr lang="en-US" sz="1700" dirty="0"/>
           </a:p>
         </p:txBody>
       </p:sp>
@@ -11761,12 +12475,12 @@
         </p:nvSpPr>
         <p:spPr>
           <a:xfrm>
-            <a:off x="8183880" y="1325880"/>
-            <a:ext cx="3611880" cy="4937760"/>
+            <a:off x="8125968" y="1325880"/>
+            <a:ext cx="3514344" cy="4937760"/>
           </a:xfrm>
           <a:prstGeom prst="roundRect">
             <a:avLst>
-              <a:gd name="adj" fmla="val 2025"/>
+              <a:gd name="adj" fmla="val 2082"/>
             </a:avLst>
           </a:prstGeom>
           <a:solidFill>
@@ -11795,8 +12509,8 @@
         </p:nvSpPr>
         <p:spPr>
           <a:xfrm>
-            <a:off x="8183880" y="1325880"/>
-            <a:ext cx="3611880" cy="109728"/>
+            <a:off x="8125968" y="1325880"/>
+            <a:ext cx="3514344" cy="109728"/>
           </a:xfrm>
           <a:prstGeom prst="rect">
             <a:avLst/>
@@ -11815,8 +12529,8 @@
         </p:nvSpPr>
         <p:spPr>
           <a:xfrm>
-            <a:off x="8458200" y="1554480"/>
-            <a:ext cx="3063240" cy="685800"/>
+            <a:off x="8400288" y="1554480"/>
+            <a:ext cx="2965704" cy="685800"/>
           </a:xfrm>
           <a:prstGeom prst="rect">
             <a:avLst/>
@@ -11856,8 +12570,8 @@
         </p:nvSpPr>
         <p:spPr>
           <a:xfrm>
-            <a:off x="8458200" y="2286000"/>
-            <a:ext cx="3063240" cy="3749040"/>
+            <a:off x="8400288" y="2286000"/>
+            <a:ext cx="2965704" cy="3749040"/>
           </a:xfrm>
           <a:prstGeom prst="rect">
             <a:avLst/>
@@ -11879,7 +12593,7 @@
               <a:buChar char="●"/>
             </a:pPr>
             <a:r>
-              <a:rPr lang="en-US" sz="1200" dirty="0">
+              <a:rPr lang="en-US" sz="1700" dirty="0">
                 <a:solidFill>
                   <a:srgbClr val="1F2937"/>
                 </a:solidFill>
@@ -11889,7 +12603,7 @@
               </a:rPr>
               <a:t>Queda pontual (1 mês) → nada a fazer: rateio é %, todos recebem proporcionalmente menos</a:t>
             </a:r>
-            <a:endParaRPr lang="en-US" sz="1200" dirty="0"/>
+            <a:endParaRPr lang="en-US" sz="1700" dirty="0"/>
           </a:p>
           <a:p>
             <a:pPr marL="342900" indent="-342900">
@@ -11900,7 +12614,7 @@
               <a:buChar char="●"/>
             </a:pPr>
             <a:r>
-              <a:rPr lang="en-US" sz="1200" dirty="0">
+              <a:rPr lang="en-US" sz="1700" dirty="0">
                 <a:solidFill>
                   <a:srgbClr val="1F2937"/>
                 </a:solidFill>
@@ -11910,7 +12624,7 @@
               </a:rPr>
               <a:t>Queda por falha → acionar O&amp;M, comunicar clientes</a:t>
             </a:r>
-            <a:endParaRPr lang="en-US" sz="1200" dirty="0"/>
+            <a:endParaRPr lang="en-US" sz="1700" dirty="0"/>
           </a:p>
           <a:p>
             <a:pPr marL="342900" indent="-342900">
@@ -11921,7 +12635,7 @@
               <a:buChar char="●"/>
             </a:pPr>
             <a:r>
-              <a:rPr lang="en-US" sz="1200" dirty="0">
+              <a:rPr lang="en-US" sz="1700" dirty="0">
                 <a:solidFill>
                   <a:srgbClr val="1F2937"/>
                 </a:solidFill>
@@ -11931,7 +12645,55 @@
               </a:rPr>
               <a:t>Queda estrutural → reduzir disponível, rebalancear cotas, mover clientes para outra usina</a:t>
             </a:r>
-            <a:endParaRPr lang="en-US" sz="1200" dirty="0"/>
+            <a:endParaRPr lang="en-US" sz="1700" dirty="0"/>
+          </a:p>
+        </p:txBody>
+      </p:sp>
+      <p:sp>
+        <p:nvSpPr>
+          <p:cNvPr id="25" name="Slide Number Placeholder 0"/>
+          <p:cNvSpPr>
+            <a:spLocks noGrp="1"/>
+          </p:cNvSpPr>
+          <p:nvPr>
+            <p:ph type="sldNum" sz="quarter" idx="4294967295"/>
+          </p:nvPr>
+        </p:nvSpPr>
+        <p:spPr>
+          <a:xfrm>
+            <a:off x="11292840" y="6556248"/>
+            <a:ext cx="548640" cy="256032"/>
+          </a:xfrm>
+          <a:prstGeom prst="rect">
+            <a:avLst/>
+          </a:prstGeom>
+          <a:extLst>
+            <a:ext uri="{C572A759-6A51-4108-AA02-DFA0A04FC94B}">
+              <ma14:wrappingTextBoxFlag xmlns:ma14="http://schemas.microsoft.com/office/mac/drawingml/2011/main" val="0"/>
+            </a:ext>
+          </a:extLst>
+        </p:spPr>
+        <p:txBody>
+          <a:bodyPr/>
+          <a:lstStyle>
+            <a:lvl1pPr>
+              <a:defRPr sz="900">
+                <a:solidFill>
+                  <a:srgbClr val="1B3A6B"/>
+                </a:solidFill>
+                <a:latin typeface="Arial"/>
+                <a:ea typeface="Arial"/>
+                <a:cs typeface="Arial"/>
+              </a:defRPr>
+            </a:lvl1pPr>
+          </a:lstStyle>
+          <a:p>
+            <a:pPr algn="r"/>
+            <a:fld id="{F7021451-1387-4CA6-816F-3879F97B5CBC}" type="slidenum">
+              <a:rPr b="1" lang="en-US"/>
+              <a:t>20</a:t>
+            </a:fld>
+            <a:endParaRPr lang="en-US"/>
           </a:p>
         </p:txBody>
       </p:sp>
@@ -12008,7 +12770,7 @@
         </p:blipFill>
         <p:spPr>
           <a:xfrm>
-            <a:off x="411480" y="6547104"/>
+            <a:off x="548640" y="6547104"/>
             <a:ext cx="274320" cy="274320"/>
           </a:xfrm>
           <a:prstGeom prst="rect">
@@ -12024,7 +12786,7 @@
         </p:nvSpPr>
         <p:spPr>
           <a:xfrm>
-            <a:off x="749808" y="6528816"/>
+            <a:off x="886968" y="6528816"/>
             <a:ext cx="6400800" cy="310896"/>
           </a:xfrm>
           <a:prstGeom prst="rect">
@@ -12064,7 +12826,7 @@
         <p:spPr>
           <a:xfrm>
             <a:off x="7132320" y="6528816"/>
-            <a:ext cx="4663440" cy="310896"/>
+            <a:ext cx="4023360" cy="310896"/>
           </a:xfrm>
           <a:prstGeom prst="rect">
             <a:avLst/>
@@ -12102,7 +12864,7 @@
         </p:nvSpPr>
         <p:spPr>
           <a:xfrm>
-            <a:off x="411480" y="384048"/>
+            <a:off x="548640" y="384048"/>
             <a:ext cx="82296" cy="658368"/>
           </a:xfrm>
           <a:prstGeom prst="rect">
@@ -12122,7 +12884,7 @@
         </p:nvSpPr>
         <p:spPr>
           <a:xfrm>
-            <a:off x="640080" y="292608"/>
+            <a:off x="777240" y="292608"/>
             <a:ext cx="10972800" cy="274320"/>
           </a:xfrm>
           <a:prstGeom prst="rect">
@@ -12161,8 +12923,8 @@
         </p:nvSpPr>
         <p:spPr>
           <a:xfrm>
-            <a:off x="640080" y="530352"/>
-            <a:ext cx="11155680" cy="566928"/>
+            <a:off x="777240" y="530352"/>
+            <a:ext cx="10881360" cy="566928"/>
           </a:xfrm>
           <a:prstGeom prst="rect">
             <a:avLst/>
@@ -12202,8 +12964,8 @@
         </p:nvSpPr>
         <p:spPr>
           <a:xfrm>
-            <a:off x="411480" y="1325880"/>
-            <a:ext cx="11384280" cy="4937760"/>
+            <a:off x="548640" y="1325880"/>
+            <a:ext cx="11091672" cy="4937760"/>
           </a:xfrm>
           <a:prstGeom prst="roundRect">
             <a:avLst>
@@ -12224,8 +12986,8 @@
         </p:nvSpPr>
         <p:spPr>
           <a:xfrm>
-            <a:off x="777240" y="1554480"/>
-            <a:ext cx="10652760" cy="4480560"/>
+            <a:off x="914400" y="1554480"/>
+            <a:ext cx="10360152" cy="4480560"/>
           </a:xfrm>
           <a:prstGeom prst="rect">
             <a:avLst/>
@@ -12246,7 +13008,7 @@
               <a:buNone/>
             </a:pPr>
             <a:r>
-              <a:rPr lang="en-US" sz="1800" b="1" dirty="0">
+              <a:rPr lang="en-US" sz="2400" b="1" dirty="0">
                 <a:solidFill>
                   <a:srgbClr val="FFFFFF"/>
                 </a:solidFill>
@@ -12256,7 +13018,7 @@
               </a:rPr>
               <a:t>60.000 kWh disponíveis × 95% = 57.000 kWh alocáveis</a:t>
             </a:r>
-            <a:endParaRPr lang="en-US" sz="1800" dirty="0"/>
+            <a:endParaRPr lang="en-US" sz="2400" dirty="0"/>
           </a:p>
           <a:p>
             <a:pPr indent="0" marL="0">
@@ -12266,7 +13028,7 @@
               <a:buNone/>
             </a:pPr>
             <a:r>
-              <a:rPr lang="en-US" sz="1800" b="1" dirty="0">
+              <a:rPr lang="en-US" sz="2400" b="1" dirty="0">
                 <a:solidFill>
                   <a:srgbClr val="F7A23B"/>
                 </a:solidFill>
@@ -12276,7 +13038,55 @@
               </a:rPr>
               <a:t>ex.: 6 empresas (~20.000) + 70 residências (~28.000) + saldo para fila</a:t>
             </a:r>
-            <a:endParaRPr lang="en-US" sz="1800" dirty="0"/>
+            <a:endParaRPr lang="en-US" sz="2400" dirty="0"/>
+          </a:p>
+        </p:txBody>
+      </p:sp>
+      <p:sp>
+        <p:nvSpPr>
+          <p:cNvPr id="25" name="Slide Number Placeholder 0"/>
+          <p:cNvSpPr>
+            <a:spLocks noGrp="1"/>
+          </p:cNvSpPr>
+          <p:nvPr>
+            <p:ph type="sldNum" sz="quarter" idx="4294967295"/>
+          </p:nvPr>
+        </p:nvSpPr>
+        <p:spPr>
+          <a:xfrm>
+            <a:off x="11292840" y="6556248"/>
+            <a:ext cx="548640" cy="256032"/>
+          </a:xfrm>
+          <a:prstGeom prst="rect">
+            <a:avLst/>
+          </a:prstGeom>
+          <a:extLst>
+            <a:ext uri="{C572A759-6A51-4108-AA02-DFA0A04FC94B}">
+              <ma14:wrappingTextBoxFlag xmlns:ma14="http://schemas.microsoft.com/office/mac/drawingml/2011/main" val="0"/>
+            </a:ext>
+          </a:extLst>
+        </p:spPr>
+        <p:txBody>
+          <a:bodyPr/>
+          <a:lstStyle>
+            <a:lvl1pPr>
+              <a:defRPr sz="900">
+                <a:solidFill>
+                  <a:srgbClr val="1B3A6B"/>
+                </a:solidFill>
+                <a:latin typeface="Arial"/>
+                <a:ea typeface="Arial"/>
+                <a:cs typeface="Arial"/>
+              </a:defRPr>
+            </a:lvl1pPr>
+          </a:lstStyle>
+          <a:p>
+            <a:pPr algn="r"/>
+            <a:fld id="{F7021451-1387-4CA6-816F-3879F97B5CBC}" type="slidenum">
+              <a:rPr b="1" lang="en-US"/>
+              <a:t>21</a:t>
+            </a:fld>
+            <a:endParaRPr lang="en-US"/>
           </a:p>
         </p:txBody>
       </p:sp>
@@ -12353,7 +13163,7 @@
         </p:blipFill>
         <p:spPr>
           <a:xfrm>
-            <a:off x="411480" y="6547104"/>
+            <a:off x="548640" y="6547104"/>
             <a:ext cx="274320" cy="274320"/>
           </a:xfrm>
           <a:prstGeom prst="rect">
@@ -12369,7 +13179,7 @@
         </p:nvSpPr>
         <p:spPr>
           <a:xfrm>
-            <a:off x="749808" y="6528816"/>
+            <a:off x="886968" y="6528816"/>
             <a:ext cx="6400800" cy="310896"/>
           </a:xfrm>
           <a:prstGeom prst="rect">
@@ -12409,7 +13219,7 @@
         <p:spPr>
           <a:xfrm>
             <a:off x="7132320" y="6528816"/>
-            <a:ext cx="4663440" cy="310896"/>
+            <a:ext cx="4023360" cy="310896"/>
           </a:xfrm>
           <a:prstGeom prst="rect">
             <a:avLst/>
@@ -12447,7 +13257,7 @@
         </p:nvSpPr>
         <p:spPr>
           <a:xfrm>
-            <a:off x="411480" y="384048"/>
+            <a:off x="548640" y="384048"/>
             <a:ext cx="82296" cy="658368"/>
           </a:xfrm>
           <a:prstGeom prst="rect">
@@ -12467,7 +13277,7 @@
         </p:nvSpPr>
         <p:spPr>
           <a:xfrm>
-            <a:off x="640080" y="292608"/>
+            <a:off x="777240" y="292608"/>
             <a:ext cx="10972800" cy="274320"/>
           </a:xfrm>
           <a:prstGeom prst="rect">
@@ -12506,8 +13316,8 @@
         </p:nvSpPr>
         <p:spPr>
           <a:xfrm>
-            <a:off x="640080" y="530352"/>
-            <a:ext cx="11155680" cy="566928"/>
+            <a:off x="777240" y="530352"/>
+            <a:ext cx="10881360" cy="566928"/>
           </a:xfrm>
           <a:prstGeom prst="rect">
             <a:avLst/>
@@ -12547,8 +13357,8 @@
         </p:nvSpPr>
         <p:spPr>
           <a:xfrm>
-            <a:off x="411480" y="1325880"/>
-            <a:ext cx="11384280" cy="4937760"/>
+            <a:off x="548640" y="1325880"/>
+            <a:ext cx="11091672" cy="4937760"/>
           </a:xfrm>
           <a:prstGeom prst="roundRect">
             <a:avLst>
@@ -12574,7 +13384,7 @@
         </p:nvSpPr>
         <p:spPr>
           <a:xfrm>
-            <a:off x="594360" y="1508760"/>
+            <a:off x="731520" y="1508760"/>
             <a:ext cx="822960" cy="384048"/>
           </a:xfrm>
           <a:prstGeom prst="roundRect">
@@ -12596,7 +13406,7 @@
         </p:nvSpPr>
         <p:spPr>
           <a:xfrm>
-            <a:off x="594360" y="1508760"/>
+            <a:off x="731520" y="1508760"/>
             <a:ext cx="822960" cy="384048"/>
           </a:xfrm>
           <a:prstGeom prst="rect">
@@ -12635,8 +13445,8 @@
         </p:nvSpPr>
         <p:spPr>
           <a:xfrm>
-            <a:off x="1508760" y="1463040"/>
-            <a:ext cx="10149840" cy="502920"/>
+            <a:off x="1645920" y="1463040"/>
+            <a:ext cx="9857232" cy="502920"/>
           </a:xfrm>
           <a:prstGeom prst="rect">
             <a:avLst/>
@@ -12676,8 +13486,8 @@
         </p:nvSpPr>
         <p:spPr>
           <a:xfrm>
-            <a:off x="640080" y="2057400"/>
-            <a:ext cx="10927080" cy="4069080"/>
+            <a:off x="777240" y="2057400"/>
+            <a:ext cx="10634472" cy="4069080"/>
           </a:xfrm>
           <a:prstGeom prst="rect">
             <a:avLst/>
@@ -12723,6 +13533,54 @@
               <a:t>Trava 2: alerta crítico se o alocado passar do disponível</a:t>
             </a:r>
             <a:endParaRPr lang="en-US" sz="1500" dirty="0"/>
+          </a:p>
+        </p:txBody>
+      </p:sp>
+      <p:sp>
+        <p:nvSpPr>
+          <p:cNvPr id="25" name="Slide Number Placeholder 0"/>
+          <p:cNvSpPr>
+            <a:spLocks noGrp="1"/>
+          </p:cNvSpPr>
+          <p:nvPr>
+            <p:ph type="sldNum" sz="quarter" idx="4294967295"/>
+          </p:nvPr>
+        </p:nvSpPr>
+        <p:spPr>
+          <a:xfrm>
+            <a:off x="11292840" y="6556248"/>
+            <a:ext cx="548640" cy="256032"/>
+          </a:xfrm>
+          <a:prstGeom prst="rect">
+            <a:avLst/>
+          </a:prstGeom>
+          <a:extLst>
+            <a:ext uri="{C572A759-6A51-4108-AA02-DFA0A04FC94B}">
+              <ma14:wrappingTextBoxFlag xmlns:ma14="http://schemas.microsoft.com/office/mac/drawingml/2011/main" val="0"/>
+            </a:ext>
+          </a:extLst>
+        </p:spPr>
+        <p:txBody>
+          <a:bodyPr/>
+          <a:lstStyle>
+            <a:lvl1pPr>
+              <a:defRPr sz="900">
+                <a:solidFill>
+                  <a:srgbClr val="1B3A6B"/>
+                </a:solidFill>
+                <a:latin typeface="Arial"/>
+                <a:ea typeface="Arial"/>
+                <a:cs typeface="Arial"/>
+              </a:defRPr>
+            </a:lvl1pPr>
+          </a:lstStyle>
+          <a:p>
+            <a:pPr algn="r"/>
+            <a:fld id="{F7021451-1387-4CA6-816F-3879F97B5CBC}" type="slidenum">
+              <a:rPr b="1" lang="en-US"/>
+              <a:t>22</a:t>
+            </a:fld>
+            <a:endParaRPr lang="en-US"/>
           </a:p>
         </p:txBody>
       </p:sp>
@@ -12799,7 +13657,7 @@
         </p:blipFill>
         <p:spPr>
           <a:xfrm>
-            <a:off x="411480" y="6547104"/>
+            <a:off x="548640" y="6547104"/>
             <a:ext cx="274320" cy="274320"/>
           </a:xfrm>
           <a:prstGeom prst="rect">
@@ -12815,7 +13673,7 @@
         </p:nvSpPr>
         <p:spPr>
           <a:xfrm>
-            <a:off x="749808" y="6528816"/>
+            <a:off x="886968" y="6528816"/>
             <a:ext cx="6400800" cy="310896"/>
           </a:xfrm>
           <a:prstGeom prst="rect">
@@ -12855,7 +13713,7 @@
         <p:spPr>
           <a:xfrm>
             <a:off x="7132320" y="6528816"/>
-            <a:ext cx="4663440" cy="310896"/>
+            <a:ext cx="4023360" cy="310896"/>
           </a:xfrm>
           <a:prstGeom prst="rect">
             <a:avLst/>
@@ -12893,7 +13751,7 @@
         </p:nvSpPr>
         <p:spPr>
           <a:xfrm>
-            <a:off x="411480" y="384048"/>
+            <a:off x="548640" y="384048"/>
             <a:ext cx="82296" cy="658368"/>
           </a:xfrm>
           <a:prstGeom prst="rect">
@@ -12913,7 +13771,7 @@
         </p:nvSpPr>
         <p:spPr>
           <a:xfrm>
-            <a:off x="640080" y="292608"/>
+            <a:off x="777240" y="292608"/>
             <a:ext cx="10972800" cy="274320"/>
           </a:xfrm>
           <a:prstGeom prst="rect">
@@ -12952,8 +13810,8 @@
         </p:nvSpPr>
         <p:spPr>
           <a:xfrm>
-            <a:off x="640080" y="530352"/>
-            <a:ext cx="11155680" cy="566928"/>
+            <a:off x="777240" y="530352"/>
+            <a:ext cx="10881360" cy="566928"/>
           </a:xfrm>
           <a:prstGeom prst="rect">
             <a:avLst/>
@@ -12993,8 +13851,8 @@
         </p:nvSpPr>
         <p:spPr>
           <a:xfrm>
-            <a:off x="411480" y="1325880"/>
-            <a:ext cx="5577840" cy="2331720"/>
+            <a:off x="548640" y="1325880"/>
+            <a:ext cx="5431536" cy="2331720"/>
           </a:xfrm>
           <a:prstGeom prst="roundRect">
             <a:avLst>
@@ -13027,7 +13885,7 @@
         </p:nvSpPr>
         <p:spPr>
           <a:xfrm>
-            <a:off x="594360" y="1508760"/>
+            <a:off x="731520" y="1508760"/>
             <a:ext cx="457200" cy="457200"/>
           </a:xfrm>
           <a:prstGeom prst="ellipse">
@@ -13047,7 +13905,7 @@
         </p:nvSpPr>
         <p:spPr>
           <a:xfrm>
-            <a:off x="594360" y="1508760"/>
+            <a:off x="731520" y="1508760"/>
             <a:ext cx="457200" cy="457200"/>
           </a:xfrm>
           <a:prstGeom prst="rect">
@@ -13086,8 +13944,8 @@
         </p:nvSpPr>
         <p:spPr>
           <a:xfrm>
-            <a:off x="1188720" y="1435608"/>
-            <a:ext cx="4663440" cy="2112264"/>
+            <a:off x="1325880" y="1435608"/>
+            <a:ext cx="4517136" cy="2112264"/>
           </a:xfrm>
           <a:prstGeom prst="rect">
             <a:avLst/>
@@ -13127,8 +13985,8 @@
         </p:nvSpPr>
         <p:spPr>
           <a:xfrm>
-            <a:off x="6217920" y="1325880"/>
-            <a:ext cx="5577840" cy="2331720"/>
+            <a:off x="6208776" y="1325880"/>
+            <a:ext cx="5431536" cy="2331720"/>
           </a:xfrm>
           <a:prstGeom prst="roundRect">
             <a:avLst>
@@ -13161,7 +14019,7 @@
         </p:nvSpPr>
         <p:spPr>
           <a:xfrm>
-            <a:off x="6400800" y="1508760"/>
+            <a:off x="6391656" y="1508760"/>
             <a:ext cx="457200" cy="457200"/>
           </a:xfrm>
           <a:prstGeom prst="ellipse">
@@ -13181,7 +14039,7 @@
         </p:nvSpPr>
         <p:spPr>
           <a:xfrm>
-            <a:off x="6400800" y="1508760"/>
+            <a:off x="6391656" y="1508760"/>
             <a:ext cx="457200" cy="457200"/>
           </a:xfrm>
           <a:prstGeom prst="rect">
@@ -13220,8 +14078,8 @@
         </p:nvSpPr>
         <p:spPr>
           <a:xfrm>
-            <a:off x="6995160" y="1435608"/>
-            <a:ext cx="4663440" cy="2112264"/>
+            <a:off x="6986016" y="1435608"/>
+            <a:ext cx="4517136" cy="2112264"/>
           </a:xfrm>
           <a:prstGeom prst="rect">
             <a:avLst/>
@@ -13261,8 +14119,8 @@
         </p:nvSpPr>
         <p:spPr>
           <a:xfrm>
-            <a:off x="411480" y="3886200"/>
-            <a:ext cx="5577840" cy="2331720"/>
+            <a:off x="548640" y="3886200"/>
+            <a:ext cx="5431536" cy="2331720"/>
           </a:xfrm>
           <a:prstGeom prst="roundRect">
             <a:avLst>
@@ -13295,7 +14153,7 @@
         </p:nvSpPr>
         <p:spPr>
           <a:xfrm>
-            <a:off x="594360" y="4069080"/>
+            <a:off x="731520" y="4069080"/>
             <a:ext cx="457200" cy="457200"/>
           </a:xfrm>
           <a:prstGeom prst="ellipse">
@@ -13315,7 +14173,7 @@
         </p:nvSpPr>
         <p:spPr>
           <a:xfrm>
-            <a:off x="594360" y="4069080"/>
+            <a:off x="731520" y="4069080"/>
             <a:ext cx="457200" cy="457200"/>
           </a:xfrm>
           <a:prstGeom prst="rect">
@@ -13354,8 +14212,8 @@
         </p:nvSpPr>
         <p:spPr>
           <a:xfrm>
-            <a:off x="1188720" y="3995928"/>
-            <a:ext cx="4663440" cy="2112264"/>
+            <a:off x="1325880" y="3995928"/>
+            <a:ext cx="4517136" cy="2112264"/>
           </a:xfrm>
           <a:prstGeom prst="rect">
             <a:avLst/>
@@ -13395,8 +14253,8 @@
         </p:nvSpPr>
         <p:spPr>
           <a:xfrm>
-            <a:off x="6217920" y="3886200"/>
-            <a:ext cx="5577840" cy="2331720"/>
+            <a:off x="6208776" y="3886200"/>
+            <a:ext cx="5431536" cy="2331720"/>
           </a:xfrm>
           <a:prstGeom prst="roundRect">
             <a:avLst>
@@ -13429,7 +14287,7 @@
         </p:nvSpPr>
         <p:spPr>
           <a:xfrm>
-            <a:off x="6400800" y="4069080"/>
+            <a:off x="6391656" y="4069080"/>
             <a:ext cx="457200" cy="457200"/>
           </a:xfrm>
           <a:prstGeom prst="ellipse">
@@ -13449,7 +14307,7 @@
         </p:nvSpPr>
         <p:spPr>
           <a:xfrm>
-            <a:off x="6400800" y="4069080"/>
+            <a:off x="6391656" y="4069080"/>
             <a:ext cx="457200" cy="457200"/>
           </a:xfrm>
           <a:prstGeom prst="rect">
@@ -13488,8 +14346,8 @@
         </p:nvSpPr>
         <p:spPr>
           <a:xfrm>
-            <a:off x="6995160" y="3995928"/>
-            <a:ext cx="4663440" cy="2112264"/>
+            <a:off x="6986016" y="3995928"/>
+            <a:ext cx="4517136" cy="2112264"/>
           </a:xfrm>
           <a:prstGeom prst="rect">
             <a:avLst/>
@@ -13518,6 +14376,54 @@
               <a:t>reagir à causa da queda</a:t>
             </a:r>
             <a:endParaRPr lang="en-US" sz="1800" dirty="0"/>
+          </a:p>
+        </p:txBody>
+      </p:sp>
+      <p:sp>
+        <p:nvSpPr>
+          <p:cNvPr id="25" name="Slide Number Placeholder 0"/>
+          <p:cNvSpPr>
+            <a:spLocks noGrp="1"/>
+          </p:cNvSpPr>
+          <p:nvPr>
+            <p:ph type="sldNum" sz="quarter" idx="4294967295"/>
+          </p:nvPr>
+        </p:nvSpPr>
+        <p:spPr>
+          <a:xfrm>
+            <a:off x="11292840" y="6556248"/>
+            <a:ext cx="548640" cy="256032"/>
+          </a:xfrm>
+          <a:prstGeom prst="rect">
+            <a:avLst/>
+          </a:prstGeom>
+          <a:extLst>
+            <a:ext uri="{C572A759-6A51-4108-AA02-DFA0A04FC94B}">
+              <ma14:wrappingTextBoxFlag xmlns:ma14="http://schemas.microsoft.com/office/mac/drawingml/2011/main" val="0"/>
+            </a:ext>
+          </a:extLst>
+        </p:spPr>
+        <p:txBody>
+          <a:bodyPr/>
+          <a:lstStyle>
+            <a:lvl1pPr>
+              <a:defRPr sz="900">
+                <a:solidFill>
+                  <a:srgbClr val="1B3A6B"/>
+                </a:solidFill>
+                <a:latin typeface="Arial"/>
+                <a:ea typeface="Arial"/>
+                <a:cs typeface="Arial"/>
+              </a:defRPr>
+            </a:lvl1pPr>
+          </a:lstStyle>
+          <a:p>
+            <a:pPr algn="r"/>
+            <a:fld id="{F7021451-1387-4CA6-816F-3879F97B5CBC}" type="slidenum">
+              <a:rPr b="1" lang="en-US"/>
+              <a:t>23</a:t>
+            </a:fld>
+            <a:endParaRPr lang="en-US"/>
           </a:p>
         </p:txBody>
       </p:sp>
@@ -13581,6 +14487,45 @@
         </p:nvSpPr>
         <p:spPr>
           <a:xfrm>
+            <a:off x="457200" y="548640"/>
+            <a:ext cx="3474720" cy="1737360"/>
+          </a:xfrm>
+          <a:prstGeom prst="rect">
+            <a:avLst/>
+          </a:prstGeom>
+          <a:noFill/>
+          <a:ln/>
+        </p:spPr>
+        <p:txBody>
+          <a:bodyPr wrap="square" rtlCol="0" anchor="ctr"/>
+          <a:lstStyle/>
+          <a:p>
+            <a:pPr indent="0" marL="0">
+              <a:buNone/>
+            </a:pPr>
+            <a:r>
+              <a:rPr lang="en-US" sz="11000" b="1" dirty="0">
+                <a:solidFill>
+                  <a:srgbClr val="11396F"/>
+                </a:solidFill>
+                <a:latin typeface="Arial" pitchFamily="34" charset="0"/>
+                <a:ea typeface="Arial" pitchFamily="34" charset="-122"/>
+                <a:cs typeface="Arial" pitchFamily="34" charset="-120"/>
+              </a:rPr>
+              <a:t>05</a:t>
+            </a:r>
+            <a:endParaRPr lang="en-US" sz="11000" dirty="0"/>
+          </a:p>
+        </p:txBody>
+      </p:sp>
+      <p:sp>
+        <p:nvSpPr>
+          <p:cNvPr id="4" name="Text 2"/>
+          <p:cNvSpPr/>
+          <p:nvPr/>
+        </p:nvSpPr>
+        <p:spPr>
+          <a:xfrm>
             <a:off x="548640" y="2194560"/>
             <a:ext cx="3291840" cy="548640"/>
           </a:xfrm>
@@ -13614,7 +14559,46 @@
       </p:sp>
       <p:sp>
         <p:nvSpPr>
-          <p:cNvPr id="4" name="Text 2"/>
+          <p:cNvPr id="5" name="Text 3"/>
+          <p:cNvSpPr/>
+          <p:nvPr/>
+        </p:nvSpPr>
+        <p:spPr>
+          <a:xfrm>
+            <a:off x="548640" y="3200400"/>
+            <a:ext cx="3383280" cy="457200"/>
+          </a:xfrm>
+          <a:prstGeom prst="rect">
+            <a:avLst/>
+          </a:prstGeom>
+          <a:noFill/>
+          <a:ln/>
+        </p:spPr>
+        <p:txBody>
+          <a:bodyPr wrap="square" rtlCol="0" anchor="ctr"/>
+          <a:lstStyle/>
+          <a:p>
+            <a:pPr indent="0" marL="0">
+              <a:buNone/>
+            </a:pPr>
+            <a:r>
+              <a:rPr lang="en-US" sz="1100" dirty="0">
+                <a:solidFill>
+                  <a:srgbClr val="C7D2E3"/>
+                </a:solidFill>
+                <a:latin typeface="Arial" pitchFamily="34" charset="0"/>
+                <a:ea typeface="Arial" pitchFamily="34" charset="-122"/>
+                <a:cs typeface="Arial" pitchFamily="34" charset="-120"/>
+              </a:rPr>
+              <a:t>M6 · Etapa 3 · Operação ponta a ponta</a:t>
+            </a:r>
+            <a:endParaRPr lang="en-US" sz="1100" dirty="0"/>
+          </a:p>
+        </p:txBody>
+      </p:sp>
+      <p:sp>
+        <p:nvSpPr>
+          <p:cNvPr id="6" name="Text 4"/>
           <p:cNvSpPr/>
           <p:nvPr/>
         </p:nvSpPr>
@@ -13653,7 +14637,7 @@
       </p:sp>
       <p:pic>
         <p:nvPicPr>
-          <p:cNvPr id="5" name="Image 0" descr="/www/wwwroot/rexar/gdsolar/docs/curso/slides/assets/logo-gdsolar.png">    </p:cNvPr>
+          <p:cNvPr id="7" name="Image 0" descr="/www/wwwroot/rexar/gdsolar/docs/curso/slides/assets/logo-gdsolar.png">    </p:cNvPr>
           <p:cNvPicPr>
             <a:picLocks noChangeAspect="1"/>
           </p:cNvPicPr>
@@ -13677,7 +14661,7 @@
       </p:pic>
       <p:sp>
         <p:nvSpPr>
-          <p:cNvPr id="6" name="Text 3"/>
+          <p:cNvPr id="8" name="Text 5"/>
           <p:cNvSpPr/>
           <p:nvPr/>
         </p:nvSpPr>
@@ -13718,7 +14702,7 @@
       </p:sp>
       <p:sp>
         <p:nvSpPr>
-          <p:cNvPr id="7" name="Text 4"/>
+          <p:cNvPr id="9" name="Text 6"/>
           <p:cNvSpPr/>
           <p:nvPr/>
         </p:nvSpPr>
@@ -13759,7 +14743,7 @@
       </p:sp>
       <p:sp>
         <p:nvSpPr>
-          <p:cNvPr id="8" name="Text 5"/>
+          <p:cNvPr id="10" name="Text 7"/>
           <p:cNvSpPr/>
           <p:nvPr/>
         </p:nvSpPr>
@@ -13875,7 +14859,7 @@
         </p:blipFill>
         <p:spPr>
           <a:xfrm>
-            <a:off x="411480" y="6547104"/>
+            <a:off x="548640" y="6547104"/>
             <a:ext cx="274320" cy="274320"/>
           </a:xfrm>
           <a:prstGeom prst="rect">
@@ -13891,7 +14875,7 @@
         </p:nvSpPr>
         <p:spPr>
           <a:xfrm>
-            <a:off x="749808" y="6528816"/>
+            <a:off x="886968" y="6528816"/>
             <a:ext cx="6400800" cy="310896"/>
           </a:xfrm>
           <a:prstGeom prst="rect">
@@ -13931,7 +14915,7 @@
         <p:spPr>
           <a:xfrm>
             <a:off x="7132320" y="6528816"/>
-            <a:ext cx="4663440" cy="310896"/>
+            <a:ext cx="4023360" cy="310896"/>
           </a:xfrm>
           <a:prstGeom prst="rect">
             <a:avLst/>
@@ -13969,7 +14953,7 @@
         </p:nvSpPr>
         <p:spPr>
           <a:xfrm>
-            <a:off x="411480" y="384048"/>
+            <a:off x="548640" y="384048"/>
             <a:ext cx="82296" cy="658368"/>
           </a:xfrm>
           <a:prstGeom prst="rect">
@@ -13989,7 +14973,7 @@
         </p:nvSpPr>
         <p:spPr>
           <a:xfrm>
-            <a:off x="640080" y="292608"/>
+            <a:off x="777240" y="292608"/>
             <a:ext cx="10972800" cy="274320"/>
           </a:xfrm>
           <a:prstGeom prst="rect">
@@ -14028,8 +15012,8 @@
         </p:nvSpPr>
         <p:spPr>
           <a:xfrm>
-            <a:off x="640080" y="530352"/>
-            <a:ext cx="11155680" cy="566928"/>
+            <a:off x="777240" y="530352"/>
+            <a:ext cx="10881360" cy="566928"/>
           </a:xfrm>
           <a:prstGeom prst="rect">
             <a:avLst/>
@@ -14383,6 +15367,54 @@
               <a:t>Aba Acesso → convite por e-mail + link para WhatsApp → cliente cria a senha</a:t>
             </a:r>
             <a:endParaRPr lang="en-US" sz="1500" dirty="0"/>
+          </a:p>
+        </p:txBody>
+      </p:sp>
+      <p:sp>
+        <p:nvSpPr>
+          <p:cNvPr id="25" name="Slide Number Placeholder 0"/>
+          <p:cNvSpPr>
+            <a:spLocks noGrp="1"/>
+          </p:cNvSpPr>
+          <p:nvPr>
+            <p:ph type="sldNum" sz="quarter" idx="4294967295"/>
+          </p:nvPr>
+        </p:nvSpPr>
+        <p:spPr>
+          <a:xfrm>
+            <a:off x="11292840" y="6556248"/>
+            <a:ext cx="548640" cy="256032"/>
+          </a:xfrm>
+          <a:prstGeom prst="rect">
+            <a:avLst/>
+          </a:prstGeom>
+          <a:extLst>
+            <a:ext uri="{C572A759-6A51-4108-AA02-DFA0A04FC94B}">
+              <ma14:wrappingTextBoxFlag xmlns:ma14="http://schemas.microsoft.com/office/mac/drawingml/2011/main" val="0"/>
+            </a:ext>
+          </a:extLst>
+        </p:spPr>
+        <p:txBody>
+          <a:bodyPr/>
+          <a:lstStyle>
+            <a:lvl1pPr>
+              <a:defRPr sz="900">
+                <a:solidFill>
+                  <a:srgbClr val="1B3A6B"/>
+                </a:solidFill>
+                <a:latin typeface="Arial"/>
+                <a:ea typeface="Arial"/>
+                <a:cs typeface="Arial"/>
+              </a:defRPr>
+            </a:lvl1pPr>
+          </a:lstStyle>
+          <a:p>
+            <a:pPr algn="r"/>
+            <a:fld id="{F7021451-1387-4CA6-816F-3879F97B5CBC}" type="slidenum">
+              <a:rPr b="1" lang="en-US"/>
+              <a:t>25</a:t>
+            </a:fld>
+            <a:endParaRPr lang="en-US"/>
           </a:p>
         </p:txBody>
       </p:sp>
@@ -14459,7 +15491,7 @@
         </p:blipFill>
         <p:spPr>
           <a:xfrm>
-            <a:off x="411480" y="6547104"/>
+            <a:off x="548640" y="6547104"/>
             <a:ext cx="274320" cy="274320"/>
           </a:xfrm>
           <a:prstGeom prst="rect">
@@ -14475,7 +15507,7 @@
         </p:nvSpPr>
         <p:spPr>
           <a:xfrm>
-            <a:off x="749808" y="6528816"/>
+            <a:off x="886968" y="6528816"/>
             <a:ext cx="6400800" cy="310896"/>
           </a:xfrm>
           <a:prstGeom prst="rect">
@@ -14515,7 +15547,7 @@
         <p:spPr>
           <a:xfrm>
             <a:off x="7132320" y="6528816"/>
-            <a:ext cx="4663440" cy="310896"/>
+            <a:ext cx="4023360" cy="310896"/>
           </a:xfrm>
           <a:prstGeom prst="rect">
             <a:avLst/>
@@ -14553,7 +15585,7 @@
         </p:nvSpPr>
         <p:spPr>
           <a:xfrm>
-            <a:off x="411480" y="384048"/>
+            <a:off x="548640" y="384048"/>
             <a:ext cx="82296" cy="658368"/>
           </a:xfrm>
           <a:prstGeom prst="rect">
@@ -14573,7 +15605,7 @@
         </p:nvSpPr>
         <p:spPr>
           <a:xfrm>
-            <a:off x="640080" y="292608"/>
+            <a:off x="777240" y="292608"/>
             <a:ext cx="10972800" cy="274320"/>
           </a:xfrm>
           <a:prstGeom prst="rect">
@@ -14612,8 +15644,8 @@
         </p:nvSpPr>
         <p:spPr>
           <a:xfrm>
-            <a:off x="640080" y="530352"/>
-            <a:ext cx="11155680" cy="566928"/>
+            <a:off x="777240" y="530352"/>
+            <a:ext cx="10881360" cy="566928"/>
           </a:xfrm>
           <a:prstGeom prst="rect">
             <a:avLst/>
@@ -14703,6 +15735,54 @@
           </a:prstGeom>
         </p:spPr>
       </p:pic>
+      <p:sp>
+        <p:nvSpPr>
+          <p:cNvPr id="25" name="Slide Number Placeholder 0"/>
+          <p:cNvSpPr>
+            <a:spLocks noGrp="1"/>
+          </p:cNvSpPr>
+          <p:nvPr>
+            <p:ph type="sldNum" sz="quarter" idx="4294967295"/>
+          </p:nvPr>
+        </p:nvSpPr>
+        <p:spPr>
+          <a:xfrm>
+            <a:off x="11292840" y="6556248"/>
+            <a:ext cx="548640" cy="256032"/>
+          </a:xfrm>
+          <a:prstGeom prst="rect">
+            <a:avLst/>
+          </a:prstGeom>
+          <a:extLst>
+            <a:ext uri="{C572A759-6A51-4108-AA02-DFA0A04FC94B}">
+              <ma14:wrappingTextBoxFlag xmlns:ma14="http://schemas.microsoft.com/office/mac/drawingml/2011/main" val="0"/>
+            </a:ext>
+          </a:extLst>
+        </p:spPr>
+        <p:txBody>
+          <a:bodyPr/>
+          <a:lstStyle>
+            <a:lvl1pPr>
+              <a:defRPr sz="900">
+                <a:solidFill>
+                  <a:srgbClr val="1B3A6B"/>
+                </a:solidFill>
+                <a:latin typeface="Arial"/>
+                <a:ea typeface="Arial"/>
+                <a:cs typeface="Arial"/>
+              </a:defRPr>
+            </a:lvl1pPr>
+          </a:lstStyle>
+          <a:p>
+            <a:pPr algn="r"/>
+            <a:fld id="{F7021451-1387-4CA6-816F-3879F97B5CBC}" type="slidenum">
+              <a:rPr b="1" lang="en-US"/>
+              <a:t>26</a:t>
+            </a:fld>
+            <a:endParaRPr lang="en-US"/>
+          </a:p>
+        </p:txBody>
+      </p:sp>
     </p:spTree>
   </p:cSld>
   <p:clrMapOvr>
@@ -14763,6 +15843,45 @@
         </p:nvSpPr>
         <p:spPr>
           <a:xfrm>
+            <a:off x="457200" y="548640"/>
+            <a:ext cx="3474720" cy="1737360"/>
+          </a:xfrm>
+          <a:prstGeom prst="rect">
+            <a:avLst/>
+          </a:prstGeom>
+          <a:noFill/>
+          <a:ln/>
+        </p:spPr>
+        <p:txBody>
+          <a:bodyPr wrap="square" rtlCol="0" anchor="ctr"/>
+          <a:lstStyle/>
+          <a:p>
+            <a:pPr indent="0" marL="0">
+              <a:buNone/>
+            </a:pPr>
+            <a:r>
+              <a:rPr lang="en-US" sz="11000" b="1" dirty="0">
+                <a:solidFill>
+                  <a:srgbClr val="11396F"/>
+                </a:solidFill>
+                <a:latin typeface="Arial" pitchFamily="34" charset="0"/>
+                <a:ea typeface="Arial" pitchFamily="34" charset="-122"/>
+                <a:cs typeface="Arial" pitchFamily="34" charset="-120"/>
+              </a:rPr>
+              <a:t>06</a:t>
+            </a:r>
+            <a:endParaRPr lang="en-US" sz="11000" dirty="0"/>
+          </a:p>
+        </p:txBody>
+      </p:sp>
+      <p:sp>
+        <p:nvSpPr>
+          <p:cNvPr id="4" name="Text 2"/>
+          <p:cNvSpPr/>
+          <p:nvPr/>
+        </p:nvSpPr>
+        <p:spPr>
+          <a:xfrm>
             <a:off x="548640" y="2194560"/>
             <a:ext cx="3291840" cy="548640"/>
           </a:xfrm>
@@ -14796,7 +15915,46 @@
       </p:sp>
       <p:sp>
         <p:nvSpPr>
-          <p:cNvPr id="4" name="Text 2"/>
+          <p:cNvPr id="5" name="Text 3"/>
+          <p:cNvSpPr/>
+          <p:nvPr/>
+        </p:nvSpPr>
+        <p:spPr>
+          <a:xfrm>
+            <a:off x="548640" y="3200400"/>
+            <a:ext cx="3383280" cy="457200"/>
+          </a:xfrm>
+          <a:prstGeom prst="rect">
+            <a:avLst/>
+          </a:prstGeom>
+          <a:noFill/>
+          <a:ln/>
+        </p:spPr>
+        <p:txBody>
+          <a:bodyPr wrap="square" rtlCol="0" anchor="ctr"/>
+          <a:lstStyle/>
+          <a:p>
+            <a:pPr indent="0" marL="0">
+              <a:buNone/>
+            </a:pPr>
+            <a:r>
+              <a:rPr lang="en-US" sz="1100" dirty="0">
+                <a:solidFill>
+                  <a:srgbClr val="C7D2E3"/>
+                </a:solidFill>
+                <a:latin typeface="Arial" pitchFamily="34" charset="0"/>
+                <a:ea typeface="Arial" pitchFamily="34" charset="-122"/>
+                <a:cs typeface="Arial" pitchFamily="34" charset="-120"/>
+              </a:rPr>
+              <a:t>M6 · Etapa 3 · Operação ponta a ponta</a:t>
+            </a:r>
+            <a:endParaRPr lang="en-US" sz="1100" dirty="0"/>
+          </a:p>
+        </p:txBody>
+      </p:sp>
+      <p:sp>
+        <p:nvSpPr>
+          <p:cNvPr id="6" name="Text 4"/>
           <p:cNvSpPr/>
           <p:nvPr/>
         </p:nvSpPr>
@@ -14835,7 +15993,7 @@
       </p:sp>
       <p:pic>
         <p:nvPicPr>
-          <p:cNvPr id="5" name="Image 0" descr="/www/wwwroot/rexar/gdsolar/docs/curso/slides/assets/logo-gdsolar.png">    </p:cNvPr>
+          <p:cNvPr id="7" name="Image 0" descr="/www/wwwroot/rexar/gdsolar/docs/curso/slides/assets/logo-gdsolar.png">    </p:cNvPr>
           <p:cNvPicPr>
             <a:picLocks noChangeAspect="1"/>
           </p:cNvPicPr>
@@ -14859,7 +16017,7 @@
       </p:pic>
       <p:sp>
         <p:nvSpPr>
-          <p:cNvPr id="6" name="Text 3"/>
+          <p:cNvPr id="8" name="Text 5"/>
           <p:cNvSpPr/>
           <p:nvPr/>
         </p:nvSpPr>
@@ -14900,7 +16058,7 @@
       </p:sp>
       <p:sp>
         <p:nvSpPr>
-          <p:cNvPr id="7" name="Text 4"/>
+          <p:cNvPr id="9" name="Text 6"/>
           <p:cNvSpPr/>
           <p:nvPr/>
         </p:nvSpPr>
@@ -14941,7 +16099,7 @@
       </p:sp>
       <p:sp>
         <p:nvSpPr>
-          <p:cNvPr id="8" name="Text 5"/>
+          <p:cNvPr id="10" name="Text 7"/>
           <p:cNvSpPr/>
           <p:nvPr/>
         </p:nvSpPr>
@@ -15057,7 +16215,7 @@
         </p:blipFill>
         <p:spPr>
           <a:xfrm>
-            <a:off x="411480" y="6547104"/>
+            <a:off x="548640" y="6547104"/>
             <a:ext cx="274320" cy="274320"/>
           </a:xfrm>
           <a:prstGeom prst="rect">
@@ -15073,7 +16231,7 @@
         </p:nvSpPr>
         <p:spPr>
           <a:xfrm>
-            <a:off x="749808" y="6528816"/>
+            <a:off x="886968" y="6528816"/>
             <a:ext cx="6400800" cy="310896"/>
           </a:xfrm>
           <a:prstGeom prst="rect">
@@ -15113,7 +16271,7 @@
         <p:spPr>
           <a:xfrm>
             <a:off x="7132320" y="6528816"/>
-            <a:ext cx="4663440" cy="310896"/>
+            <a:ext cx="4023360" cy="310896"/>
           </a:xfrm>
           <a:prstGeom prst="rect">
             <a:avLst/>
@@ -15151,7 +16309,7 @@
         </p:nvSpPr>
         <p:spPr>
           <a:xfrm>
-            <a:off x="411480" y="384048"/>
+            <a:off x="548640" y="384048"/>
             <a:ext cx="82296" cy="658368"/>
           </a:xfrm>
           <a:prstGeom prst="rect">
@@ -15171,7 +16329,7 @@
         </p:nvSpPr>
         <p:spPr>
           <a:xfrm>
-            <a:off x="640080" y="292608"/>
+            <a:off x="777240" y="292608"/>
             <a:ext cx="10972800" cy="274320"/>
           </a:xfrm>
           <a:prstGeom prst="rect">
@@ -15210,8 +16368,8 @@
         </p:nvSpPr>
         <p:spPr>
           <a:xfrm>
-            <a:off x="640080" y="530352"/>
-            <a:ext cx="11155680" cy="566928"/>
+            <a:off x="777240" y="530352"/>
+            <a:ext cx="10881360" cy="566928"/>
           </a:xfrm>
           <a:prstGeom prst="rect">
             <a:avLst/>
@@ -15565,6 +16723,54 @@
               <a:t>Trava 2: disponível &lt; alocada → alerta crítico (Escanear Agora)</a:t>
             </a:r>
             <a:endParaRPr lang="en-US" sz="1500" dirty="0"/>
+          </a:p>
+        </p:txBody>
+      </p:sp>
+      <p:sp>
+        <p:nvSpPr>
+          <p:cNvPr id="25" name="Slide Number Placeholder 0"/>
+          <p:cNvSpPr>
+            <a:spLocks noGrp="1"/>
+          </p:cNvSpPr>
+          <p:nvPr>
+            <p:ph type="sldNum" sz="quarter" idx="4294967295"/>
+          </p:nvPr>
+        </p:nvSpPr>
+        <p:spPr>
+          <a:xfrm>
+            <a:off x="11292840" y="6556248"/>
+            <a:ext cx="548640" cy="256032"/>
+          </a:xfrm>
+          <a:prstGeom prst="rect">
+            <a:avLst/>
+          </a:prstGeom>
+          <a:extLst>
+            <a:ext uri="{C572A759-6A51-4108-AA02-DFA0A04FC94B}">
+              <ma14:wrappingTextBoxFlag xmlns:ma14="http://schemas.microsoft.com/office/mac/drawingml/2011/main" val="0"/>
+            </a:ext>
+          </a:extLst>
+        </p:spPr>
+        <p:txBody>
+          <a:bodyPr/>
+          <a:lstStyle>
+            <a:lvl1pPr>
+              <a:defRPr sz="900">
+                <a:solidFill>
+                  <a:srgbClr val="1B3A6B"/>
+                </a:solidFill>
+                <a:latin typeface="Arial"/>
+                <a:ea typeface="Arial"/>
+                <a:cs typeface="Arial"/>
+              </a:defRPr>
+            </a:lvl1pPr>
+          </a:lstStyle>
+          <a:p>
+            <a:pPr algn="r"/>
+            <a:fld id="{F7021451-1387-4CA6-816F-3879F97B5CBC}" type="slidenum">
+              <a:rPr b="1" lang="en-US"/>
+              <a:t>28</a:t>
+            </a:fld>
+            <a:endParaRPr lang="en-US"/>
           </a:p>
         </p:txBody>
       </p:sp>
@@ -15641,7 +16847,7 @@
         </p:blipFill>
         <p:spPr>
           <a:xfrm>
-            <a:off x="411480" y="6547104"/>
+            <a:off x="548640" y="6547104"/>
             <a:ext cx="274320" cy="274320"/>
           </a:xfrm>
           <a:prstGeom prst="rect">
@@ -15657,7 +16863,7 @@
         </p:nvSpPr>
         <p:spPr>
           <a:xfrm>
-            <a:off x="749808" y="6528816"/>
+            <a:off x="886968" y="6528816"/>
             <a:ext cx="6400800" cy="310896"/>
           </a:xfrm>
           <a:prstGeom prst="rect">
@@ -15697,7 +16903,7 @@
         <p:spPr>
           <a:xfrm>
             <a:off x="7132320" y="6528816"/>
-            <a:ext cx="4663440" cy="310896"/>
+            <a:ext cx="4023360" cy="310896"/>
           </a:xfrm>
           <a:prstGeom prst="rect">
             <a:avLst/>
@@ -15735,7 +16941,7 @@
         </p:nvSpPr>
         <p:spPr>
           <a:xfrm>
-            <a:off x="411480" y="384048"/>
+            <a:off x="548640" y="384048"/>
             <a:ext cx="82296" cy="658368"/>
           </a:xfrm>
           <a:prstGeom prst="rect">
@@ -15755,7 +16961,7 @@
         </p:nvSpPr>
         <p:spPr>
           <a:xfrm>
-            <a:off x="640080" y="292608"/>
+            <a:off x="777240" y="292608"/>
             <a:ext cx="10972800" cy="274320"/>
           </a:xfrm>
           <a:prstGeom prst="rect">
@@ -15794,8 +17000,8 @@
         </p:nvSpPr>
         <p:spPr>
           <a:xfrm>
-            <a:off x="640080" y="530352"/>
-            <a:ext cx="11155680" cy="566928"/>
+            <a:off x="777240" y="530352"/>
+            <a:ext cx="10881360" cy="566928"/>
           </a:xfrm>
           <a:prstGeom prst="rect">
             <a:avLst/>
@@ -15996,6 +17202,54 @@
               <a:t>Resolva a causa → nova varredura → o alerta se resolve sozinho</a:t>
             </a:r>
             <a:endParaRPr lang="en-US" sz="1500" dirty="0"/>
+          </a:p>
+        </p:txBody>
+      </p:sp>
+      <p:sp>
+        <p:nvSpPr>
+          <p:cNvPr id="25" name="Slide Number Placeholder 0"/>
+          <p:cNvSpPr>
+            <a:spLocks noGrp="1"/>
+          </p:cNvSpPr>
+          <p:nvPr>
+            <p:ph type="sldNum" sz="quarter" idx="4294967295"/>
+          </p:nvPr>
+        </p:nvSpPr>
+        <p:spPr>
+          <a:xfrm>
+            <a:off x="11292840" y="6556248"/>
+            <a:ext cx="548640" cy="256032"/>
+          </a:xfrm>
+          <a:prstGeom prst="rect">
+            <a:avLst/>
+          </a:prstGeom>
+          <a:extLst>
+            <a:ext uri="{C572A759-6A51-4108-AA02-DFA0A04FC94B}">
+              <ma14:wrappingTextBoxFlag xmlns:ma14="http://schemas.microsoft.com/office/mac/drawingml/2011/main" val="0"/>
+            </a:ext>
+          </a:extLst>
+        </p:spPr>
+        <p:txBody>
+          <a:bodyPr/>
+          <a:lstStyle>
+            <a:lvl1pPr>
+              <a:defRPr sz="900">
+                <a:solidFill>
+                  <a:srgbClr val="1B3A6B"/>
+                </a:solidFill>
+                <a:latin typeface="Arial"/>
+                <a:ea typeface="Arial"/>
+                <a:cs typeface="Arial"/>
+              </a:defRPr>
+            </a:lvl1pPr>
+          </a:lstStyle>
+          <a:p>
+            <a:pPr algn="r"/>
+            <a:fld id="{F7021451-1387-4CA6-816F-3879F97B5CBC}" type="slidenum">
+              <a:rPr b="1" lang="en-US"/>
+              <a:t>29</a:t>
+            </a:fld>
+            <a:endParaRPr lang="en-US"/>
           </a:p>
         </p:txBody>
       </p:sp>
@@ -16072,7 +17326,7 @@
         </p:blipFill>
         <p:spPr>
           <a:xfrm>
-            <a:off x="411480" y="6547104"/>
+            <a:off x="548640" y="6547104"/>
             <a:ext cx="274320" cy="274320"/>
           </a:xfrm>
           <a:prstGeom prst="rect">
@@ -16088,7 +17342,7 @@
         </p:nvSpPr>
         <p:spPr>
           <a:xfrm>
-            <a:off x="749808" y="6528816"/>
+            <a:off x="886968" y="6528816"/>
             <a:ext cx="6400800" cy="310896"/>
           </a:xfrm>
           <a:prstGeom prst="rect">
@@ -16128,7 +17382,7 @@
         <p:spPr>
           <a:xfrm>
             <a:off x="7132320" y="6528816"/>
-            <a:ext cx="4663440" cy="310896"/>
+            <a:ext cx="4023360" cy="310896"/>
           </a:xfrm>
           <a:prstGeom prst="rect">
             <a:avLst/>
@@ -16166,7 +17420,7 @@
         </p:nvSpPr>
         <p:spPr>
           <a:xfrm>
-            <a:off x="411480" y="384048"/>
+            <a:off x="548640" y="384048"/>
             <a:ext cx="82296" cy="658368"/>
           </a:xfrm>
           <a:prstGeom prst="rect">
@@ -16186,7 +17440,7 @@
         </p:nvSpPr>
         <p:spPr>
           <a:xfrm>
-            <a:off x="640080" y="292608"/>
+            <a:off x="777240" y="292608"/>
             <a:ext cx="10972800" cy="274320"/>
           </a:xfrm>
           <a:prstGeom prst="rect">
@@ -16225,8 +17479,8 @@
         </p:nvSpPr>
         <p:spPr>
           <a:xfrm>
-            <a:off x="640080" y="530352"/>
-            <a:ext cx="11155680" cy="566928"/>
+            <a:off x="777240" y="530352"/>
+            <a:ext cx="10881360" cy="566928"/>
           </a:xfrm>
           <a:prstGeom prst="rect">
             <a:avLst/>
@@ -16266,8 +17520,8 @@
         </p:nvSpPr>
         <p:spPr>
           <a:xfrm>
-            <a:off x="411480" y="1325880"/>
-            <a:ext cx="11384280" cy="4892040"/>
+            <a:off x="548640" y="1325880"/>
+            <a:ext cx="11091672" cy="4892040"/>
           </a:xfrm>
           <a:prstGeom prst="roundRect">
             <a:avLst>
@@ -16300,7 +17554,7 @@
         </p:nvSpPr>
         <p:spPr>
           <a:xfrm>
-            <a:off x="594360" y="1508760"/>
+            <a:off x="731520" y="1508760"/>
             <a:ext cx="457200" cy="457200"/>
           </a:xfrm>
           <a:prstGeom prst="ellipse">
@@ -16320,7 +17574,7 @@
         </p:nvSpPr>
         <p:spPr>
           <a:xfrm>
-            <a:off x="594360" y="1508760"/>
+            <a:off x="731520" y="1508760"/>
             <a:ext cx="457200" cy="457200"/>
           </a:xfrm>
           <a:prstGeom prst="rect">
@@ -16359,8 +17613,8 @@
         </p:nvSpPr>
         <p:spPr>
           <a:xfrm>
-            <a:off x="1188720" y="1435608"/>
-            <a:ext cx="10469880" cy="4672584"/>
+            <a:off x="1325880" y="1435608"/>
+            <a:ext cx="10177272" cy="4672584"/>
           </a:xfrm>
           <a:prstGeom prst="rect">
             <a:avLst/>
@@ -16389,6 +17643,54 @@
               <a:t>Contrato do cliente = adesão à entidade + regras da participação + gestão</a:t>
             </a:r>
             <a:endParaRPr lang="en-US" sz="1800" dirty="0"/>
+          </a:p>
+        </p:txBody>
+      </p:sp>
+      <p:sp>
+        <p:nvSpPr>
+          <p:cNvPr id="25" name="Slide Number Placeholder 0"/>
+          <p:cNvSpPr>
+            <a:spLocks noGrp="1"/>
+          </p:cNvSpPr>
+          <p:nvPr>
+            <p:ph type="sldNum" sz="quarter" idx="4294967295"/>
+          </p:nvPr>
+        </p:nvSpPr>
+        <p:spPr>
+          <a:xfrm>
+            <a:off x="11292840" y="6556248"/>
+            <a:ext cx="548640" cy="256032"/>
+          </a:xfrm>
+          <a:prstGeom prst="rect">
+            <a:avLst/>
+          </a:prstGeom>
+          <a:extLst>
+            <a:ext uri="{C572A759-6A51-4108-AA02-DFA0A04FC94B}">
+              <ma14:wrappingTextBoxFlag xmlns:ma14="http://schemas.microsoft.com/office/mac/drawingml/2011/main" val="0"/>
+            </a:ext>
+          </a:extLst>
+        </p:spPr>
+        <p:txBody>
+          <a:bodyPr/>
+          <a:lstStyle>
+            <a:lvl1pPr>
+              <a:defRPr sz="900">
+                <a:solidFill>
+                  <a:srgbClr val="1B3A6B"/>
+                </a:solidFill>
+                <a:latin typeface="Arial"/>
+                <a:ea typeface="Arial"/>
+                <a:cs typeface="Arial"/>
+              </a:defRPr>
+            </a:lvl1pPr>
+          </a:lstStyle>
+          <a:p>
+            <a:pPr algn="r"/>
+            <a:fld id="{F7021451-1387-4CA6-816F-3879F97B5CBC}" type="slidenum">
+              <a:rPr b="1" lang="en-US"/>
+              <a:t>3</a:t>
+            </a:fld>
+            <a:endParaRPr lang="en-US"/>
           </a:p>
         </p:txBody>
       </p:sp>
@@ -16465,7 +17767,7 @@
         </p:blipFill>
         <p:spPr>
           <a:xfrm>
-            <a:off x="411480" y="6547104"/>
+            <a:off x="548640" y="6547104"/>
             <a:ext cx="274320" cy="274320"/>
           </a:xfrm>
           <a:prstGeom prst="rect">
@@ -16481,7 +17783,7 @@
         </p:nvSpPr>
         <p:spPr>
           <a:xfrm>
-            <a:off x="749808" y="6528816"/>
+            <a:off x="886968" y="6528816"/>
             <a:ext cx="6400800" cy="310896"/>
           </a:xfrm>
           <a:prstGeom prst="rect">
@@ -16521,7 +17823,7 @@
         <p:spPr>
           <a:xfrm>
             <a:off x="7132320" y="6528816"/>
-            <a:ext cx="4663440" cy="310896"/>
+            <a:ext cx="4023360" cy="310896"/>
           </a:xfrm>
           <a:prstGeom prst="rect">
             <a:avLst/>
@@ -16559,7 +17861,7 @@
         </p:nvSpPr>
         <p:spPr>
           <a:xfrm>
-            <a:off x="411480" y="384048"/>
+            <a:off x="548640" y="384048"/>
             <a:ext cx="82296" cy="658368"/>
           </a:xfrm>
           <a:prstGeom prst="rect">
@@ -16579,7 +17881,7 @@
         </p:nvSpPr>
         <p:spPr>
           <a:xfrm>
-            <a:off x="640080" y="292608"/>
+            <a:off x="777240" y="292608"/>
             <a:ext cx="10972800" cy="274320"/>
           </a:xfrm>
           <a:prstGeom prst="rect">
@@ -16618,8 +17920,8 @@
         </p:nvSpPr>
         <p:spPr>
           <a:xfrm>
-            <a:off x="640080" y="530352"/>
-            <a:ext cx="11155680" cy="566928"/>
+            <a:off x="777240" y="530352"/>
+            <a:ext cx="10881360" cy="566928"/>
           </a:xfrm>
           <a:prstGeom prst="rect">
             <a:avLst/>
@@ -16659,8 +17961,8 @@
         </p:nvSpPr>
         <p:spPr>
           <a:xfrm>
-            <a:off x="411480" y="1325880"/>
-            <a:ext cx="5577840" cy="411480"/>
+            <a:off x="548640" y="1325880"/>
+            <a:ext cx="5394960" cy="411480"/>
           </a:xfrm>
           <a:prstGeom prst="rect">
             <a:avLst/>
@@ -16698,8 +18000,8 @@
         </p:nvSpPr>
         <p:spPr>
           <a:xfrm>
-            <a:off x="411480" y="1783080"/>
-            <a:ext cx="5577840" cy="4480560"/>
+            <a:off x="548640" y="1783080"/>
+            <a:ext cx="5394960" cy="4480560"/>
           </a:xfrm>
           <a:prstGeom prst="rect">
             <a:avLst/>
@@ -16782,8 +18084,8 @@
         </p:nvSpPr>
         <p:spPr>
           <a:xfrm>
-            <a:off x="6309360" y="1325880"/>
-            <a:ext cx="5486400" cy="4937760"/>
+            <a:off x="6172200" y="1325880"/>
+            <a:ext cx="5468112" cy="4937760"/>
           </a:xfrm>
           <a:prstGeom prst="roundRect">
             <a:avLst>
@@ -16804,8 +18106,8 @@
         </p:nvSpPr>
         <p:spPr>
           <a:xfrm>
-            <a:off x="6629400" y="1554480"/>
-            <a:ext cx="4846320" cy="4480560"/>
+            <a:off x="6492240" y="1554480"/>
+            <a:ext cx="4828032" cy="4480560"/>
           </a:xfrm>
           <a:prstGeom prst="rect">
             <a:avLst/>
@@ -16849,6 +18151,54 @@
               <a:t>Usina alocada: os 5 clientes do M5 com contrato emitido, vínculo com a usina e convite enviado, mais 10 clientes adicionais (carregados pelo "checkpoint do M6" do laboratório ou cadastrados manualmente) até ocupar 90–98% da energia disponível, com nenhum cliente acima de 25% e a planilha de rateio pronta para a distribuidora.</a:t>
             </a:r>
             <a:endParaRPr lang="en-US" sz="1300" dirty="0"/>
+          </a:p>
+        </p:txBody>
+      </p:sp>
+      <p:sp>
+        <p:nvSpPr>
+          <p:cNvPr id="25" name="Slide Number Placeholder 0"/>
+          <p:cNvSpPr>
+            <a:spLocks noGrp="1"/>
+          </p:cNvSpPr>
+          <p:nvPr>
+            <p:ph type="sldNum" sz="quarter" idx="4294967295"/>
+          </p:nvPr>
+        </p:nvSpPr>
+        <p:spPr>
+          <a:xfrm>
+            <a:off x="11292840" y="6556248"/>
+            <a:ext cx="548640" cy="256032"/>
+          </a:xfrm>
+          <a:prstGeom prst="rect">
+            <a:avLst/>
+          </a:prstGeom>
+          <a:extLst>
+            <a:ext uri="{C572A759-6A51-4108-AA02-DFA0A04FC94B}">
+              <ma14:wrappingTextBoxFlag xmlns:ma14="http://schemas.microsoft.com/office/mac/drawingml/2011/main" val="0"/>
+            </a:ext>
+          </a:extLst>
+        </p:spPr>
+        <p:txBody>
+          <a:bodyPr/>
+          <a:lstStyle>
+            <a:lvl1pPr>
+              <a:defRPr sz="900">
+                <a:solidFill>
+                  <a:srgbClr val="1B3A6B"/>
+                </a:solidFill>
+                <a:latin typeface="Arial"/>
+                <a:ea typeface="Arial"/>
+                <a:cs typeface="Arial"/>
+              </a:defRPr>
+            </a:lvl1pPr>
+          </a:lstStyle>
+          <a:p>
+            <a:pPr algn="r"/>
+            <a:fld id="{F7021451-1387-4CA6-816F-3879F97B5CBC}" type="slidenum">
+              <a:rPr b="1" lang="en-US"/>
+              <a:t>30</a:t>
+            </a:fld>
+            <a:endParaRPr lang="en-US"/>
           </a:p>
         </p:txBody>
       </p:sp>
@@ -16925,7 +18275,7 @@
         </p:blipFill>
         <p:spPr>
           <a:xfrm>
-            <a:off x="411480" y="6547104"/>
+            <a:off x="548640" y="6547104"/>
             <a:ext cx="274320" cy="274320"/>
           </a:xfrm>
           <a:prstGeom prst="rect">
@@ -16941,7 +18291,7 @@
         </p:nvSpPr>
         <p:spPr>
           <a:xfrm>
-            <a:off x="749808" y="6528816"/>
+            <a:off x="886968" y="6528816"/>
             <a:ext cx="6400800" cy="310896"/>
           </a:xfrm>
           <a:prstGeom prst="rect">
@@ -16981,7 +18331,7 @@
         <p:spPr>
           <a:xfrm>
             <a:off x="7132320" y="6528816"/>
-            <a:ext cx="4663440" cy="310896"/>
+            <a:ext cx="4023360" cy="310896"/>
           </a:xfrm>
           <a:prstGeom prst="rect">
             <a:avLst/>
@@ -17019,7 +18369,7 @@
         </p:nvSpPr>
         <p:spPr>
           <a:xfrm>
-            <a:off x="411480" y="384048"/>
+            <a:off x="548640" y="384048"/>
             <a:ext cx="82296" cy="658368"/>
           </a:xfrm>
           <a:prstGeom prst="rect">
@@ -17039,7 +18389,7 @@
         </p:nvSpPr>
         <p:spPr>
           <a:xfrm>
-            <a:off x="640080" y="292608"/>
+            <a:off x="777240" y="292608"/>
             <a:ext cx="10972800" cy="274320"/>
           </a:xfrm>
           <a:prstGeom prst="rect">
@@ -17078,8 +18428,8 @@
         </p:nvSpPr>
         <p:spPr>
           <a:xfrm>
-            <a:off x="640080" y="530352"/>
-            <a:ext cx="11155680" cy="566928"/>
+            <a:off x="777240" y="530352"/>
+            <a:ext cx="10881360" cy="566928"/>
           </a:xfrm>
           <a:prstGeom prst="rect">
             <a:avLst/>
@@ -17120,7 +18470,7 @@
         <p:spPr>
           <a:xfrm>
             <a:off x="548640" y="1325880"/>
-            <a:ext cx="11155680" cy="4937760"/>
+            <a:ext cx="5486400" cy="4937760"/>
           </a:xfrm>
           <a:prstGeom prst="rect">
             <a:avLst/>
@@ -17141,7 +18491,7 @@
               <a:buNone/>
             </a:pPr>
             <a:r>
-              <a:rPr lang="en-US" sz="1200" dirty="0">
+              <a:rPr lang="en-US" sz="1800" dirty="0">
                 <a:solidFill>
                   <a:srgbClr val="1F2937"/>
                 </a:solidFill>
@@ -17151,7 +18501,7 @@
               </a:rPr>
               <a:t>1. Objeto e unidade(s) consumidora(s)</a:t>
             </a:r>
-            <a:endParaRPr lang="en-US" sz="1200" dirty="0"/>
+            <a:endParaRPr lang="en-US" sz="1800" dirty="0"/>
           </a:p>
           <a:p>
             <a:pPr indent="0" marL="0">
@@ -17161,7 +18511,7 @@
               <a:buNone/>
             </a:pPr>
             <a:r>
-              <a:rPr lang="en-US" sz="1200" dirty="0">
+              <a:rPr lang="en-US" sz="1800" dirty="0">
                 <a:solidFill>
                   <a:srgbClr val="1F2937"/>
                 </a:solidFill>
@@ -17171,7 +18521,7 @@
               </a:rPr>
               <a:t>2. Cota/percentual e início previsto dos créditos</a:t>
             </a:r>
-            <a:endParaRPr lang="en-US" sz="1200" dirty="0"/>
+            <a:endParaRPr lang="en-US" sz="1800" dirty="0"/>
           </a:p>
           <a:p>
             <a:pPr indent="0" marL="0">
@@ -17181,7 +18531,7 @@
               <a:buNone/>
             </a:pPr>
             <a:r>
-              <a:rPr lang="en-US" sz="1200" dirty="0">
+              <a:rPr lang="en-US" sz="1800" dirty="0">
                 <a:solidFill>
                   <a:srgbClr val="1F2937"/>
                 </a:solidFill>
@@ -17191,7 +18541,7 @@
               </a:rPr>
               <a:t>3. Cálculo mensal do valor (energia compensada × (1 − desconto))</a:t>
             </a:r>
-            <a:endParaRPr lang="en-US" sz="1200" dirty="0"/>
+            <a:endParaRPr lang="en-US" sz="1800" dirty="0"/>
           </a:p>
           <a:p>
             <a:pPr indent="0" marL="0">
@@ -17201,7 +18551,7 @@
               <a:buNone/>
             </a:pPr>
             <a:r>
-              <a:rPr lang="en-US" sz="1200" dirty="0">
+              <a:rPr lang="en-US" sz="1800" dirty="0">
                 <a:solidFill>
                   <a:srgbClr val="1F2937"/>
                 </a:solidFill>
@@ -17211,7 +18561,7 @@
               </a:rPr>
               <a:t>4. Vencimento, meios de pagamento, atraso (multa e juros legais)</a:t>
             </a:r>
-            <a:endParaRPr lang="en-US" sz="1200" dirty="0"/>
+            <a:endParaRPr lang="en-US" sz="1800" dirty="0"/>
           </a:p>
           <a:p>
             <a:pPr indent="0" marL="0">
@@ -17221,7 +18571,7 @@
               <a:buNone/>
             </a:pPr>
             <a:r>
-              <a:rPr lang="en-US" sz="1200" dirty="0">
+              <a:rPr lang="en-US" sz="1800" dirty="0">
                 <a:solidFill>
                   <a:srgbClr val="1F2937"/>
                 </a:solidFill>
@@ -17231,8 +18581,32 @@
               </a:rPr>
               <a:t>5. Prazo, renovação e cancelamento (aviso prévio)</a:t>
             </a:r>
-            <a:endParaRPr lang="en-US" sz="1200" dirty="0"/>
-          </a:p>
+            <a:endParaRPr lang="en-US" sz="1800" dirty="0"/>
+          </a:p>
+        </p:txBody>
+      </p:sp>
+      <p:sp>
+        <p:nvSpPr>
+          <p:cNvPr id="10" name="Text 7"/>
+          <p:cNvSpPr/>
+          <p:nvPr/>
+        </p:nvSpPr>
+        <p:spPr>
+          <a:xfrm>
+            <a:off x="6263640" y="1325880"/>
+            <a:ext cx="5486400" cy="4937760"/>
+          </a:xfrm>
+          <a:prstGeom prst="rect">
+            <a:avLst/>
+          </a:prstGeom>
+          <a:noFill/>
+          <a:ln/>
+        </p:spPr>
+        <p:txBody>
+          <a:bodyPr wrap="square" rtlCol="0" anchor="t">
+            <a:normAutofit/>
+          </a:bodyPr>
+          <a:lstStyle/>
           <a:p>
             <a:pPr indent="0" marL="0">
               <a:spcAft>
@@ -17241,7 +18615,7 @@
               <a:buNone/>
             </a:pPr>
             <a:r>
-              <a:rPr lang="en-US" sz="1200" dirty="0">
+              <a:rPr lang="en-US" sz="1800" dirty="0">
                 <a:solidFill>
                   <a:srgbClr val="1F2937"/>
                 </a:solidFill>
@@ -17251,7 +18625,7 @@
               </a:rPr>
               <a:t>6. Mudança de endereço/titularidade</a:t>
             </a:r>
-            <a:endParaRPr lang="en-US" sz="1200" dirty="0"/>
+            <a:endParaRPr lang="en-US" sz="1800" dirty="0"/>
           </a:p>
           <a:p>
             <a:pPr indent="0" marL="0">
@@ -17261,7 +18635,7 @@
               <a:buNone/>
             </a:pPr>
             <a:r>
-              <a:rPr lang="en-US" sz="1200" dirty="0">
+              <a:rPr lang="en-US" sz="1800" dirty="0">
                 <a:solidFill>
                   <a:srgbClr val="1F2937"/>
                 </a:solidFill>
@@ -17271,7 +18645,7 @@
               </a:rPr>
               <a:t>7. Variação de geração (nunca paga o que não recebeu)</a:t>
             </a:r>
-            <a:endParaRPr lang="en-US" sz="1200" dirty="0"/>
+            <a:endParaRPr lang="en-US" sz="1800" dirty="0"/>
           </a:p>
           <a:p>
             <a:pPr indent="0" marL="0">
@@ -17281,7 +18655,7 @@
               <a:buNone/>
             </a:pPr>
             <a:r>
-              <a:rPr lang="en-US" sz="1200" dirty="0">
+              <a:rPr lang="en-US" sz="1800" dirty="0">
                 <a:solidFill>
                   <a:srgbClr val="1F2937"/>
                 </a:solidFill>
@@ -17291,7 +18665,7 @@
               </a:rPr>
               <a:t>8. Reajuste e reequilíbrio regulatório</a:t>
             </a:r>
-            <a:endParaRPr lang="en-US" sz="1200" dirty="0"/>
+            <a:endParaRPr lang="en-US" sz="1800" dirty="0"/>
           </a:p>
           <a:p>
             <a:pPr indent="0" marL="0">
@@ -17301,7 +18675,7 @@
               <a:buNone/>
             </a:pPr>
             <a:r>
-              <a:rPr lang="en-US" sz="1200" dirty="0">
+              <a:rPr lang="en-US" sz="1800" dirty="0">
                 <a:solidFill>
                   <a:srgbClr val="1F2937"/>
                 </a:solidFill>
@@ -17311,7 +18685,7 @@
               </a:rPr>
               <a:t>9. Obrigações do cliente (manter titularidade, informar mudanças, enviar faturas se preciso)</a:t>
             </a:r>
-            <a:endParaRPr lang="en-US" sz="1200" dirty="0"/>
+            <a:endParaRPr lang="en-US" sz="1800" dirty="0"/>
           </a:p>
           <a:p>
             <a:pPr indent="0" marL="0">
@@ -17321,7 +18695,7 @@
               <a:buNone/>
             </a:pPr>
             <a:r>
-              <a:rPr lang="en-US" sz="1200" dirty="0">
+              <a:rPr lang="en-US" sz="1800" dirty="0">
                 <a:solidFill>
                   <a:srgbClr val="1F2937"/>
                 </a:solidFill>
@@ -17331,7 +18705,55 @@
               </a:rPr>
               <a:t>10. Dados pessoais (LGPD) e comunicação</a:t>
             </a:r>
-            <a:endParaRPr lang="en-US" sz="1200" dirty="0"/>
+            <a:endParaRPr lang="en-US" sz="1800" dirty="0"/>
+          </a:p>
+        </p:txBody>
+      </p:sp>
+      <p:sp>
+        <p:nvSpPr>
+          <p:cNvPr id="25" name="Slide Number Placeholder 0"/>
+          <p:cNvSpPr>
+            <a:spLocks noGrp="1"/>
+          </p:cNvSpPr>
+          <p:nvPr>
+            <p:ph type="sldNum" sz="quarter" idx="4294967295"/>
+          </p:nvPr>
+        </p:nvSpPr>
+        <p:spPr>
+          <a:xfrm>
+            <a:off x="11292840" y="6556248"/>
+            <a:ext cx="548640" cy="256032"/>
+          </a:xfrm>
+          <a:prstGeom prst="rect">
+            <a:avLst/>
+          </a:prstGeom>
+          <a:extLst>
+            <a:ext uri="{C572A759-6A51-4108-AA02-DFA0A04FC94B}">
+              <ma14:wrappingTextBoxFlag xmlns:ma14="http://schemas.microsoft.com/office/mac/drawingml/2011/main" val="0"/>
+            </a:ext>
+          </a:extLst>
+        </p:spPr>
+        <p:txBody>
+          <a:bodyPr/>
+          <a:lstStyle>
+            <a:lvl1pPr>
+              <a:defRPr sz="900">
+                <a:solidFill>
+                  <a:srgbClr val="1B3A6B"/>
+                </a:solidFill>
+                <a:latin typeface="Arial"/>
+                <a:ea typeface="Arial"/>
+                <a:cs typeface="Arial"/>
+              </a:defRPr>
+            </a:lvl1pPr>
+          </a:lstStyle>
+          <a:p>
+            <a:pPr algn="r"/>
+            <a:fld id="{F7021451-1387-4CA6-816F-3879F97B5CBC}" type="slidenum">
+              <a:rPr b="1" lang="en-US"/>
+              <a:t>4</a:t>
+            </a:fld>
+            <a:endParaRPr lang="en-US"/>
           </a:p>
         </p:txBody>
       </p:sp>
@@ -17408,7 +18830,7 @@
         </p:blipFill>
         <p:spPr>
           <a:xfrm>
-            <a:off x="411480" y="6547104"/>
+            <a:off x="548640" y="6547104"/>
             <a:ext cx="274320" cy="274320"/>
           </a:xfrm>
           <a:prstGeom prst="rect">
@@ -17424,7 +18846,7 @@
         </p:nvSpPr>
         <p:spPr>
           <a:xfrm>
-            <a:off x="749808" y="6528816"/>
+            <a:off x="886968" y="6528816"/>
             <a:ext cx="6400800" cy="310896"/>
           </a:xfrm>
           <a:prstGeom prst="rect">
@@ -17464,7 +18886,7 @@
         <p:spPr>
           <a:xfrm>
             <a:off x="7132320" y="6528816"/>
-            <a:ext cx="4663440" cy="310896"/>
+            <a:ext cx="4023360" cy="310896"/>
           </a:xfrm>
           <a:prstGeom prst="rect">
             <a:avLst/>
@@ -17502,7 +18924,7 @@
         </p:nvSpPr>
         <p:spPr>
           <a:xfrm>
-            <a:off x="411480" y="384048"/>
+            <a:off x="548640" y="384048"/>
             <a:ext cx="82296" cy="658368"/>
           </a:xfrm>
           <a:prstGeom prst="rect">
@@ -17522,7 +18944,7 @@
         </p:nvSpPr>
         <p:spPr>
           <a:xfrm>
-            <a:off x="640080" y="292608"/>
+            <a:off x="777240" y="292608"/>
             <a:ext cx="10972800" cy="274320"/>
           </a:xfrm>
           <a:prstGeom prst="rect">
@@ -17561,8 +18983,8 @@
         </p:nvSpPr>
         <p:spPr>
           <a:xfrm>
-            <a:off x="640080" y="530352"/>
-            <a:ext cx="11155680" cy="566928"/>
+            <a:off x="777240" y="530352"/>
+            <a:ext cx="10881360" cy="566928"/>
           </a:xfrm>
           <a:prstGeom prst="rect">
             <a:avLst/>
@@ -17602,12 +19024,12 @@
         </p:nvSpPr>
         <p:spPr>
           <a:xfrm>
-            <a:off x="411480" y="1325880"/>
-            <a:ext cx="3642360" cy="4892040"/>
+            <a:off x="548640" y="1325880"/>
+            <a:ext cx="3544824" cy="4892040"/>
           </a:xfrm>
           <a:prstGeom prst="roundRect">
             <a:avLst>
-              <a:gd name="adj" fmla="val 2008"/>
+              <a:gd name="adj" fmla="val 2064"/>
             </a:avLst>
           </a:prstGeom>
           <a:solidFill>
@@ -17636,7 +19058,7 @@
         </p:nvSpPr>
         <p:spPr>
           <a:xfrm>
-            <a:off x="594360" y="1508760"/>
+            <a:off x="731520" y="1508760"/>
             <a:ext cx="457200" cy="457200"/>
           </a:xfrm>
           <a:prstGeom prst="ellipse">
@@ -17656,7 +19078,7 @@
         </p:nvSpPr>
         <p:spPr>
           <a:xfrm>
-            <a:off x="594360" y="1508760"/>
+            <a:off x="731520" y="1508760"/>
             <a:ext cx="457200" cy="457200"/>
           </a:xfrm>
           <a:prstGeom prst="rect">
@@ -17695,8 +19117,8 @@
         </p:nvSpPr>
         <p:spPr>
           <a:xfrm>
-            <a:off x="1188720" y="1435608"/>
-            <a:ext cx="2727960" cy="4672584"/>
+            <a:off x="1325880" y="1435608"/>
+            <a:ext cx="2630424" cy="4672584"/>
           </a:xfrm>
           <a:prstGeom prst="rect">
             <a:avLst/>
@@ -17736,12 +19158,12 @@
         </p:nvSpPr>
         <p:spPr>
           <a:xfrm>
-            <a:off x="4282440" y="1325880"/>
-            <a:ext cx="3642360" cy="4892040"/>
+            <a:off x="4322064" y="1325880"/>
+            <a:ext cx="3544824" cy="4892040"/>
           </a:xfrm>
           <a:prstGeom prst="roundRect">
             <a:avLst>
-              <a:gd name="adj" fmla="val 2008"/>
+              <a:gd name="adj" fmla="val 2064"/>
             </a:avLst>
           </a:prstGeom>
           <a:solidFill>
@@ -17770,7 +19192,7 @@
         </p:nvSpPr>
         <p:spPr>
           <a:xfrm>
-            <a:off x="4465320" y="1508760"/>
+            <a:off x="4504944" y="1508760"/>
             <a:ext cx="457200" cy="457200"/>
           </a:xfrm>
           <a:prstGeom prst="ellipse">
@@ -17790,7 +19212,7 @@
         </p:nvSpPr>
         <p:spPr>
           <a:xfrm>
-            <a:off x="4465320" y="1508760"/>
+            <a:off x="4504944" y="1508760"/>
             <a:ext cx="457200" cy="457200"/>
           </a:xfrm>
           <a:prstGeom prst="rect">
@@ -17829,8 +19251,8 @@
         </p:nvSpPr>
         <p:spPr>
           <a:xfrm>
-            <a:off x="5059680" y="1435608"/>
-            <a:ext cx="2727960" cy="4672584"/>
+            <a:off x="5099304" y="1435608"/>
+            <a:ext cx="2630424" cy="4672584"/>
           </a:xfrm>
           <a:prstGeom prst="rect">
             <a:avLst/>
@@ -17870,12 +19292,12 @@
         </p:nvSpPr>
         <p:spPr>
           <a:xfrm>
-            <a:off x="8153400" y="1325880"/>
-            <a:ext cx="3642360" cy="4892040"/>
+            <a:off x="8095488" y="1325880"/>
+            <a:ext cx="3544824" cy="4892040"/>
           </a:xfrm>
           <a:prstGeom prst="roundRect">
             <a:avLst>
-              <a:gd name="adj" fmla="val 2008"/>
+              <a:gd name="adj" fmla="val 2064"/>
             </a:avLst>
           </a:prstGeom>
           <a:solidFill>
@@ -17904,7 +19326,7 @@
         </p:nvSpPr>
         <p:spPr>
           <a:xfrm>
-            <a:off x="8336280" y="1508760"/>
+            <a:off x="8278368" y="1508760"/>
             <a:ext cx="457200" cy="457200"/>
           </a:xfrm>
           <a:prstGeom prst="ellipse">
@@ -17924,7 +19346,7 @@
         </p:nvSpPr>
         <p:spPr>
           <a:xfrm>
-            <a:off x="8336280" y="1508760"/>
+            <a:off x="8278368" y="1508760"/>
             <a:ext cx="457200" cy="457200"/>
           </a:xfrm>
           <a:prstGeom prst="rect">
@@ -17963,8 +19385,8 @@
         </p:nvSpPr>
         <p:spPr>
           <a:xfrm>
-            <a:off x="8930640" y="1435608"/>
-            <a:ext cx="2727960" cy="4672584"/>
+            <a:off x="8872728" y="1435608"/>
+            <a:ext cx="2630424" cy="4672584"/>
           </a:xfrm>
           <a:prstGeom prst="rect">
             <a:avLst/>
@@ -17993,6 +19415,54 @@
               <a:t>Assinatura eletrônica com trilha de auditoria</a:t>
             </a:r>
             <a:endParaRPr lang="en-US" sz="1800" dirty="0"/>
+          </a:p>
+        </p:txBody>
+      </p:sp>
+      <p:sp>
+        <p:nvSpPr>
+          <p:cNvPr id="25" name="Slide Number Placeholder 0"/>
+          <p:cNvSpPr>
+            <a:spLocks noGrp="1"/>
+          </p:cNvSpPr>
+          <p:nvPr>
+            <p:ph type="sldNum" sz="quarter" idx="4294967295"/>
+          </p:nvPr>
+        </p:nvSpPr>
+        <p:spPr>
+          <a:xfrm>
+            <a:off x="11292840" y="6556248"/>
+            <a:ext cx="548640" cy="256032"/>
+          </a:xfrm>
+          <a:prstGeom prst="rect">
+            <a:avLst/>
+          </a:prstGeom>
+          <a:extLst>
+            <a:ext uri="{C572A759-6A51-4108-AA02-DFA0A04FC94B}">
+              <ma14:wrappingTextBoxFlag xmlns:ma14="http://schemas.microsoft.com/office/mac/drawingml/2011/main" val="0"/>
+            </a:ext>
+          </a:extLst>
+        </p:spPr>
+        <p:txBody>
+          <a:bodyPr/>
+          <a:lstStyle>
+            <a:lvl1pPr>
+              <a:defRPr sz="900">
+                <a:solidFill>
+                  <a:srgbClr val="1B3A6B"/>
+                </a:solidFill>
+                <a:latin typeface="Arial"/>
+                <a:ea typeface="Arial"/>
+                <a:cs typeface="Arial"/>
+              </a:defRPr>
+            </a:lvl1pPr>
+          </a:lstStyle>
+          <a:p>
+            <a:pPr algn="r"/>
+            <a:fld id="{F7021451-1387-4CA6-816F-3879F97B5CBC}" type="slidenum">
+              <a:rPr b="1" lang="en-US"/>
+              <a:t>5</a:t>
+            </a:fld>
+            <a:endParaRPr lang="en-US"/>
           </a:p>
         </p:txBody>
       </p:sp>
@@ -18069,7 +19539,7 @@
         </p:blipFill>
         <p:spPr>
           <a:xfrm>
-            <a:off x="411480" y="6547104"/>
+            <a:off x="548640" y="6547104"/>
             <a:ext cx="274320" cy="274320"/>
           </a:xfrm>
           <a:prstGeom prst="rect">
@@ -18085,7 +19555,7 @@
         </p:nvSpPr>
         <p:spPr>
           <a:xfrm>
-            <a:off x="749808" y="6528816"/>
+            <a:off x="886968" y="6528816"/>
             <a:ext cx="6400800" cy="310896"/>
           </a:xfrm>
           <a:prstGeom prst="rect">
@@ -18125,7 +19595,7 @@
         <p:spPr>
           <a:xfrm>
             <a:off x="7132320" y="6528816"/>
-            <a:ext cx="4663440" cy="310896"/>
+            <a:ext cx="4023360" cy="310896"/>
           </a:xfrm>
           <a:prstGeom prst="rect">
             <a:avLst/>
@@ -18163,7 +19633,7 @@
         </p:nvSpPr>
         <p:spPr>
           <a:xfrm>
-            <a:off x="411480" y="384048"/>
+            <a:off x="548640" y="384048"/>
             <a:ext cx="82296" cy="658368"/>
           </a:xfrm>
           <a:prstGeom prst="rect">
@@ -18183,7 +19653,7 @@
         </p:nvSpPr>
         <p:spPr>
           <a:xfrm>
-            <a:off x="640080" y="292608"/>
+            <a:off x="777240" y="292608"/>
             <a:ext cx="10972800" cy="274320"/>
           </a:xfrm>
           <a:prstGeom prst="rect">
@@ -18222,8 +19692,8 @@
         </p:nvSpPr>
         <p:spPr>
           <a:xfrm>
-            <a:off x="640080" y="530352"/>
-            <a:ext cx="11155680" cy="566928"/>
+            <a:off x="777240" y="530352"/>
+            <a:ext cx="10881360" cy="566928"/>
           </a:xfrm>
           <a:prstGeom prst="rect">
             <a:avLst/>
@@ -18263,8 +19733,8 @@
         </p:nvSpPr>
         <p:spPr>
           <a:xfrm>
-            <a:off x="411480" y="1325880"/>
-            <a:ext cx="11384280" cy="4937760"/>
+            <a:off x="548640" y="1325880"/>
+            <a:ext cx="11091672" cy="4937760"/>
           </a:xfrm>
           <a:prstGeom prst="roundRect">
             <a:avLst>
@@ -18290,7 +19760,7 @@
         </p:nvSpPr>
         <p:spPr>
           <a:xfrm>
-            <a:off x="594360" y="1508760"/>
+            <a:off x="731520" y="1508760"/>
             <a:ext cx="822960" cy="384048"/>
           </a:xfrm>
           <a:prstGeom prst="roundRect">
@@ -18312,7 +19782,7 @@
         </p:nvSpPr>
         <p:spPr>
           <a:xfrm>
-            <a:off x="594360" y="1508760"/>
+            <a:off x="731520" y="1508760"/>
             <a:ext cx="822960" cy="384048"/>
           </a:xfrm>
           <a:prstGeom prst="rect">
@@ -18351,8 +19821,8 @@
         </p:nvSpPr>
         <p:spPr>
           <a:xfrm>
-            <a:off x="1508760" y="1463040"/>
-            <a:ext cx="10149840" cy="502920"/>
+            <a:off x="1645920" y="1463040"/>
+            <a:ext cx="9857232" cy="502920"/>
           </a:xfrm>
           <a:prstGeom prst="rect">
             <a:avLst/>
@@ -18392,8 +19862,8 @@
         </p:nvSpPr>
         <p:spPr>
           <a:xfrm>
-            <a:off x="640080" y="2057400"/>
-            <a:ext cx="10927080" cy="4069080"/>
+            <a:off x="777240" y="2057400"/>
+            <a:ext cx="10634472" cy="4069080"/>
           </a:xfrm>
           <a:prstGeom prst="rect">
             <a:avLst/>
@@ -18439,6 +19909,54 @@
               <a:t>status: emitido → assinado → ativo</a:t>
             </a:r>
             <a:endParaRPr lang="en-US" sz="1500" dirty="0"/>
+          </a:p>
+        </p:txBody>
+      </p:sp>
+      <p:sp>
+        <p:nvSpPr>
+          <p:cNvPr id="25" name="Slide Number Placeholder 0"/>
+          <p:cNvSpPr>
+            <a:spLocks noGrp="1"/>
+          </p:cNvSpPr>
+          <p:nvPr>
+            <p:ph type="sldNum" sz="quarter" idx="4294967295"/>
+          </p:nvPr>
+        </p:nvSpPr>
+        <p:spPr>
+          <a:xfrm>
+            <a:off x="11292840" y="6556248"/>
+            <a:ext cx="548640" cy="256032"/>
+          </a:xfrm>
+          <a:prstGeom prst="rect">
+            <a:avLst/>
+          </a:prstGeom>
+          <a:extLst>
+            <a:ext uri="{C572A759-6A51-4108-AA02-DFA0A04FC94B}">
+              <ma14:wrappingTextBoxFlag xmlns:ma14="http://schemas.microsoft.com/office/mac/drawingml/2011/main" val="0"/>
+            </a:ext>
+          </a:extLst>
+        </p:spPr>
+        <p:txBody>
+          <a:bodyPr/>
+          <a:lstStyle>
+            <a:lvl1pPr>
+              <a:defRPr sz="900">
+                <a:solidFill>
+                  <a:srgbClr val="1B3A6B"/>
+                </a:solidFill>
+                <a:latin typeface="Arial"/>
+                <a:ea typeface="Arial"/>
+                <a:cs typeface="Arial"/>
+              </a:defRPr>
+            </a:lvl1pPr>
+          </a:lstStyle>
+          <a:p>
+            <a:pPr algn="r"/>
+            <a:fld id="{F7021451-1387-4CA6-816F-3879F97B5CBC}" type="slidenum">
+              <a:rPr b="1" lang="en-US"/>
+              <a:t>6</a:t>
+            </a:fld>
+            <a:endParaRPr lang="en-US"/>
           </a:p>
         </p:txBody>
       </p:sp>
@@ -18515,7 +20033,7 @@
         </p:blipFill>
         <p:spPr>
           <a:xfrm>
-            <a:off x="411480" y="6547104"/>
+            <a:off x="548640" y="6547104"/>
             <a:ext cx="274320" cy="274320"/>
           </a:xfrm>
           <a:prstGeom prst="rect">
@@ -18531,7 +20049,7 @@
         </p:nvSpPr>
         <p:spPr>
           <a:xfrm>
-            <a:off x="749808" y="6528816"/>
+            <a:off x="886968" y="6528816"/>
             <a:ext cx="6400800" cy="310896"/>
           </a:xfrm>
           <a:prstGeom prst="rect">
@@ -18571,7 +20089,7 @@
         <p:spPr>
           <a:xfrm>
             <a:off x="7132320" y="6528816"/>
-            <a:ext cx="4663440" cy="310896"/>
+            <a:ext cx="4023360" cy="310896"/>
           </a:xfrm>
           <a:prstGeom prst="rect">
             <a:avLst/>
@@ -18609,7 +20127,7 @@
         </p:nvSpPr>
         <p:spPr>
           <a:xfrm>
-            <a:off x="411480" y="384048"/>
+            <a:off x="548640" y="384048"/>
             <a:ext cx="82296" cy="658368"/>
           </a:xfrm>
           <a:prstGeom prst="rect">
@@ -18629,7 +20147,7 @@
         </p:nvSpPr>
         <p:spPr>
           <a:xfrm>
-            <a:off x="640080" y="292608"/>
+            <a:off x="777240" y="292608"/>
             <a:ext cx="10972800" cy="274320"/>
           </a:xfrm>
           <a:prstGeom prst="rect">
@@ -18668,8 +20186,8 @@
         </p:nvSpPr>
         <p:spPr>
           <a:xfrm>
-            <a:off x="640080" y="530352"/>
-            <a:ext cx="11155680" cy="566928"/>
+            <a:off x="777240" y="530352"/>
+            <a:ext cx="10881360" cy="566928"/>
           </a:xfrm>
           <a:prstGeom prst="rect">
             <a:avLst/>
@@ -18709,8 +20227,8 @@
         </p:nvSpPr>
         <p:spPr>
           <a:xfrm>
-            <a:off x="411480" y="1325880"/>
-            <a:ext cx="3642360" cy="2331720"/>
+            <a:off x="548640" y="1325880"/>
+            <a:ext cx="3544824" cy="2331720"/>
           </a:xfrm>
           <a:prstGeom prst="roundRect">
             <a:avLst>
@@ -18743,7 +20261,7 @@
         </p:nvSpPr>
         <p:spPr>
           <a:xfrm>
-            <a:off x="594360" y="1508760"/>
+            <a:off x="731520" y="1508760"/>
             <a:ext cx="457200" cy="457200"/>
           </a:xfrm>
           <a:prstGeom prst="ellipse">
@@ -18763,7 +20281,7 @@
         </p:nvSpPr>
         <p:spPr>
           <a:xfrm>
-            <a:off x="594360" y="1508760"/>
+            <a:off x="731520" y="1508760"/>
             <a:ext cx="457200" cy="457200"/>
           </a:xfrm>
           <a:prstGeom prst="rect">
@@ -18802,8 +20320,8 @@
         </p:nvSpPr>
         <p:spPr>
           <a:xfrm>
-            <a:off x="1188720" y="1435608"/>
-            <a:ext cx="2727960" cy="2112264"/>
+            <a:off x="1325880" y="1435608"/>
+            <a:ext cx="2630424" cy="2112264"/>
           </a:xfrm>
           <a:prstGeom prst="rect">
             <a:avLst/>
@@ -18843,8 +20361,8 @@
         </p:nvSpPr>
         <p:spPr>
           <a:xfrm>
-            <a:off x="4282440" y="1325880"/>
-            <a:ext cx="3642360" cy="2331720"/>
+            <a:off x="4322064" y="1325880"/>
+            <a:ext cx="3544824" cy="2331720"/>
           </a:xfrm>
           <a:prstGeom prst="roundRect">
             <a:avLst>
@@ -18877,7 +20395,7 @@
         </p:nvSpPr>
         <p:spPr>
           <a:xfrm>
-            <a:off x="4465320" y="1508760"/>
+            <a:off x="4504944" y="1508760"/>
             <a:ext cx="457200" cy="457200"/>
           </a:xfrm>
           <a:prstGeom prst="ellipse">
@@ -18897,7 +20415,7 @@
         </p:nvSpPr>
         <p:spPr>
           <a:xfrm>
-            <a:off x="4465320" y="1508760"/>
+            <a:off x="4504944" y="1508760"/>
             <a:ext cx="457200" cy="457200"/>
           </a:xfrm>
           <a:prstGeom prst="rect">
@@ -18936,8 +20454,8 @@
         </p:nvSpPr>
         <p:spPr>
           <a:xfrm>
-            <a:off x="5059680" y="1435608"/>
-            <a:ext cx="2727960" cy="2112264"/>
+            <a:off x="5099304" y="1435608"/>
+            <a:ext cx="2630424" cy="2112264"/>
           </a:xfrm>
           <a:prstGeom prst="rect">
             <a:avLst/>
@@ -18977,8 +20495,8 @@
         </p:nvSpPr>
         <p:spPr>
           <a:xfrm>
-            <a:off x="8153400" y="1325880"/>
-            <a:ext cx="3642360" cy="2331720"/>
+            <a:off x="8095488" y="1325880"/>
+            <a:ext cx="3544824" cy="2331720"/>
           </a:xfrm>
           <a:prstGeom prst="roundRect">
             <a:avLst>
@@ -19011,7 +20529,7 @@
         </p:nvSpPr>
         <p:spPr>
           <a:xfrm>
-            <a:off x="8336280" y="1508760"/>
+            <a:off x="8278368" y="1508760"/>
             <a:ext cx="457200" cy="457200"/>
           </a:xfrm>
           <a:prstGeom prst="ellipse">
@@ -19031,7 +20549,7 @@
         </p:nvSpPr>
         <p:spPr>
           <a:xfrm>
-            <a:off x="8336280" y="1508760"/>
+            <a:off x="8278368" y="1508760"/>
             <a:ext cx="457200" cy="457200"/>
           </a:xfrm>
           <a:prstGeom prst="rect">
@@ -19070,8 +20588,8 @@
         </p:nvSpPr>
         <p:spPr>
           <a:xfrm>
-            <a:off x="8930640" y="1435608"/>
-            <a:ext cx="2727960" cy="2112264"/>
+            <a:off x="8872728" y="1435608"/>
+            <a:ext cx="2630424" cy="2112264"/>
           </a:xfrm>
           <a:prstGeom prst="rect">
             <a:avLst/>
@@ -19111,8 +20629,8 @@
         </p:nvSpPr>
         <p:spPr>
           <a:xfrm>
-            <a:off x="411480" y="3886200"/>
-            <a:ext cx="3642360" cy="2331720"/>
+            <a:off x="548640" y="3886200"/>
+            <a:ext cx="3544824" cy="2331720"/>
           </a:xfrm>
           <a:prstGeom prst="roundRect">
             <a:avLst>
@@ -19145,7 +20663,7 @@
         </p:nvSpPr>
         <p:spPr>
           <a:xfrm>
-            <a:off x="594360" y="4069080"/>
+            <a:off x="731520" y="4069080"/>
             <a:ext cx="457200" cy="457200"/>
           </a:xfrm>
           <a:prstGeom prst="ellipse">
@@ -19165,7 +20683,7 @@
         </p:nvSpPr>
         <p:spPr>
           <a:xfrm>
-            <a:off x="594360" y="4069080"/>
+            <a:off x="731520" y="4069080"/>
             <a:ext cx="457200" cy="457200"/>
           </a:xfrm>
           <a:prstGeom prst="rect">
@@ -19204,8 +20722,8 @@
         </p:nvSpPr>
         <p:spPr>
           <a:xfrm>
-            <a:off x="1188720" y="3995928"/>
-            <a:ext cx="2727960" cy="2112264"/>
+            <a:off x="1325880" y="3995928"/>
+            <a:ext cx="2630424" cy="2112264"/>
           </a:xfrm>
           <a:prstGeom prst="rect">
             <a:avLst/>
@@ -19245,8 +20763,8 @@
         </p:nvSpPr>
         <p:spPr>
           <a:xfrm>
-            <a:off x="4282440" y="3886200"/>
-            <a:ext cx="3642360" cy="2331720"/>
+            <a:off x="4322064" y="3886200"/>
+            <a:ext cx="3544824" cy="2331720"/>
           </a:xfrm>
           <a:prstGeom prst="roundRect">
             <a:avLst>
@@ -19279,7 +20797,7 @@
         </p:nvSpPr>
         <p:spPr>
           <a:xfrm>
-            <a:off x="4465320" y="4069080"/>
+            <a:off x="4504944" y="4069080"/>
             <a:ext cx="457200" cy="457200"/>
           </a:xfrm>
           <a:prstGeom prst="ellipse">
@@ -19299,7 +20817,7 @@
         </p:nvSpPr>
         <p:spPr>
           <a:xfrm>
-            <a:off x="4465320" y="4069080"/>
+            <a:off x="4504944" y="4069080"/>
             <a:ext cx="457200" cy="457200"/>
           </a:xfrm>
           <a:prstGeom prst="rect">
@@ -19338,8 +20856,8 @@
         </p:nvSpPr>
         <p:spPr>
           <a:xfrm>
-            <a:off x="5059680" y="3995928"/>
-            <a:ext cx="2727960" cy="2112264"/>
+            <a:off x="5099304" y="3995928"/>
+            <a:ext cx="2630424" cy="2112264"/>
           </a:xfrm>
           <a:prstGeom prst="rect">
             <a:avLst/>
@@ -19368,6 +20886,54 @@
               <a:t>assinatura eletrônica</a:t>
             </a:r>
             <a:endParaRPr lang="en-US" sz="1800" dirty="0"/>
+          </a:p>
+        </p:txBody>
+      </p:sp>
+      <p:sp>
+        <p:nvSpPr>
+          <p:cNvPr id="25" name="Slide Number Placeholder 0"/>
+          <p:cNvSpPr>
+            <a:spLocks noGrp="1"/>
+          </p:cNvSpPr>
+          <p:nvPr>
+            <p:ph type="sldNum" sz="quarter" idx="4294967295"/>
+          </p:nvPr>
+        </p:nvSpPr>
+        <p:spPr>
+          <a:xfrm>
+            <a:off x="11292840" y="6556248"/>
+            <a:ext cx="548640" cy="256032"/>
+          </a:xfrm>
+          <a:prstGeom prst="rect">
+            <a:avLst/>
+          </a:prstGeom>
+          <a:extLst>
+            <a:ext uri="{C572A759-6A51-4108-AA02-DFA0A04FC94B}">
+              <ma14:wrappingTextBoxFlag xmlns:ma14="http://schemas.microsoft.com/office/mac/drawingml/2011/main" val="0"/>
+            </a:ext>
+          </a:extLst>
+        </p:spPr>
+        <p:txBody>
+          <a:bodyPr/>
+          <a:lstStyle>
+            <a:lvl1pPr>
+              <a:defRPr sz="900">
+                <a:solidFill>
+                  <a:srgbClr val="1B3A6B"/>
+                </a:solidFill>
+                <a:latin typeface="Arial"/>
+                <a:ea typeface="Arial"/>
+                <a:cs typeface="Arial"/>
+              </a:defRPr>
+            </a:lvl1pPr>
+          </a:lstStyle>
+          <a:p>
+            <a:pPr algn="r"/>
+            <a:fld id="{F7021451-1387-4CA6-816F-3879F97B5CBC}" type="slidenum">
+              <a:rPr b="1" lang="en-US"/>
+              <a:t>7</a:t>
+            </a:fld>
+            <a:endParaRPr lang="en-US"/>
           </a:p>
         </p:txBody>
       </p:sp>
@@ -19431,6 +20997,45 @@
         </p:nvSpPr>
         <p:spPr>
           <a:xfrm>
+            <a:off x="457200" y="548640"/>
+            <a:ext cx="3474720" cy="1737360"/>
+          </a:xfrm>
+          <a:prstGeom prst="rect">
+            <a:avLst/>
+          </a:prstGeom>
+          <a:noFill/>
+          <a:ln/>
+        </p:spPr>
+        <p:txBody>
+          <a:bodyPr wrap="square" rtlCol="0" anchor="ctr"/>
+          <a:lstStyle/>
+          <a:p>
+            <a:pPr indent="0" marL="0">
+              <a:buNone/>
+            </a:pPr>
+            <a:r>
+              <a:rPr lang="en-US" sz="11000" b="1" dirty="0">
+                <a:solidFill>
+                  <a:srgbClr val="11396F"/>
+                </a:solidFill>
+                <a:latin typeface="Arial" pitchFamily="34" charset="0"/>
+                <a:ea typeface="Arial" pitchFamily="34" charset="-122"/>
+                <a:cs typeface="Arial" pitchFamily="34" charset="-120"/>
+              </a:rPr>
+              <a:t>02</a:t>
+            </a:r>
+            <a:endParaRPr lang="en-US" sz="11000" dirty="0"/>
+          </a:p>
+        </p:txBody>
+      </p:sp>
+      <p:sp>
+        <p:nvSpPr>
+          <p:cNvPr id="4" name="Text 2"/>
+          <p:cNvSpPr/>
+          <p:nvPr/>
+        </p:nvSpPr>
+        <p:spPr>
+          <a:xfrm>
             <a:off x="548640" y="2194560"/>
             <a:ext cx="3291840" cy="548640"/>
           </a:xfrm>
@@ -19464,7 +21069,46 @@
       </p:sp>
       <p:sp>
         <p:nvSpPr>
-          <p:cNvPr id="4" name="Text 2"/>
+          <p:cNvPr id="5" name="Text 3"/>
+          <p:cNvSpPr/>
+          <p:nvPr/>
+        </p:nvSpPr>
+        <p:spPr>
+          <a:xfrm>
+            <a:off x="548640" y="3200400"/>
+            <a:ext cx="3383280" cy="457200"/>
+          </a:xfrm>
+          <a:prstGeom prst="rect">
+            <a:avLst/>
+          </a:prstGeom>
+          <a:noFill/>
+          <a:ln/>
+        </p:spPr>
+        <p:txBody>
+          <a:bodyPr wrap="square" rtlCol="0" anchor="ctr"/>
+          <a:lstStyle/>
+          <a:p>
+            <a:pPr indent="0" marL="0">
+              <a:buNone/>
+            </a:pPr>
+            <a:r>
+              <a:rPr lang="en-US" sz="1100" dirty="0">
+                <a:solidFill>
+                  <a:srgbClr val="C7D2E3"/>
+                </a:solidFill>
+                <a:latin typeface="Arial" pitchFamily="34" charset="0"/>
+                <a:ea typeface="Arial" pitchFamily="34" charset="-122"/>
+                <a:cs typeface="Arial" pitchFamily="34" charset="-120"/>
+              </a:rPr>
+              <a:t>M6 · Etapa 3 · Operação ponta a ponta</a:t>
+            </a:r>
+            <a:endParaRPr lang="en-US" sz="1100" dirty="0"/>
+          </a:p>
+        </p:txBody>
+      </p:sp>
+      <p:sp>
+        <p:nvSpPr>
+          <p:cNvPr id="6" name="Text 4"/>
           <p:cNvSpPr/>
           <p:nvPr/>
         </p:nvSpPr>
@@ -19503,7 +21147,7 @@
       </p:sp>
       <p:pic>
         <p:nvPicPr>
-          <p:cNvPr id="5" name="Image 0" descr="/www/wwwroot/rexar/gdsolar/docs/curso/slides/assets/logo-gdsolar.png">    </p:cNvPr>
+          <p:cNvPr id="7" name="Image 0" descr="/www/wwwroot/rexar/gdsolar/docs/curso/slides/assets/logo-gdsolar.png">    </p:cNvPr>
           <p:cNvPicPr>
             <a:picLocks noChangeAspect="1"/>
           </p:cNvPicPr>
@@ -19527,7 +21171,7 @@
       </p:pic>
       <p:sp>
         <p:nvSpPr>
-          <p:cNvPr id="6" name="Text 3"/>
+          <p:cNvPr id="8" name="Text 5"/>
           <p:cNvSpPr/>
           <p:nvPr/>
         </p:nvSpPr>
@@ -19568,7 +21212,7 @@
       </p:sp>
       <p:sp>
         <p:nvSpPr>
-          <p:cNvPr id="7" name="Text 4"/>
+          <p:cNvPr id="9" name="Text 6"/>
           <p:cNvSpPr/>
           <p:nvPr/>
         </p:nvSpPr>
@@ -19609,7 +21253,7 @@
       </p:sp>
       <p:sp>
         <p:nvSpPr>
-          <p:cNvPr id="8" name="Text 5"/>
+          <p:cNvPr id="10" name="Text 7"/>
           <p:cNvSpPr/>
           <p:nvPr/>
         </p:nvSpPr>
@@ -19788,7 +21432,7 @@
         </p:blipFill>
         <p:spPr>
           <a:xfrm>
-            <a:off x="411480" y="6547104"/>
+            <a:off x="548640" y="6547104"/>
             <a:ext cx="274320" cy="274320"/>
           </a:xfrm>
           <a:prstGeom prst="rect">
@@ -19804,7 +21448,7 @@
         </p:nvSpPr>
         <p:spPr>
           <a:xfrm>
-            <a:off x="749808" y="6528816"/>
+            <a:off x="886968" y="6528816"/>
             <a:ext cx="6400800" cy="310896"/>
           </a:xfrm>
           <a:prstGeom prst="rect">
@@ -19844,7 +21488,7 @@
         <p:spPr>
           <a:xfrm>
             <a:off x="7132320" y="6528816"/>
-            <a:ext cx="4663440" cy="310896"/>
+            <a:ext cx="4023360" cy="310896"/>
           </a:xfrm>
           <a:prstGeom prst="rect">
             <a:avLst/>
@@ -19882,7 +21526,7 @@
         </p:nvSpPr>
         <p:spPr>
           <a:xfrm>
-            <a:off x="411480" y="384048"/>
+            <a:off x="548640" y="384048"/>
             <a:ext cx="82296" cy="658368"/>
           </a:xfrm>
           <a:prstGeom prst="rect">
@@ -19902,7 +21546,7 @@
         </p:nvSpPr>
         <p:spPr>
           <a:xfrm>
-            <a:off x="640080" y="292608"/>
+            <a:off x="777240" y="292608"/>
             <a:ext cx="10972800" cy="274320"/>
           </a:xfrm>
           <a:prstGeom prst="rect">
@@ -19941,8 +21585,8 @@
         </p:nvSpPr>
         <p:spPr>
           <a:xfrm>
-            <a:off x="640080" y="530352"/>
-            <a:ext cx="11155680" cy="566928"/>
+            <a:off x="777240" y="530352"/>
+            <a:ext cx="10881360" cy="566928"/>
           </a:xfrm>
           <a:prstGeom prst="rect">
             <a:avLst/>
@@ -19989,16 +21633,16 @@
           </p:nvPr>
         </p:nvGraphicFramePr>
         <p:xfrm>
-          <a:off x="411480" y="1417320"/>
-          <a:ext cx="11384280" cy="914400"/>
+          <a:off x="548640" y="1417320"/>
+          <a:ext cx="11091672" cy="914400"/>
         </p:xfrm>
         <a:graphic>
           <a:graphicData uri="http://schemas.openxmlformats.org/drawingml/2006/table">
             <a:tbl>
               <a:tblPr/>
               <a:tblGrid>
-                <a:gridCol w="5692140"/>
-                <a:gridCol w="5692140"/>
+                <a:gridCol w="5545836"/>
+                <a:gridCol w="5545836"/>
               </a:tblGrid>
               <a:tr h="0">
                 <a:tc>
@@ -20694,6 +22338,54 @@
           </a:graphicData>
         </a:graphic>
       </p:graphicFrame>
+      <p:sp>
+        <p:nvSpPr>
+          <p:cNvPr id="25" name="Slide Number Placeholder 0"/>
+          <p:cNvSpPr>
+            <a:spLocks noGrp="1"/>
+          </p:cNvSpPr>
+          <p:nvPr>
+            <p:ph type="sldNum" sz="quarter" idx="4294967295"/>
+          </p:nvPr>
+        </p:nvSpPr>
+        <p:spPr>
+          <a:xfrm>
+            <a:off x="11292840" y="6556248"/>
+            <a:ext cx="548640" cy="256032"/>
+          </a:xfrm>
+          <a:prstGeom prst="rect">
+            <a:avLst/>
+          </a:prstGeom>
+          <a:extLst>
+            <a:ext uri="{C572A759-6A51-4108-AA02-DFA0A04FC94B}">
+              <ma14:wrappingTextBoxFlag xmlns:ma14="http://schemas.microsoft.com/office/mac/drawingml/2011/main" val="0"/>
+            </a:ext>
+          </a:extLst>
+        </p:spPr>
+        <p:txBody>
+          <a:bodyPr/>
+          <a:lstStyle>
+            <a:lvl1pPr>
+              <a:defRPr sz="900">
+                <a:solidFill>
+                  <a:srgbClr val="1B3A6B"/>
+                </a:solidFill>
+                <a:latin typeface="Arial"/>
+                <a:ea typeface="Arial"/>
+                <a:cs typeface="Arial"/>
+              </a:defRPr>
+            </a:lvl1pPr>
+          </a:lstStyle>
+          <a:p>
+            <a:pPr algn="r"/>
+            <a:fld id="{F7021451-1387-4CA6-816F-3879F97B5CBC}" type="slidenum">
+              <a:rPr b="1" lang="en-US"/>
+              <a:t>9</a:t>
+            </a:fld>
+            <a:endParaRPr lang="en-US"/>
+          </a:p>
+        </p:txBody>
+      </p:sp>
     </p:spTree>
   </p:cSld>
   <p:clrMapOvr>

--- a/docs/curso/slides/m06-contratos-e-alocacao.pptx
+++ b/docs/curso/slides/m06-contratos-e-alocacao.pptx
@@ -35,9 +35,13 @@
     <p:sldId id="283" r:id="rId29"/>
     <p:sldId id="284" r:id="rId30"/>
     <p:sldId id="285" r:id="rId31"/>
+    <p:sldId id="286" r:id="rId32"/>
+    <p:sldId id="287" r:id="rId33"/>
+    <p:sldId id="288" r:id="rId34"/>
+    <p:sldId id="289" r:id="rId35"/>
   </p:sldIdLst>
   <p:notesMasterIdLst>
-    <p:notesMasterId r:id="rId32"/>
+    <p:notesMasterId r:id="rId36"/>
   </p:notesMasterIdLst>
   <p:sldSz cx="12192000" cy="6858000"/>
   <p:notesSz cx="6858000" cy="12192000"/>
@@ -619,8 +623,8 @@
           <a:p>
             <a:r>
               <a:rPr lang="en-US" dirty="0"/>
-              <a:t>Toda operação com dados precisa de uma base legal. Na assinatura, a principal é a execução do contrato: você precisa dos dados para cumprir o que combinou com o cliente. Algumas operações têm base em obrigação legal ou regulatória, como guardar documentos fiscais. Não dependa de "consentimento para tudo": ele pode ser revogado e não é a base adequada para o essencial do contrato. E seja transparente: tenha um aviso de privacidade simples, explicando que dados você coleta, para quê, com quem compartilha — a distribuidora, o meio de pagamento, o contador — e como o titular exerce os direitos dele.
-O segundo pilar é a segurança. Cada pessoa da equipe deve acessar só o que precisa. Na plataforma, isso já acontece pelos perfis: o consultor vê só a carteira dele, o cliente vê só os próprios dados, as faturas ficam guardadas em área protegida e os documentos de proposta são entregues por link temporário. O que costuma vazar está fora do sistema: planilhas com CPF enviadas por WhatsApp, contas de luz salvas no celular do vendedor, e-mails encaminhados. Crie uma regra simples: dado de cliente vive no sistema, não em arquivo solto.</a:t>
+              <a:t>A base legal principal é a execução do contrato. Tenha um aviso de privacidade simples.
+O que vaza costuma estar fora do sistema: planilhas no WhatsApp e contas no celular do vendedor. Regra simples: dado de cliente vive no sistema.</a:t>
             </a:r>
             <a:endParaRPr lang="en-US" dirty="0"/>
           </a:p>
@@ -708,7 +712,7 @@
           <a:p>
             <a:r>
               <a:rPr lang="en-US" dirty="0"/>
-              <a:t>O titular dos dados tem direitos: saber que dados você tem, corrigir, pedir a eliminação quando cabível. Defina um canal para isso — pode ser o próprio suporte da plataforma ou um e-mail — e um responsável, o encarregado. Defina também por quanto tempo você guarda cada tipo de dado depois que o contrato termina: alguns, como documentos fiscais, você precisa manter por prazo legal; outros podem ser eliminados. Um detalhe da plataforma: quando um cliente é excluído, o CPF ou CNPJ é apagado do cadastro, o que permite que ele volte no futuro sem conflito — mas o histórico financeiro necessário continua.</a:t>
+              <a:t>Ofereça um canal para o titular e defina por quanto tempo guarda cada dado.</a:t>
             </a:r>
             <a:endParaRPr lang="en-US" dirty="0"/>
           </a:p>
@@ -796,7 +800,7 @@
           <a:p>
             <a:r>
               <a:rPr lang="en-US" dirty="0"/>
-              <a:t>Resumindo: colete só o necessário, use a execução do contrato como base principal, tenha um aviso de privacidade, mantenha os dados dentro do sistema com acesso por perfil, ofereça um canal ao titular e defina prazos de retenção. Na próxima aula, a lista de rateio na distribuidora.</a:t>
+              <a:t/>
             </a:r>
             <a:endParaRPr lang="en-US" dirty="0"/>
           </a:p>
@@ -972,7 +976,7 @@
           <a:p>
             <a:r>
               <a:rPr lang="en-US" dirty="0"/>
-              <a:t>A lista de rateio é um cadastro, feito pela entidade titular da usina junto à distribuidora, com as unidades consumidoras que recebem os créditos e o percentual de cada uma. A soma não pode passar de cem por cento. O que não for distribuído fica na própria unidade da usina, como crédito acumulado. A distribuidora usa essa lista todo mês para dividir os créditos. Cada distribuidora tem o seu canal e o seu formulário para isso — portal, e-mail, agência —, e prazos para que uma alteração passe a valer. Descubra o procedimento exato da sua distribuidora antes do primeiro cliente.</a:t>
+              <a:t>A lista traz as unidades e o percentual de cada uma, somando no máximo cem por cento. Descubra o procedimento exato da sua distribuidora antes do primeiro cliente.</a:t>
             </a:r>
             <a:endParaRPr lang="en-US" dirty="0"/>
           </a:p>
@@ -1060,7 +1064,7 @@
           <a:p>
             <a:r>
               <a:rPr lang="en-US" dirty="0"/>
-              <a:t>Na prática, a atualização do rateio é um ciclo. Uma vez por ciclo de faturamento, você consolida as mudanças: clientes novos que assinaram, clientes que saíram, ajustes de cota. Monta a nova lista completa, com os percentuais recalculados. Envia à distribuidora pelo canal oficial e guarda o protocolo. Acompanha até a confirmação. E, no ciclo seguinte, confere nas faturas dos clientes se os créditos vieram como esperado. Concentrar as mudanças num dia fixo do mês, em vez de mandar uma alteração a cada cliente, reduz erros e retrabalho.</a:t>
+              <a:t>Atualize uma vez por ciclo, num dia fixo: consolide entradas e saídas, envie, acompanhe o protocolo e confira na fatura seguinte.</a:t>
             </a:r>
             <a:endParaRPr lang="en-US" dirty="0"/>
           </a:p>
@@ -1148,7 +1152,7 @@
           <a:p>
             <a:r>
               <a:rPr lang="en-US" dirty="0"/>
-              <a:t>Toda vez que um cliente sai, abre-se um buraco: o percentual dele fica sem dono. Esses créditos ficam acumulados na unidade da usina e podem ser destinados depois, dentro do prazo de validade, mas, enquanto isso, ninguém paga por eles, e o produtor e você deixam de receber. Por isso, toda saída deve disparar duas ações: vender a cota liberada para um cliente novo, de preferência já na fila, e, enquanto isso, avaliar redistribuir para clientes atuais que tenham consumo descoberto. Uma operação madura mantém uma lista de espera de clientes justamente para preencher esses buracos.</a:t>
+              <a:t>Toda saída abre um buraco no rateio. Tenha uma fila de clientes para preenchê-lo rápido.</a:t>
             </a:r>
             <a:endParaRPr lang="en-US" dirty="0"/>
           </a:p>
@@ -1236,7 +1240,7 @@
           <a:p>
             <a:r>
               <a:rPr lang="en-US" dirty="0"/>
-              <a:t>Alguns cuidados. Só inclua unidades da área da mesma distribuidora e de titulares com contrato e adesão ativos. Atenção às casas decimais: um percentual digitado errado pode dar a um cliente dez vezes mais créditos do que deveria. Em usinas acima de quinhentos quilowatts, lembre do GD três: nenhum participante com vinte e cinco por cento ou mais. E guarde todos os protocolos: se a distribuidora errar a aplicação do rateio, é com eles que você pede a correção.</a:t>
+              <a:t>Cuidado com as casas decimais, com a concentração acima de vinte e cinco por cento e guarde todos os protocolos.</a:t>
             </a:r>
             <a:endParaRPr lang="en-US" dirty="0"/>
           </a:p>
@@ -1324,7 +1328,7 @@
           <a:p>
             <a:r>
               <a:rPr lang="en-US" dirty="0"/>
-              <a:t>Resumindo: a lista de rateio é o elo com a distribuidora; atualize uma vez por ciclo, consolidando entradas e saídas; trate cada saída como um buraco a preencher; e guarde os protocolos. A plataforma ajuda a calcular os percentuais a partir das cotas — é o que vamos ver na próxima aula.</a:t>
+              <a:t/>
             </a:r>
             <a:endParaRPr lang="en-US" dirty="0"/>
           </a:p>
@@ -1588,9 +1592,9 @@
           <a:p>
             <a:r>
               <a:rPr lang="en-US" dirty="0"/>
-              <a:t>Três números controlam a alocação. A energia disponível, que você define a partir da geração média, de forma conservadora. A energia alocada, que é a soma das cotas de todos os clientes vinculados. E o saldo, que é a diferença, ou seja, o que ainda pode ser vendido. A meta de ocupação saudável fica entre noventa e noventa e oito por cento da energia disponível. Abaixo disso, você deixa dinheiro na mesa. Acima, qualquer mês fraco deixa os clientes com menos créditos do que o contratado.
-O segundo cuidado é a concentração. Em usinas acima de quinhentos quilowatts, um participante com vinte e cinco por cento ou mais dos créditos pode levar a usina para o GD três, como vimos no módulo 2. Mas, mesmo abaixo dessa linha, concentração é risco: se o seu maior cliente tem vinte por cento da usina e cancela ou para de pagar, um quinto da receita some de uma vez. Prefira uma carteira diversificada, combinando empresas, que trazem volume, com residências, que diluem o risco.
-E quando a geração cai? Depende da causa. Uma queda pontual, num mês nublado, não exige nada: o rateio é percentual, todos recebem proporcionalmente menos, e a cobrança acompanha, porque é calculada sobre o que foi compensado. Uma queda por falha — um inversor parado, sujeira, furto de cabos — exige acionar a manutenção imediatamente e avisar os clientes com transparência. E uma queda estrutural — a usina simplesmente gera menos do que o projetado, mês após mês — exige reduzir a energia disponível, rebalancear as cotas e, se for o caso, mover clientes para outra usina. É aqui que ter mais de uma usina dá segurança à operação.</a:t>
+              <a:t>Mantenha a ocupação entre noventa e noventa e oito por cento da energia disponível. A plataforma ajuda com duas travas: não deixa vincular acima do saldo e acusa alerta crítico se a alocação passar da energia disponível.
+Evite concentração: além do risco de GD três, um cliente grande que sai leva uma fatia da receita de uma vez.
+Quando a geração cai, a ação depende da causa: uma queda pontual não exige nada, uma falha exige manutenção e uma queda estrutural exige rebalancear as cotas.</a:t>
             </a:r>
             <a:endParaRPr lang="en-US" dirty="0"/>
           </a:p>
@@ -1678,7 +1682,7 @@
           <a:p>
             <a:r>
               <a:rPr lang="en-US" dirty="0"/>
-              <a:t>Para planejar, comece da meta: sessenta mil quilowatts-hora disponíveis, com ocupação de noventa e cinco por cento, dão cinquenta e sete mil alocáveis. Um desenho possível: seis empresas somando uns vinte mil, setenta residências somando uns vinte e oito mil e o restante como reserva para clientes na fila e para ajustes de cota. Cada usina deve ter esse plano de ocupação, e o time comercial deve vender olhando para ele.</a:t>
+              <a:t>Cada usina deve ter um plano de ocupação, e o time comercial vende olhando para ele.</a:t>
             </a:r>
             <a:endParaRPr lang="en-US" dirty="0"/>
           </a:p>
@@ -1766,7 +1770,7 @@
           <a:p>
             <a:r>
               <a:rPr lang="en-US" dirty="0"/>
-              <a:t>A plataforma tem duas travas. A primeira é na hora de vincular um cliente: se a energia pedida for maior que o saldo da usina, o vínculo é recusado. Dois vendedores não conseguem vender a mesma energia, porque o segundo vínculo esbarra no saldo. A segunda trava é para quando a realidade muda depois: se você registra uma geração menor e a energia disponível cai abaixo da alocada, a varredura de alertas da usina acusa um alerta crítico, de energia alocada maior que a disponível. Além dele, existem alertas de usina sem registro de geração no mês, de usina sem energia disponível, de saldo baixo e de cliente consumindo mais do que a cota alocada.</a:t>
+              <a:t>Trava 1: não vincula acima do saldo Trava 2: alerta crítico se o alocado passar do disponível</a:t>
             </a:r>
             <a:endParaRPr lang="en-US" dirty="0"/>
           </a:p>
@@ -1854,7 +1858,7 @@
           <a:p>
             <a:r>
               <a:rPr lang="en-US" dirty="0"/>
-              <a:t>Resumindo: ocupe entre noventa e noventa e oito por cento da energia disponível, confie nas travas da plataforma, evite concentração e responda às quedas de geração conforme a causa. Nos dois laboratórios a seguir, você vai emitir contratos, vincular clientes e encher a sua usina.</a:t>
+              <a:t/>
             </a:r>
             <a:endParaRPr lang="en-US" dirty="0"/>
           </a:p>
@@ -2030,10 +2034,10 @@
           <a:p>
             <a:r>
               <a:rPr lang="en-US" dirty="0"/>
-              <a:t>Abra a proposta da academia e marque como aprovada: o cliente aceitou. A partir dela, gere o contrato. Repare que os dados da proposta já vêm preenchidos — cliente, unidade consumidora, média de consumo, taxa de redução, prazo. Complete os dados cadastrais do cliente que o contrato exige, como o representante legal e o endereço da unidade consumidora. Informe a data de emissão e salve. O contrato aparece em Cliente Consumidor, Contratos, com um código. Quando o cliente assinar — na vida real, pela ferramenta de assinatura eletrônica —, volte e registre a data de assinatura e o status de assinado.
-Agora, o vínculo, que é o coração da alocação. Abra Cliente Consumidor, Unidades Consumidoras, e entre na UC da academia. Crie um vínculo com a usina. Escolha a usina da sua empresa. Em energia alocada, informe a cota que você calculou no módulo 5: cerca de cinco mil, setecentos e noventa e cinco quilowatts-hora por mês. A plataforma mostra quanto isso representa do consumo previsto da UC. Informe a data de início do vínculo — a data em que você espera que os créditos comecem, depois do rateio — e salve. Repare que a tela da UC passa a mostrar quanto do consumo previsto está alocado e quanto ainda está disponível para uma nova alocação, por exemplo em outra usina. E, se você abrir Usinas Solar, Gestão de Energia, a energia alocada da usina já subiu e o saldo caiu. Uma observação: uma mesma unidade consumidora pode ter vínculos com usinas diferentes ao mesmo tempo, o que é útil quando o cliente é grande e nenhuma usina sozinha comporta a cota dele.
-Para montar a lista de rateio da distribuidora, abra a usina e veja os clientes vinculados, com a energia alocada de cada um. Leve esses números para a planilha de rateio do curso, que calcula o percentual de cada unidade consumidora. Esse é o arquivo que a entidade envia à distribuidora, como você aprendeu na aula 3.
-Por fim, o convite ao portal. Na ficha do cliente, abra a aba Acesso e gere o convite. A plataforma envia um e-mail de ativação para o cliente e mostra o link, que você também pode compartilhar pelo WhatsApp com um clique — o convite tem validade, por segurança. No laboratório, o e-mail não sai de verdade: ele aparece na caixa de e-mails do laboratório. Abra o convite e veja a tela de ativação, em que o cliente cria a própria senha. A partir daí, ele acessa o portal com as faturas, as cobranças e o relatório de economia. Uma dica: envie o convite junto com uma mensagem de boas-vindas explicando as duas contas — reforçar isso no primeiro dia evita sustos no primeiro mês.</a:t>
+              <a:t>Marque a proposta como aprovada e gere o contrato. Os dados vêm da proposta; complete o cadastro e registre a assinatura.
+Na unidade consumidora, crie o vínculo com a usina e informe a energia alocada. O saldo da usina cai na hora.
+Abra a usina, veja os clientes vinculados e calcule na planilha o percentual de rateio de cada um.
+Na aba Acesso do cliente, gere o convite: ele recebe o e-mail de ativação e cria a própria senha.</a:t>
             </a:r>
             <a:endParaRPr lang="en-US" dirty="0"/>
           </a:p>
@@ -2297,10 +2301,10 @@
           <a:p>
             <a:r>
               <a:rPr lang="en-US" dirty="0"/>
-              <a:t>Antes de vincular, abra a planilha de plano de ocupação. Liste os quinze clientes — os cinco do módulo 5 e os dez do checkpoint — com a cota de cada um. Some e compare com a energia disponível da usina. O objetivo é ficar entre noventa e noventa e oito por cento. Confira também a maior participação: nenhum cliente deve passar de vinte e cinco por cento, e, idealmente, nem de quinze.
-Agora vincule os clientes, um por um, pela unidade consumidora de cada um, como na aula anterior. A cada vínculo, o saldo da usina diminui. Ao terminar, abra a Gestão de Energia: a sua usina deve estar perto de noventa e cinco por cento de ocupação, com um pequeno saldo. Anote esse saldo.
-Agora, o primeiro teste. Imagine que um vendedor fechou um cliente grande e tenta vinculá-lo com uma cota maior do que o saldo. Tente. A plataforma recusa: a energia solicitada excede o saldo disponível da usina. É a trava que impede dois vendedores de venderem a mesma energia. O que fazer na vida real? Oferecer ao cliente a cota que cabe agora, alocar o restante em outra usina ou colocá-lo na fila. Faça o teste com a energia igual ao saldo e veja que funciona. Depois, encerre esse vínculo de teste para voltar ao plano.
-Agora, o segundo teste. Imagine que a usina teve um problema e você decidiu, de forma conservadora, reduzir a energia disponível. Registre um novo mês de geração com a energia disponível uns quinze por cento abaixo da energia já alocada. Salve. Agora abra Relatórios, Alertas Operacionais, e clique em Escanear Agora — a varredura que a operação roda para checar a saúde das usinas. Aparece um alerta crítico: a energia alocada excede a disponível. Abra o alerta e veja os detalhes: a usina, quanto está alocado, quanto está disponível. Repare também no sino do cabeçalho, que passa a mostrar o alerta.</a:t>
+              <a:t>Na planilha de ocupação, some as cotas: a meta é entre noventa e noventa e oito por cento, sem cliente acima de vinte e cinco.
+Vincule os clientes e acompanhe o saldo em Gestão de Energia.
+Tente vincular uma cota maior que o saldo: o vínculo é recusado.
+Registre uma geração menor que a energia alocada e clique em Escanear Agora, em Alertas Operacionais: aparece o alerta crítico.</a:t>
             </a:r>
             <a:endParaRPr lang="en-US" dirty="0"/>
           </a:p>
@@ -2388,7 +2392,7 @@
           <a:p>
             <a:r>
               <a:rPr lang="en-US" dirty="0"/>
-              <a:t>Como resolver? Depende da causa, como vimos na aula 4. Se a usina voltou a gerar normalmente, registre a disponibilidade correta. Se a queda é estrutural, reduza cotas ou mova clientes para outra usina. Para o laboratório, registre de novo a energia disponível original e clique em Escanear Agora. O alerta se resolve sozinho, porque a condição deixou de existir. Esse é um princípio dos alertas da plataforma: eles não são uma lista que só cresce; eles refletem a situação atual da operação.</a:t>
+              <a:t>Corrija a causa e escaneie de novo: o alerta se resolve sozinho.</a:t>
             </a:r>
             <a:endParaRPr lang="en-US" dirty="0"/>
           </a:p>
@@ -2476,7 +2480,7 @@
           <a:p>
             <a:r>
               <a:rPr lang="en-US" dirty="0"/>
-              <a:t>Primeiro, quem assina. Lembre da estrutura do módulo 3: o cliente adere à entidade que detém a usina — consórcio, cooperativa ou associação — e a sua empresa faz a gestão. Dependendo do desenho jurídico, o cliente assina um termo de adesão à entidade e um contrato com as regras da participação, ou um único instrumento que reúne tudo. O importante é que fique claro: o cliente é participante da geração compartilhada, recebe um percentual dos créditos e contribui com os custos conforme a regra do contrato.</a:t>
+              <a:t>O cliente adere à entidade que detém a usina e a sua empresa faz a gestão. Isso precisa ficar claro no documento.</a:t>
             </a:r>
             <a:endParaRPr lang="en-US" dirty="0"/>
           </a:p>
@@ -2606,6 +2610,358 @@
 </p:notes>
 </file>
 
+<file path=ppt/notesSlides/notesSlide31.xml><?xml version="1.0" encoding="utf-8"?>
+<p:notes xmlns:a="http://schemas.openxmlformats.org/drawingml/2006/main" xmlns:r="http://schemas.openxmlformats.org/officeDocument/2006/relationships" xmlns:p="http://schemas.openxmlformats.org/presentationml/2006/main">
+  <p:cSld>
+    <p:spTree>
+      <p:nvGrpSpPr>
+        <p:cNvPr id="1" name=""/>
+        <p:cNvGrpSpPr/>
+        <p:nvPr/>
+      </p:nvGrpSpPr>
+      <p:grpSpPr>
+        <a:xfrm>
+          <a:off x="0" y="0"/>
+          <a:ext cx="0" cy="0"/>
+          <a:chOff x="0" y="0"/>
+          <a:chExt cx="0" cy="0"/>
+        </a:xfrm>
+      </p:grpSpPr>
+      <p:sp>
+        <p:nvSpPr>
+          <p:cNvPr id="2" name="Slide Image Placeholder 1"/>
+          <p:cNvSpPr>
+            <a:spLocks noGrp="1" noRot="1" noChangeAspect="1"/>
+          </p:cNvSpPr>
+          <p:nvPr>
+            <p:ph type="sldImg"/>
+          </p:nvPr>
+        </p:nvSpPr>
+        <p:spPr/>
+      </p:sp>
+      <p:sp>
+        <p:nvSpPr>
+          <p:cNvPr id="3" name="Notes Placeholder 2"/>
+          <p:cNvSpPr>
+            <a:spLocks noGrp="1"/>
+          </p:cNvSpPr>
+          <p:nvPr>
+            <p:ph type="body" idx="1"/>
+          </p:nvPr>
+        </p:nvSpPr>
+        <p:spPr/>
+        <p:txBody>
+          <a:bodyPr/>
+          <a:lstStyle/>
+          <a:p>
+            <a:r>
+              <a:rPr lang="en-US" dirty="0"/>
+              <a:t/>
+            </a:r>
+            <a:endParaRPr lang="en-US" dirty="0"/>
+          </a:p>
+        </p:txBody>
+      </p:sp>
+      <p:sp>
+        <p:nvSpPr>
+          <p:cNvPr id="4" name="Slide Number Placeholder 3"/>
+          <p:cNvSpPr>
+            <a:spLocks noGrp="1"/>
+          </p:cNvSpPr>
+          <p:nvPr>
+            <p:ph type="sldNum" sz="quarter" idx="10"/>
+          </p:nvPr>
+        </p:nvSpPr>
+        <p:spPr/>
+        <p:txBody>
+          <a:bodyPr/>
+          <a:lstStyle/>
+          <a:p>
+            <a:fld id="{F7021451-1387-4CA6-816F-3879F97B5CBC}" type="slidenum">
+              <a:rPr lang="en-US"/>
+              <a:t>31</a:t>
+            </a:fld>
+            <a:endParaRPr lang="en-US"/>
+          </a:p>
+        </p:txBody>
+      </p:sp>
+    </p:spTree>
+    <p:extLst>
+      <p:ext uri="{BB962C8B-B14F-4D97-AF65-F5344CB8AC3E}">
+        <p14:creationId xmlns:p14="http://schemas.microsoft.com/office/powerpoint/2010/main" val="1024086991"/>
+      </p:ext>
+    </p:extLst>
+  </p:cSld>
+  <p:clrMapOvr>
+    <a:masterClrMapping/>
+  </p:clrMapOvr>
+</p:notes>
+</file>
+
+<file path=ppt/notesSlides/notesSlide32.xml><?xml version="1.0" encoding="utf-8"?>
+<p:notes xmlns:a="http://schemas.openxmlformats.org/drawingml/2006/main" xmlns:r="http://schemas.openxmlformats.org/officeDocument/2006/relationships" xmlns:p="http://schemas.openxmlformats.org/presentationml/2006/main">
+  <p:cSld>
+    <p:spTree>
+      <p:nvGrpSpPr>
+        <p:cNvPr id="1" name=""/>
+        <p:cNvGrpSpPr/>
+        <p:nvPr/>
+      </p:nvGrpSpPr>
+      <p:grpSpPr>
+        <a:xfrm>
+          <a:off x="0" y="0"/>
+          <a:ext cx="0" cy="0"/>
+          <a:chOff x="0" y="0"/>
+          <a:chExt cx="0" cy="0"/>
+        </a:xfrm>
+      </p:grpSpPr>
+      <p:sp>
+        <p:nvSpPr>
+          <p:cNvPr id="2" name="Slide Image Placeholder 1"/>
+          <p:cNvSpPr>
+            <a:spLocks noGrp="1" noRot="1" noChangeAspect="1"/>
+          </p:cNvSpPr>
+          <p:nvPr>
+            <p:ph type="sldImg"/>
+          </p:nvPr>
+        </p:nvSpPr>
+        <p:spPr/>
+      </p:sp>
+      <p:sp>
+        <p:nvSpPr>
+          <p:cNvPr id="3" name="Notes Placeholder 2"/>
+          <p:cNvSpPr>
+            <a:spLocks noGrp="1"/>
+          </p:cNvSpPr>
+          <p:nvPr>
+            <p:ph type="body" idx="1"/>
+          </p:nvPr>
+        </p:nvSpPr>
+        <p:spPr/>
+        <p:txBody>
+          <a:bodyPr/>
+          <a:lstStyle/>
+          <a:p>
+            <a:r>
+              <a:rPr lang="en-US" dirty="0"/>
+              <a:t/>
+            </a:r>
+            <a:endParaRPr lang="en-US" dirty="0"/>
+          </a:p>
+        </p:txBody>
+      </p:sp>
+      <p:sp>
+        <p:nvSpPr>
+          <p:cNvPr id="4" name="Slide Number Placeholder 3"/>
+          <p:cNvSpPr>
+            <a:spLocks noGrp="1"/>
+          </p:cNvSpPr>
+          <p:nvPr>
+            <p:ph type="sldNum" sz="quarter" idx="10"/>
+          </p:nvPr>
+        </p:nvSpPr>
+        <p:spPr/>
+        <p:txBody>
+          <a:bodyPr/>
+          <a:lstStyle/>
+          <a:p>
+            <a:fld id="{F7021451-1387-4CA6-816F-3879F97B5CBC}" type="slidenum">
+              <a:rPr lang="en-US"/>
+              <a:t>32</a:t>
+            </a:fld>
+            <a:endParaRPr lang="en-US"/>
+          </a:p>
+        </p:txBody>
+      </p:sp>
+    </p:spTree>
+    <p:extLst>
+      <p:ext uri="{BB962C8B-B14F-4D97-AF65-F5344CB8AC3E}">
+        <p14:creationId xmlns:p14="http://schemas.microsoft.com/office/powerpoint/2010/main" val="1024086991"/>
+      </p:ext>
+    </p:extLst>
+  </p:cSld>
+  <p:clrMapOvr>
+    <a:masterClrMapping/>
+  </p:clrMapOvr>
+</p:notes>
+</file>
+
+<file path=ppt/notesSlides/notesSlide33.xml><?xml version="1.0" encoding="utf-8"?>
+<p:notes xmlns:a="http://schemas.openxmlformats.org/drawingml/2006/main" xmlns:r="http://schemas.openxmlformats.org/officeDocument/2006/relationships" xmlns:p="http://schemas.openxmlformats.org/presentationml/2006/main">
+  <p:cSld>
+    <p:spTree>
+      <p:nvGrpSpPr>
+        <p:cNvPr id="1" name=""/>
+        <p:cNvGrpSpPr/>
+        <p:nvPr/>
+      </p:nvGrpSpPr>
+      <p:grpSpPr>
+        <a:xfrm>
+          <a:off x="0" y="0"/>
+          <a:ext cx="0" cy="0"/>
+          <a:chOff x="0" y="0"/>
+          <a:chExt cx="0" cy="0"/>
+        </a:xfrm>
+      </p:grpSpPr>
+      <p:sp>
+        <p:nvSpPr>
+          <p:cNvPr id="2" name="Slide Image Placeholder 1"/>
+          <p:cNvSpPr>
+            <a:spLocks noGrp="1" noRot="1" noChangeAspect="1"/>
+          </p:cNvSpPr>
+          <p:nvPr>
+            <p:ph type="sldImg"/>
+          </p:nvPr>
+        </p:nvSpPr>
+        <p:spPr/>
+      </p:sp>
+      <p:sp>
+        <p:nvSpPr>
+          <p:cNvPr id="3" name="Notes Placeholder 2"/>
+          <p:cNvSpPr>
+            <a:spLocks noGrp="1"/>
+          </p:cNvSpPr>
+          <p:nvPr>
+            <p:ph type="body" idx="1"/>
+          </p:nvPr>
+        </p:nvSpPr>
+        <p:spPr/>
+        <p:txBody>
+          <a:bodyPr/>
+          <a:lstStyle/>
+          <a:p>
+            <a:r>
+              <a:rPr lang="en-US" dirty="0"/>
+              <a:t/>
+            </a:r>
+            <a:endParaRPr lang="en-US" dirty="0"/>
+          </a:p>
+        </p:txBody>
+      </p:sp>
+      <p:sp>
+        <p:nvSpPr>
+          <p:cNvPr id="4" name="Slide Number Placeholder 3"/>
+          <p:cNvSpPr>
+            <a:spLocks noGrp="1"/>
+          </p:cNvSpPr>
+          <p:nvPr>
+            <p:ph type="sldNum" sz="quarter" idx="10"/>
+          </p:nvPr>
+        </p:nvSpPr>
+        <p:spPr/>
+        <p:txBody>
+          <a:bodyPr/>
+          <a:lstStyle/>
+          <a:p>
+            <a:fld id="{F7021451-1387-4CA6-816F-3879F97B5CBC}" type="slidenum">
+              <a:rPr lang="en-US"/>
+              <a:t>33</a:t>
+            </a:fld>
+            <a:endParaRPr lang="en-US"/>
+          </a:p>
+        </p:txBody>
+      </p:sp>
+    </p:spTree>
+    <p:extLst>
+      <p:ext uri="{BB962C8B-B14F-4D97-AF65-F5344CB8AC3E}">
+        <p14:creationId xmlns:p14="http://schemas.microsoft.com/office/powerpoint/2010/main" val="1024086991"/>
+      </p:ext>
+    </p:extLst>
+  </p:cSld>
+  <p:clrMapOvr>
+    <a:masterClrMapping/>
+  </p:clrMapOvr>
+</p:notes>
+</file>
+
+<file path=ppt/notesSlides/notesSlide34.xml><?xml version="1.0" encoding="utf-8"?>
+<p:notes xmlns:a="http://schemas.openxmlformats.org/drawingml/2006/main" xmlns:r="http://schemas.openxmlformats.org/officeDocument/2006/relationships" xmlns:p="http://schemas.openxmlformats.org/presentationml/2006/main">
+  <p:cSld>
+    <p:spTree>
+      <p:nvGrpSpPr>
+        <p:cNvPr id="1" name=""/>
+        <p:cNvGrpSpPr/>
+        <p:nvPr/>
+      </p:nvGrpSpPr>
+      <p:grpSpPr>
+        <a:xfrm>
+          <a:off x="0" y="0"/>
+          <a:ext cx="0" cy="0"/>
+          <a:chOff x="0" y="0"/>
+          <a:chExt cx="0" cy="0"/>
+        </a:xfrm>
+      </p:grpSpPr>
+      <p:sp>
+        <p:nvSpPr>
+          <p:cNvPr id="2" name="Slide Image Placeholder 1"/>
+          <p:cNvSpPr>
+            <a:spLocks noGrp="1" noRot="1" noChangeAspect="1"/>
+          </p:cNvSpPr>
+          <p:nvPr>
+            <p:ph type="sldImg"/>
+          </p:nvPr>
+        </p:nvSpPr>
+        <p:spPr/>
+      </p:sp>
+      <p:sp>
+        <p:nvSpPr>
+          <p:cNvPr id="3" name="Notes Placeholder 2"/>
+          <p:cNvSpPr>
+            <a:spLocks noGrp="1"/>
+          </p:cNvSpPr>
+          <p:nvPr>
+            <p:ph type="body" idx="1"/>
+          </p:nvPr>
+        </p:nvSpPr>
+        <p:spPr/>
+        <p:txBody>
+          <a:bodyPr/>
+          <a:lstStyle/>
+          <a:p>
+            <a:r>
+              <a:rPr lang="en-US" dirty="0"/>
+              <a:t/>
+            </a:r>
+            <a:endParaRPr lang="en-US" dirty="0"/>
+          </a:p>
+        </p:txBody>
+      </p:sp>
+      <p:sp>
+        <p:nvSpPr>
+          <p:cNvPr id="4" name="Slide Number Placeholder 3"/>
+          <p:cNvSpPr>
+            <a:spLocks noGrp="1"/>
+          </p:cNvSpPr>
+          <p:nvPr>
+            <p:ph type="sldNum" sz="quarter" idx="10"/>
+          </p:nvPr>
+        </p:nvSpPr>
+        <p:spPr/>
+        <p:txBody>
+          <a:bodyPr/>
+          <a:lstStyle/>
+          <a:p>
+            <a:fld id="{F7021451-1387-4CA6-816F-3879F97B5CBC}" type="slidenum">
+              <a:rPr lang="en-US"/>
+              <a:t>34</a:t>
+            </a:fld>
+            <a:endParaRPr lang="en-US"/>
+          </a:p>
+        </p:txBody>
+      </p:sp>
+    </p:spTree>
+    <p:extLst>
+      <p:ext uri="{BB962C8B-B14F-4D97-AF65-F5344CB8AC3E}">
+        <p14:creationId xmlns:p14="http://schemas.microsoft.com/office/powerpoint/2010/main" val="1024086991"/>
+      </p:ext>
+    </p:extLst>
+  </p:cSld>
+  <p:clrMapOvr>
+    <a:masterClrMapping/>
+  </p:clrMapOvr>
+</p:notes>
+</file>
+
 <file path=ppt/notesSlides/notesSlide4.xml><?xml version="1.0" encoding="utf-8"?>
 <p:notes xmlns:a="http://schemas.openxmlformats.org/drawingml/2006/main" xmlns:r="http://schemas.openxmlformats.org/officeDocument/2006/relationships" xmlns:p="http://schemas.openxmlformats.org/presentationml/2006/main">
   <p:cSld>
@@ -2652,7 +3008,7 @@
           <a:p>
             <a:r>
               <a:rPr lang="en-US" dirty="0"/>
-              <a:t>São dez cláusulas essenciais. Um: o objeto, identificando a unidade consumidora, ou as unidades, que vão receber os créditos. Dois: a cota, em percentual ou em quilowatt-hora de referência, e a data prevista para o início dos créditos. Três: como o valor mensal é calculado — a energia compensada na fatura da distribuidora, multiplicada por um menos o desconto. Escreva a fórmula e um exemplo numérico; isso evita muita discussão. Quatro: vencimento, meios de pagamento — Pix e boleto — e as consequências do atraso, com multa e juros dentro do que a lei permite. Cinco: prazo, renovação e cancelamento, com aviso prévio suficiente para você atualizar o rateio. Seis: o que acontece se o cliente mudar de endereço ou trocar a titularidade da conta. Sete: variação de geração — se a usina gerar menos, ele recebe menos créditos e paga proporcionalmente menos. Oito: reajuste e reequilíbrio em caso de mudança regulatória, como a do Fio B. Nove: as obrigações do cliente — manter a conta no nome dele, informar mudanças, autorizar o acesso às faturas. E dez: dados pessoais e canais de comunicação, que é o tema da próxima aula.</a:t>
+              <a:t>Das dez cláusulas da tela, três evitam a maioria dos conflitos: a fórmula do valor mensal com um exemplo, o cancelamento com aviso prévio e o reequilíbrio em caso de mudança regulatória.</a:t>
             </a:r>
             <a:endParaRPr lang="en-US" dirty="0"/>
           </a:p>
@@ -2740,7 +3096,7 @@
           <a:p>
             <a:r>
               <a:rPr lang="en-US" dirty="0"/>
-              <a:t>Para assinar, colete os documentos. Pessoa física: documento de identidade, a conta de luz no nome dela e, se o contrato exigir, comprovante de endereço. Pessoa jurídica: o cartão CNPJ ou o contrato social, o documento do representante legal e a conta de luz. Use assinatura eletrônica com trilha de auditoria — é aceita juridicamente, rápida e evita papel. Guarde tudo organizado por cliente: quando a distribuidora, um auditor ou o próprio cliente pedir, você encontra em minutos.</a:t>
+              <a:t>Use assinatura eletrônica e guarde os documentos organizados por cliente.</a:t>
             </a:r>
             <a:endParaRPr lang="en-US" dirty="0"/>
           </a:p>
@@ -2828,7 +3184,7 @@
           <a:p>
             <a:r>
               <a:rPr lang="en-US" dirty="0"/>
-              <a:t>Na plataforma, o contrato nasce da proposta aprovada, aproveitando os dados dela, e tem status: emitido, assinado, ativo, cancelado. No laboratório deste módulo, você vai emitir os contratos dos seus clientes.</a:t>
+              <a:t>Contrato nasce da proposta aprovada status: emitido → assinado → ativo</a:t>
             </a:r>
             <a:endParaRPr lang="en-US" dirty="0"/>
           </a:p>
@@ -2916,7 +3272,7 @@
           <a:p>
             <a:r>
               <a:rPr lang="en-US" dirty="0"/>
-              <a:t>Resumindo: dez cláusulas, a fórmula do valor com exemplo, cancelamento com aviso prévio, reequilíbrio regulatório e assinatura eletrônica com documentos organizados. Na próxima aula, a LGPD.</a:t>
+              <a:t/>
             </a:r>
             <a:endParaRPr lang="en-US" dirty="0"/>
           </a:p>
@@ -3092,7 +3448,7 @@
           <a:p>
             <a:r>
               <a:rPr lang="en-US" dirty="0"/>
-              <a:t>O primeiro princípio é o da finalidade e da necessidade: colete só o que precisa, para uma finalidade clara. Nome e documento servem para o contrato, a cobrança e o cadastro na distribuidora. Endereço e unidade consumidora, para o rateio e para associar as faturas. Telefone e e-mail, para os avisos e o acesso ao portal. E as faturas da distribuidora, para calcular a cobrança e o relatório de economia. Não colete dados que você não usa, como renda ou profissão, a menos que haja um motivo.</a:t>
+              <a:t>Colete só o necessário, com finalidade clara, como mostra a tabela.</a:t>
             </a:r>
             <a:endParaRPr lang="en-US" dirty="0"/>
           </a:p>
@@ -4400,7 +4756,7 @@
         <p:spPr>
           <a:xfrm>
             <a:off x="822960" y="2286000"/>
-            <a:ext cx="4860036" cy="3749040"/>
+            <a:ext cx="4860036" cy="2286000"/>
           </a:xfrm>
           <a:prstGeom prst="rect">
             <a:avLst/>
@@ -4481,6 +4837,65 @@
       <p:sp>
         <p:nvSpPr>
           <p:cNvPr id="13" name="Shape 10"/>
+          <p:cNvSpPr/>
+          <p:nvPr/>
+        </p:nvSpPr>
+        <p:spPr>
+          <a:xfrm>
+            <a:off x="822960" y="4663440"/>
+            <a:ext cx="4860036" cy="18288"/>
+          </a:xfrm>
+          <a:prstGeom prst="rect">
+            <a:avLst/>
+          </a:prstGeom>
+          <a:solidFill>
+            <a:srgbClr val="D8E0EC"/>
+          </a:solidFill>
+          <a:ln/>
+        </p:spPr>
+      </p:sp>
+      <p:sp>
+        <p:nvSpPr>
+          <p:cNvPr id="14" name="Text 11"/>
+          <p:cNvSpPr/>
+          <p:nvPr/>
+        </p:nvSpPr>
+        <p:spPr>
+          <a:xfrm>
+            <a:off x="822960" y="4754880"/>
+            <a:ext cx="4860036" cy="1371600"/>
+          </a:xfrm>
+          <a:prstGeom prst="rect">
+            <a:avLst/>
+          </a:prstGeom>
+          <a:noFill/>
+          <a:ln/>
+        </p:spPr>
+        <p:txBody>
+          <a:bodyPr wrap="square" rtlCol="0" anchor="t"/>
+          <a:lstStyle/>
+          <a:p>
+            <a:pPr indent="0" marL="0">
+              <a:buNone/>
+            </a:pPr>
+            <a:r>
+              <a:rPr lang="en-US" sz="1300" i="1" dirty="0">
+                <a:solidFill>
+                  <a:srgbClr val="64748B"/>
+                </a:solidFill>
+                <a:latin typeface="Arial" pitchFamily="34" charset="0"/>
+                <a:ea typeface="Arial" pitchFamily="34" charset="-122"/>
+                <a:cs typeface="Arial" pitchFamily="34" charset="-120"/>
+              </a:rPr>
+              <a:t>A base legal principal é a execução do contrato. Tenha um aviso de privacidade simples.</a:t>
+            </a:r>
+            <a:endParaRPr lang="en-US" sz="1300" dirty="0"/>
+          </a:p>
+        </p:txBody>
+      </p:sp>
+      <p:sp>
+        <p:nvSpPr>
+          <p:cNvPr id="15" name="Shape 12"/>
           <p:cNvSpPr/>
           <p:nvPr/>
         </p:nvSpPr>
@@ -4514,7 +4929,7 @@
       </p:sp>
       <p:sp>
         <p:nvSpPr>
-          <p:cNvPr id="14" name="Shape 11"/>
+          <p:cNvPr id="16" name="Shape 13"/>
           <p:cNvSpPr/>
           <p:nvPr/>
         </p:nvSpPr>
@@ -4534,7 +4949,7 @@
       </p:sp>
       <p:sp>
         <p:nvSpPr>
-          <p:cNvPr id="15" name="Text 12"/>
+          <p:cNvPr id="17" name="Text 14"/>
           <p:cNvSpPr/>
           <p:nvPr/>
         </p:nvSpPr>
@@ -4575,14 +4990,14 @@
       </p:sp>
       <p:sp>
         <p:nvSpPr>
-          <p:cNvPr id="16" name="Text 13"/>
+          <p:cNvPr id="18" name="Text 15"/>
           <p:cNvSpPr/>
           <p:nvPr/>
         </p:nvSpPr>
         <p:spPr>
           <a:xfrm>
             <a:off x="6505956" y="2286000"/>
-            <a:ext cx="4860036" cy="3749040"/>
+            <a:ext cx="4860036" cy="2286000"/>
           </a:xfrm>
           <a:prstGeom prst="rect">
             <a:avLst/>
@@ -4699,6 +5114,65 @@
               <a:t>registro de quem acessou</a:t>
             </a:r>
             <a:endParaRPr lang="en-US" sz="1700" dirty="0"/>
+          </a:p>
+        </p:txBody>
+      </p:sp>
+      <p:sp>
+        <p:nvSpPr>
+          <p:cNvPr id="19" name="Shape 16"/>
+          <p:cNvSpPr/>
+          <p:nvPr/>
+        </p:nvSpPr>
+        <p:spPr>
+          <a:xfrm>
+            <a:off x="6505956" y="4663440"/>
+            <a:ext cx="4860036" cy="18288"/>
+          </a:xfrm>
+          <a:prstGeom prst="rect">
+            <a:avLst/>
+          </a:prstGeom>
+          <a:solidFill>
+            <a:srgbClr val="D8E0EC"/>
+          </a:solidFill>
+          <a:ln/>
+        </p:spPr>
+      </p:sp>
+      <p:sp>
+        <p:nvSpPr>
+          <p:cNvPr id="20" name="Text 17"/>
+          <p:cNvSpPr/>
+          <p:nvPr/>
+        </p:nvSpPr>
+        <p:spPr>
+          <a:xfrm>
+            <a:off x="6505956" y="4754880"/>
+            <a:ext cx="4860036" cy="1371600"/>
+          </a:xfrm>
+          <a:prstGeom prst="rect">
+            <a:avLst/>
+          </a:prstGeom>
+          <a:noFill/>
+          <a:ln/>
+        </p:spPr>
+        <p:txBody>
+          <a:bodyPr wrap="square" rtlCol="0" anchor="t"/>
+          <a:lstStyle/>
+          <a:p>
+            <a:pPr indent="0" marL="0">
+              <a:buNone/>
+            </a:pPr>
+            <a:r>
+              <a:rPr lang="en-US" sz="1300" i="1" dirty="0">
+                <a:solidFill>
+                  <a:srgbClr val="64748B"/>
+                </a:solidFill>
+                <a:latin typeface="Arial" pitchFamily="34" charset="0"/>
+                <a:ea typeface="Arial" pitchFamily="34" charset="-122"/>
+                <a:cs typeface="Arial" pitchFamily="34" charset="-120"/>
+              </a:rPr>
+              <a:t>O que vaza costuma estar fora do sistema: planilhas no WhatsApp e contas no celular do vendedor. Regra simples: dado de cliente vive no sistema.</a:t>
+            </a:r>
+            <a:endParaRPr lang="en-US" sz="1300" dirty="0"/>
           </a:p>
         </p:txBody>
       </p:sp>
@@ -5018,11 +5492,11 @@
         <p:spPr>
           <a:xfrm>
             <a:off x="548640" y="1325880"/>
-            <a:ext cx="3544824" cy="2331720"/>
+            <a:ext cx="3544824" cy="1874520"/>
           </a:xfrm>
           <a:prstGeom prst="roundRect">
             <a:avLst>
-              <a:gd name="adj" fmla="val 3137"/>
+              <a:gd name="adj" fmla="val 3902"/>
             </a:avLst>
           </a:prstGeom>
           <a:solidFill>
@@ -5111,7 +5585,7 @@
         <p:spPr>
           <a:xfrm>
             <a:off x="1325880" y="1435608"/>
-            <a:ext cx="2630424" cy="2112264"/>
+            <a:ext cx="2630424" cy="1655064"/>
           </a:xfrm>
           <a:prstGeom prst="rect">
             <a:avLst/>
@@ -5152,11 +5626,11 @@
         <p:spPr>
           <a:xfrm>
             <a:off x="4322064" y="1325880"/>
-            <a:ext cx="3544824" cy="2331720"/>
+            <a:ext cx="3544824" cy="1874520"/>
           </a:xfrm>
           <a:prstGeom prst="roundRect">
             <a:avLst>
-              <a:gd name="adj" fmla="val 3137"/>
+              <a:gd name="adj" fmla="val 3902"/>
             </a:avLst>
           </a:prstGeom>
           <a:solidFill>
@@ -5245,7 +5719,7 @@
         <p:spPr>
           <a:xfrm>
             <a:off x="5099304" y="1435608"/>
-            <a:ext cx="2630424" cy="2112264"/>
+            <a:ext cx="2630424" cy="1655064"/>
           </a:xfrm>
           <a:prstGeom prst="rect">
             <a:avLst/>
@@ -5286,11 +5760,11 @@
         <p:spPr>
           <a:xfrm>
             <a:off x="8095488" y="1325880"/>
-            <a:ext cx="3544824" cy="2331720"/>
+            <a:ext cx="3544824" cy="1874520"/>
           </a:xfrm>
           <a:prstGeom prst="roundRect">
             <a:avLst>
-              <a:gd name="adj" fmla="val 3137"/>
+              <a:gd name="adj" fmla="val 3902"/>
             </a:avLst>
           </a:prstGeom>
           <a:solidFill>
@@ -5379,7 +5853,7 @@
         <p:spPr>
           <a:xfrm>
             <a:off x="8872728" y="1435608"/>
-            <a:ext cx="2630424" cy="2112264"/>
+            <a:ext cx="2630424" cy="1655064"/>
           </a:xfrm>
           <a:prstGeom prst="rect">
             <a:avLst/>
@@ -5419,12 +5893,12 @@
         </p:nvSpPr>
         <p:spPr>
           <a:xfrm>
-            <a:off x="548640" y="3886200"/>
-            <a:ext cx="3544824" cy="2331720"/>
+            <a:off x="548640" y="3429000"/>
+            <a:ext cx="3544824" cy="1874520"/>
           </a:xfrm>
           <a:prstGeom prst="roundRect">
             <a:avLst>
-              <a:gd name="adj" fmla="val 3137"/>
+              <a:gd name="adj" fmla="val 3902"/>
             </a:avLst>
           </a:prstGeom>
           <a:solidFill>
@@ -5453,7 +5927,7 @@
         </p:nvSpPr>
         <p:spPr>
           <a:xfrm>
-            <a:off x="731520" y="4069080"/>
+            <a:off x="731520" y="3611880"/>
             <a:ext cx="457200" cy="457200"/>
           </a:xfrm>
           <a:prstGeom prst="ellipse">
@@ -5473,7 +5947,7 @@
         </p:nvSpPr>
         <p:spPr>
           <a:xfrm>
-            <a:off x="731520" y="4069080"/>
+            <a:off x="731520" y="3611880"/>
             <a:ext cx="457200" cy="457200"/>
           </a:xfrm>
           <a:prstGeom prst="rect">
@@ -5512,8 +5986,8 @@
         </p:nvSpPr>
         <p:spPr>
           <a:xfrm>
-            <a:off x="1325880" y="3995928"/>
-            <a:ext cx="2630424" cy="2112264"/>
+            <a:off x="1325880" y="3538728"/>
+            <a:ext cx="2630424" cy="1655064"/>
           </a:xfrm>
           <a:prstGeom prst="rect">
             <a:avLst/>
@@ -5553,12 +6027,12 @@
         </p:nvSpPr>
         <p:spPr>
           <a:xfrm>
-            <a:off x="4322064" y="3886200"/>
-            <a:ext cx="3544824" cy="2331720"/>
+            <a:off x="4322064" y="3429000"/>
+            <a:ext cx="3544824" cy="1874520"/>
           </a:xfrm>
           <a:prstGeom prst="roundRect">
             <a:avLst>
-              <a:gd name="adj" fmla="val 3137"/>
+              <a:gd name="adj" fmla="val 3902"/>
             </a:avLst>
           </a:prstGeom>
           <a:solidFill>
@@ -5587,7 +6061,7 @@
         </p:nvSpPr>
         <p:spPr>
           <a:xfrm>
-            <a:off x="4504944" y="4069080"/>
+            <a:off x="4504944" y="3611880"/>
             <a:ext cx="457200" cy="457200"/>
           </a:xfrm>
           <a:prstGeom prst="ellipse">
@@ -5607,7 +6081,7 @@
         </p:nvSpPr>
         <p:spPr>
           <a:xfrm>
-            <a:off x="4504944" y="4069080"/>
+            <a:off x="4504944" y="3611880"/>
             <a:ext cx="457200" cy="457200"/>
           </a:xfrm>
           <a:prstGeom prst="rect">
@@ -5646,8 +6120,8 @@
         </p:nvSpPr>
         <p:spPr>
           <a:xfrm>
-            <a:off x="5099304" y="3995928"/>
-            <a:ext cx="2630424" cy="2112264"/>
+            <a:off x="5099304" y="3538728"/>
+            <a:ext cx="2630424" cy="1655064"/>
           </a:xfrm>
           <a:prstGeom prst="rect">
             <a:avLst/>
@@ -5687,12 +6161,12 @@
         </p:nvSpPr>
         <p:spPr>
           <a:xfrm>
-            <a:off x="8095488" y="3886200"/>
-            <a:ext cx="3544824" cy="2331720"/>
+            <a:off x="8095488" y="3429000"/>
+            <a:ext cx="3544824" cy="1874520"/>
           </a:xfrm>
           <a:prstGeom prst="roundRect">
             <a:avLst>
-              <a:gd name="adj" fmla="val 3137"/>
+              <a:gd name="adj" fmla="val 3902"/>
             </a:avLst>
           </a:prstGeom>
           <a:solidFill>
@@ -5721,7 +6195,7 @@
         </p:nvSpPr>
         <p:spPr>
           <a:xfrm>
-            <a:off x="8278368" y="4069080"/>
+            <a:off x="8278368" y="3611880"/>
             <a:ext cx="457200" cy="457200"/>
           </a:xfrm>
           <a:prstGeom prst="ellipse">
@@ -5741,7 +6215,7 @@
         </p:nvSpPr>
         <p:spPr>
           <a:xfrm>
-            <a:off x="8278368" y="4069080"/>
+            <a:off x="8278368" y="3611880"/>
             <a:ext cx="457200" cy="457200"/>
           </a:xfrm>
           <a:prstGeom prst="rect">
@@ -5780,8 +6254,8 @@
         </p:nvSpPr>
         <p:spPr>
           <a:xfrm>
-            <a:off x="8872728" y="3995928"/>
-            <a:ext cx="2630424" cy="2112264"/>
+            <a:off x="8872728" y="3538728"/>
+            <a:ext cx="2630424" cy="1655064"/>
           </a:xfrm>
           <a:prstGeom prst="rect">
             <a:avLst/>
@@ -5810,6 +6284,92 @@
               <a:t>prazo de retenção definido</a:t>
             </a:r>
             <a:endParaRPr lang="en-US" sz="1800" dirty="0"/>
+          </a:p>
+        </p:txBody>
+      </p:sp>
+      <p:sp>
+        <p:nvSpPr>
+          <p:cNvPr id="33" name="Shape 30"/>
+          <p:cNvSpPr/>
+          <p:nvPr/>
+        </p:nvSpPr>
+        <p:spPr>
+          <a:xfrm>
+            <a:off x="548640" y="5413248"/>
+            <a:ext cx="11091672" cy="868680"/>
+          </a:xfrm>
+          <a:prstGeom prst="roundRect">
+            <a:avLst>
+              <a:gd name="adj" fmla="val 8421"/>
+            </a:avLst>
+          </a:prstGeom>
+          <a:solidFill>
+            <a:srgbClr val="EEF3FA"/>
+          </a:solidFill>
+          <a:ln w="6350">
+            <a:solidFill>
+              <a:srgbClr val="D8E0EC"/>
+            </a:solidFill>
+            <a:prstDash val="solid"/>
+          </a:ln>
+        </p:spPr>
+      </p:sp>
+      <p:sp>
+        <p:nvSpPr>
+          <p:cNvPr id="34" name="Shape 31"/>
+          <p:cNvSpPr/>
+          <p:nvPr/>
+        </p:nvSpPr>
+        <p:spPr>
+          <a:xfrm>
+            <a:off x="548640" y="5413248"/>
+            <a:ext cx="91440" cy="868680"/>
+          </a:xfrm>
+          <a:prstGeom prst="rect">
+            <a:avLst/>
+          </a:prstGeom>
+          <a:solidFill>
+            <a:srgbClr val="F7A23B"/>
+          </a:solidFill>
+          <a:ln/>
+        </p:spPr>
+      </p:sp>
+      <p:sp>
+        <p:nvSpPr>
+          <p:cNvPr id="35" name="Text 32"/>
+          <p:cNvSpPr/>
+          <p:nvPr/>
+        </p:nvSpPr>
+        <p:spPr>
+          <a:xfrm>
+            <a:off x="777240" y="5458968"/>
+            <a:ext cx="10744200" cy="777240"/>
+          </a:xfrm>
+          <a:prstGeom prst="rect">
+            <a:avLst/>
+          </a:prstGeom>
+          <a:noFill/>
+          <a:ln/>
+        </p:spPr>
+        <p:txBody>
+          <a:bodyPr wrap="square" rtlCol="0" anchor="ctr"/>
+          <a:lstStyle/>
+          <a:p>
+            <a:pPr indent="0" marL="0">
+              <a:buNone/>
+            </a:pPr>
+            <a:r>
+              <a:rPr lang="en-US" sz="1500" dirty="0">
+                <a:solidFill>
+                  <a:srgbClr val="1F2937"/>
+                </a:solidFill>
+                <a:latin typeface="Arial" pitchFamily="34" charset="0"/>
+                <a:ea typeface="Arial" pitchFamily="34" charset="-122"/>
+                <a:cs typeface="Arial" pitchFamily="34" charset="-120"/>
+              </a:rPr>
+              <a:t>Ofereça um canal para o titular e defina por quanto tempo guarda cada dado.</a:t>
+            </a:r>
+            <a:endParaRPr lang="en-US" sz="1500" dirty="0"/>
           </a:p>
         </p:txBody>
       </p:sp>
@@ -7662,11 +8222,11 @@
         <p:spPr>
           <a:xfrm>
             <a:off x="548640" y="1325880"/>
-            <a:ext cx="5431536" cy="2331720"/>
+            <a:ext cx="5431536" cy="1874520"/>
           </a:xfrm>
           <a:prstGeom prst="roundRect">
             <a:avLst>
-              <a:gd name="adj" fmla="val 3137"/>
+              <a:gd name="adj" fmla="val 3902"/>
             </a:avLst>
           </a:prstGeom>
           <a:solidFill>
@@ -7755,7 +8315,7 @@
         <p:spPr>
           <a:xfrm>
             <a:off x="1325880" y="1435608"/>
-            <a:ext cx="4517136" cy="2112264"/>
+            <a:ext cx="4517136" cy="1655064"/>
           </a:xfrm>
           <a:prstGeom prst="rect">
             <a:avLst/>
@@ -7796,11 +8356,11 @@
         <p:spPr>
           <a:xfrm>
             <a:off x="6208776" y="1325880"/>
-            <a:ext cx="5431536" cy="2331720"/>
+            <a:ext cx="5431536" cy="1874520"/>
           </a:xfrm>
           <a:prstGeom prst="roundRect">
             <a:avLst>
-              <a:gd name="adj" fmla="val 3137"/>
+              <a:gd name="adj" fmla="val 3902"/>
             </a:avLst>
           </a:prstGeom>
           <a:solidFill>
@@ -7889,7 +8449,7 @@
         <p:spPr>
           <a:xfrm>
             <a:off x="6986016" y="1435608"/>
-            <a:ext cx="4517136" cy="2112264"/>
+            <a:ext cx="4517136" cy="1655064"/>
           </a:xfrm>
           <a:prstGeom prst="rect">
             <a:avLst/>
@@ -7929,12 +8489,12 @@
         </p:nvSpPr>
         <p:spPr>
           <a:xfrm>
-            <a:off x="548640" y="3886200"/>
-            <a:ext cx="5431536" cy="2331720"/>
+            <a:off x="548640" y="3429000"/>
+            <a:ext cx="5431536" cy="1874520"/>
           </a:xfrm>
           <a:prstGeom prst="roundRect">
             <a:avLst>
-              <a:gd name="adj" fmla="val 3137"/>
+              <a:gd name="adj" fmla="val 3902"/>
             </a:avLst>
           </a:prstGeom>
           <a:solidFill>
@@ -7963,7 +8523,7 @@
         </p:nvSpPr>
         <p:spPr>
           <a:xfrm>
-            <a:off x="731520" y="4069080"/>
+            <a:off x="731520" y="3611880"/>
             <a:ext cx="457200" cy="457200"/>
           </a:xfrm>
           <a:prstGeom prst="ellipse">
@@ -7983,7 +8543,7 @@
         </p:nvSpPr>
         <p:spPr>
           <a:xfrm>
-            <a:off x="731520" y="4069080"/>
+            <a:off x="731520" y="3611880"/>
             <a:ext cx="457200" cy="457200"/>
           </a:xfrm>
           <a:prstGeom prst="rect">
@@ -8022,8 +8582,8 @@
         </p:nvSpPr>
         <p:spPr>
           <a:xfrm>
-            <a:off x="1325880" y="3995928"/>
-            <a:ext cx="4517136" cy="2112264"/>
+            <a:off x="1325880" y="3538728"/>
+            <a:ext cx="4517136" cy="1655064"/>
           </a:xfrm>
           <a:prstGeom prst="rect">
             <a:avLst/>
@@ -8063,12 +8623,12 @@
         </p:nvSpPr>
         <p:spPr>
           <a:xfrm>
-            <a:off x="6208776" y="3886200"/>
-            <a:ext cx="5431536" cy="2331720"/>
+            <a:off x="6208776" y="3429000"/>
+            <a:ext cx="5431536" cy="1874520"/>
           </a:xfrm>
           <a:prstGeom prst="roundRect">
             <a:avLst>
-              <a:gd name="adj" fmla="val 3137"/>
+              <a:gd name="adj" fmla="val 3902"/>
             </a:avLst>
           </a:prstGeom>
           <a:solidFill>
@@ -8097,7 +8657,7 @@
         </p:nvSpPr>
         <p:spPr>
           <a:xfrm>
-            <a:off x="6391656" y="4069080"/>
+            <a:off x="6391656" y="3611880"/>
             <a:ext cx="457200" cy="457200"/>
           </a:xfrm>
           <a:prstGeom prst="ellipse">
@@ -8117,7 +8677,7 @@
         </p:nvSpPr>
         <p:spPr>
           <a:xfrm>
-            <a:off x="6391656" y="4069080"/>
+            <a:off x="6391656" y="3611880"/>
             <a:ext cx="457200" cy="457200"/>
           </a:xfrm>
           <a:prstGeom prst="rect">
@@ -8156,8 +8716,8 @@
         </p:nvSpPr>
         <p:spPr>
           <a:xfrm>
-            <a:off x="6986016" y="3995928"/>
-            <a:ext cx="4517136" cy="2112264"/>
+            <a:off x="6986016" y="3538728"/>
+            <a:ext cx="4517136" cy="1655064"/>
           </a:xfrm>
           <a:prstGeom prst="rect">
             <a:avLst/>
@@ -8186,6 +8746,92 @@
               <a:t>… soma ≤ 100%</a:t>
             </a:r>
             <a:endParaRPr lang="en-US" sz="1800" dirty="0"/>
+          </a:p>
+        </p:txBody>
+      </p:sp>
+      <p:sp>
+        <p:nvSpPr>
+          <p:cNvPr id="25" name="Shape 22"/>
+          <p:cNvSpPr/>
+          <p:nvPr/>
+        </p:nvSpPr>
+        <p:spPr>
+          <a:xfrm>
+            <a:off x="548640" y="5413248"/>
+            <a:ext cx="11091672" cy="868680"/>
+          </a:xfrm>
+          <a:prstGeom prst="roundRect">
+            <a:avLst>
+              <a:gd name="adj" fmla="val 8421"/>
+            </a:avLst>
+          </a:prstGeom>
+          <a:solidFill>
+            <a:srgbClr val="EEF3FA"/>
+          </a:solidFill>
+          <a:ln w="6350">
+            <a:solidFill>
+              <a:srgbClr val="D8E0EC"/>
+            </a:solidFill>
+            <a:prstDash val="solid"/>
+          </a:ln>
+        </p:spPr>
+      </p:sp>
+      <p:sp>
+        <p:nvSpPr>
+          <p:cNvPr id="26" name="Shape 23"/>
+          <p:cNvSpPr/>
+          <p:nvPr/>
+        </p:nvSpPr>
+        <p:spPr>
+          <a:xfrm>
+            <a:off x="548640" y="5413248"/>
+            <a:ext cx="91440" cy="868680"/>
+          </a:xfrm>
+          <a:prstGeom prst="rect">
+            <a:avLst/>
+          </a:prstGeom>
+          <a:solidFill>
+            <a:srgbClr val="F7A23B"/>
+          </a:solidFill>
+          <a:ln/>
+        </p:spPr>
+      </p:sp>
+      <p:sp>
+        <p:nvSpPr>
+          <p:cNvPr id="27" name="Text 24"/>
+          <p:cNvSpPr/>
+          <p:nvPr/>
+        </p:nvSpPr>
+        <p:spPr>
+          <a:xfrm>
+            <a:off x="777240" y="5458968"/>
+            <a:ext cx="10744200" cy="777240"/>
+          </a:xfrm>
+          <a:prstGeom prst="rect">
+            <a:avLst/>
+          </a:prstGeom>
+          <a:noFill/>
+          <a:ln/>
+        </p:spPr>
+        <p:txBody>
+          <a:bodyPr wrap="square" rtlCol="0" anchor="ctr"/>
+          <a:lstStyle/>
+          <a:p>
+            <a:pPr indent="0" marL="0">
+              <a:buNone/>
+            </a:pPr>
+            <a:r>
+              <a:rPr lang="en-US" sz="1500" dirty="0">
+                <a:solidFill>
+                  <a:srgbClr val="1F2937"/>
+                </a:solidFill>
+                <a:latin typeface="Arial" pitchFamily="34" charset="0"/>
+                <a:ea typeface="Arial" pitchFamily="34" charset="-122"/>
+                <a:cs typeface="Arial" pitchFamily="34" charset="-120"/>
+              </a:rPr>
+              <a:t>A lista traz as unidades e o percentual de cada uma, somando no máximo cem por cento. Descubra o procedimento exato da sua distribuidora antes do primeiro cliente.</a:t>
+            </a:r>
+            <a:endParaRPr lang="en-US" sz="1500" dirty="0"/>
           </a:p>
         </p:txBody>
       </p:sp>
@@ -8504,7 +9150,7 @@
         </p:nvSpPr>
         <p:spPr>
           <a:xfrm>
-            <a:off x="548640" y="2651760"/>
+            <a:off x="548640" y="2583180"/>
             <a:ext cx="2852928" cy="1463040"/>
           </a:xfrm>
           <a:prstGeom prst="chevron">
@@ -8529,7 +9175,7 @@
         </p:nvSpPr>
         <p:spPr>
           <a:xfrm>
-            <a:off x="868680" y="2651760"/>
+            <a:off x="868680" y="2583180"/>
             <a:ext cx="2331720" cy="1463040"/>
           </a:xfrm>
           <a:prstGeom prst="rect">
@@ -8570,7 +9216,7 @@
         </p:nvSpPr>
         <p:spPr>
           <a:xfrm>
-            <a:off x="3291840" y="2651760"/>
+            <a:off x="3291840" y="2583180"/>
             <a:ext cx="2852928" cy="1463040"/>
           </a:xfrm>
           <a:prstGeom prst="chevron">
@@ -8595,7 +9241,7 @@
         </p:nvSpPr>
         <p:spPr>
           <a:xfrm>
-            <a:off x="3611880" y="2651760"/>
+            <a:off x="3611880" y="2583180"/>
             <a:ext cx="2331720" cy="1463040"/>
           </a:xfrm>
           <a:prstGeom prst="rect">
@@ -8636,7 +9282,7 @@
         </p:nvSpPr>
         <p:spPr>
           <a:xfrm>
-            <a:off x="6035040" y="2651760"/>
+            <a:off x="6035040" y="2583180"/>
             <a:ext cx="2852928" cy="1463040"/>
           </a:xfrm>
           <a:prstGeom prst="chevron">
@@ -8661,7 +9307,7 @@
         </p:nvSpPr>
         <p:spPr>
           <a:xfrm>
-            <a:off x="6355080" y="2651760"/>
+            <a:off x="6355080" y="2583180"/>
             <a:ext cx="2331720" cy="1463040"/>
           </a:xfrm>
           <a:prstGeom prst="rect">
@@ -8702,7 +9348,7 @@
         </p:nvSpPr>
         <p:spPr>
           <a:xfrm>
-            <a:off x="8778240" y="2651760"/>
+            <a:off x="8778240" y="2583180"/>
             <a:ext cx="2852928" cy="1463040"/>
           </a:xfrm>
           <a:prstGeom prst="chevron">
@@ -8727,7 +9373,7 @@
         </p:nvSpPr>
         <p:spPr>
           <a:xfrm>
-            <a:off x="9098280" y="2651760"/>
+            <a:off x="9098280" y="2583180"/>
             <a:ext cx="2331720" cy="1463040"/>
           </a:xfrm>
           <a:prstGeom prst="rect">
@@ -8755,6 +9401,92 @@
                 <a:cs typeface="Arial" pitchFamily="34" charset="-120"/>
               </a:rPr>
               <a:t>confirmar na fatura</a:t>
+            </a:r>
+            <a:endParaRPr lang="en-US" sz="1500" dirty="0"/>
+          </a:p>
+        </p:txBody>
+      </p:sp>
+      <p:sp>
+        <p:nvSpPr>
+          <p:cNvPr id="17" name="Shape 14"/>
+          <p:cNvSpPr/>
+          <p:nvPr/>
+        </p:nvSpPr>
+        <p:spPr>
+          <a:xfrm>
+            <a:off x="548640" y="5413248"/>
+            <a:ext cx="11091672" cy="868680"/>
+          </a:xfrm>
+          <a:prstGeom prst="roundRect">
+            <a:avLst>
+              <a:gd name="adj" fmla="val 8421"/>
+            </a:avLst>
+          </a:prstGeom>
+          <a:solidFill>
+            <a:srgbClr val="EEF3FA"/>
+          </a:solidFill>
+          <a:ln w="6350">
+            <a:solidFill>
+              <a:srgbClr val="D8E0EC"/>
+            </a:solidFill>
+            <a:prstDash val="solid"/>
+          </a:ln>
+        </p:spPr>
+      </p:sp>
+      <p:sp>
+        <p:nvSpPr>
+          <p:cNvPr id="18" name="Shape 15"/>
+          <p:cNvSpPr/>
+          <p:nvPr/>
+        </p:nvSpPr>
+        <p:spPr>
+          <a:xfrm>
+            <a:off x="548640" y="5413248"/>
+            <a:ext cx="91440" cy="868680"/>
+          </a:xfrm>
+          <a:prstGeom prst="rect">
+            <a:avLst/>
+          </a:prstGeom>
+          <a:solidFill>
+            <a:srgbClr val="F7A23B"/>
+          </a:solidFill>
+          <a:ln/>
+        </p:spPr>
+      </p:sp>
+      <p:sp>
+        <p:nvSpPr>
+          <p:cNvPr id="19" name="Text 16"/>
+          <p:cNvSpPr/>
+          <p:nvPr/>
+        </p:nvSpPr>
+        <p:spPr>
+          <a:xfrm>
+            <a:off x="777240" y="5458968"/>
+            <a:ext cx="10744200" cy="777240"/>
+          </a:xfrm>
+          <a:prstGeom prst="rect">
+            <a:avLst/>
+          </a:prstGeom>
+          <a:noFill/>
+          <a:ln/>
+        </p:spPr>
+        <p:txBody>
+          <a:bodyPr wrap="square" rtlCol="0" anchor="ctr"/>
+          <a:lstStyle/>
+          <a:p>
+            <a:pPr indent="0" marL="0">
+              <a:buNone/>
+            </a:pPr>
+            <a:r>
+              <a:rPr lang="en-US" sz="1500" dirty="0">
+                <a:solidFill>
+                  <a:srgbClr val="1F2937"/>
+                </a:solidFill>
+                <a:latin typeface="Arial" pitchFamily="34" charset="0"/>
+                <a:ea typeface="Arial" pitchFamily="34" charset="-122"/>
+                <a:cs typeface="Arial" pitchFamily="34" charset="-120"/>
+              </a:rPr>
+              <a:t>Atualize uma vez por ciclo, num dia fixo: consolide entradas e saídas, envie, acompanhe o protocolo e confira na fatura seguinte.</a:t>
             </a:r>
             <a:endParaRPr lang="en-US" sz="1500" dirty="0"/>
           </a:p>
@@ -9076,11 +9808,11 @@
         <p:spPr>
           <a:xfrm>
             <a:off x="548640" y="1325880"/>
-            <a:ext cx="11091672" cy="4937760"/>
+            <a:ext cx="11091672" cy="3977640"/>
           </a:xfrm>
           <a:prstGeom prst="roundRect">
             <a:avLst>
-              <a:gd name="adj" fmla="val 1852"/>
+              <a:gd name="adj" fmla="val 2299"/>
             </a:avLst>
           </a:prstGeom>
           <a:solidFill>
@@ -9098,7 +9830,7 @@
         <p:spPr>
           <a:xfrm>
             <a:off x="914400" y="1554480"/>
-            <a:ext cx="10360152" cy="4480560"/>
+            <a:ext cx="10360152" cy="3520440"/>
           </a:xfrm>
           <a:prstGeom prst="rect">
             <a:avLst/>
@@ -9150,6 +9882,92 @@
               <a:t>Ação: vender a cota liberada rápido ou redistribuir aos clientes com espaço</a:t>
             </a:r>
             <a:endParaRPr lang="en-US" sz="2400" dirty="0"/>
+          </a:p>
+        </p:txBody>
+      </p:sp>
+      <p:sp>
+        <p:nvSpPr>
+          <p:cNvPr id="11" name="Shape 8"/>
+          <p:cNvSpPr/>
+          <p:nvPr/>
+        </p:nvSpPr>
+        <p:spPr>
+          <a:xfrm>
+            <a:off x="548640" y="5413248"/>
+            <a:ext cx="11091672" cy="868680"/>
+          </a:xfrm>
+          <a:prstGeom prst="roundRect">
+            <a:avLst>
+              <a:gd name="adj" fmla="val 8421"/>
+            </a:avLst>
+          </a:prstGeom>
+          <a:solidFill>
+            <a:srgbClr val="EEF3FA"/>
+          </a:solidFill>
+          <a:ln w="6350">
+            <a:solidFill>
+              <a:srgbClr val="D8E0EC"/>
+            </a:solidFill>
+            <a:prstDash val="solid"/>
+          </a:ln>
+        </p:spPr>
+      </p:sp>
+      <p:sp>
+        <p:nvSpPr>
+          <p:cNvPr id="12" name="Shape 9"/>
+          <p:cNvSpPr/>
+          <p:nvPr/>
+        </p:nvSpPr>
+        <p:spPr>
+          <a:xfrm>
+            <a:off x="548640" y="5413248"/>
+            <a:ext cx="91440" cy="868680"/>
+          </a:xfrm>
+          <a:prstGeom prst="rect">
+            <a:avLst/>
+          </a:prstGeom>
+          <a:solidFill>
+            <a:srgbClr val="F7A23B"/>
+          </a:solidFill>
+          <a:ln/>
+        </p:spPr>
+      </p:sp>
+      <p:sp>
+        <p:nvSpPr>
+          <p:cNvPr id="13" name="Text 10"/>
+          <p:cNvSpPr/>
+          <p:nvPr/>
+        </p:nvSpPr>
+        <p:spPr>
+          <a:xfrm>
+            <a:off x="777240" y="5458968"/>
+            <a:ext cx="10744200" cy="777240"/>
+          </a:xfrm>
+          <a:prstGeom prst="rect">
+            <a:avLst/>
+          </a:prstGeom>
+          <a:noFill/>
+          <a:ln/>
+        </p:spPr>
+        <p:txBody>
+          <a:bodyPr wrap="square" rtlCol="0" anchor="ctr"/>
+          <a:lstStyle/>
+          <a:p>
+            <a:pPr indent="0" marL="0">
+              <a:buNone/>
+            </a:pPr>
+            <a:r>
+              <a:rPr lang="en-US" sz="1500" dirty="0">
+                <a:solidFill>
+                  <a:srgbClr val="1F2937"/>
+                </a:solidFill>
+                <a:latin typeface="Arial" pitchFamily="34" charset="0"/>
+                <a:ea typeface="Arial" pitchFamily="34" charset="-122"/>
+                <a:cs typeface="Arial" pitchFamily="34" charset="-120"/>
+              </a:rPr>
+              <a:t>Toda saída abre um buraco no rateio. Tenha uma fila de clientes para preenchê-lo rápido.</a:t>
+            </a:r>
+            <a:endParaRPr lang="en-US" sz="1500" dirty="0"/>
           </a:p>
         </p:txBody>
       </p:sp>
@@ -9469,11 +10287,11 @@
         <p:spPr>
           <a:xfrm>
             <a:off x="548640" y="1325880"/>
-            <a:ext cx="3544824" cy="2331720"/>
+            <a:ext cx="3544824" cy="1874520"/>
           </a:xfrm>
           <a:prstGeom prst="roundRect">
             <a:avLst>
-              <a:gd name="adj" fmla="val 3137"/>
+              <a:gd name="adj" fmla="val 3902"/>
             </a:avLst>
           </a:prstGeom>
           <a:solidFill>
@@ -9562,7 +10380,7 @@
         <p:spPr>
           <a:xfrm>
             <a:off x="1325880" y="1435608"/>
-            <a:ext cx="2630424" cy="2112264"/>
+            <a:ext cx="2630424" cy="1655064"/>
           </a:xfrm>
           <a:prstGeom prst="rect">
             <a:avLst/>
@@ -9603,11 +10421,11 @@
         <p:spPr>
           <a:xfrm>
             <a:off x="4322064" y="1325880"/>
-            <a:ext cx="3544824" cy="2331720"/>
+            <a:ext cx="3544824" cy="1874520"/>
           </a:xfrm>
           <a:prstGeom prst="roundRect">
             <a:avLst>
-              <a:gd name="adj" fmla="val 3137"/>
+              <a:gd name="adj" fmla="val 3902"/>
             </a:avLst>
           </a:prstGeom>
           <a:solidFill>
@@ -9696,7 +10514,7 @@
         <p:spPr>
           <a:xfrm>
             <a:off x="5099304" y="1435608"/>
-            <a:ext cx="2630424" cy="2112264"/>
+            <a:ext cx="2630424" cy="1655064"/>
           </a:xfrm>
           <a:prstGeom prst="rect">
             <a:avLst/>
@@ -9737,11 +10555,11 @@
         <p:spPr>
           <a:xfrm>
             <a:off x="8095488" y="1325880"/>
-            <a:ext cx="3544824" cy="2331720"/>
+            <a:ext cx="3544824" cy="1874520"/>
           </a:xfrm>
           <a:prstGeom prst="roundRect">
             <a:avLst>
-              <a:gd name="adj" fmla="val 3137"/>
+              <a:gd name="adj" fmla="val 3902"/>
             </a:avLst>
           </a:prstGeom>
           <a:solidFill>
@@ -9830,7 +10648,7 @@
         <p:spPr>
           <a:xfrm>
             <a:off x="8872728" y="1435608"/>
-            <a:ext cx="2630424" cy="2112264"/>
+            <a:ext cx="2630424" cy="1655064"/>
           </a:xfrm>
           <a:prstGeom prst="rect">
             <a:avLst/>
@@ -9870,12 +10688,12 @@
         </p:nvSpPr>
         <p:spPr>
           <a:xfrm>
-            <a:off x="548640" y="3886200"/>
-            <a:ext cx="3544824" cy="2331720"/>
+            <a:off x="548640" y="3429000"/>
+            <a:ext cx="3544824" cy="1874520"/>
           </a:xfrm>
           <a:prstGeom prst="roundRect">
             <a:avLst>
-              <a:gd name="adj" fmla="val 3137"/>
+              <a:gd name="adj" fmla="val 3902"/>
             </a:avLst>
           </a:prstGeom>
           <a:solidFill>
@@ -9904,7 +10722,7 @@
         </p:nvSpPr>
         <p:spPr>
           <a:xfrm>
-            <a:off x="731520" y="4069080"/>
+            <a:off x="731520" y="3611880"/>
             <a:ext cx="457200" cy="457200"/>
           </a:xfrm>
           <a:prstGeom prst="ellipse">
@@ -9924,7 +10742,7 @@
         </p:nvSpPr>
         <p:spPr>
           <a:xfrm>
-            <a:off x="731520" y="4069080"/>
+            <a:off x="731520" y="3611880"/>
             <a:ext cx="457200" cy="457200"/>
           </a:xfrm>
           <a:prstGeom prst="rect">
@@ -9963,8 +10781,8 @@
         </p:nvSpPr>
         <p:spPr>
           <a:xfrm>
-            <a:off x="1325880" y="3995928"/>
-            <a:ext cx="2630424" cy="2112264"/>
+            <a:off x="1325880" y="3538728"/>
+            <a:ext cx="2630424" cy="1655064"/>
           </a:xfrm>
           <a:prstGeom prst="rect">
             <a:avLst/>
@@ -10004,12 +10822,12 @@
         </p:nvSpPr>
         <p:spPr>
           <a:xfrm>
-            <a:off x="4322064" y="3886200"/>
-            <a:ext cx="3544824" cy="2331720"/>
+            <a:off x="4322064" y="3429000"/>
+            <a:ext cx="3544824" cy="1874520"/>
           </a:xfrm>
           <a:prstGeom prst="roundRect">
             <a:avLst>
-              <a:gd name="adj" fmla="val 3137"/>
+              <a:gd name="adj" fmla="val 3902"/>
             </a:avLst>
           </a:prstGeom>
           <a:solidFill>
@@ -10038,7 +10856,7 @@
         </p:nvSpPr>
         <p:spPr>
           <a:xfrm>
-            <a:off x="4504944" y="4069080"/>
+            <a:off x="4504944" y="3611880"/>
             <a:ext cx="457200" cy="457200"/>
           </a:xfrm>
           <a:prstGeom prst="ellipse">
@@ -10058,7 +10876,7 @@
         </p:nvSpPr>
         <p:spPr>
           <a:xfrm>
-            <a:off x="4504944" y="4069080"/>
+            <a:off x="4504944" y="3611880"/>
             <a:ext cx="457200" cy="457200"/>
           </a:xfrm>
           <a:prstGeom prst="rect">
@@ -10097,8 +10915,8 @@
         </p:nvSpPr>
         <p:spPr>
           <a:xfrm>
-            <a:off x="5099304" y="3995928"/>
-            <a:ext cx="2630424" cy="2112264"/>
+            <a:off x="5099304" y="3538728"/>
+            <a:ext cx="2630424" cy="1655064"/>
           </a:xfrm>
           <a:prstGeom prst="rect">
             <a:avLst/>
@@ -10127,6 +10945,92 @@
               <a:t>guardar protocolos</a:t>
             </a:r>
             <a:endParaRPr lang="en-US" sz="1800" dirty="0"/>
+          </a:p>
+        </p:txBody>
+      </p:sp>
+      <p:sp>
+        <p:nvSpPr>
+          <p:cNvPr id="29" name="Shape 26"/>
+          <p:cNvSpPr/>
+          <p:nvPr/>
+        </p:nvSpPr>
+        <p:spPr>
+          <a:xfrm>
+            <a:off x="548640" y="5413248"/>
+            <a:ext cx="11091672" cy="868680"/>
+          </a:xfrm>
+          <a:prstGeom prst="roundRect">
+            <a:avLst>
+              <a:gd name="adj" fmla="val 8421"/>
+            </a:avLst>
+          </a:prstGeom>
+          <a:solidFill>
+            <a:srgbClr val="EEF3FA"/>
+          </a:solidFill>
+          <a:ln w="6350">
+            <a:solidFill>
+              <a:srgbClr val="D8E0EC"/>
+            </a:solidFill>
+            <a:prstDash val="solid"/>
+          </a:ln>
+        </p:spPr>
+      </p:sp>
+      <p:sp>
+        <p:nvSpPr>
+          <p:cNvPr id="30" name="Shape 27"/>
+          <p:cNvSpPr/>
+          <p:nvPr/>
+        </p:nvSpPr>
+        <p:spPr>
+          <a:xfrm>
+            <a:off x="548640" y="5413248"/>
+            <a:ext cx="91440" cy="868680"/>
+          </a:xfrm>
+          <a:prstGeom prst="rect">
+            <a:avLst/>
+          </a:prstGeom>
+          <a:solidFill>
+            <a:srgbClr val="F7A23B"/>
+          </a:solidFill>
+          <a:ln/>
+        </p:spPr>
+      </p:sp>
+      <p:sp>
+        <p:nvSpPr>
+          <p:cNvPr id="31" name="Text 28"/>
+          <p:cNvSpPr/>
+          <p:nvPr/>
+        </p:nvSpPr>
+        <p:spPr>
+          <a:xfrm>
+            <a:off x="777240" y="5458968"/>
+            <a:ext cx="10744200" cy="777240"/>
+          </a:xfrm>
+          <a:prstGeom prst="rect">
+            <a:avLst/>
+          </a:prstGeom>
+          <a:noFill/>
+          <a:ln/>
+        </p:spPr>
+        <p:txBody>
+          <a:bodyPr wrap="square" rtlCol="0" anchor="ctr"/>
+          <a:lstStyle/>
+          <a:p>
+            <a:pPr indent="0" marL="0">
+              <a:buNone/>
+            </a:pPr>
+            <a:r>
+              <a:rPr lang="en-US" sz="1500" dirty="0">
+                <a:solidFill>
+                  <a:srgbClr val="1F2937"/>
+                </a:solidFill>
+                <a:latin typeface="Arial" pitchFamily="34" charset="0"/>
+                <a:ea typeface="Arial" pitchFamily="34" charset="-122"/>
+                <a:cs typeface="Arial" pitchFamily="34" charset="-120"/>
+              </a:rPr>
+              <a:t>Cuidado com as casas decimais, com a concentração acima de vinte e cinco por cento e guarde todos os protocolos.</a:t>
+            </a:r>
+            <a:endParaRPr lang="en-US" sz="1500" dirty="0"/>
           </a:p>
         </p:txBody>
       </p:sp>
@@ -12249,7 +13153,7 @@
         <p:spPr>
           <a:xfrm>
             <a:off x="822960" y="2286000"/>
-            <a:ext cx="2965704" cy="3749040"/>
+            <a:ext cx="2965704" cy="2286000"/>
           </a:xfrm>
           <a:prstGeom prst="rect">
             <a:avLst/>
@@ -12309,6 +13213,65 @@
       <p:sp>
         <p:nvSpPr>
           <p:cNvPr id="13" name="Shape 10"/>
+          <p:cNvSpPr/>
+          <p:nvPr/>
+        </p:nvSpPr>
+        <p:spPr>
+          <a:xfrm>
+            <a:off x="822960" y="4663440"/>
+            <a:ext cx="2965704" cy="18288"/>
+          </a:xfrm>
+          <a:prstGeom prst="rect">
+            <a:avLst/>
+          </a:prstGeom>
+          <a:solidFill>
+            <a:srgbClr val="D8E0EC"/>
+          </a:solidFill>
+          <a:ln/>
+        </p:spPr>
+      </p:sp>
+      <p:sp>
+        <p:nvSpPr>
+          <p:cNvPr id="14" name="Text 11"/>
+          <p:cNvSpPr/>
+          <p:nvPr/>
+        </p:nvSpPr>
+        <p:spPr>
+          <a:xfrm>
+            <a:off x="822960" y="4754880"/>
+            <a:ext cx="2965704" cy="1371600"/>
+          </a:xfrm>
+          <a:prstGeom prst="rect">
+            <a:avLst/>
+          </a:prstGeom>
+          <a:noFill/>
+          <a:ln/>
+        </p:spPr>
+        <p:txBody>
+          <a:bodyPr wrap="square" rtlCol="0" anchor="t"/>
+          <a:lstStyle/>
+          <a:p>
+            <a:pPr indent="0" marL="0">
+              <a:buNone/>
+            </a:pPr>
+            <a:r>
+              <a:rPr lang="en-US" sz="1100" i="1" dirty="0">
+                <a:solidFill>
+                  <a:srgbClr val="64748B"/>
+                </a:solidFill>
+                <a:latin typeface="Arial" pitchFamily="34" charset="0"/>
+                <a:ea typeface="Arial" pitchFamily="34" charset="-122"/>
+                <a:cs typeface="Arial" pitchFamily="34" charset="-120"/>
+              </a:rPr>
+              <a:t>Mantenha a ocupação entre noventa e noventa e oito por cento da energia disponível. A plataforma ajuda com duas travas: não deixa vincular acima do saldo e acusa alerta crítico se a alocação passar da energia disponível.</a:t>
+            </a:r>
+            <a:endParaRPr lang="en-US" sz="1100" dirty="0"/>
+          </a:p>
+        </p:txBody>
+      </p:sp>
+      <p:sp>
+        <p:nvSpPr>
+          <p:cNvPr id="15" name="Shape 12"/>
           <p:cNvSpPr/>
           <p:nvPr/>
         </p:nvSpPr>
@@ -12342,7 +13305,7 @@
       </p:sp>
       <p:sp>
         <p:nvSpPr>
-          <p:cNvPr id="14" name="Shape 11"/>
+          <p:cNvPr id="16" name="Shape 13"/>
           <p:cNvSpPr/>
           <p:nvPr/>
         </p:nvSpPr>
@@ -12362,7 +13325,7 @@
       </p:sp>
       <p:sp>
         <p:nvSpPr>
-          <p:cNvPr id="15" name="Text 12"/>
+          <p:cNvPr id="17" name="Text 14"/>
           <p:cNvSpPr/>
           <p:nvPr/>
         </p:nvSpPr>
@@ -12403,14 +13366,14 @@
       </p:sp>
       <p:sp>
         <p:nvSpPr>
-          <p:cNvPr id="16" name="Text 13"/>
+          <p:cNvPr id="18" name="Text 15"/>
           <p:cNvSpPr/>
           <p:nvPr/>
         </p:nvSpPr>
         <p:spPr>
           <a:xfrm>
             <a:off x="4611624" y="2286000"/>
-            <a:ext cx="2965704" cy="3749040"/>
+            <a:ext cx="2965704" cy="2286000"/>
           </a:xfrm>
           <a:prstGeom prst="rect">
             <a:avLst/>
@@ -12469,7 +13432,66 @@
       </p:sp>
       <p:sp>
         <p:nvSpPr>
-          <p:cNvPr id="17" name="Shape 14"/>
+          <p:cNvPr id="19" name="Shape 16"/>
+          <p:cNvSpPr/>
+          <p:nvPr/>
+        </p:nvSpPr>
+        <p:spPr>
+          <a:xfrm>
+            <a:off x="4611624" y="4663440"/>
+            <a:ext cx="2965704" cy="18288"/>
+          </a:xfrm>
+          <a:prstGeom prst="rect">
+            <a:avLst/>
+          </a:prstGeom>
+          <a:solidFill>
+            <a:srgbClr val="D8E0EC"/>
+          </a:solidFill>
+          <a:ln/>
+        </p:spPr>
+      </p:sp>
+      <p:sp>
+        <p:nvSpPr>
+          <p:cNvPr id="20" name="Text 17"/>
+          <p:cNvSpPr/>
+          <p:nvPr/>
+        </p:nvSpPr>
+        <p:spPr>
+          <a:xfrm>
+            <a:off x="4611624" y="4754880"/>
+            <a:ext cx="2965704" cy="1371600"/>
+          </a:xfrm>
+          <a:prstGeom prst="rect">
+            <a:avLst/>
+          </a:prstGeom>
+          <a:noFill/>
+          <a:ln/>
+        </p:spPr>
+        <p:txBody>
+          <a:bodyPr wrap="square" rtlCol="0" anchor="t"/>
+          <a:lstStyle/>
+          <a:p>
+            <a:pPr indent="0" marL="0">
+              <a:buNone/>
+            </a:pPr>
+            <a:r>
+              <a:rPr lang="en-US" sz="1300" i="1" dirty="0">
+                <a:solidFill>
+                  <a:srgbClr val="64748B"/>
+                </a:solidFill>
+                <a:latin typeface="Arial" pitchFamily="34" charset="0"/>
+                <a:ea typeface="Arial" pitchFamily="34" charset="-122"/>
+                <a:cs typeface="Arial" pitchFamily="34" charset="-120"/>
+              </a:rPr>
+              <a:t>Evite concentração: além do risco de GD três, um cliente grande que sai leva uma fatia da receita de uma vez.</a:t>
+            </a:r>
+            <a:endParaRPr lang="en-US" sz="1300" dirty="0"/>
+          </a:p>
+        </p:txBody>
+      </p:sp>
+      <p:sp>
+        <p:nvSpPr>
+          <p:cNvPr id="21" name="Shape 18"/>
           <p:cNvSpPr/>
           <p:nvPr/>
         </p:nvSpPr>
@@ -12503,7 +13525,7 @@
       </p:sp>
       <p:sp>
         <p:nvSpPr>
-          <p:cNvPr id="18" name="Shape 15"/>
+          <p:cNvPr id="22" name="Shape 19"/>
           <p:cNvSpPr/>
           <p:nvPr/>
         </p:nvSpPr>
@@ -12523,7 +13545,7 @@
       </p:sp>
       <p:sp>
         <p:nvSpPr>
-          <p:cNvPr id="19" name="Text 16"/>
+          <p:cNvPr id="23" name="Text 20"/>
           <p:cNvSpPr/>
           <p:nvPr/>
         </p:nvSpPr>
@@ -12564,14 +13586,14 @@
       </p:sp>
       <p:sp>
         <p:nvSpPr>
-          <p:cNvPr id="20" name="Text 17"/>
+          <p:cNvPr id="24" name="Text 21"/>
           <p:cNvSpPr/>
           <p:nvPr/>
         </p:nvSpPr>
         <p:spPr>
           <a:xfrm>
             <a:off x="8400288" y="2286000"/>
-            <a:ext cx="2965704" cy="3749040"/>
+            <a:ext cx="2965704" cy="2286000"/>
           </a:xfrm>
           <a:prstGeom prst="rect">
             <a:avLst/>
@@ -12593,7 +13615,7 @@
               <a:buChar char="●"/>
             </a:pPr>
             <a:r>
-              <a:rPr lang="en-US" sz="1700" dirty="0">
+              <a:rPr lang="en-US" sz="1300" dirty="0">
                 <a:solidFill>
                   <a:srgbClr val="1F2937"/>
                 </a:solidFill>
@@ -12603,7 +13625,7 @@
               </a:rPr>
               <a:t>Queda pontual (1 mês) → nada a fazer: rateio é %, todos recebem proporcionalmente menos</a:t>
             </a:r>
-            <a:endParaRPr lang="en-US" sz="1700" dirty="0"/>
+            <a:endParaRPr lang="en-US" sz="1300" dirty="0"/>
           </a:p>
           <a:p>
             <a:pPr marL="342900" indent="-342900">
@@ -12614,7 +13636,7 @@
               <a:buChar char="●"/>
             </a:pPr>
             <a:r>
-              <a:rPr lang="en-US" sz="1700" dirty="0">
+              <a:rPr lang="en-US" sz="1300" dirty="0">
                 <a:solidFill>
                   <a:srgbClr val="1F2937"/>
                 </a:solidFill>
@@ -12624,7 +13646,7 @@
               </a:rPr>
               <a:t>Queda por falha → acionar O&amp;M, comunicar clientes</a:t>
             </a:r>
-            <a:endParaRPr lang="en-US" sz="1700" dirty="0"/>
+            <a:endParaRPr lang="en-US" sz="1300" dirty="0"/>
           </a:p>
           <a:p>
             <a:pPr marL="342900" indent="-342900">
@@ -12635,7 +13657,7 @@
               <a:buChar char="●"/>
             </a:pPr>
             <a:r>
-              <a:rPr lang="en-US" sz="1700" dirty="0">
+              <a:rPr lang="en-US" sz="1300" dirty="0">
                 <a:solidFill>
                   <a:srgbClr val="1F2937"/>
                 </a:solidFill>
@@ -12645,7 +13667,66 @@
               </a:rPr>
               <a:t>Queda estrutural → reduzir disponível, rebalancear cotas, mover clientes para outra usina</a:t>
             </a:r>
-            <a:endParaRPr lang="en-US" sz="1700" dirty="0"/>
+            <a:endParaRPr lang="en-US" sz="1300" dirty="0"/>
+          </a:p>
+        </p:txBody>
+      </p:sp>
+      <p:sp>
+        <p:nvSpPr>
+          <p:cNvPr id="25" name="Shape 22"/>
+          <p:cNvSpPr/>
+          <p:nvPr/>
+        </p:nvSpPr>
+        <p:spPr>
+          <a:xfrm>
+            <a:off x="8400288" y="4663440"/>
+            <a:ext cx="2965704" cy="18288"/>
+          </a:xfrm>
+          <a:prstGeom prst="rect">
+            <a:avLst/>
+          </a:prstGeom>
+          <a:solidFill>
+            <a:srgbClr val="D8E0EC"/>
+          </a:solidFill>
+          <a:ln/>
+        </p:spPr>
+      </p:sp>
+      <p:sp>
+        <p:nvSpPr>
+          <p:cNvPr id="26" name="Text 23"/>
+          <p:cNvSpPr/>
+          <p:nvPr/>
+        </p:nvSpPr>
+        <p:spPr>
+          <a:xfrm>
+            <a:off x="8400288" y="4754880"/>
+            <a:ext cx="2965704" cy="1371600"/>
+          </a:xfrm>
+          <a:prstGeom prst="rect">
+            <a:avLst/>
+          </a:prstGeom>
+          <a:noFill/>
+          <a:ln/>
+        </p:spPr>
+        <p:txBody>
+          <a:bodyPr wrap="square" rtlCol="0" anchor="t"/>
+          <a:lstStyle/>
+          <a:p>
+            <a:pPr indent="0" marL="0">
+              <a:buNone/>
+            </a:pPr>
+            <a:r>
+              <a:rPr lang="en-US" sz="1300" i="1" dirty="0">
+                <a:solidFill>
+                  <a:srgbClr val="64748B"/>
+                </a:solidFill>
+                <a:latin typeface="Arial" pitchFamily="34" charset="0"/>
+                <a:ea typeface="Arial" pitchFamily="34" charset="-122"/>
+                <a:cs typeface="Arial" pitchFamily="34" charset="-120"/>
+              </a:rPr>
+              <a:t>Quando a geração cai, a ação depende da causa: uma queda pontual não exige nada, uma falha exige manutenção e uma queda estrutural exige rebalancear as cotas.</a:t>
+            </a:r>
+            <a:endParaRPr lang="en-US" sz="1300" dirty="0"/>
           </a:p>
         </p:txBody>
       </p:sp>
@@ -12965,11 +14046,11 @@
         <p:spPr>
           <a:xfrm>
             <a:off x="548640" y="1325880"/>
-            <a:ext cx="11091672" cy="4937760"/>
+            <a:ext cx="11091672" cy="3977640"/>
           </a:xfrm>
           <a:prstGeom prst="roundRect">
             <a:avLst>
-              <a:gd name="adj" fmla="val 1852"/>
+              <a:gd name="adj" fmla="val 2299"/>
             </a:avLst>
           </a:prstGeom>
           <a:solidFill>
@@ -12987,7 +14068,7 @@
         <p:spPr>
           <a:xfrm>
             <a:off x="914400" y="1554480"/>
-            <a:ext cx="10360152" cy="4480560"/>
+            <a:ext cx="10360152" cy="3520440"/>
           </a:xfrm>
           <a:prstGeom prst="rect">
             <a:avLst/>
@@ -13039,6 +14120,92 @@
               <a:t>ex.: 6 empresas (~20.000) + 70 residências (~28.000) + saldo para fila</a:t>
             </a:r>
             <a:endParaRPr lang="en-US" sz="2400" dirty="0"/>
+          </a:p>
+        </p:txBody>
+      </p:sp>
+      <p:sp>
+        <p:nvSpPr>
+          <p:cNvPr id="11" name="Shape 8"/>
+          <p:cNvSpPr/>
+          <p:nvPr/>
+        </p:nvSpPr>
+        <p:spPr>
+          <a:xfrm>
+            <a:off x="548640" y="5413248"/>
+            <a:ext cx="11091672" cy="868680"/>
+          </a:xfrm>
+          <a:prstGeom prst="roundRect">
+            <a:avLst>
+              <a:gd name="adj" fmla="val 8421"/>
+            </a:avLst>
+          </a:prstGeom>
+          <a:solidFill>
+            <a:srgbClr val="EEF3FA"/>
+          </a:solidFill>
+          <a:ln w="6350">
+            <a:solidFill>
+              <a:srgbClr val="D8E0EC"/>
+            </a:solidFill>
+            <a:prstDash val="solid"/>
+          </a:ln>
+        </p:spPr>
+      </p:sp>
+      <p:sp>
+        <p:nvSpPr>
+          <p:cNvPr id="12" name="Shape 9"/>
+          <p:cNvSpPr/>
+          <p:nvPr/>
+        </p:nvSpPr>
+        <p:spPr>
+          <a:xfrm>
+            <a:off x="548640" y="5413248"/>
+            <a:ext cx="91440" cy="868680"/>
+          </a:xfrm>
+          <a:prstGeom prst="rect">
+            <a:avLst/>
+          </a:prstGeom>
+          <a:solidFill>
+            <a:srgbClr val="F7A23B"/>
+          </a:solidFill>
+          <a:ln/>
+        </p:spPr>
+      </p:sp>
+      <p:sp>
+        <p:nvSpPr>
+          <p:cNvPr id="13" name="Text 10"/>
+          <p:cNvSpPr/>
+          <p:nvPr/>
+        </p:nvSpPr>
+        <p:spPr>
+          <a:xfrm>
+            <a:off x="777240" y="5458968"/>
+            <a:ext cx="10744200" cy="777240"/>
+          </a:xfrm>
+          <a:prstGeom prst="rect">
+            <a:avLst/>
+          </a:prstGeom>
+          <a:noFill/>
+          <a:ln/>
+        </p:spPr>
+        <p:txBody>
+          <a:bodyPr wrap="square" rtlCol="0" anchor="ctr"/>
+          <a:lstStyle/>
+          <a:p>
+            <a:pPr indent="0" marL="0">
+              <a:buNone/>
+            </a:pPr>
+            <a:r>
+              <a:rPr lang="en-US" sz="1500" dirty="0">
+                <a:solidFill>
+                  <a:srgbClr val="1F2937"/>
+                </a:solidFill>
+                <a:latin typeface="Arial" pitchFamily="34" charset="0"/>
+                <a:ea typeface="Arial" pitchFamily="34" charset="-122"/>
+                <a:cs typeface="Arial" pitchFamily="34" charset="-120"/>
+              </a:rPr>
+              <a:t>Cada usina deve ter um plano de ocupação, e o time comercial vende olhando para ele.</a:t>
+            </a:r>
+            <a:endParaRPr lang="en-US" sz="1500" dirty="0"/>
           </a:p>
         </p:txBody>
       </p:sp>
@@ -15211,7 +16378,7 @@
                 <a:ea typeface="Arial" pitchFamily="34" charset="-122"/>
                 <a:cs typeface="Arial" pitchFamily="34" charset="-120"/>
               </a:rPr>
-              <a:t>Proposta aprovada → Contrato (dados vêm da proposta) → status Emitido/Assinado</a:t>
+              <a:t>Marque a proposta como aprovada e gere o contrato. Os dados vêm da proposta; complete o cadastro e registre a assinatura.</a:t>
             </a:r>
             <a:endParaRPr lang="en-US" sz="1500" dirty="0"/>
           </a:p>
@@ -15262,7 +16429,7 @@
                 <a:ea typeface="Arial" pitchFamily="34" charset="-122"/>
                 <a:cs typeface="Arial" pitchFamily="34" charset="-120"/>
               </a:rPr>
-              <a:t>Vínculo = UC + usina + energia alocada (kWh) · atualiza a alocação da usina na hora</a:t>
+              <a:t>Na unidade consumidora, crie o vínculo com a usina e informe a energia alocada. O saldo da usina cai na hora.</a:t>
             </a:r>
             <a:endParaRPr lang="en-US" sz="1500" dirty="0"/>
           </a:p>
@@ -15313,7 +16480,7 @@
                 <a:ea typeface="Arial" pitchFamily="34" charset="-122"/>
                 <a:cs typeface="Arial" pitchFamily="34" charset="-120"/>
               </a:rPr>
-              <a:t>% de rateio = energia alocada ÷ geração média considerada</a:t>
+              <a:t>Abra a usina, veja os clientes vinculados e calcule na planilha o percentual de rateio de cada um.</a:t>
             </a:r>
             <a:endParaRPr lang="en-US" sz="1500" dirty="0"/>
           </a:p>
@@ -15364,7 +16531,7 @@
                 <a:ea typeface="Arial" pitchFamily="34" charset="-122"/>
                 <a:cs typeface="Arial" pitchFamily="34" charset="-120"/>
               </a:rPr>
-              <a:t>Aba Acesso → convite por e-mail + link para WhatsApp → cliente cria a senha</a:t>
+              <a:t>Na aba Acesso do cliente, gere o convite: ele recebe o e-mail de ativação e cria a própria senha.</a:t>
             </a:r>
             <a:endParaRPr lang="en-US" sz="1500" dirty="0"/>
           </a:p>
@@ -16567,7 +17734,7 @@
                 <a:ea typeface="Arial" pitchFamily="34" charset="-122"/>
                 <a:cs typeface="Arial" pitchFamily="34" charset="-120"/>
               </a:rPr>
-              <a:t>Meta: 90–98% · maior cliente &lt; 25% (idealmente &lt; 15%)</a:t>
+              <a:t>Na planilha de ocupação, some as cotas: a meta é entre noventa e noventa e oito por cento, sem cliente acima de vinte e cinco.</a:t>
             </a:r>
             <a:endParaRPr lang="en-US" sz="1500" dirty="0"/>
           </a:p>
@@ -16618,7 +17785,7 @@
                 <a:ea typeface="Arial" pitchFamily="34" charset="-122"/>
                 <a:cs typeface="Arial" pitchFamily="34" charset="-120"/>
               </a:rPr>
-              <a:t>Vincule e acompanhe o saldo na Gestão de Energia</a:t>
+              <a:t>Vincule os clientes e acompanhe o saldo em Gestão de Energia.</a:t>
             </a:r>
             <a:endParaRPr lang="en-US" sz="1500" dirty="0"/>
           </a:p>
@@ -16669,7 +17836,7 @@
                 <a:ea typeface="Arial" pitchFamily="34" charset="-122"/>
                 <a:cs typeface="Arial" pitchFamily="34" charset="-120"/>
               </a:rPr>
-              <a:t>Trava 1: vínculo recusado acima do saldo</a:t>
+              <a:t>Tente vincular uma cota maior que o saldo: o vínculo é recusado.</a:t>
             </a:r>
             <a:endParaRPr lang="en-US" sz="1500" dirty="0"/>
           </a:p>
@@ -16720,7 +17887,7 @@
                 <a:ea typeface="Arial" pitchFamily="34" charset="-122"/>
                 <a:cs typeface="Arial" pitchFamily="34" charset="-120"/>
               </a:rPr>
-              <a:t>Trava 2: disponível &lt; alocada → alerta crítico (Escanear Agora)</a:t>
+              <a:t>Registre uma geração menor que a energia alocada e clique em Escanear Agora, em Alertas Operacionais: aparece o alerta crítico.</a:t>
             </a:r>
             <a:endParaRPr lang="en-US" sz="1500" dirty="0"/>
           </a:p>
@@ -17199,7 +18366,7 @@
                 <a:ea typeface="Arial" pitchFamily="34" charset="-122"/>
                 <a:cs typeface="Arial" pitchFamily="34" charset="-120"/>
               </a:rPr>
-              <a:t>Resolva a causa → nova varredura → o alerta se resolve sozinho</a:t>
+              <a:t>Corrija a causa e escaneie de novo: o alerta se resolve sozinho.</a:t>
             </a:r>
             <a:endParaRPr lang="en-US" sz="1500" dirty="0"/>
           </a:p>
@@ -17521,11 +18688,11 @@
         <p:spPr>
           <a:xfrm>
             <a:off x="548640" y="1325880"/>
-            <a:ext cx="11091672" cy="4892040"/>
+            <a:ext cx="11091672" cy="3977640"/>
           </a:xfrm>
           <a:prstGeom prst="roundRect">
             <a:avLst>
-              <a:gd name="adj" fmla="val 1495"/>
+              <a:gd name="adj" fmla="val 1839"/>
             </a:avLst>
           </a:prstGeom>
           <a:solidFill>
@@ -17614,7 +18781,7 @@
         <p:spPr>
           <a:xfrm>
             <a:off x="1325880" y="1435608"/>
-            <a:ext cx="10177272" cy="4672584"/>
+            <a:ext cx="10177272" cy="3758184"/>
           </a:xfrm>
           <a:prstGeom prst="rect">
             <a:avLst/>
@@ -17643,6 +18810,92 @@
               <a:t>Contrato do cliente = adesão à entidade + regras da participação + gestão</a:t>
             </a:r>
             <a:endParaRPr lang="en-US" sz="1800" dirty="0"/>
+          </a:p>
+        </p:txBody>
+      </p:sp>
+      <p:sp>
+        <p:nvSpPr>
+          <p:cNvPr id="13" name="Shape 10"/>
+          <p:cNvSpPr/>
+          <p:nvPr/>
+        </p:nvSpPr>
+        <p:spPr>
+          <a:xfrm>
+            <a:off x="548640" y="5413248"/>
+            <a:ext cx="11091672" cy="868680"/>
+          </a:xfrm>
+          <a:prstGeom prst="roundRect">
+            <a:avLst>
+              <a:gd name="adj" fmla="val 8421"/>
+            </a:avLst>
+          </a:prstGeom>
+          <a:solidFill>
+            <a:srgbClr val="EEF3FA"/>
+          </a:solidFill>
+          <a:ln w="6350">
+            <a:solidFill>
+              <a:srgbClr val="D8E0EC"/>
+            </a:solidFill>
+            <a:prstDash val="solid"/>
+          </a:ln>
+        </p:spPr>
+      </p:sp>
+      <p:sp>
+        <p:nvSpPr>
+          <p:cNvPr id="14" name="Shape 11"/>
+          <p:cNvSpPr/>
+          <p:nvPr/>
+        </p:nvSpPr>
+        <p:spPr>
+          <a:xfrm>
+            <a:off x="548640" y="5413248"/>
+            <a:ext cx="91440" cy="868680"/>
+          </a:xfrm>
+          <a:prstGeom prst="rect">
+            <a:avLst/>
+          </a:prstGeom>
+          <a:solidFill>
+            <a:srgbClr val="F7A23B"/>
+          </a:solidFill>
+          <a:ln/>
+        </p:spPr>
+      </p:sp>
+      <p:sp>
+        <p:nvSpPr>
+          <p:cNvPr id="15" name="Text 12"/>
+          <p:cNvSpPr/>
+          <p:nvPr/>
+        </p:nvSpPr>
+        <p:spPr>
+          <a:xfrm>
+            <a:off x="777240" y="5458968"/>
+            <a:ext cx="10744200" cy="777240"/>
+          </a:xfrm>
+          <a:prstGeom prst="rect">
+            <a:avLst/>
+          </a:prstGeom>
+          <a:noFill/>
+          <a:ln/>
+        </p:spPr>
+        <p:txBody>
+          <a:bodyPr wrap="square" rtlCol="0" anchor="ctr"/>
+          <a:lstStyle/>
+          <a:p>
+            <a:pPr indent="0" marL="0">
+              <a:buNone/>
+            </a:pPr>
+            <a:r>
+              <a:rPr lang="en-US" sz="1500" dirty="0">
+                <a:solidFill>
+                  <a:srgbClr val="1F2937"/>
+                </a:solidFill>
+                <a:latin typeface="Arial" pitchFamily="34" charset="0"/>
+                <a:ea typeface="Arial" pitchFamily="34" charset="-122"/>
+                <a:cs typeface="Arial" pitchFamily="34" charset="-120"/>
+              </a:rPr>
+              <a:t>O cliente adere à entidade que detém a usina e a sua empresa faz a gestão. Isso precisa ficar claro no documento.</a:t>
+            </a:r>
+            <a:endParaRPr lang="en-US" sz="1500" dirty="0"/>
           </a:p>
         </p:txBody>
       </p:sp>
@@ -17847,7 +19100,7 @@
                 <a:ea typeface="Arial" pitchFamily="34" charset="-122"/>
                 <a:cs typeface="Arial" pitchFamily="34" charset="-120"/>
               </a:rPr>
-              <a:t>M6 · Fechamento</a:t>
+              <a:t>M6 · Teste rápido</a:t>
             </a:r>
             <a:endParaRPr lang="en-US" sz="900" dirty="0"/>
           </a:p>
@@ -17906,7 +19159,7 @@
                 <a:ea typeface="Arial" pitchFamily="34" charset="-122"/>
                 <a:cs typeface="Arial" pitchFamily="34" charset="-120"/>
               </a:rPr>
-              <a:t>FECHAMENTO DO MÓDULO</a:t>
+              <a:t>QUESTÕES 1–2 DE 6</a:t>
             </a:r>
             <a:endParaRPr lang="en-US" sz="1000" dirty="0"/>
           </a:p>
@@ -17947,7 +19200,7 @@
                 <a:ea typeface="Arial" pitchFamily="34" charset="-122"/>
                 <a:cs typeface="Arial" pitchFamily="34" charset="-120"/>
               </a:rPr>
-              <a:t>Pratique e entregue</a:t>
+              <a:t>Teste rápido</a:t>
             </a:r>
             <a:endParaRPr lang="en-US" sz="2600" dirty="0"/>
           </a:p>
@@ -17955,142 +19208,17 @@
       </p:sp>
       <p:sp>
         <p:nvSpPr>
-          <p:cNvPr id="9" name="Text 6"/>
+          <p:cNvPr id="9" name="Shape 6"/>
           <p:cNvSpPr/>
           <p:nvPr/>
         </p:nvSpPr>
         <p:spPr>
           <a:xfrm>
             <a:off x="548640" y="1325880"/>
-            <a:ext cx="5394960" cy="411480"/>
-          </a:xfrm>
-          <a:prstGeom prst="rect">
-            <a:avLst/>
-          </a:prstGeom>
-          <a:noFill/>
-          <a:ln/>
-        </p:spPr>
-        <p:txBody>
-          <a:bodyPr wrap="square" rtlCol="0" anchor="ctr"/>
-          <a:lstStyle/>
-          <a:p>
-            <a:pPr indent="0" marL="0">
-              <a:buNone/>
-            </a:pPr>
-            <a:r>
-              <a:rPr lang="en-US" sz="1600" b="1" dirty="0">
-                <a:solidFill>
-                  <a:srgbClr val="1B3A6B"/>
-                </a:solidFill>
-                <a:latin typeface="Arial" pitchFamily="34" charset="0"/>
-                <a:ea typeface="Arial" pitchFamily="34" charset="-122"/>
-                <a:cs typeface="Arial" pitchFamily="34" charset="-120"/>
-              </a:rPr>
-              <a:t>Exercícios</a:t>
-            </a:r>
-            <a:endParaRPr lang="en-US" sz="1600" dirty="0"/>
-          </a:p>
-        </p:txBody>
-      </p:sp>
-      <p:sp>
-        <p:nvSpPr>
-          <p:cNvPr id="10" name="Text 7"/>
-          <p:cNvSpPr/>
-          <p:nvPr/>
-        </p:nvSpPr>
-        <p:spPr>
-          <a:xfrm>
-            <a:off x="548640" y="1783080"/>
-            <a:ext cx="5394960" cy="4480560"/>
-          </a:xfrm>
-          <a:prstGeom prst="rect">
-            <a:avLst/>
-          </a:prstGeom>
-          <a:noFill/>
-          <a:ln/>
-        </p:spPr>
-        <p:txBody>
-          <a:bodyPr wrap="square" rtlCol="0" anchor="t">
-            <a:normAutofit/>
-          </a:bodyPr>
-          <a:lstStyle/>
-          <a:p>
-            <a:pPr indent="0" marL="0">
-              <a:spcAft>
-                <a:spcPts val="800"/>
-              </a:spcAft>
-              <a:buNone/>
-            </a:pPr>
-            <a:r>
-              <a:rPr lang="en-US" sz="1600" dirty="0">
-                <a:solidFill>
-                  <a:srgbClr val="1F2937"/>
-                </a:solidFill>
-                <a:latin typeface="Arial" pitchFamily="34" charset="0"/>
-                <a:ea typeface="Arial" pitchFamily="34" charset="-122"/>
-                <a:cs typeface="Arial" pitchFamily="34" charset="-120"/>
-              </a:rPr>
-              <a:t>1. Usina com 60.000 kWh disponíveis; já alocados 55.300 kWh. Um cliente pede 5.000 kWh. O que acontece na plataforma e o que você faz?</a:t>
-            </a:r>
-            <a:endParaRPr lang="en-US" sz="1600" dirty="0"/>
-          </a:p>
-          <a:p>
-            <a:pPr indent="0" marL="0">
-              <a:spcAft>
-                <a:spcPts val="800"/>
-              </a:spcAft>
-              <a:buNone/>
-            </a:pPr>
-            <a:r>
-              <a:rPr lang="en-US" sz="1600" dirty="0">
-                <a:solidFill>
-                  <a:srgbClr val="1F2937"/>
-                </a:solidFill>
-                <a:latin typeface="Arial" pitchFamily="34" charset="0"/>
-                <a:ea typeface="Arial" pitchFamily="34" charset="-122"/>
-                <a:cs typeface="Arial" pitchFamily="34" charset="-120"/>
-              </a:rPr>
-              <a:t>2. Cliente sai em março. Quais são os três passos operacionais?</a:t>
-            </a:r>
-            <a:endParaRPr lang="en-US" sz="1600" dirty="0"/>
-          </a:p>
-          <a:p>
-            <a:pPr indent="0" marL="0">
-              <a:spcAft>
-                <a:spcPts val="800"/>
-              </a:spcAft>
-              <a:buNone/>
-            </a:pPr>
-            <a:r>
-              <a:rPr lang="en-US" sz="1600" dirty="0">
-                <a:solidFill>
-                  <a:srgbClr val="1F2937"/>
-                </a:solidFill>
-                <a:latin typeface="Arial" pitchFamily="34" charset="0"/>
-                <a:ea typeface="Arial" pitchFamily="34" charset="-122"/>
-                <a:cs typeface="Arial" pitchFamily="34" charset="-120"/>
-              </a:rPr>
-              <a:t>3. Liste os dados pessoais que a sua operação coleta e a finalidade de cada um.</a:t>
-            </a:r>
-            <a:endParaRPr lang="en-US" sz="1600" dirty="0"/>
-          </a:p>
-        </p:txBody>
-      </p:sp>
-      <p:sp>
-        <p:nvSpPr>
-          <p:cNvPr id="11" name="Shape 8"/>
-          <p:cNvSpPr/>
-          <p:nvPr/>
-        </p:nvSpPr>
-        <p:spPr>
-          <a:xfrm>
-            <a:off x="6172200" y="1325880"/>
-            <a:ext cx="5468112" cy="4937760"/>
-          </a:xfrm>
-          <a:prstGeom prst="roundRect">
-            <a:avLst>
-              <a:gd name="adj" fmla="val 1852"/>
-            </a:avLst>
+            <a:ext cx="502920" cy="502920"/>
+          </a:xfrm>
+          <a:prstGeom prst="ellipse">
+            <a:avLst/>
           </a:prstGeom>
           <a:solidFill>
             <a:srgbClr val="1B3A6B"/>
@@ -18100,32 +19228,135 @@
       </p:sp>
       <p:sp>
         <p:nvSpPr>
-          <p:cNvPr id="12" name="Text 9"/>
-          <p:cNvSpPr/>
-          <p:nvPr/>
-        </p:nvSpPr>
-        <p:spPr>
-          <a:xfrm>
-            <a:off x="6492240" y="1554480"/>
-            <a:ext cx="4828032" cy="4480560"/>
-          </a:xfrm>
-          <a:prstGeom prst="rect">
-            <a:avLst/>
-          </a:prstGeom>
-          <a:noFill/>
-          <a:ln/>
-        </p:spPr>
-        <p:txBody>
-          <a:bodyPr wrap="square" rtlCol="0" anchor="t">
-            <a:normAutofit/>
-          </a:bodyPr>
-          <a:lstStyle/>
-          <a:p>
-            <a:pPr indent="0" marL="0">
-              <a:buNone/>
-            </a:pPr>
-            <a:r>
-              <a:rPr lang="en-US" sz="1300" b="1" spc="100" kern="0" dirty="0">
+          <p:cNvPr id="10" name="Text 7"/>
+          <p:cNvSpPr/>
+          <p:nvPr/>
+        </p:nvSpPr>
+        <p:spPr>
+          <a:xfrm>
+            <a:off x="548640" y="1325880"/>
+            <a:ext cx="502920" cy="502920"/>
+          </a:xfrm>
+          <a:prstGeom prst="rect">
+            <a:avLst/>
+          </a:prstGeom>
+          <a:noFill/>
+          <a:ln/>
+        </p:spPr>
+        <p:txBody>
+          <a:bodyPr wrap="square" rtlCol="0" anchor="ctr"/>
+          <a:lstStyle/>
+          <a:p>
+            <a:pPr algn="ctr" indent="0" marL="0">
+              <a:buNone/>
+            </a:pPr>
+            <a:r>
+              <a:rPr lang="en-US" sz="1600" b="1" dirty="0">
+                <a:solidFill>
+                  <a:srgbClr val="FFFFFF"/>
+                </a:solidFill>
+                <a:latin typeface="Arial" pitchFamily="34" charset="0"/>
+                <a:ea typeface="Arial" pitchFamily="34" charset="-122"/>
+                <a:cs typeface="Arial" pitchFamily="34" charset="-120"/>
+              </a:rPr>
+              <a:t>1</a:t>
+            </a:r>
+            <a:endParaRPr lang="en-US" sz="1600" dirty="0"/>
+          </a:p>
+        </p:txBody>
+      </p:sp>
+      <p:sp>
+        <p:nvSpPr>
+          <p:cNvPr id="11" name="Text 8"/>
+          <p:cNvSpPr/>
+          <p:nvPr/>
+        </p:nvSpPr>
+        <p:spPr>
+          <a:xfrm>
+            <a:off x="1234440" y="1280160"/>
+            <a:ext cx="10424160" cy="640080"/>
+          </a:xfrm>
+          <a:prstGeom prst="rect">
+            <a:avLst/>
+          </a:prstGeom>
+          <a:noFill/>
+          <a:ln/>
+        </p:spPr>
+        <p:txBody>
+          <a:bodyPr wrap="square" rtlCol="0" anchor="ctr"/>
+          <a:lstStyle/>
+          <a:p>
+            <a:pPr indent="0" marL="0">
+              <a:buNone/>
+            </a:pPr>
+            <a:r>
+              <a:rPr lang="en-US" sz="1800" b="1" dirty="0">
+                <a:solidFill>
+                  <a:srgbClr val="1B3A6B"/>
+                </a:solidFill>
+                <a:latin typeface="Arial" pitchFamily="34" charset="0"/>
+                <a:ea typeface="Arial" pitchFamily="34" charset="-122"/>
+                <a:cs typeface="Arial" pitchFamily="34" charset="-120"/>
+              </a:rPr>
+              <a:t>Qual cláusula evita surpresas quando a regra do Fio B muda?</a:t>
+            </a:r>
+            <a:endParaRPr lang="en-US" sz="1800" dirty="0"/>
+          </a:p>
+        </p:txBody>
+      </p:sp>
+      <p:sp>
+        <p:nvSpPr>
+          <p:cNvPr id="12" name="Shape 9"/>
+          <p:cNvSpPr/>
+          <p:nvPr/>
+        </p:nvSpPr>
+        <p:spPr>
+          <a:xfrm>
+            <a:off x="548640" y="2057400"/>
+            <a:ext cx="2601468" cy="1463040"/>
+          </a:xfrm>
+          <a:prstGeom prst="roundRect">
+            <a:avLst>
+              <a:gd name="adj" fmla="val 5000"/>
+            </a:avLst>
+          </a:prstGeom>
+          <a:solidFill>
+            <a:srgbClr val="FFFFFF"/>
+          </a:solidFill>
+          <a:ln w="9525">
+            <a:solidFill>
+              <a:srgbClr val="D8E0EC"/>
+            </a:solidFill>
+            <a:prstDash val="solid"/>
+          </a:ln>
+        </p:spPr>
+      </p:sp>
+      <p:sp>
+        <p:nvSpPr>
+          <p:cNvPr id="13" name="Text 10"/>
+          <p:cNvSpPr/>
+          <p:nvPr/>
+        </p:nvSpPr>
+        <p:spPr>
+          <a:xfrm>
+            <a:off x="685800" y="2148840"/>
+            <a:ext cx="365760" cy="365760"/>
+          </a:xfrm>
+          <a:prstGeom prst="rect">
+            <a:avLst/>
+          </a:prstGeom>
+          <a:noFill/>
+          <a:ln/>
+        </p:spPr>
+        <p:txBody>
+          <a:bodyPr wrap="square" rtlCol="0" anchor="ctr"/>
+          <a:lstStyle/>
+          <a:p>
+            <a:pPr indent="0" marL="0">
+              <a:buNone/>
+            </a:pPr>
+            <a:r>
+              <a:rPr lang="en-US" sz="1400" b="1" dirty="0">
                 <a:solidFill>
                   <a:srgbClr val="F7A23B"/>
                 </a:solidFill>
@@ -18133,14 +19364,412 @@
                 <a:ea typeface="Arial" pitchFamily="34" charset="-122"/>
                 <a:cs typeface="Arial" pitchFamily="34" charset="-120"/>
               </a:rPr>
-              <a:t>ENTREGÁVEL DO MÓDULO
-</a:t>
-            </a:r>
-            <a:pPr indent="0" marL="0">
-              <a:buNone/>
-            </a:pPr>
-            <a:r>
-              <a:rPr lang="en-US" sz="1600" dirty="0">
+              <a:t>A</a:t>
+            </a:r>
+            <a:endParaRPr lang="en-US" sz="1400" dirty="0"/>
+          </a:p>
+        </p:txBody>
+      </p:sp>
+      <p:sp>
+        <p:nvSpPr>
+          <p:cNvPr id="14" name="Text 11"/>
+          <p:cNvSpPr/>
+          <p:nvPr/>
+        </p:nvSpPr>
+        <p:spPr>
+          <a:xfrm>
+            <a:off x="685800" y="2514600"/>
+            <a:ext cx="2327148" cy="914400"/>
+          </a:xfrm>
+          <a:prstGeom prst="rect">
+            <a:avLst/>
+          </a:prstGeom>
+          <a:noFill/>
+          <a:ln/>
+        </p:spPr>
+        <p:txBody>
+          <a:bodyPr wrap="square" rtlCol="0" anchor="t"/>
+          <a:lstStyle/>
+          <a:p>
+            <a:pPr indent="0" marL="0">
+              <a:buNone/>
+            </a:pPr>
+            <a:r>
+              <a:rPr lang="en-US" sz="1500" dirty="0">
+                <a:solidFill>
+                  <a:srgbClr val="1F2937"/>
+                </a:solidFill>
+                <a:latin typeface="Arial" pitchFamily="34" charset="0"/>
+                <a:ea typeface="Arial" pitchFamily="34" charset="-122"/>
+                <a:cs typeface="Arial" pitchFamily="34" charset="-120"/>
+              </a:rPr>
+              <a:t>Reequilíbrio/ajuste regulatório</a:t>
+            </a:r>
+            <a:endParaRPr lang="en-US" sz="1500" dirty="0"/>
+          </a:p>
+        </p:txBody>
+      </p:sp>
+      <p:sp>
+        <p:nvSpPr>
+          <p:cNvPr id="15" name="Shape 12"/>
+          <p:cNvSpPr/>
+          <p:nvPr/>
+        </p:nvSpPr>
+        <p:spPr>
+          <a:xfrm>
+            <a:off x="3378708" y="2057400"/>
+            <a:ext cx="2601468" cy="1463040"/>
+          </a:xfrm>
+          <a:prstGeom prst="roundRect">
+            <a:avLst>
+              <a:gd name="adj" fmla="val 5000"/>
+            </a:avLst>
+          </a:prstGeom>
+          <a:solidFill>
+            <a:srgbClr val="FFFFFF"/>
+          </a:solidFill>
+          <a:ln w="9525">
+            <a:solidFill>
+              <a:srgbClr val="D8E0EC"/>
+            </a:solidFill>
+            <a:prstDash val="solid"/>
+          </a:ln>
+        </p:spPr>
+      </p:sp>
+      <p:sp>
+        <p:nvSpPr>
+          <p:cNvPr id="16" name="Text 13"/>
+          <p:cNvSpPr/>
+          <p:nvPr/>
+        </p:nvSpPr>
+        <p:spPr>
+          <a:xfrm>
+            <a:off x="3515868" y="2148840"/>
+            <a:ext cx="365760" cy="365760"/>
+          </a:xfrm>
+          <a:prstGeom prst="rect">
+            <a:avLst/>
+          </a:prstGeom>
+          <a:noFill/>
+          <a:ln/>
+        </p:spPr>
+        <p:txBody>
+          <a:bodyPr wrap="square" rtlCol="0" anchor="ctr"/>
+          <a:lstStyle/>
+          <a:p>
+            <a:pPr indent="0" marL="0">
+              <a:buNone/>
+            </a:pPr>
+            <a:r>
+              <a:rPr lang="en-US" sz="1400" b="1" dirty="0">
+                <a:solidFill>
+                  <a:srgbClr val="F7A23B"/>
+                </a:solidFill>
+                <a:latin typeface="Arial" pitchFamily="34" charset="0"/>
+                <a:ea typeface="Arial" pitchFamily="34" charset="-122"/>
+                <a:cs typeface="Arial" pitchFamily="34" charset="-120"/>
+              </a:rPr>
+              <a:t>B</a:t>
+            </a:r>
+            <a:endParaRPr lang="en-US" sz="1400" dirty="0"/>
+          </a:p>
+        </p:txBody>
+      </p:sp>
+      <p:sp>
+        <p:nvSpPr>
+          <p:cNvPr id="17" name="Text 14"/>
+          <p:cNvSpPr/>
+          <p:nvPr/>
+        </p:nvSpPr>
+        <p:spPr>
+          <a:xfrm>
+            <a:off x="3515868" y="2514600"/>
+            <a:ext cx="2327148" cy="914400"/>
+          </a:xfrm>
+          <a:prstGeom prst="rect">
+            <a:avLst/>
+          </a:prstGeom>
+          <a:noFill/>
+          <a:ln/>
+        </p:spPr>
+        <p:txBody>
+          <a:bodyPr wrap="square" rtlCol="0" anchor="t"/>
+          <a:lstStyle/>
+          <a:p>
+            <a:pPr indent="0" marL="0">
+              <a:buNone/>
+            </a:pPr>
+            <a:r>
+              <a:rPr lang="en-US" sz="1500" dirty="0">
+                <a:solidFill>
+                  <a:srgbClr val="1F2937"/>
+                </a:solidFill>
+                <a:latin typeface="Arial" pitchFamily="34" charset="0"/>
+                <a:ea typeface="Arial" pitchFamily="34" charset="-122"/>
+                <a:cs typeface="Arial" pitchFamily="34" charset="-120"/>
+              </a:rPr>
+              <a:t>foro</a:t>
+            </a:r>
+            <a:endParaRPr lang="en-US" sz="1500" dirty="0"/>
+          </a:p>
+        </p:txBody>
+      </p:sp>
+      <p:sp>
+        <p:nvSpPr>
+          <p:cNvPr id="18" name="Shape 15"/>
+          <p:cNvSpPr/>
+          <p:nvPr/>
+        </p:nvSpPr>
+        <p:spPr>
+          <a:xfrm>
+            <a:off x="6208776" y="2057400"/>
+            <a:ext cx="2601468" cy="1463040"/>
+          </a:xfrm>
+          <a:prstGeom prst="roundRect">
+            <a:avLst>
+              <a:gd name="adj" fmla="val 5000"/>
+            </a:avLst>
+          </a:prstGeom>
+          <a:solidFill>
+            <a:srgbClr val="FFFFFF"/>
+          </a:solidFill>
+          <a:ln w="9525">
+            <a:solidFill>
+              <a:srgbClr val="D8E0EC"/>
+            </a:solidFill>
+            <a:prstDash val="solid"/>
+          </a:ln>
+        </p:spPr>
+      </p:sp>
+      <p:sp>
+        <p:nvSpPr>
+          <p:cNvPr id="19" name="Text 16"/>
+          <p:cNvSpPr/>
+          <p:nvPr/>
+        </p:nvSpPr>
+        <p:spPr>
+          <a:xfrm>
+            <a:off x="6345936" y="2148840"/>
+            <a:ext cx="365760" cy="365760"/>
+          </a:xfrm>
+          <a:prstGeom prst="rect">
+            <a:avLst/>
+          </a:prstGeom>
+          <a:noFill/>
+          <a:ln/>
+        </p:spPr>
+        <p:txBody>
+          <a:bodyPr wrap="square" rtlCol="0" anchor="ctr"/>
+          <a:lstStyle/>
+          <a:p>
+            <a:pPr indent="0" marL="0">
+              <a:buNone/>
+            </a:pPr>
+            <a:r>
+              <a:rPr lang="en-US" sz="1400" b="1" dirty="0">
+                <a:solidFill>
+                  <a:srgbClr val="F7A23B"/>
+                </a:solidFill>
+                <a:latin typeface="Arial" pitchFamily="34" charset="0"/>
+                <a:ea typeface="Arial" pitchFamily="34" charset="-122"/>
+                <a:cs typeface="Arial" pitchFamily="34" charset="-120"/>
+              </a:rPr>
+              <a:t>C</a:t>
+            </a:r>
+            <a:endParaRPr lang="en-US" sz="1400" dirty="0"/>
+          </a:p>
+        </p:txBody>
+      </p:sp>
+      <p:sp>
+        <p:nvSpPr>
+          <p:cNvPr id="20" name="Text 17"/>
+          <p:cNvSpPr/>
+          <p:nvPr/>
+        </p:nvSpPr>
+        <p:spPr>
+          <a:xfrm>
+            <a:off x="6345936" y="2514600"/>
+            <a:ext cx="2327148" cy="914400"/>
+          </a:xfrm>
+          <a:prstGeom prst="rect">
+            <a:avLst/>
+          </a:prstGeom>
+          <a:noFill/>
+          <a:ln/>
+        </p:spPr>
+        <p:txBody>
+          <a:bodyPr wrap="square" rtlCol="0" anchor="t"/>
+          <a:lstStyle/>
+          <a:p>
+            <a:pPr indent="0" marL="0">
+              <a:buNone/>
+            </a:pPr>
+            <a:r>
+              <a:rPr lang="en-US" sz="1500" dirty="0">
+                <a:solidFill>
+                  <a:srgbClr val="1F2937"/>
+                </a:solidFill>
+                <a:latin typeface="Arial" pitchFamily="34" charset="0"/>
+                <a:ea typeface="Arial" pitchFamily="34" charset="-122"/>
+                <a:cs typeface="Arial" pitchFamily="34" charset="-120"/>
+              </a:rPr>
+              <a:t>multa fixa</a:t>
+            </a:r>
+            <a:endParaRPr lang="en-US" sz="1500" dirty="0"/>
+          </a:p>
+        </p:txBody>
+      </p:sp>
+      <p:sp>
+        <p:nvSpPr>
+          <p:cNvPr id="21" name="Shape 18"/>
+          <p:cNvSpPr/>
+          <p:nvPr/>
+        </p:nvSpPr>
+        <p:spPr>
+          <a:xfrm>
+            <a:off x="9038844" y="2057400"/>
+            <a:ext cx="2601468" cy="1463040"/>
+          </a:xfrm>
+          <a:prstGeom prst="roundRect">
+            <a:avLst>
+              <a:gd name="adj" fmla="val 5000"/>
+            </a:avLst>
+          </a:prstGeom>
+          <a:solidFill>
+            <a:srgbClr val="FFFFFF"/>
+          </a:solidFill>
+          <a:ln w="9525">
+            <a:solidFill>
+              <a:srgbClr val="D8E0EC"/>
+            </a:solidFill>
+            <a:prstDash val="solid"/>
+          </a:ln>
+        </p:spPr>
+      </p:sp>
+      <p:sp>
+        <p:nvSpPr>
+          <p:cNvPr id="22" name="Text 19"/>
+          <p:cNvSpPr/>
+          <p:nvPr/>
+        </p:nvSpPr>
+        <p:spPr>
+          <a:xfrm>
+            <a:off x="9176004" y="2148840"/>
+            <a:ext cx="365760" cy="365760"/>
+          </a:xfrm>
+          <a:prstGeom prst="rect">
+            <a:avLst/>
+          </a:prstGeom>
+          <a:noFill/>
+          <a:ln/>
+        </p:spPr>
+        <p:txBody>
+          <a:bodyPr wrap="square" rtlCol="0" anchor="ctr"/>
+          <a:lstStyle/>
+          <a:p>
+            <a:pPr indent="0" marL="0">
+              <a:buNone/>
+            </a:pPr>
+            <a:r>
+              <a:rPr lang="en-US" sz="1400" b="1" dirty="0">
+                <a:solidFill>
+                  <a:srgbClr val="F7A23B"/>
+                </a:solidFill>
+                <a:latin typeface="Arial" pitchFamily="34" charset="0"/>
+                <a:ea typeface="Arial" pitchFamily="34" charset="-122"/>
+                <a:cs typeface="Arial" pitchFamily="34" charset="-120"/>
+              </a:rPr>
+              <a:t>D</a:t>
+            </a:r>
+            <a:endParaRPr lang="en-US" sz="1400" dirty="0"/>
+          </a:p>
+        </p:txBody>
+      </p:sp>
+      <p:sp>
+        <p:nvSpPr>
+          <p:cNvPr id="23" name="Text 20"/>
+          <p:cNvSpPr/>
+          <p:nvPr/>
+        </p:nvSpPr>
+        <p:spPr>
+          <a:xfrm>
+            <a:off x="9176004" y="2514600"/>
+            <a:ext cx="2327148" cy="914400"/>
+          </a:xfrm>
+          <a:prstGeom prst="rect">
+            <a:avLst/>
+          </a:prstGeom>
+          <a:noFill/>
+          <a:ln/>
+        </p:spPr>
+        <p:txBody>
+          <a:bodyPr wrap="square" rtlCol="0" anchor="t"/>
+          <a:lstStyle/>
+          <a:p>
+            <a:pPr indent="0" marL="0">
+              <a:buNone/>
+            </a:pPr>
+            <a:r>
+              <a:rPr lang="en-US" sz="1500" dirty="0">
+                <a:solidFill>
+                  <a:srgbClr val="1F2937"/>
+                </a:solidFill>
+                <a:latin typeface="Arial" pitchFamily="34" charset="0"/>
+                <a:ea typeface="Arial" pitchFamily="34" charset="-122"/>
+                <a:cs typeface="Arial" pitchFamily="34" charset="-120"/>
+              </a:rPr>
+              <a:t>confidencialidade</a:t>
+            </a:r>
+            <a:endParaRPr lang="en-US" sz="1500" dirty="0"/>
+          </a:p>
+        </p:txBody>
+      </p:sp>
+      <p:sp>
+        <p:nvSpPr>
+          <p:cNvPr id="24" name="Shape 21"/>
+          <p:cNvSpPr/>
+          <p:nvPr/>
+        </p:nvSpPr>
+        <p:spPr>
+          <a:xfrm>
+            <a:off x="548640" y="3840480"/>
+            <a:ext cx="502920" cy="502920"/>
+          </a:xfrm>
+          <a:prstGeom prst="ellipse">
+            <a:avLst/>
+          </a:prstGeom>
+          <a:solidFill>
+            <a:srgbClr val="1B3A6B"/>
+          </a:solidFill>
+          <a:ln/>
+        </p:spPr>
+      </p:sp>
+      <p:sp>
+        <p:nvSpPr>
+          <p:cNvPr id="25" name="Text 22"/>
+          <p:cNvSpPr/>
+          <p:nvPr/>
+        </p:nvSpPr>
+        <p:spPr>
+          <a:xfrm>
+            <a:off x="548640" y="3840480"/>
+            <a:ext cx="502920" cy="502920"/>
+          </a:xfrm>
+          <a:prstGeom prst="rect">
+            <a:avLst/>
+          </a:prstGeom>
+          <a:noFill/>
+          <a:ln/>
+        </p:spPr>
+        <p:txBody>
+          <a:bodyPr wrap="square" rtlCol="0" anchor="ctr"/>
+          <a:lstStyle/>
+          <a:p>
+            <a:pPr algn="ctr" indent="0" marL="0">
+              <a:buNone/>
+            </a:pPr>
+            <a:r>
+              <a:rPr lang="en-US" sz="1600" b="1" dirty="0">
                 <a:solidFill>
                   <a:srgbClr val="FFFFFF"/>
                 </a:solidFill>
@@ -18148,9 +19777,468 @@
                 <a:ea typeface="Arial" pitchFamily="34" charset="-122"/>
                 <a:cs typeface="Arial" pitchFamily="34" charset="-120"/>
               </a:rPr>
-              <a:t>Usina alocada: os 5 clientes do M5 com contrato emitido, vínculo com a usina e convite enviado, mais 10 clientes adicionais (carregados pelo "checkpoint do M6" do laboratório ou cadastrados manualmente) até ocupar 90–98% da energia disponível, com nenhum cliente acima de 25% e a planilha de rateio pronta para a distribuidora.</a:t>
-            </a:r>
-            <a:endParaRPr lang="en-US" sz="1300" dirty="0"/>
+              <a:t>2</a:t>
+            </a:r>
+            <a:endParaRPr lang="en-US" sz="1600" dirty="0"/>
+          </a:p>
+        </p:txBody>
+      </p:sp>
+      <p:sp>
+        <p:nvSpPr>
+          <p:cNvPr id="26" name="Text 23"/>
+          <p:cNvSpPr/>
+          <p:nvPr/>
+        </p:nvSpPr>
+        <p:spPr>
+          <a:xfrm>
+            <a:off x="1234440" y="3794760"/>
+            <a:ext cx="10424160" cy="640080"/>
+          </a:xfrm>
+          <a:prstGeom prst="rect">
+            <a:avLst/>
+          </a:prstGeom>
+          <a:noFill/>
+          <a:ln/>
+        </p:spPr>
+        <p:txBody>
+          <a:bodyPr wrap="square" rtlCol="0" anchor="ctr"/>
+          <a:lstStyle/>
+          <a:p>
+            <a:pPr indent="0" marL="0">
+              <a:buNone/>
+            </a:pPr>
+            <a:r>
+              <a:rPr lang="en-US" sz="1800" b="1" dirty="0">
+                <a:solidFill>
+                  <a:srgbClr val="1B3A6B"/>
+                </a:solidFill>
+                <a:latin typeface="Arial" pitchFamily="34" charset="0"/>
+                <a:ea typeface="Arial" pitchFamily="34" charset="-122"/>
+                <a:cs typeface="Arial" pitchFamily="34" charset="-120"/>
+              </a:rPr>
+              <a:t>A base legal mais comum para tratar os dados do cliente na assinatura é:</a:t>
+            </a:r>
+            <a:endParaRPr lang="en-US" sz="1800" dirty="0"/>
+          </a:p>
+        </p:txBody>
+      </p:sp>
+      <p:sp>
+        <p:nvSpPr>
+          <p:cNvPr id="27" name="Shape 24"/>
+          <p:cNvSpPr/>
+          <p:nvPr/>
+        </p:nvSpPr>
+        <p:spPr>
+          <a:xfrm>
+            <a:off x="548640" y="4572000"/>
+            <a:ext cx="2601468" cy="1463040"/>
+          </a:xfrm>
+          <a:prstGeom prst="roundRect">
+            <a:avLst>
+              <a:gd name="adj" fmla="val 5000"/>
+            </a:avLst>
+          </a:prstGeom>
+          <a:solidFill>
+            <a:srgbClr val="FFFFFF"/>
+          </a:solidFill>
+          <a:ln w="9525">
+            <a:solidFill>
+              <a:srgbClr val="D8E0EC"/>
+            </a:solidFill>
+            <a:prstDash val="solid"/>
+          </a:ln>
+        </p:spPr>
+      </p:sp>
+      <p:sp>
+        <p:nvSpPr>
+          <p:cNvPr id="28" name="Text 25"/>
+          <p:cNvSpPr/>
+          <p:nvPr/>
+        </p:nvSpPr>
+        <p:spPr>
+          <a:xfrm>
+            <a:off x="685800" y="4663440"/>
+            <a:ext cx="365760" cy="365760"/>
+          </a:xfrm>
+          <a:prstGeom prst="rect">
+            <a:avLst/>
+          </a:prstGeom>
+          <a:noFill/>
+          <a:ln/>
+        </p:spPr>
+        <p:txBody>
+          <a:bodyPr wrap="square" rtlCol="0" anchor="ctr"/>
+          <a:lstStyle/>
+          <a:p>
+            <a:pPr indent="0" marL="0">
+              <a:buNone/>
+            </a:pPr>
+            <a:r>
+              <a:rPr lang="en-US" sz="1400" b="1" dirty="0">
+                <a:solidFill>
+                  <a:srgbClr val="F7A23B"/>
+                </a:solidFill>
+                <a:latin typeface="Arial" pitchFamily="34" charset="0"/>
+                <a:ea typeface="Arial" pitchFamily="34" charset="-122"/>
+                <a:cs typeface="Arial" pitchFamily="34" charset="-120"/>
+              </a:rPr>
+              <a:t>A</a:t>
+            </a:r>
+            <a:endParaRPr lang="en-US" sz="1400" dirty="0"/>
+          </a:p>
+        </p:txBody>
+      </p:sp>
+      <p:sp>
+        <p:nvSpPr>
+          <p:cNvPr id="29" name="Text 26"/>
+          <p:cNvSpPr/>
+          <p:nvPr/>
+        </p:nvSpPr>
+        <p:spPr>
+          <a:xfrm>
+            <a:off x="685800" y="5029200"/>
+            <a:ext cx="2327148" cy="914400"/>
+          </a:xfrm>
+          <a:prstGeom prst="rect">
+            <a:avLst/>
+          </a:prstGeom>
+          <a:noFill/>
+          <a:ln/>
+        </p:spPr>
+        <p:txBody>
+          <a:bodyPr wrap="square" rtlCol="0" anchor="t"/>
+          <a:lstStyle/>
+          <a:p>
+            <a:pPr indent="0" marL="0">
+              <a:buNone/>
+            </a:pPr>
+            <a:r>
+              <a:rPr lang="en-US" sz="1500" dirty="0">
+                <a:solidFill>
+                  <a:srgbClr val="1F2937"/>
+                </a:solidFill>
+                <a:latin typeface="Arial" pitchFamily="34" charset="0"/>
+                <a:ea typeface="Arial" pitchFamily="34" charset="-122"/>
+                <a:cs typeface="Arial" pitchFamily="34" charset="-120"/>
+              </a:rPr>
+              <a:t>execução de contrato</a:t>
+            </a:r>
+            <a:endParaRPr lang="en-US" sz="1500" dirty="0"/>
+          </a:p>
+        </p:txBody>
+      </p:sp>
+      <p:sp>
+        <p:nvSpPr>
+          <p:cNvPr id="30" name="Shape 27"/>
+          <p:cNvSpPr/>
+          <p:nvPr/>
+        </p:nvSpPr>
+        <p:spPr>
+          <a:xfrm>
+            <a:off x="3378708" y="4572000"/>
+            <a:ext cx="2601468" cy="1463040"/>
+          </a:xfrm>
+          <a:prstGeom prst="roundRect">
+            <a:avLst>
+              <a:gd name="adj" fmla="val 5000"/>
+            </a:avLst>
+          </a:prstGeom>
+          <a:solidFill>
+            <a:srgbClr val="FFFFFF"/>
+          </a:solidFill>
+          <a:ln w="9525">
+            <a:solidFill>
+              <a:srgbClr val="D8E0EC"/>
+            </a:solidFill>
+            <a:prstDash val="solid"/>
+          </a:ln>
+        </p:spPr>
+      </p:sp>
+      <p:sp>
+        <p:nvSpPr>
+          <p:cNvPr id="31" name="Text 28"/>
+          <p:cNvSpPr/>
+          <p:nvPr/>
+        </p:nvSpPr>
+        <p:spPr>
+          <a:xfrm>
+            <a:off x="3515868" y="4663440"/>
+            <a:ext cx="365760" cy="365760"/>
+          </a:xfrm>
+          <a:prstGeom prst="rect">
+            <a:avLst/>
+          </a:prstGeom>
+          <a:noFill/>
+          <a:ln/>
+        </p:spPr>
+        <p:txBody>
+          <a:bodyPr wrap="square" rtlCol="0" anchor="ctr"/>
+          <a:lstStyle/>
+          <a:p>
+            <a:pPr indent="0" marL="0">
+              <a:buNone/>
+            </a:pPr>
+            <a:r>
+              <a:rPr lang="en-US" sz="1400" b="1" dirty="0">
+                <a:solidFill>
+                  <a:srgbClr val="F7A23B"/>
+                </a:solidFill>
+                <a:latin typeface="Arial" pitchFamily="34" charset="0"/>
+                <a:ea typeface="Arial" pitchFamily="34" charset="-122"/>
+                <a:cs typeface="Arial" pitchFamily="34" charset="-120"/>
+              </a:rPr>
+              <a:t>B</a:t>
+            </a:r>
+            <a:endParaRPr lang="en-US" sz="1400" dirty="0"/>
+          </a:p>
+        </p:txBody>
+      </p:sp>
+      <p:sp>
+        <p:nvSpPr>
+          <p:cNvPr id="32" name="Text 29"/>
+          <p:cNvSpPr/>
+          <p:nvPr/>
+        </p:nvSpPr>
+        <p:spPr>
+          <a:xfrm>
+            <a:off x="3515868" y="5029200"/>
+            <a:ext cx="2327148" cy="914400"/>
+          </a:xfrm>
+          <a:prstGeom prst="rect">
+            <a:avLst/>
+          </a:prstGeom>
+          <a:noFill/>
+          <a:ln/>
+        </p:spPr>
+        <p:txBody>
+          <a:bodyPr wrap="square" rtlCol="0" anchor="t"/>
+          <a:lstStyle/>
+          <a:p>
+            <a:pPr indent="0" marL="0">
+              <a:buNone/>
+            </a:pPr>
+            <a:r>
+              <a:rPr lang="en-US" sz="1500" dirty="0">
+                <a:solidFill>
+                  <a:srgbClr val="1F2937"/>
+                </a:solidFill>
+                <a:latin typeface="Arial" pitchFamily="34" charset="0"/>
+                <a:ea typeface="Arial" pitchFamily="34" charset="-122"/>
+                <a:cs typeface="Arial" pitchFamily="34" charset="-120"/>
+              </a:rPr>
+              <a:t>consentimento para tudo</a:t>
+            </a:r>
+            <a:endParaRPr lang="en-US" sz="1500" dirty="0"/>
+          </a:p>
+        </p:txBody>
+      </p:sp>
+      <p:sp>
+        <p:nvSpPr>
+          <p:cNvPr id="33" name="Shape 30"/>
+          <p:cNvSpPr/>
+          <p:nvPr/>
+        </p:nvSpPr>
+        <p:spPr>
+          <a:xfrm>
+            <a:off x="6208776" y="4572000"/>
+            <a:ext cx="2601468" cy="1463040"/>
+          </a:xfrm>
+          <a:prstGeom prst="roundRect">
+            <a:avLst>
+              <a:gd name="adj" fmla="val 5000"/>
+            </a:avLst>
+          </a:prstGeom>
+          <a:solidFill>
+            <a:srgbClr val="FFFFFF"/>
+          </a:solidFill>
+          <a:ln w="9525">
+            <a:solidFill>
+              <a:srgbClr val="D8E0EC"/>
+            </a:solidFill>
+            <a:prstDash val="solid"/>
+          </a:ln>
+        </p:spPr>
+      </p:sp>
+      <p:sp>
+        <p:nvSpPr>
+          <p:cNvPr id="34" name="Text 31"/>
+          <p:cNvSpPr/>
+          <p:nvPr/>
+        </p:nvSpPr>
+        <p:spPr>
+          <a:xfrm>
+            <a:off x="6345936" y="4663440"/>
+            <a:ext cx="365760" cy="365760"/>
+          </a:xfrm>
+          <a:prstGeom prst="rect">
+            <a:avLst/>
+          </a:prstGeom>
+          <a:noFill/>
+          <a:ln/>
+        </p:spPr>
+        <p:txBody>
+          <a:bodyPr wrap="square" rtlCol="0" anchor="ctr"/>
+          <a:lstStyle/>
+          <a:p>
+            <a:pPr indent="0" marL="0">
+              <a:buNone/>
+            </a:pPr>
+            <a:r>
+              <a:rPr lang="en-US" sz="1400" b="1" dirty="0">
+                <a:solidFill>
+                  <a:srgbClr val="F7A23B"/>
+                </a:solidFill>
+                <a:latin typeface="Arial" pitchFamily="34" charset="0"/>
+                <a:ea typeface="Arial" pitchFamily="34" charset="-122"/>
+                <a:cs typeface="Arial" pitchFamily="34" charset="-120"/>
+              </a:rPr>
+              <a:t>C</a:t>
+            </a:r>
+            <a:endParaRPr lang="en-US" sz="1400" dirty="0"/>
+          </a:p>
+        </p:txBody>
+      </p:sp>
+      <p:sp>
+        <p:nvSpPr>
+          <p:cNvPr id="35" name="Text 32"/>
+          <p:cNvSpPr/>
+          <p:nvPr/>
+        </p:nvSpPr>
+        <p:spPr>
+          <a:xfrm>
+            <a:off x="6345936" y="5029200"/>
+            <a:ext cx="2327148" cy="914400"/>
+          </a:xfrm>
+          <a:prstGeom prst="rect">
+            <a:avLst/>
+          </a:prstGeom>
+          <a:noFill/>
+          <a:ln/>
+        </p:spPr>
+        <p:txBody>
+          <a:bodyPr wrap="square" rtlCol="0" anchor="t"/>
+          <a:lstStyle/>
+          <a:p>
+            <a:pPr indent="0" marL="0">
+              <a:buNone/>
+            </a:pPr>
+            <a:r>
+              <a:rPr lang="en-US" sz="1500" dirty="0">
+                <a:solidFill>
+                  <a:srgbClr val="1F2937"/>
+                </a:solidFill>
+                <a:latin typeface="Arial" pitchFamily="34" charset="0"/>
+                <a:ea typeface="Arial" pitchFamily="34" charset="-122"/>
+                <a:cs typeface="Arial" pitchFamily="34" charset="-120"/>
+              </a:rPr>
+              <a:t>interesse público</a:t>
+            </a:r>
+            <a:endParaRPr lang="en-US" sz="1500" dirty="0"/>
+          </a:p>
+        </p:txBody>
+      </p:sp>
+      <p:sp>
+        <p:nvSpPr>
+          <p:cNvPr id="36" name="Shape 33"/>
+          <p:cNvSpPr/>
+          <p:nvPr/>
+        </p:nvSpPr>
+        <p:spPr>
+          <a:xfrm>
+            <a:off x="9038844" y="4572000"/>
+            <a:ext cx="2601468" cy="1463040"/>
+          </a:xfrm>
+          <a:prstGeom prst="roundRect">
+            <a:avLst>
+              <a:gd name="adj" fmla="val 5000"/>
+            </a:avLst>
+          </a:prstGeom>
+          <a:solidFill>
+            <a:srgbClr val="FFFFFF"/>
+          </a:solidFill>
+          <a:ln w="9525">
+            <a:solidFill>
+              <a:srgbClr val="D8E0EC"/>
+            </a:solidFill>
+            <a:prstDash val="solid"/>
+          </a:ln>
+        </p:spPr>
+      </p:sp>
+      <p:sp>
+        <p:nvSpPr>
+          <p:cNvPr id="37" name="Text 34"/>
+          <p:cNvSpPr/>
+          <p:nvPr/>
+        </p:nvSpPr>
+        <p:spPr>
+          <a:xfrm>
+            <a:off x="9176004" y="4663440"/>
+            <a:ext cx="365760" cy="365760"/>
+          </a:xfrm>
+          <a:prstGeom prst="rect">
+            <a:avLst/>
+          </a:prstGeom>
+          <a:noFill/>
+          <a:ln/>
+        </p:spPr>
+        <p:txBody>
+          <a:bodyPr wrap="square" rtlCol="0" anchor="ctr"/>
+          <a:lstStyle/>
+          <a:p>
+            <a:pPr indent="0" marL="0">
+              <a:buNone/>
+            </a:pPr>
+            <a:r>
+              <a:rPr lang="en-US" sz="1400" b="1" dirty="0">
+                <a:solidFill>
+                  <a:srgbClr val="F7A23B"/>
+                </a:solidFill>
+                <a:latin typeface="Arial" pitchFamily="34" charset="0"/>
+                <a:ea typeface="Arial" pitchFamily="34" charset="-122"/>
+                <a:cs typeface="Arial" pitchFamily="34" charset="-120"/>
+              </a:rPr>
+              <a:t>D</a:t>
+            </a:r>
+            <a:endParaRPr lang="en-US" sz="1400" dirty="0"/>
+          </a:p>
+        </p:txBody>
+      </p:sp>
+      <p:sp>
+        <p:nvSpPr>
+          <p:cNvPr id="38" name="Text 35"/>
+          <p:cNvSpPr/>
+          <p:nvPr/>
+        </p:nvSpPr>
+        <p:spPr>
+          <a:xfrm>
+            <a:off x="9176004" y="5029200"/>
+            <a:ext cx="2327148" cy="914400"/>
+          </a:xfrm>
+          <a:prstGeom prst="rect">
+            <a:avLst/>
+          </a:prstGeom>
+          <a:noFill/>
+          <a:ln/>
+        </p:spPr>
+        <p:txBody>
+          <a:bodyPr wrap="square" rtlCol="0" anchor="t"/>
+          <a:lstStyle/>
+          <a:p>
+            <a:pPr indent="0" marL="0">
+              <a:buNone/>
+            </a:pPr>
+            <a:r>
+              <a:rPr lang="en-US" sz="1500" dirty="0">
+                <a:solidFill>
+                  <a:srgbClr val="1F2937"/>
+                </a:solidFill>
+                <a:latin typeface="Arial" pitchFamily="34" charset="0"/>
+                <a:ea typeface="Arial" pitchFamily="34" charset="-122"/>
+                <a:cs typeface="Arial" pitchFamily="34" charset="-120"/>
+              </a:rPr>
+              <a:t>nenhuma</a:t>
+            </a:r>
+            <a:endParaRPr lang="en-US" sz="1500" dirty="0"/>
           </a:p>
         </p:txBody>
       </p:sp>
@@ -18197,6 +20285,4206 @@
             <a:fld id="{F7021451-1387-4CA6-816F-3879F97B5CBC}" type="slidenum">
               <a:rPr b="1" lang="en-US"/>
               <a:t>30</a:t>
+            </a:fld>
+            <a:endParaRPr lang="en-US"/>
+          </a:p>
+        </p:txBody>
+      </p:sp>
+    </p:spTree>
+  </p:cSld>
+  <p:clrMapOvr>
+    <a:masterClrMapping/>
+  </p:clrMapOvr>
+</p:sld>
+</file>
+
+<file path=ppt/slides/slide31.xml><?xml version="1.0" encoding="utf-8"?>
+<p:sld xmlns:a="http://schemas.openxmlformats.org/drawingml/2006/main" xmlns:r="http://schemas.openxmlformats.org/officeDocument/2006/relationships" xmlns:p="http://schemas.openxmlformats.org/presentationml/2006/main">
+  <p:cSld name="Slide 31">
+    <p:bg>
+      <p:bgPr>
+        <a:solidFill>
+          <a:srgbClr val="F6F8FB"/>
+        </a:solidFill>
+      </p:bgPr>
+    </p:bg>
+    <p:spTree>
+      <p:nvGrpSpPr>
+        <p:cNvPr id="1" name=""/>
+        <p:cNvGrpSpPr/>
+        <p:nvPr/>
+      </p:nvGrpSpPr>
+      <p:grpSpPr>
+        <a:xfrm>
+          <a:off x="0" y="0"/>
+          <a:ext cx="0" cy="0"/>
+          <a:chOff x="0" y="0"/>
+          <a:chExt cx="0" cy="0"/>
+        </a:xfrm>
+      </p:grpSpPr>
+      <p:sp>
+        <p:nvSpPr>
+          <p:cNvPr id="2" name="Shape 0"/>
+          <p:cNvSpPr/>
+          <p:nvPr/>
+        </p:nvSpPr>
+        <p:spPr>
+          <a:xfrm>
+            <a:off x="0" y="6510528"/>
+            <a:ext cx="12191695" cy="347472"/>
+          </a:xfrm>
+          <a:prstGeom prst="rect">
+            <a:avLst/>
+          </a:prstGeom>
+          <a:solidFill>
+            <a:srgbClr val="FFFFFF"/>
+          </a:solidFill>
+          <a:ln w="6350">
+            <a:solidFill>
+              <a:srgbClr val="D8E0EC"/>
+            </a:solidFill>
+            <a:prstDash val="solid"/>
+          </a:ln>
+        </p:spPr>
+      </p:sp>
+      <p:pic>
+        <p:nvPicPr>
+          <p:cNvPr id="3" name="Image 0" descr="/www/wwwroot/rexar/gdsolar/docs/curso/slides/assets/logo-gdsolar.png">    </p:cNvPr>
+          <p:cNvPicPr>
+            <a:picLocks noChangeAspect="1"/>
+          </p:cNvPicPr>
+          <p:nvPr/>
+        </p:nvPicPr>
+        <p:blipFill>
+          <a:blip r:embed="rId1"/>
+          <a:stretch>
+            <a:fillRect/>
+          </a:stretch>
+        </p:blipFill>
+        <p:spPr>
+          <a:xfrm>
+            <a:off x="548640" y="6547104"/>
+            <a:ext cx="274320" cy="274320"/>
+          </a:xfrm>
+          <a:prstGeom prst="rect">
+            <a:avLst/>
+          </a:prstGeom>
+        </p:spPr>
+      </p:pic>
+      <p:sp>
+        <p:nvSpPr>
+          <p:cNvPr id="4" name="Text 1"/>
+          <p:cNvSpPr/>
+          <p:nvPr/>
+        </p:nvSpPr>
+        <p:spPr>
+          <a:xfrm>
+            <a:off x="886968" y="6528816"/>
+            <a:ext cx="6400800" cy="310896"/>
+          </a:xfrm>
+          <a:prstGeom prst="rect">
+            <a:avLst/>
+          </a:prstGeom>
+          <a:noFill/>
+          <a:ln/>
+        </p:spPr>
+        <p:txBody>
+          <a:bodyPr wrap="square" rtlCol="0" anchor="ctr"/>
+          <a:lstStyle/>
+          <a:p>
+            <a:pPr indent="0" marL="0">
+              <a:buNone/>
+            </a:pPr>
+            <a:r>
+              <a:rPr lang="en-US" sz="900" b="1" dirty="0">
+                <a:solidFill>
+                  <a:srgbClr val="64748B"/>
+                </a:solidFill>
+                <a:latin typeface="Arial" pitchFamily="34" charset="0"/>
+                <a:ea typeface="Arial" pitchFamily="34" charset="-122"/>
+                <a:cs typeface="Arial" pitchFamily="34" charset="-120"/>
+              </a:rPr>
+              <a:t>GD Solar  ·  Formação em Energia por Assinatura</a:t>
+            </a:r>
+            <a:endParaRPr lang="en-US" sz="900" dirty="0"/>
+          </a:p>
+        </p:txBody>
+      </p:sp>
+      <p:sp>
+        <p:nvSpPr>
+          <p:cNvPr id="5" name="Text 2"/>
+          <p:cNvSpPr/>
+          <p:nvPr/>
+        </p:nvSpPr>
+        <p:spPr>
+          <a:xfrm>
+            <a:off x="7132320" y="6528816"/>
+            <a:ext cx="4023360" cy="310896"/>
+          </a:xfrm>
+          <a:prstGeom prst="rect">
+            <a:avLst/>
+          </a:prstGeom>
+          <a:noFill/>
+          <a:ln/>
+        </p:spPr>
+        <p:txBody>
+          <a:bodyPr wrap="square" rtlCol="0" anchor="ctr"/>
+          <a:lstStyle/>
+          <a:p>
+            <a:pPr algn="r" indent="0" marL="0">
+              <a:buNone/>
+            </a:pPr>
+            <a:r>
+              <a:rPr lang="en-US" sz="900" dirty="0">
+                <a:solidFill>
+                  <a:srgbClr val="64748B"/>
+                </a:solidFill>
+                <a:latin typeface="Arial" pitchFamily="34" charset="0"/>
+                <a:ea typeface="Arial" pitchFamily="34" charset="-122"/>
+                <a:cs typeface="Arial" pitchFamily="34" charset="-120"/>
+              </a:rPr>
+              <a:t>M6 · Teste rápido</a:t>
+            </a:r>
+            <a:endParaRPr lang="en-US" sz="900" dirty="0"/>
+          </a:p>
+        </p:txBody>
+      </p:sp>
+      <p:sp>
+        <p:nvSpPr>
+          <p:cNvPr id="6" name="Shape 3"/>
+          <p:cNvSpPr/>
+          <p:nvPr/>
+        </p:nvSpPr>
+        <p:spPr>
+          <a:xfrm>
+            <a:off x="548640" y="384048"/>
+            <a:ext cx="82296" cy="658368"/>
+          </a:xfrm>
+          <a:prstGeom prst="rect">
+            <a:avLst/>
+          </a:prstGeom>
+          <a:solidFill>
+            <a:srgbClr val="F7A23B"/>
+          </a:solidFill>
+          <a:ln/>
+        </p:spPr>
+      </p:sp>
+      <p:sp>
+        <p:nvSpPr>
+          <p:cNvPr id="7" name="Text 4"/>
+          <p:cNvSpPr/>
+          <p:nvPr/>
+        </p:nvSpPr>
+        <p:spPr>
+          <a:xfrm>
+            <a:off x="777240" y="292608"/>
+            <a:ext cx="10972800" cy="274320"/>
+          </a:xfrm>
+          <a:prstGeom prst="rect">
+            <a:avLst/>
+          </a:prstGeom>
+          <a:noFill/>
+          <a:ln/>
+        </p:spPr>
+        <p:txBody>
+          <a:bodyPr wrap="square" rtlCol="0" anchor="ctr"/>
+          <a:lstStyle/>
+          <a:p>
+            <a:pPr indent="0" marL="0">
+              <a:buNone/>
+            </a:pPr>
+            <a:r>
+              <a:rPr lang="en-US" sz="1000" b="1" spc="100" kern="0" dirty="0">
+                <a:solidFill>
+                  <a:srgbClr val="F7A23B"/>
+                </a:solidFill>
+                <a:latin typeface="Arial" pitchFamily="34" charset="0"/>
+                <a:ea typeface="Arial" pitchFamily="34" charset="-122"/>
+                <a:cs typeface="Arial" pitchFamily="34" charset="-120"/>
+              </a:rPr>
+              <a:t>QUESTÕES 3–4 DE 6</a:t>
+            </a:r>
+            <a:endParaRPr lang="en-US" sz="1000" dirty="0"/>
+          </a:p>
+        </p:txBody>
+      </p:sp>
+      <p:sp>
+        <p:nvSpPr>
+          <p:cNvPr id="8" name="Text 5"/>
+          <p:cNvSpPr/>
+          <p:nvPr/>
+        </p:nvSpPr>
+        <p:spPr>
+          <a:xfrm>
+            <a:off x="777240" y="530352"/>
+            <a:ext cx="10881360" cy="566928"/>
+          </a:xfrm>
+          <a:prstGeom prst="rect">
+            <a:avLst/>
+          </a:prstGeom>
+          <a:noFill/>
+          <a:ln/>
+        </p:spPr>
+        <p:txBody>
+          <a:bodyPr wrap="square" rtlCol="0" anchor="ctr">
+            <a:normAutofit/>
+          </a:bodyPr>
+          <a:lstStyle/>
+          <a:p>
+            <a:pPr indent="0" marL="0">
+              <a:buNone/>
+            </a:pPr>
+            <a:r>
+              <a:rPr lang="en-US" sz="2600" b="1" dirty="0">
+                <a:solidFill>
+                  <a:srgbClr val="1B3A6B"/>
+                </a:solidFill>
+                <a:latin typeface="Arial" pitchFamily="34" charset="0"/>
+                <a:ea typeface="Arial" pitchFamily="34" charset="-122"/>
+                <a:cs typeface="Arial" pitchFamily="34" charset="-120"/>
+              </a:rPr>
+              <a:t>Teste rápido</a:t>
+            </a:r>
+            <a:endParaRPr lang="en-US" sz="2600" dirty="0"/>
+          </a:p>
+        </p:txBody>
+      </p:sp>
+      <p:sp>
+        <p:nvSpPr>
+          <p:cNvPr id="9" name="Shape 6"/>
+          <p:cNvSpPr/>
+          <p:nvPr/>
+        </p:nvSpPr>
+        <p:spPr>
+          <a:xfrm>
+            <a:off x="548640" y="1325880"/>
+            <a:ext cx="502920" cy="502920"/>
+          </a:xfrm>
+          <a:prstGeom prst="ellipse">
+            <a:avLst/>
+          </a:prstGeom>
+          <a:solidFill>
+            <a:srgbClr val="1B3A6B"/>
+          </a:solidFill>
+          <a:ln/>
+        </p:spPr>
+      </p:sp>
+      <p:sp>
+        <p:nvSpPr>
+          <p:cNvPr id="10" name="Text 7"/>
+          <p:cNvSpPr/>
+          <p:nvPr/>
+        </p:nvSpPr>
+        <p:spPr>
+          <a:xfrm>
+            <a:off x="548640" y="1325880"/>
+            <a:ext cx="502920" cy="502920"/>
+          </a:xfrm>
+          <a:prstGeom prst="rect">
+            <a:avLst/>
+          </a:prstGeom>
+          <a:noFill/>
+          <a:ln/>
+        </p:spPr>
+        <p:txBody>
+          <a:bodyPr wrap="square" rtlCol="0" anchor="ctr"/>
+          <a:lstStyle/>
+          <a:p>
+            <a:pPr algn="ctr" indent="0" marL="0">
+              <a:buNone/>
+            </a:pPr>
+            <a:r>
+              <a:rPr lang="en-US" sz="1600" b="1" dirty="0">
+                <a:solidFill>
+                  <a:srgbClr val="FFFFFF"/>
+                </a:solidFill>
+                <a:latin typeface="Arial" pitchFamily="34" charset="0"/>
+                <a:ea typeface="Arial" pitchFamily="34" charset="-122"/>
+                <a:cs typeface="Arial" pitchFamily="34" charset="-120"/>
+              </a:rPr>
+              <a:t>3</a:t>
+            </a:r>
+            <a:endParaRPr lang="en-US" sz="1600" dirty="0"/>
+          </a:p>
+        </p:txBody>
+      </p:sp>
+      <p:sp>
+        <p:nvSpPr>
+          <p:cNvPr id="11" name="Text 8"/>
+          <p:cNvSpPr/>
+          <p:nvPr/>
+        </p:nvSpPr>
+        <p:spPr>
+          <a:xfrm>
+            <a:off x="1234440" y="1280160"/>
+            <a:ext cx="10424160" cy="640080"/>
+          </a:xfrm>
+          <a:prstGeom prst="rect">
+            <a:avLst/>
+          </a:prstGeom>
+          <a:noFill/>
+          <a:ln/>
+        </p:spPr>
+        <p:txBody>
+          <a:bodyPr wrap="square" rtlCol="0" anchor="ctr"/>
+          <a:lstStyle/>
+          <a:p>
+            <a:pPr indent="0" marL="0">
+              <a:buNone/>
+            </a:pPr>
+            <a:r>
+              <a:rPr lang="en-US" sz="1800" b="1" dirty="0">
+                <a:solidFill>
+                  <a:srgbClr val="1B3A6B"/>
+                </a:solidFill>
+                <a:latin typeface="Arial" pitchFamily="34" charset="0"/>
+                <a:ea typeface="Arial" pitchFamily="34" charset="-122"/>
+                <a:cs typeface="Arial" pitchFamily="34" charset="-120"/>
+              </a:rPr>
+              <a:t>Quando um cliente sai, a lista de rateio:</a:t>
+            </a:r>
+            <a:endParaRPr lang="en-US" sz="1800" dirty="0"/>
+          </a:p>
+        </p:txBody>
+      </p:sp>
+      <p:sp>
+        <p:nvSpPr>
+          <p:cNvPr id="12" name="Shape 9"/>
+          <p:cNvSpPr/>
+          <p:nvPr/>
+        </p:nvSpPr>
+        <p:spPr>
+          <a:xfrm>
+            <a:off x="548640" y="2057400"/>
+            <a:ext cx="2601468" cy="1463040"/>
+          </a:xfrm>
+          <a:prstGeom prst="roundRect">
+            <a:avLst>
+              <a:gd name="adj" fmla="val 5000"/>
+            </a:avLst>
+          </a:prstGeom>
+          <a:solidFill>
+            <a:srgbClr val="FFFFFF"/>
+          </a:solidFill>
+          <a:ln w="9525">
+            <a:solidFill>
+              <a:srgbClr val="D8E0EC"/>
+            </a:solidFill>
+            <a:prstDash val="solid"/>
+          </a:ln>
+        </p:spPr>
+      </p:sp>
+      <p:sp>
+        <p:nvSpPr>
+          <p:cNvPr id="13" name="Text 10"/>
+          <p:cNvSpPr/>
+          <p:nvPr/>
+        </p:nvSpPr>
+        <p:spPr>
+          <a:xfrm>
+            <a:off x="685800" y="2148840"/>
+            <a:ext cx="365760" cy="365760"/>
+          </a:xfrm>
+          <a:prstGeom prst="rect">
+            <a:avLst/>
+          </a:prstGeom>
+          <a:noFill/>
+          <a:ln/>
+        </p:spPr>
+        <p:txBody>
+          <a:bodyPr wrap="square" rtlCol="0" anchor="ctr"/>
+          <a:lstStyle/>
+          <a:p>
+            <a:pPr indent="0" marL="0">
+              <a:buNone/>
+            </a:pPr>
+            <a:r>
+              <a:rPr lang="en-US" sz="1400" b="1" dirty="0">
+                <a:solidFill>
+                  <a:srgbClr val="F7A23B"/>
+                </a:solidFill>
+                <a:latin typeface="Arial" pitchFamily="34" charset="0"/>
+                <a:ea typeface="Arial" pitchFamily="34" charset="-122"/>
+                <a:cs typeface="Arial" pitchFamily="34" charset="-120"/>
+              </a:rPr>
+              <a:t>A</a:t>
+            </a:r>
+            <a:endParaRPr lang="en-US" sz="1400" dirty="0"/>
+          </a:p>
+        </p:txBody>
+      </p:sp>
+      <p:sp>
+        <p:nvSpPr>
+          <p:cNvPr id="14" name="Text 11"/>
+          <p:cNvSpPr/>
+          <p:nvPr/>
+        </p:nvSpPr>
+        <p:spPr>
+          <a:xfrm>
+            <a:off x="685800" y="2514600"/>
+            <a:ext cx="2327148" cy="914400"/>
+          </a:xfrm>
+          <a:prstGeom prst="rect">
+            <a:avLst/>
+          </a:prstGeom>
+          <a:noFill/>
+          <a:ln/>
+        </p:spPr>
+        <p:txBody>
+          <a:bodyPr wrap="square" rtlCol="0" anchor="t"/>
+          <a:lstStyle/>
+          <a:p>
+            <a:pPr indent="0" marL="0">
+              <a:buNone/>
+            </a:pPr>
+            <a:r>
+              <a:rPr lang="en-US" sz="1500" dirty="0">
+                <a:solidFill>
+                  <a:srgbClr val="1F2937"/>
+                </a:solidFill>
+                <a:latin typeface="Arial" pitchFamily="34" charset="0"/>
+                <a:ea typeface="Arial" pitchFamily="34" charset="-122"/>
+                <a:cs typeface="Arial" pitchFamily="34" charset="-120"/>
+              </a:rPr>
+              <a:t>precisa ser atualizada na distribuidora</a:t>
+            </a:r>
+            <a:endParaRPr lang="en-US" sz="1500" dirty="0"/>
+          </a:p>
+        </p:txBody>
+      </p:sp>
+      <p:sp>
+        <p:nvSpPr>
+          <p:cNvPr id="15" name="Shape 12"/>
+          <p:cNvSpPr/>
+          <p:nvPr/>
+        </p:nvSpPr>
+        <p:spPr>
+          <a:xfrm>
+            <a:off x="3378708" y="2057400"/>
+            <a:ext cx="2601468" cy="1463040"/>
+          </a:xfrm>
+          <a:prstGeom prst="roundRect">
+            <a:avLst>
+              <a:gd name="adj" fmla="val 5000"/>
+            </a:avLst>
+          </a:prstGeom>
+          <a:solidFill>
+            <a:srgbClr val="FFFFFF"/>
+          </a:solidFill>
+          <a:ln w="9525">
+            <a:solidFill>
+              <a:srgbClr val="D8E0EC"/>
+            </a:solidFill>
+            <a:prstDash val="solid"/>
+          </a:ln>
+        </p:spPr>
+      </p:sp>
+      <p:sp>
+        <p:nvSpPr>
+          <p:cNvPr id="16" name="Text 13"/>
+          <p:cNvSpPr/>
+          <p:nvPr/>
+        </p:nvSpPr>
+        <p:spPr>
+          <a:xfrm>
+            <a:off x="3515868" y="2148840"/>
+            <a:ext cx="365760" cy="365760"/>
+          </a:xfrm>
+          <a:prstGeom prst="rect">
+            <a:avLst/>
+          </a:prstGeom>
+          <a:noFill/>
+          <a:ln/>
+        </p:spPr>
+        <p:txBody>
+          <a:bodyPr wrap="square" rtlCol="0" anchor="ctr"/>
+          <a:lstStyle/>
+          <a:p>
+            <a:pPr indent="0" marL="0">
+              <a:buNone/>
+            </a:pPr>
+            <a:r>
+              <a:rPr lang="en-US" sz="1400" b="1" dirty="0">
+                <a:solidFill>
+                  <a:srgbClr val="F7A23B"/>
+                </a:solidFill>
+                <a:latin typeface="Arial" pitchFamily="34" charset="0"/>
+                <a:ea typeface="Arial" pitchFamily="34" charset="-122"/>
+                <a:cs typeface="Arial" pitchFamily="34" charset="-120"/>
+              </a:rPr>
+              <a:t>B</a:t>
+            </a:r>
+            <a:endParaRPr lang="en-US" sz="1400" dirty="0"/>
+          </a:p>
+        </p:txBody>
+      </p:sp>
+      <p:sp>
+        <p:nvSpPr>
+          <p:cNvPr id="17" name="Text 14"/>
+          <p:cNvSpPr/>
+          <p:nvPr/>
+        </p:nvSpPr>
+        <p:spPr>
+          <a:xfrm>
+            <a:off x="3515868" y="2514600"/>
+            <a:ext cx="2327148" cy="914400"/>
+          </a:xfrm>
+          <a:prstGeom prst="rect">
+            <a:avLst/>
+          </a:prstGeom>
+          <a:noFill/>
+          <a:ln/>
+        </p:spPr>
+        <p:txBody>
+          <a:bodyPr wrap="square" rtlCol="0" anchor="t"/>
+          <a:lstStyle/>
+          <a:p>
+            <a:pPr indent="0" marL="0">
+              <a:buNone/>
+            </a:pPr>
+            <a:r>
+              <a:rPr lang="en-US" sz="1500" dirty="0">
+                <a:solidFill>
+                  <a:srgbClr val="1F2937"/>
+                </a:solidFill>
+                <a:latin typeface="Arial" pitchFamily="34" charset="0"/>
+                <a:ea typeface="Arial" pitchFamily="34" charset="-122"/>
+                <a:cs typeface="Arial" pitchFamily="34" charset="-120"/>
+              </a:rPr>
+              <a:t>se atualiza sozinha</a:t>
+            </a:r>
+            <a:endParaRPr lang="en-US" sz="1500" dirty="0"/>
+          </a:p>
+        </p:txBody>
+      </p:sp>
+      <p:sp>
+        <p:nvSpPr>
+          <p:cNvPr id="18" name="Shape 15"/>
+          <p:cNvSpPr/>
+          <p:nvPr/>
+        </p:nvSpPr>
+        <p:spPr>
+          <a:xfrm>
+            <a:off x="6208776" y="2057400"/>
+            <a:ext cx="2601468" cy="1463040"/>
+          </a:xfrm>
+          <a:prstGeom prst="roundRect">
+            <a:avLst>
+              <a:gd name="adj" fmla="val 5000"/>
+            </a:avLst>
+          </a:prstGeom>
+          <a:solidFill>
+            <a:srgbClr val="FFFFFF"/>
+          </a:solidFill>
+          <a:ln w="9525">
+            <a:solidFill>
+              <a:srgbClr val="D8E0EC"/>
+            </a:solidFill>
+            <a:prstDash val="solid"/>
+          </a:ln>
+        </p:spPr>
+      </p:sp>
+      <p:sp>
+        <p:nvSpPr>
+          <p:cNvPr id="19" name="Text 16"/>
+          <p:cNvSpPr/>
+          <p:nvPr/>
+        </p:nvSpPr>
+        <p:spPr>
+          <a:xfrm>
+            <a:off x="6345936" y="2148840"/>
+            <a:ext cx="365760" cy="365760"/>
+          </a:xfrm>
+          <a:prstGeom prst="rect">
+            <a:avLst/>
+          </a:prstGeom>
+          <a:noFill/>
+          <a:ln/>
+        </p:spPr>
+        <p:txBody>
+          <a:bodyPr wrap="square" rtlCol="0" anchor="ctr"/>
+          <a:lstStyle/>
+          <a:p>
+            <a:pPr indent="0" marL="0">
+              <a:buNone/>
+            </a:pPr>
+            <a:r>
+              <a:rPr lang="en-US" sz="1400" b="1" dirty="0">
+                <a:solidFill>
+                  <a:srgbClr val="F7A23B"/>
+                </a:solidFill>
+                <a:latin typeface="Arial" pitchFamily="34" charset="0"/>
+                <a:ea typeface="Arial" pitchFamily="34" charset="-122"/>
+                <a:cs typeface="Arial" pitchFamily="34" charset="-120"/>
+              </a:rPr>
+              <a:t>C</a:t>
+            </a:r>
+            <a:endParaRPr lang="en-US" sz="1400" dirty="0"/>
+          </a:p>
+        </p:txBody>
+      </p:sp>
+      <p:sp>
+        <p:nvSpPr>
+          <p:cNvPr id="20" name="Text 17"/>
+          <p:cNvSpPr/>
+          <p:nvPr/>
+        </p:nvSpPr>
+        <p:spPr>
+          <a:xfrm>
+            <a:off x="6345936" y="2514600"/>
+            <a:ext cx="2327148" cy="914400"/>
+          </a:xfrm>
+          <a:prstGeom prst="rect">
+            <a:avLst/>
+          </a:prstGeom>
+          <a:noFill/>
+          <a:ln/>
+        </p:spPr>
+        <p:txBody>
+          <a:bodyPr wrap="square" rtlCol="0" anchor="t"/>
+          <a:lstStyle/>
+          <a:p>
+            <a:pPr indent="0" marL="0">
+              <a:buNone/>
+            </a:pPr>
+            <a:r>
+              <a:rPr lang="en-US" sz="1500" dirty="0">
+                <a:solidFill>
+                  <a:srgbClr val="1F2937"/>
+                </a:solidFill>
+                <a:latin typeface="Arial" pitchFamily="34" charset="0"/>
+                <a:ea typeface="Arial" pitchFamily="34" charset="-122"/>
+                <a:cs typeface="Arial" pitchFamily="34" charset="-120"/>
+              </a:rPr>
+              <a:t>não muda</a:t>
+            </a:r>
+            <a:endParaRPr lang="en-US" sz="1500" dirty="0"/>
+          </a:p>
+        </p:txBody>
+      </p:sp>
+      <p:sp>
+        <p:nvSpPr>
+          <p:cNvPr id="21" name="Shape 18"/>
+          <p:cNvSpPr/>
+          <p:nvPr/>
+        </p:nvSpPr>
+        <p:spPr>
+          <a:xfrm>
+            <a:off x="9038844" y="2057400"/>
+            <a:ext cx="2601468" cy="1463040"/>
+          </a:xfrm>
+          <a:prstGeom prst="roundRect">
+            <a:avLst>
+              <a:gd name="adj" fmla="val 5000"/>
+            </a:avLst>
+          </a:prstGeom>
+          <a:solidFill>
+            <a:srgbClr val="FFFFFF"/>
+          </a:solidFill>
+          <a:ln w="9525">
+            <a:solidFill>
+              <a:srgbClr val="D8E0EC"/>
+            </a:solidFill>
+            <a:prstDash val="solid"/>
+          </a:ln>
+        </p:spPr>
+      </p:sp>
+      <p:sp>
+        <p:nvSpPr>
+          <p:cNvPr id="22" name="Text 19"/>
+          <p:cNvSpPr/>
+          <p:nvPr/>
+        </p:nvSpPr>
+        <p:spPr>
+          <a:xfrm>
+            <a:off x="9176004" y="2148840"/>
+            <a:ext cx="365760" cy="365760"/>
+          </a:xfrm>
+          <a:prstGeom prst="rect">
+            <a:avLst/>
+          </a:prstGeom>
+          <a:noFill/>
+          <a:ln/>
+        </p:spPr>
+        <p:txBody>
+          <a:bodyPr wrap="square" rtlCol="0" anchor="ctr"/>
+          <a:lstStyle/>
+          <a:p>
+            <a:pPr indent="0" marL="0">
+              <a:buNone/>
+            </a:pPr>
+            <a:r>
+              <a:rPr lang="en-US" sz="1400" b="1" dirty="0">
+                <a:solidFill>
+                  <a:srgbClr val="F7A23B"/>
+                </a:solidFill>
+                <a:latin typeface="Arial" pitchFamily="34" charset="0"/>
+                <a:ea typeface="Arial" pitchFamily="34" charset="-122"/>
+                <a:cs typeface="Arial" pitchFamily="34" charset="-120"/>
+              </a:rPr>
+              <a:t>D</a:t>
+            </a:r>
+            <a:endParaRPr lang="en-US" sz="1400" dirty="0"/>
+          </a:p>
+        </p:txBody>
+      </p:sp>
+      <p:sp>
+        <p:nvSpPr>
+          <p:cNvPr id="23" name="Text 20"/>
+          <p:cNvSpPr/>
+          <p:nvPr/>
+        </p:nvSpPr>
+        <p:spPr>
+          <a:xfrm>
+            <a:off x="9176004" y="2514600"/>
+            <a:ext cx="2327148" cy="914400"/>
+          </a:xfrm>
+          <a:prstGeom prst="rect">
+            <a:avLst/>
+          </a:prstGeom>
+          <a:noFill/>
+          <a:ln/>
+        </p:spPr>
+        <p:txBody>
+          <a:bodyPr wrap="square" rtlCol="0" anchor="t"/>
+          <a:lstStyle/>
+          <a:p>
+            <a:pPr indent="0" marL="0">
+              <a:buNone/>
+            </a:pPr>
+            <a:r>
+              <a:rPr lang="en-US" sz="1500" dirty="0">
+                <a:solidFill>
+                  <a:srgbClr val="1F2937"/>
+                </a:solidFill>
+                <a:latin typeface="Arial" pitchFamily="34" charset="0"/>
+                <a:ea typeface="Arial" pitchFamily="34" charset="-122"/>
+                <a:cs typeface="Arial" pitchFamily="34" charset="-120"/>
+              </a:rPr>
+              <a:t>é cancelada inteira</a:t>
+            </a:r>
+            <a:endParaRPr lang="en-US" sz="1500" dirty="0"/>
+          </a:p>
+        </p:txBody>
+      </p:sp>
+      <p:sp>
+        <p:nvSpPr>
+          <p:cNvPr id="24" name="Shape 21"/>
+          <p:cNvSpPr/>
+          <p:nvPr/>
+        </p:nvSpPr>
+        <p:spPr>
+          <a:xfrm>
+            <a:off x="548640" y="3840480"/>
+            <a:ext cx="502920" cy="502920"/>
+          </a:xfrm>
+          <a:prstGeom prst="ellipse">
+            <a:avLst/>
+          </a:prstGeom>
+          <a:solidFill>
+            <a:srgbClr val="1B3A6B"/>
+          </a:solidFill>
+          <a:ln/>
+        </p:spPr>
+      </p:sp>
+      <p:sp>
+        <p:nvSpPr>
+          <p:cNvPr id="25" name="Text 22"/>
+          <p:cNvSpPr/>
+          <p:nvPr/>
+        </p:nvSpPr>
+        <p:spPr>
+          <a:xfrm>
+            <a:off x="548640" y="3840480"/>
+            <a:ext cx="502920" cy="502920"/>
+          </a:xfrm>
+          <a:prstGeom prst="rect">
+            <a:avLst/>
+          </a:prstGeom>
+          <a:noFill/>
+          <a:ln/>
+        </p:spPr>
+        <p:txBody>
+          <a:bodyPr wrap="square" rtlCol="0" anchor="ctr"/>
+          <a:lstStyle/>
+          <a:p>
+            <a:pPr algn="ctr" indent="0" marL="0">
+              <a:buNone/>
+            </a:pPr>
+            <a:r>
+              <a:rPr lang="en-US" sz="1600" b="1" dirty="0">
+                <a:solidFill>
+                  <a:srgbClr val="FFFFFF"/>
+                </a:solidFill>
+                <a:latin typeface="Arial" pitchFamily="34" charset="0"/>
+                <a:ea typeface="Arial" pitchFamily="34" charset="-122"/>
+                <a:cs typeface="Arial" pitchFamily="34" charset="-120"/>
+              </a:rPr>
+              <a:t>4</a:t>
+            </a:r>
+            <a:endParaRPr lang="en-US" sz="1600" dirty="0"/>
+          </a:p>
+        </p:txBody>
+      </p:sp>
+      <p:sp>
+        <p:nvSpPr>
+          <p:cNvPr id="26" name="Text 23"/>
+          <p:cNvSpPr/>
+          <p:nvPr/>
+        </p:nvSpPr>
+        <p:spPr>
+          <a:xfrm>
+            <a:off x="1234440" y="3794760"/>
+            <a:ext cx="10424160" cy="640080"/>
+          </a:xfrm>
+          <a:prstGeom prst="rect">
+            <a:avLst/>
+          </a:prstGeom>
+          <a:noFill/>
+          <a:ln/>
+        </p:spPr>
+        <p:txBody>
+          <a:bodyPr wrap="square" rtlCol="0" anchor="ctr"/>
+          <a:lstStyle/>
+          <a:p>
+            <a:pPr indent="0" marL="0">
+              <a:buNone/>
+            </a:pPr>
+            <a:r>
+              <a:rPr lang="en-US" sz="1800" b="1" dirty="0">
+                <a:solidFill>
+                  <a:srgbClr val="1B3A6B"/>
+                </a:solidFill>
+                <a:latin typeface="Arial" pitchFamily="34" charset="0"/>
+                <a:ea typeface="Arial" pitchFamily="34" charset="-122"/>
+                <a:cs typeface="Arial" pitchFamily="34" charset="-120"/>
+              </a:rPr>
+              <a:t>A plataforma permite vincular mais energia do que o saldo da usina?</a:t>
+            </a:r>
+            <a:endParaRPr lang="en-US" sz="1800" dirty="0"/>
+          </a:p>
+        </p:txBody>
+      </p:sp>
+      <p:sp>
+        <p:nvSpPr>
+          <p:cNvPr id="27" name="Shape 24"/>
+          <p:cNvSpPr/>
+          <p:nvPr/>
+        </p:nvSpPr>
+        <p:spPr>
+          <a:xfrm>
+            <a:off x="548640" y="4572000"/>
+            <a:ext cx="2601468" cy="1463040"/>
+          </a:xfrm>
+          <a:prstGeom prst="roundRect">
+            <a:avLst>
+              <a:gd name="adj" fmla="val 5000"/>
+            </a:avLst>
+          </a:prstGeom>
+          <a:solidFill>
+            <a:srgbClr val="FFFFFF"/>
+          </a:solidFill>
+          <a:ln w="9525">
+            <a:solidFill>
+              <a:srgbClr val="D8E0EC"/>
+            </a:solidFill>
+            <a:prstDash val="solid"/>
+          </a:ln>
+        </p:spPr>
+      </p:sp>
+      <p:sp>
+        <p:nvSpPr>
+          <p:cNvPr id="28" name="Text 25"/>
+          <p:cNvSpPr/>
+          <p:nvPr/>
+        </p:nvSpPr>
+        <p:spPr>
+          <a:xfrm>
+            <a:off x="685800" y="4663440"/>
+            <a:ext cx="365760" cy="365760"/>
+          </a:xfrm>
+          <a:prstGeom prst="rect">
+            <a:avLst/>
+          </a:prstGeom>
+          <a:noFill/>
+          <a:ln/>
+        </p:spPr>
+        <p:txBody>
+          <a:bodyPr wrap="square" rtlCol="0" anchor="ctr"/>
+          <a:lstStyle/>
+          <a:p>
+            <a:pPr indent="0" marL="0">
+              <a:buNone/>
+            </a:pPr>
+            <a:r>
+              <a:rPr lang="en-US" sz="1400" b="1" dirty="0">
+                <a:solidFill>
+                  <a:srgbClr val="F7A23B"/>
+                </a:solidFill>
+                <a:latin typeface="Arial" pitchFamily="34" charset="0"/>
+                <a:ea typeface="Arial" pitchFamily="34" charset="-122"/>
+                <a:cs typeface="Arial" pitchFamily="34" charset="-120"/>
+              </a:rPr>
+              <a:t>A</a:t>
+            </a:r>
+            <a:endParaRPr lang="en-US" sz="1400" dirty="0"/>
+          </a:p>
+        </p:txBody>
+      </p:sp>
+      <p:sp>
+        <p:nvSpPr>
+          <p:cNvPr id="29" name="Text 26"/>
+          <p:cNvSpPr/>
+          <p:nvPr/>
+        </p:nvSpPr>
+        <p:spPr>
+          <a:xfrm>
+            <a:off x="685800" y="5029200"/>
+            <a:ext cx="2327148" cy="914400"/>
+          </a:xfrm>
+          <a:prstGeom prst="rect">
+            <a:avLst/>
+          </a:prstGeom>
+          <a:noFill/>
+          <a:ln/>
+        </p:spPr>
+        <p:txBody>
+          <a:bodyPr wrap="square" rtlCol="0" anchor="t"/>
+          <a:lstStyle/>
+          <a:p>
+            <a:pPr indent="0" marL="0">
+              <a:buNone/>
+            </a:pPr>
+            <a:r>
+              <a:rPr lang="en-US" sz="1500" dirty="0">
+                <a:solidFill>
+                  <a:srgbClr val="1F2937"/>
+                </a:solidFill>
+                <a:latin typeface="Arial" pitchFamily="34" charset="0"/>
+                <a:ea typeface="Arial" pitchFamily="34" charset="-122"/>
+                <a:cs typeface="Arial" pitchFamily="34" charset="-120"/>
+              </a:rPr>
+              <a:t>Sim</a:t>
+            </a:r>
+            <a:endParaRPr lang="en-US" sz="1500" dirty="0"/>
+          </a:p>
+        </p:txBody>
+      </p:sp>
+      <p:sp>
+        <p:nvSpPr>
+          <p:cNvPr id="30" name="Shape 27"/>
+          <p:cNvSpPr/>
+          <p:nvPr/>
+        </p:nvSpPr>
+        <p:spPr>
+          <a:xfrm>
+            <a:off x="3378708" y="4572000"/>
+            <a:ext cx="2601468" cy="1463040"/>
+          </a:xfrm>
+          <a:prstGeom prst="roundRect">
+            <a:avLst>
+              <a:gd name="adj" fmla="val 5000"/>
+            </a:avLst>
+          </a:prstGeom>
+          <a:solidFill>
+            <a:srgbClr val="FFFFFF"/>
+          </a:solidFill>
+          <a:ln w="9525">
+            <a:solidFill>
+              <a:srgbClr val="D8E0EC"/>
+            </a:solidFill>
+            <a:prstDash val="solid"/>
+          </a:ln>
+        </p:spPr>
+      </p:sp>
+      <p:sp>
+        <p:nvSpPr>
+          <p:cNvPr id="31" name="Text 28"/>
+          <p:cNvSpPr/>
+          <p:nvPr/>
+        </p:nvSpPr>
+        <p:spPr>
+          <a:xfrm>
+            <a:off x="3515868" y="4663440"/>
+            <a:ext cx="365760" cy="365760"/>
+          </a:xfrm>
+          <a:prstGeom prst="rect">
+            <a:avLst/>
+          </a:prstGeom>
+          <a:noFill/>
+          <a:ln/>
+        </p:spPr>
+        <p:txBody>
+          <a:bodyPr wrap="square" rtlCol="0" anchor="ctr"/>
+          <a:lstStyle/>
+          <a:p>
+            <a:pPr indent="0" marL="0">
+              <a:buNone/>
+            </a:pPr>
+            <a:r>
+              <a:rPr lang="en-US" sz="1400" b="1" dirty="0">
+                <a:solidFill>
+                  <a:srgbClr val="F7A23B"/>
+                </a:solidFill>
+                <a:latin typeface="Arial" pitchFamily="34" charset="0"/>
+                <a:ea typeface="Arial" pitchFamily="34" charset="-122"/>
+                <a:cs typeface="Arial" pitchFamily="34" charset="-120"/>
+              </a:rPr>
+              <a:t>B</a:t>
+            </a:r>
+            <a:endParaRPr lang="en-US" sz="1400" dirty="0"/>
+          </a:p>
+        </p:txBody>
+      </p:sp>
+      <p:sp>
+        <p:nvSpPr>
+          <p:cNvPr id="32" name="Text 29"/>
+          <p:cNvSpPr/>
+          <p:nvPr/>
+        </p:nvSpPr>
+        <p:spPr>
+          <a:xfrm>
+            <a:off x="3515868" y="5029200"/>
+            <a:ext cx="2327148" cy="914400"/>
+          </a:xfrm>
+          <a:prstGeom prst="rect">
+            <a:avLst/>
+          </a:prstGeom>
+          <a:noFill/>
+          <a:ln/>
+        </p:spPr>
+        <p:txBody>
+          <a:bodyPr wrap="square" rtlCol="0" anchor="t"/>
+          <a:lstStyle/>
+          <a:p>
+            <a:pPr indent="0" marL="0">
+              <a:buNone/>
+            </a:pPr>
+            <a:r>
+              <a:rPr lang="en-US" sz="1500" dirty="0">
+                <a:solidFill>
+                  <a:srgbClr val="1F2937"/>
+                </a:solidFill>
+                <a:latin typeface="Arial" pitchFamily="34" charset="0"/>
+                <a:ea typeface="Arial" pitchFamily="34" charset="-122"/>
+                <a:cs typeface="Arial" pitchFamily="34" charset="-120"/>
+              </a:rPr>
+              <a:t>Só para admin</a:t>
+            </a:r>
+            <a:endParaRPr lang="en-US" sz="1500" dirty="0"/>
+          </a:p>
+        </p:txBody>
+      </p:sp>
+      <p:sp>
+        <p:nvSpPr>
+          <p:cNvPr id="33" name="Shape 30"/>
+          <p:cNvSpPr/>
+          <p:nvPr/>
+        </p:nvSpPr>
+        <p:spPr>
+          <a:xfrm>
+            <a:off x="6208776" y="4572000"/>
+            <a:ext cx="2601468" cy="1463040"/>
+          </a:xfrm>
+          <a:prstGeom prst="roundRect">
+            <a:avLst>
+              <a:gd name="adj" fmla="val 5000"/>
+            </a:avLst>
+          </a:prstGeom>
+          <a:solidFill>
+            <a:srgbClr val="FFFFFF"/>
+          </a:solidFill>
+          <a:ln w="9525">
+            <a:solidFill>
+              <a:srgbClr val="D8E0EC"/>
+            </a:solidFill>
+            <a:prstDash val="solid"/>
+          </a:ln>
+        </p:spPr>
+      </p:sp>
+      <p:sp>
+        <p:nvSpPr>
+          <p:cNvPr id="34" name="Text 31"/>
+          <p:cNvSpPr/>
+          <p:nvPr/>
+        </p:nvSpPr>
+        <p:spPr>
+          <a:xfrm>
+            <a:off x="6345936" y="4663440"/>
+            <a:ext cx="365760" cy="365760"/>
+          </a:xfrm>
+          <a:prstGeom prst="rect">
+            <a:avLst/>
+          </a:prstGeom>
+          <a:noFill/>
+          <a:ln/>
+        </p:spPr>
+        <p:txBody>
+          <a:bodyPr wrap="square" rtlCol="0" anchor="ctr"/>
+          <a:lstStyle/>
+          <a:p>
+            <a:pPr indent="0" marL="0">
+              <a:buNone/>
+            </a:pPr>
+            <a:r>
+              <a:rPr lang="en-US" sz="1400" b="1" dirty="0">
+                <a:solidFill>
+                  <a:srgbClr val="F7A23B"/>
+                </a:solidFill>
+                <a:latin typeface="Arial" pitchFamily="34" charset="0"/>
+                <a:ea typeface="Arial" pitchFamily="34" charset="-122"/>
+                <a:cs typeface="Arial" pitchFamily="34" charset="-120"/>
+              </a:rPr>
+              <a:t>C</a:t>
+            </a:r>
+            <a:endParaRPr lang="en-US" sz="1400" dirty="0"/>
+          </a:p>
+        </p:txBody>
+      </p:sp>
+      <p:sp>
+        <p:nvSpPr>
+          <p:cNvPr id="35" name="Text 32"/>
+          <p:cNvSpPr/>
+          <p:nvPr/>
+        </p:nvSpPr>
+        <p:spPr>
+          <a:xfrm>
+            <a:off x="6345936" y="5029200"/>
+            <a:ext cx="2327148" cy="914400"/>
+          </a:xfrm>
+          <a:prstGeom prst="rect">
+            <a:avLst/>
+          </a:prstGeom>
+          <a:noFill/>
+          <a:ln/>
+        </p:spPr>
+        <p:txBody>
+          <a:bodyPr wrap="square" rtlCol="0" anchor="t"/>
+          <a:lstStyle/>
+          <a:p>
+            <a:pPr indent="0" marL="0">
+              <a:buNone/>
+            </a:pPr>
+            <a:r>
+              <a:rPr lang="en-US" sz="1500" dirty="0">
+                <a:solidFill>
+                  <a:srgbClr val="1F2937"/>
+                </a:solidFill>
+                <a:latin typeface="Arial" pitchFamily="34" charset="0"/>
+                <a:ea typeface="Arial" pitchFamily="34" charset="-122"/>
+                <a:cs typeface="Arial" pitchFamily="34" charset="-120"/>
+              </a:rPr>
+              <a:t>Não, recusa o vínculo</a:t>
+            </a:r>
+            <a:endParaRPr lang="en-US" sz="1500" dirty="0"/>
+          </a:p>
+        </p:txBody>
+      </p:sp>
+      <p:sp>
+        <p:nvSpPr>
+          <p:cNvPr id="36" name="Shape 33"/>
+          <p:cNvSpPr/>
+          <p:nvPr/>
+        </p:nvSpPr>
+        <p:spPr>
+          <a:xfrm>
+            <a:off x="9038844" y="4572000"/>
+            <a:ext cx="2601468" cy="1463040"/>
+          </a:xfrm>
+          <a:prstGeom prst="roundRect">
+            <a:avLst>
+              <a:gd name="adj" fmla="val 5000"/>
+            </a:avLst>
+          </a:prstGeom>
+          <a:solidFill>
+            <a:srgbClr val="FFFFFF"/>
+          </a:solidFill>
+          <a:ln w="9525">
+            <a:solidFill>
+              <a:srgbClr val="D8E0EC"/>
+            </a:solidFill>
+            <a:prstDash val="solid"/>
+          </a:ln>
+        </p:spPr>
+      </p:sp>
+      <p:sp>
+        <p:nvSpPr>
+          <p:cNvPr id="37" name="Text 34"/>
+          <p:cNvSpPr/>
+          <p:nvPr/>
+        </p:nvSpPr>
+        <p:spPr>
+          <a:xfrm>
+            <a:off x="9176004" y="4663440"/>
+            <a:ext cx="365760" cy="365760"/>
+          </a:xfrm>
+          <a:prstGeom prst="rect">
+            <a:avLst/>
+          </a:prstGeom>
+          <a:noFill/>
+          <a:ln/>
+        </p:spPr>
+        <p:txBody>
+          <a:bodyPr wrap="square" rtlCol="0" anchor="ctr"/>
+          <a:lstStyle/>
+          <a:p>
+            <a:pPr indent="0" marL="0">
+              <a:buNone/>
+            </a:pPr>
+            <a:r>
+              <a:rPr lang="en-US" sz="1400" b="1" dirty="0">
+                <a:solidFill>
+                  <a:srgbClr val="F7A23B"/>
+                </a:solidFill>
+                <a:latin typeface="Arial" pitchFamily="34" charset="0"/>
+                <a:ea typeface="Arial" pitchFamily="34" charset="-122"/>
+                <a:cs typeface="Arial" pitchFamily="34" charset="-120"/>
+              </a:rPr>
+              <a:t>D</a:t>
+            </a:r>
+            <a:endParaRPr lang="en-US" sz="1400" dirty="0"/>
+          </a:p>
+        </p:txBody>
+      </p:sp>
+      <p:sp>
+        <p:nvSpPr>
+          <p:cNvPr id="38" name="Text 35"/>
+          <p:cNvSpPr/>
+          <p:nvPr/>
+        </p:nvSpPr>
+        <p:spPr>
+          <a:xfrm>
+            <a:off x="9176004" y="5029200"/>
+            <a:ext cx="2327148" cy="914400"/>
+          </a:xfrm>
+          <a:prstGeom prst="rect">
+            <a:avLst/>
+          </a:prstGeom>
+          <a:noFill/>
+          <a:ln/>
+        </p:spPr>
+        <p:txBody>
+          <a:bodyPr wrap="square" rtlCol="0" anchor="t"/>
+          <a:lstStyle/>
+          <a:p>
+            <a:pPr indent="0" marL="0">
+              <a:buNone/>
+            </a:pPr>
+            <a:r>
+              <a:rPr lang="en-US" sz="1500" dirty="0">
+                <a:solidFill>
+                  <a:srgbClr val="1F2937"/>
+                </a:solidFill>
+                <a:latin typeface="Arial" pitchFamily="34" charset="0"/>
+                <a:ea typeface="Arial" pitchFamily="34" charset="-122"/>
+                <a:cs typeface="Arial" pitchFamily="34" charset="-120"/>
+              </a:rPr>
+              <a:t>Só com senha</a:t>
+            </a:r>
+            <a:endParaRPr lang="en-US" sz="1500" dirty="0"/>
+          </a:p>
+        </p:txBody>
+      </p:sp>
+      <p:sp>
+        <p:nvSpPr>
+          <p:cNvPr id="25" name="Slide Number Placeholder 0"/>
+          <p:cNvSpPr>
+            <a:spLocks noGrp="1"/>
+          </p:cNvSpPr>
+          <p:nvPr>
+            <p:ph type="sldNum" sz="quarter" idx="4294967295"/>
+          </p:nvPr>
+        </p:nvSpPr>
+        <p:spPr>
+          <a:xfrm>
+            <a:off x="11292840" y="6556248"/>
+            <a:ext cx="548640" cy="256032"/>
+          </a:xfrm>
+          <a:prstGeom prst="rect">
+            <a:avLst/>
+          </a:prstGeom>
+          <a:extLst>
+            <a:ext uri="{C572A759-6A51-4108-AA02-DFA0A04FC94B}">
+              <ma14:wrappingTextBoxFlag xmlns:ma14="http://schemas.microsoft.com/office/mac/drawingml/2011/main" val="0"/>
+            </a:ext>
+          </a:extLst>
+        </p:spPr>
+        <p:txBody>
+          <a:bodyPr/>
+          <a:lstStyle>
+            <a:lvl1pPr>
+              <a:defRPr sz="900">
+                <a:solidFill>
+                  <a:srgbClr val="1B3A6B"/>
+                </a:solidFill>
+                <a:latin typeface="Arial"/>
+                <a:ea typeface="Arial"/>
+                <a:cs typeface="Arial"/>
+              </a:defRPr>
+            </a:lvl1pPr>
+          </a:lstStyle>
+          <a:p>
+            <a:pPr algn="r"/>
+            <a:fld id="{F7021451-1387-4CA6-816F-3879F97B5CBC}" type="slidenum">
+              <a:rPr b="1" lang="en-US"/>
+              <a:t>31</a:t>
+            </a:fld>
+            <a:endParaRPr lang="en-US"/>
+          </a:p>
+        </p:txBody>
+      </p:sp>
+    </p:spTree>
+  </p:cSld>
+  <p:clrMapOvr>
+    <a:masterClrMapping/>
+  </p:clrMapOvr>
+</p:sld>
+</file>
+
+<file path=ppt/slides/slide32.xml><?xml version="1.0" encoding="utf-8"?>
+<p:sld xmlns:a="http://schemas.openxmlformats.org/drawingml/2006/main" xmlns:r="http://schemas.openxmlformats.org/officeDocument/2006/relationships" xmlns:p="http://schemas.openxmlformats.org/presentationml/2006/main">
+  <p:cSld name="Slide 32">
+    <p:bg>
+      <p:bgPr>
+        <a:solidFill>
+          <a:srgbClr val="F6F8FB"/>
+        </a:solidFill>
+      </p:bgPr>
+    </p:bg>
+    <p:spTree>
+      <p:nvGrpSpPr>
+        <p:cNvPr id="1" name=""/>
+        <p:cNvGrpSpPr/>
+        <p:nvPr/>
+      </p:nvGrpSpPr>
+      <p:grpSpPr>
+        <a:xfrm>
+          <a:off x="0" y="0"/>
+          <a:ext cx="0" cy="0"/>
+          <a:chOff x="0" y="0"/>
+          <a:chExt cx="0" cy="0"/>
+        </a:xfrm>
+      </p:grpSpPr>
+      <p:sp>
+        <p:nvSpPr>
+          <p:cNvPr id="2" name="Shape 0"/>
+          <p:cNvSpPr/>
+          <p:nvPr/>
+        </p:nvSpPr>
+        <p:spPr>
+          <a:xfrm>
+            <a:off x="0" y="6510528"/>
+            <a:ext cx="12191695" cy="347472"/>
+          </a:xfrm>
+          <a:prstGeom prst="rect">
+            <a:avLst/>
+          </a:prstGeom>
+          <a:solidFill>
+            <a:srgbClr val="FFFFFF"/>
+          </a:solidFill>
+          <a:ln w="6350">
+            <a:solidFill>
+              <a:srgbClr val="D8E0EC"/>
+            </a:solidFill>
+            <a:prstDash val="solid"/>
+          </a:ln>
+        </p:spPr>
+      </p:sp>
+      <p:pic>
+        <p:nvPicPr>
+          <p:cNvPr id="3" name="Image 0" descr="/www/wwwroot/rexar/gdsolar/docs/curso/slides/assets/logo-gdsolar.png">    </p:cNvPr>
+          <p:cNvPicPr>
+            <a:picLocks noChangeAspect="1"/>
+          </p:cNvPicPr>
+          <p:nvPr/>
+        </p:nvPicPr>
+        <p:blipFill>
+          <a:blip r:embed="rId1"/>
+          <a:stretch>
+            <a:fillRect/>
+          </a:stretch>
+        </p:blipFill>
+        <p:spPr>
+          <a:xfrm>
+            <a:off x="548640" y="6547104"/>
+            <a:ext cx="274320" cy="274320"/>
+          </a:xfrm>
+          <a:prstGeom prst="rect">
+            <a:avLst/>
+          </a:prstGeom>
+        </p:spPr>
+      </p:pic>
+      <p:sp>
+        <p:nvSpPr>
+          <p:cNvPr id="4" name="Text 1"/>
+          <p:cNvSpPr/>
+          <p:nvPr/>
+        </p:nvSpPr>
+        <p:spPr>
+          <a:xfrm>
+            <a:off x="886968" y="6528816"/>
+            <a:ext cx="6400800" cy="310896"/>
+          </a:xfrm>
+          <a:prstGeom prst="rect">
+            <a:avLst/>
+          </a:prstGeom>
+          <a:noFill/>
+          <a:ln/>
+        </p:spPr>
+        <p:txBody>
+          <a:bodyPr wrap="square" rtlCol="0" anchor="ctr"/>
+          <a:lstStyle/>
+          <a:p>
+            <a:pPr indent="0" marL="0">
+              <a:buNone/>
+            </a:pPr>
+            <a:r>
+              <a:rPr lang="en-US" sz="900" b="1" dirty="0">
+                <a:solidFill>
+                  <a:srgbClr val="64748B"/>
+                </a:solidFill>
+                <a:latin typeface="Arial" pitchFamily="34" charset="0"/>
+                <a:ea typeface="Arial" pitchFamily="34" charset="-122"/>
+                <a:cs typeface="Arial" pitchFamily="34" charset="-120"/>
+              </a:rPr>
+              <a:t>GD Solar  ·  Formação em Energia por Assinatura</a:t>
+            </a:r>
+            <a:endParaRPr lang="en-US" sz="900" dirty="0"/>
+          </a:p>
+        </p:txBody>
+      </p:sp>
+      <p:sp>
+        <p:nvSpPr>
+          <p:cNvPr id="5" name="Text 2"/>
+          <p:cNvSpPr/>
+          <p:nvPr/>
+        </p:nvSpPr>
+        <p:spPr>
+          <a:xfrm>
+            <a:off x="7132320" y="6528816"/>
+            <a:ext cx="4023360" cy="310896"/>
+          </a:xfrm>
+          <a:prstGeom prst="rect">
+            <a:avLst/>
+          </a:prstGeom>
+          <a:noFill/>
+          <a:ln/>
+        </p:spPr>
+        <p:txBody>
+          <a:bodyPr wrap="square" rtlCol="0" anchor="ctr"/>
+          <a:lstStyle/>
+          <a:p>
+            <a:pPr algn="r" indent="0" marL="0">
+              <a:buNone/>
+            </a:pPr>
+            <a:r>
+              <a:rPr lang="en-US" sz="900" dirty="0">
+                <a:solidFill>
+                  <a:srgbClr val="64748B"/>
+                </a:solidFill>
+                <a:latin typeface="Arial" pitchFamily="34" charset="0"/>
+                <a:ea typeface="Arial" pitchFamily="34" charset="-122"/>
+                <a:cs typeface="Arial" pitchFamily="34" charset="-120"/>
+              </a:rPr>
+              <a:t>M6 · Teste rápido</a:t>
+            </a:r>
+            <a:endParaRPr lang="en-US" sz="900" dirty="0"/>
+          </a:p>
+        </p:txBody>
+      </p:sp>
+      <p:sp>
+        <p:nvSpPr>
+          <p:cNvPr id="6" name="Shape 3"/>
+          <p:cNvSpPr/>
+          <p:nvPr/>
+        </p:nvSpPr>
+        <p:spPr>
+          <a:xfrm>
+            <a:off x="548640" y="384048"/>
+            <a:ext cx="82296" cy="658368"/>
+          </a:xfrm>
+          <a:prstGeom prst="rect">
+            <a:avLst/>
+          </a:prstGeom>
+          <a:solidFill>
+            <a:srgbClr val="F7A23B"/>
+          </a:solidFill>
+          <a:ln/>
+        </p:spPr>
+      </p:sp>
+      <p:sp>
+        <p:nvSpPr>
+          <p:cNvPr id="7" name="Text 4"/>
+          <p:cNvSpPr/>
+          <p:nvPr/>
+        </p:nvSpPr>
+        <p:spPr>
+          <a:xfrm>
+            <a:off x="777240" y="292608"/>
+            <a:ext cx="10972800" cy="274320"/>
+          </a:xfrm>
+          <a:prstGeom prst="rect">
+            <a:avLst/>
+          </a:prstGeom>
+          <a:noFill/>
+          <a:ln/>
+        </p:spPr>
+        <p:txBody>
+          <a:bodyPr wrap="square" rtlCol="0" anchor="ctr"/>
+          <a:lstStyle/>
+          <a:p>
+            <a:pPr indent="0" marL="0">
+              <a:buNone/>
+            </a:pPr>
+            <a:r>
+              <a:rPr lang="en-US" sz="1000" b="1" spc="100" kern="0" dirty="0">
+                <a:solidFill>
+                  <a:srgbClr val="F7A23B"/>
+                </a:solidFill>
+                <a:latin typeface="Arial" pitchFamily="34" charset="0"/>
+                <a:ea typeface="Arial" pitchFamily="34" charset="-122"/>
+                <a:cs typeface="Arial" pitchFamily="34" charset="-120"/>
+              </a:rPr>
+              <a:t>QUESTÕES 5–6 DE 6</a:t>
+            </a:r>
+            <a:endParaRPr lang="en-US" sz="1000" dirty="0"/>
+          </a:p>
+        </p:txBody>
+      </p:sp>
+      <p:sp>
+        <p:nvSpPr>
+          <p:cNvPr id="8" name="Text 5"/>
+          <p:cNvSpPr/>
+          <p:nvPr/>
+        </p:nvSpPr>
+        <p:spPr>
+          <a:xfrm>
+            <a:off x="777240" y="530352"/>
+            <a:ext cx="10881360" cy="566928"/>
+          </a:xfrm>
+          <a:prstGeom prst="rect">
+            <a:avLst/>
+          </a:prstGeom>
+          <a:noFill/>
+          <a:ln/>
+        </p:spPr>
+        <p:txBody>
+          <a:bodyPr wrap="square" rtlCol="0" anchor="ctr">
+            <a:normAutofit/>
+          </a:bodyPr>
+          <a:lstStyle/>
+          <a:p>
+            <a:pPr indent="0" marL="0">
+              <a:buNone/>
+            </a:pPr>
+            <a:r>
+              <a:rPr lang="en-US" sz="2600" b="1" dirty="0">
+                <a:solidFill>
+                  <a:srgbClr val="1B3A6B"/>
+                </a:solidFill>
+                <a:latin typeface="Arial" pitchFamily="34" charset="0"/>
+                <a:ea typeface="Arial" pitchFamily="34" charset="-122"/>
+                <a:cs typeface="Arial" pitchFamily="34" charset="-120"/>
+              </a:rPr>
+              <a:t>Teste rápido</a:t>
+            </a:r>
+            <a:endParaRPr lang="en-US" sz="2600" dirty="0"/>
+          </a:p>
+        </p:txBody>
+      </p:sp>
+      <p:sp>
+        <p:nvSpPr>
+          <p:cNvPr id="9" name="Shape 6"/>
+          <p:cNvSpPr/>
+          <p:nvPr/>
+        </p:nvSpPr>
+        <p:spPr>
+          <a:xfrm>
+            <a:off x="548640" y="1325880"/>
+            <a:ext cx="502920" cy="502920"/>
+          </a:xfrm>
+          <a:prstGeom prst="ellipse">
+            <a:avLst/>
+          </a:prstGeom>
+          <a:solidFill>
+            <a:srgbClr val="1B3A6B"/>
+          </a:solidFill>
+          <a:ln/>
+        </p:spPr>
+      </p:sp>
+      <p:sp>
+        <p:nvSpPr>
+          <p:cNvPr id="10" name="Text 7"/>
+          <p:cNvSpPr/>
+          <p:nvPr/>
+        </p:nvSpPr>
+        <p:spPr>
+          <a:xfrm>
+            <a:off x="548640" y="1325880"/>
+            <a:ext cx="502920" cy="502920"/>
+          </a:xfrm>
+          <a:prstGeom prst="rect">
+            <a:avLst/>
+          </a:prstGeom>
+          <a:noFill/>
+          <a:ln/>
+        </p:spPr>
+        <p:txBody>
+          <a:bodyPr wrap="square" rtlCol="0" anchor="ctr"/>
+          <a:lstStyle/>
+          <a:p>
+            <a:pPr algn="ctr" indent="0" marL="0">
+              <a:buNone/>
+            </a:pPr>
+            <a:r>
+              <a:rPr lang="en-US" sz="1600" b="1" dirty="0">
+                <a:solidFill>
+                  <a:srgbClr val="FFFFFF"/>
+                </a:solidFill>
+                <a:latin typeface="Arial" pitchFamily="34" charset="0"/>
+                <a:ea typeface="Arial" pitchFamily="34" charset="-122"/>
+                <a:cs typeface="Arial" pitchFamily="34" charset="-120"/>
+              </a:rPr>
+              <a:t>5</a:t>
+            </a:r>
+            <a:endParaRPr lang="en-US" sz="1600" dirty="0"/>
+          </a:p>
+        </p:txBody>
+      </p:sp>
+      <p:sp>
+        <p:nvSpPr>
+          <p:cNvPr id="11" name="Text 8"/>
+          <p:cNvSpPr/>
+          <p:nvPr/>
+        </p:nvSpPr>
+        <p:spPr>
+          <a:xfrm>
+            <a:off x="1234440" y="1280160"/>
+            <a:ext cx="10424160" cy="640080"/>
+          </a:xfrm>
+          <a:prstGeom prst="rect">
+            <a:avLst/>
+          </a:prstGeom>
+          <a:noFill/>
+          <a:ln/>
+        </p:spPr>
+        <p:txBody>
+          <a:bodyPr wrap="square" rtlCol="0" anchor="ctr"/>
+          <a:lstStyle/>
+          <a:p>
+            <a:pPr indent="0" marL="0">
+              <a:buNone/>
+            </a:pPr>
+            <a:r>
+              <a:rPr lang="en-US" sz="1800" b="1" dirty="0">
+                <a:solidFill>
+                  <a:srgbClr val="1B3A6B"/>
+                </a:solidFill>
+                <a:latin typeface="Arial" pitchFamily="34" charset="0"/>
+                <a:ea typeface="Arial" pitchFamily="34" charset="-122"/>
+                <a:cs typeface="Arial" pitchFamily="34" charset="-120"/>
+              </a:rPr>
+              <a:t>Se a geração registrada cair abaixo do que já está alocado, a varredura de alertas indica:</a:t>
+            </a:r>
+            <a:endParaRPr lang="en-US" sz="1800" dirty="0"/>
+          </a:p>
+        </p:txBody>
+      </p:sp>
+      <p:sp>
+        <p:nvSpPr>
+          <p:cNvPr id="12" name="Shape 9"/>
+          <p:cNvSpPr/>
+          <p:nvPr/>
+        </p:nvSpPr>
+        <p:spPr>
+          <a:xfrm>
+            <a:off x="548640" y="2057400"/>
+            <a:ext cx="2601468" cy="1463040"/>
+          </a:xfrm>
+          <a:prstGeom prst="roundRect">
+            <a:avLst>
+              <a:gd name="adj" fmla="val 5000"/>
+            </a:avLst>
+          </a:prstGeom>
+          <a:solidFill>
+            <a:srgbClr val="FFFFFF"/>
+          </a:solidFill>
+          <a:ln w="9525">
+            <a:solidFill>
+              <a:srgbClr val="D8E0EC"/>
+            </a:solidFill>
+            <a:prstDash val="solid"/>
+          </a:ln>
+        </p:spPr>
+      </p:sp>
+      <p:sp>
+        <p:nvSpPr>
+          <p:cNvPr id="13" name="Text 10"/>
+          <p:cNvSpPr/>
+          <p:nvPr/>
+        </p:nvSpPr>
+        <p:spPr>
+          <a:xfrm>
+            <a:off x="685800" y="2148840"/>
+            <a:ext cx="365760" cy="365760"/>
+          </a:xfrm>
+          <a:prstGeom prst="rect">
+            <a:avLst/>
+          </a:prstGeom>
+          <a:noFill/>
+          <a:ln/>
+        </p:spPr>
+        <p:txBody>
+          <a:bodyPr wrap="square" rtlCol="0" anchor="ctr"/>
+          <a:lstStyle/>
+          <a:p>
+            <a:pPr indent="0" marL="0">
+              <a:buNone/>
+            </a:pPr>
+            <a:r>
+              <a:rPr lang="en-US" sz="1400" b="1" dirty="0">
+                <a:solidFill>
+                  <a:srgbClr val="F7A23B"/>
+                </a:solidFill>
+                <a:latin typeface="Arial" pitchFamily="34" charset="0"/>
+                <a:ea typeface="Arial" pitchFamily="34" charset="-122"/>
+                <a:cs typeface="Arial" pitchFamily="34" charset="-120"/>
+              </a:rPr>
+              <a:t>B</a:t>
+            </a:r>
+            <a:endParaRPr lang="en-US" sz="1400" dirty="0"/>
+          </a:p>
+        </p:txBody>
+      </p:sp>
+      <p:sp>
+        <p:nvSpPr>
+          <p:cNvPr id="14" name="Text 11"/>
+          <p:cNvSpPr/>
+          <p:nvPr/>
+        </p:nvSpPr>
+        <p:spPr>
+          <a:xfrm>
+            <a:off x="685800" y="2514600"/>
+            <a:ext cx="2327148" cy="914400"/>
+          </a:xfrm>
+          <a:prstGeom prst="rect">
+            <a:avLst/>
+          </a:prstGeom>
+          <a:noFill/>
+          <a:ln/>
+        </p:spPr>
+        <p:txBody>
+          <a:bodyPr wrap="square" rtlCol="0" anchor="t"/>
+          <a:lstStyle/>
+          <a:p>
+            <a:pPr indent="0" marL="0">
+              <a:buNone/>
+            </a:pPr>
+            <a:r>
+              <a:rPr lang="en-US" sz="1500" dirty="0">
+                <a:solidFill>
+                  <a:srgbClr val="1F2937"/>
+                </a:solidFill>
+                <a:latin typeface="Arial" pitchFamily="34" charset="0"/>
+                <a:ea typeface="Arial" pitchFamily="34" charset="-122"/>
+                <a:cs typeface="Arial" pitchFamily="34" charset="-120"/>
+              </a:rPr>
+              <a:t>nada</a:t>
+            </a:r>
+            <a:endParaRPr lang="en-US" sz="1500" dirty="0"/>
+          </a:p>
+        </p:txBody>
+      </p:sp>
+      <p:sp>
+        <p:nvSpPr>
+          <p:cNvPr id="15" name="Shape 12"/>
+          <p:cNvSpPr/>
+          <p:nvPr/>
+        </p:nvSpPr>
+        <p:spPr>
+          <a:xfrm>
+            <a:off x="3378708" y="2057400"/>
+            <a:ext cx="2601468" cy="1463040"/>
+          </a:xfrm>
+          <a:prstGeom prst="roundRect">
+            <a:avLst>
+              <a:gd name="adj" fmla="val 5000"/>
+            </a:avLst>
+          </a:prstGeom>
+          <a:solidFill>
+            <a:srgbClr val="FFFFFF"/>
+          </a:solidFill>
+          <a:ln w="9525">
+            <a:solidFill>
+              <a:srgbClr val="D8E0EC"/>
+            </a:solidFill>
+            <a:prstDash val="solid"/>
+          </a:ln>
+        </p:spPr>
+      </p:sp>
+      <p:sp>
+        <p:nvSpPr>
+          <p:cNvPr id="16" name="Text 13"/>
+          <p:cNvSpPr/>
+          <p:nvPr/>
+        </p:nvSpPr>
+        <p:spPr>
+          <a:xfrm>
+            <a:off x="3515868" y="2148840"/>
+            <a:ext cx="365760" cy="365760"/>
+          </a:xfrm>
+          <a:prstGeom prst="rect">
+            <a:avLst/>
+          </a:prstGeom>
+          <a:noFill/>
+          <a:ln/>
+        </p:spPr>
+        <p:txBody>
+          <a:bodyPr wrap="square" rtlCol="0" anchor="ctr"/>
+          <a:lstStyle/>
+          <a:p>
+            <a:pPr indent="0" marL="0">
+              <a:buNone/>
+            </a:pPr>
+            <a:r>
+              <a:rPr lang="en-US" sz="1400" b="1" dirty="0">
+                <a:solidFill>
+                  <a:srgbClr val="F7A23B"/>
+                </a:solidFill>
+                <a:latin typeface="Arial" pitchFamily="34" charset="0"/>
+                <a:ea typeface="Arial" pitchFamily="34" charset="-122"/>
+                <a:cs typeface="Arial" pitchFamily="34" charset="-120"/>
+              </a:rPr>
+              <a:t>C</a:t>
+            </a:r>
+            <a:endParaRPr lang="en-US" sz="1400" dirty="0"/>
+          </a:p>
+        </p:txBody>
+      </p:sp>
+      <p:sp>
+        <p:nvSpPr>
+          <p:cNvPr id="17" name="Text 14"/>
+          <p:cNvSpPr/>
+          <p:nvPr/>
+        </p:nvSpPr>
+        <p:spPr>
+          <a:xfrm>
+            <a:off x="3515868" y="2514600"/>
+            <a:ext cx="2327148" cy="914400"/>
+          </a:xfrm>
+          <a:prstGeom prst="rect">
+            <a:avLst/>
+          </a:prstGeom>
+          <a:noFill/>
+          <a:ln/>
+        </p:spPr>
+        <p:txBody>
+          <a:bodyPr wrap="square" rtlCol="0" anchor="t"/>
+          <a:lstStyle/>
+          <a:p>
+            <a:pPr indent="0" marL="0">
+              <a:buNone/>
+            </a:pPr>
+            <a:r>
+              <a:rPr lang="en-US" sz="1500" dirty="0">
+                <a:solidFill>
+                  <a:srgbClr val="1F2937"/>
+                </a:solidFill>
+                <a:latin typeface="Arial" pitchFamily="34" charset="0"/>
+                <a:ea typeface="Arial" pitchFamily="34" charset="-122"/>
+                <a:cs typeface="Arial" pitchFamily="34" charset="-120"/>
+              </a:rPr>
+              <a:t>cobrança vencida</a:t>
+            </a:r>
+            <a:endParaRPr lang="en-US" sz="1500" dirty="0"/>
+          </a:p>
+        </p:txBody>
+      </p:sp>
+      <p:sp>
+        <p:nvSpPr>
+          <p:cNvPr id="18" name="Shape 15"/>
+          <p:cNvSpPr/>
+          <p:nvPr/>
+        </p:nvSpPr>
+        <p:spPr>
+          <a:xfrm>
+            <a:off x="6208776" y="2057400"/>
+            <a:ext cx="2601468" cy="1463040"/>
+          </a:xfrm>
+          <a:prstGeom prst="roundRect">
+            <a:avLst>
+              <a:gd name="adj" fmla="val 5000"/>
+            </a:avLst>
+          </a:prstGeom>
+          <a:solidFill>
+            <a:srgbClr val="FFFFFF"/>
+          </a:solidFill>
+          <a:ln w="9525">
+            <a:solidFill>
+              <a:srgbClr val="D8E0EC"/>
+            </a:solidFill>
+            <a:prstDash val="solid"/>
+          </a:ln>
+        </p:spPr>
+      </p:sp>
+      <p:sp>
+        <p:nvSpPr>
+          <p:cNvPr id="19" name="Text 16"/>
+          <p:cNvSpPr/>
+          <p:nvPr/>
+        </p:nvSpPr>
+        <p:spPr>
+          <a:xfrm>
+            <a:off x="6345936" y="2148840"/>
+            <a:ext cx="365760" cy="365760"/>
+          </a:xfrm>
+          <a:prstGeom prst="rect">
+            <a:avLst/>
+          </a:prstGeom>
+          <a:noFill/>
+          <a:ln/>
+        </p:spPr>
+        <p:txBody>
+          <a:bodyPr wrap="square" rtlCol="0" anchor="ctr"/>
+          <a:lstStyle/>
+          <a:p>
+            <a:pPr indent="0" marL="0">
+              <a:buNone/>
+            </a:pPr>
+            <a:r>
+              <a:rPr lang="en-US" sz="1400" b="1" dirty="0">
+                <a:solidFill>
+                  <a:srgbClr val="F7A23B"/>
+                </a:solidFill>
+                <a:latin typeface="Arial" pitchFamily="34" charset="0"/>
+                <a:ea typeface="Arial" pitchFamily="34" charset="-122"/>
+                <a:cs typeface="Arial" pitchFamily="34" charset="-120"/>
+              </a:rPr>
+              <a:t>D</a:t>
+            </a:r>
+            <a:endParaRPr lang="en-US" sz="1400" dirty="0"/>
+          </a:p>
+        </p:txBody>
+      </p:sp>
+      <p:sp>
+        <p:nvSpPr>
+          <p:cNvPr id="20" name="Text 17"/>
+          <p:cNvSpPr/>
+          <p:nvPr/>
+        </p:nvSpPr>
+        <p:spPr>
+          <a:xfrm>
+            <a:off x="6345936" y="2514600"/>
+            <a:ext cx="2327148" cy="914400"/>
+          </a:xfrm>
+          <a:prstGeom prst="rect">
+            <a:avLst/>
+          </a:prstGeom>
+          <a:noFill/>
+          <a:ln/>
+        </p:spPr>
+        <p:txBody>
+          <a:bodyPr wrap="square" rtlCol="0" anchor="t"/>
+          <a:lstStyle/>
+          <a:p>
+            <a:pPr indent="0" marL="0">
+              <a:buNone/>
+            </a:pPr>
+            <a:r>
+              <a:rPr lang="en-US" sz="1500" dirty="0">
+                <a:solidFill>
+                  <a:srgbClr val="1F2937"/>
+                </a:solidFill>
+                <a:latin typeface="Arial" pitchFamily="34" charset="0"/>
+                <a:ea typeface="Arial" pitchFamily="34" charset="-122"/>
+                <a:cs typeface="Arial" pitchFamily="34" charset="-120"/>
+              </a:rPr>
+              <a:t>fatura ilegível</a:t>
+            </a:r>
+            <a:endParaRPr lang="en-US" sz="1500" dirty="0"/>
+          </a:p>
+        </p:txBody>
+      </p:sp>
+      <p:sp>
+        <p:nvSpPr>
+          <p:cNvPr id="21" name="Shape 18"/>
+          <p:cNvSpPr/>
+          <p:nvPr/>
+        </p:nvSpPr>
+        <p:spPr>
+          <a:xfrm>
+            <a:off x="548640" y="3840480"/>
+            <a:ext cx="502920" cy="502920"/>
+          </a:xfrm>
+          <a:prstGeom prst="ellipse">
+            <a:avLst/>
+          </a:prstGeom>
+          <a:solidFill>
+            <a:srgbClr val="1B3A6B"/>
+          </a:solidFill>
+          <a:ln/>
+        </p:spPr>
+      </p:sp>
+      <p:sp>
+        <p:nvSpPr>
+          <p:cNvPr id="22" name="Text 19"/>
+          <p:cNvSpPr/>
+          <p:nvPr/>
+        </p:nvSpPr>
+        <p:spPr>
+          <a:xfrm>
+            <a:off x="548640" y="3840480"/>
+            <a:ext cx="502920" cy="502920"/>
+          </a:xfrm>
+          <a:prstGeom prst="rect">
+            <a:avLst/>
+          </a:prstGeom>
+          <a:noFill/>
+          <a:ln/>
+        </p:spPr>
+        <p:txBody>
+          <a:bodyPr wrap="square" rtlCol="0" anchor="ctr"/>
+          <a:lstStyle/>
+          <a:p>
+            <a:pPr algn="ctr" indent="0" marL="0">
+              <a:buNone/>
+            </a:pPr>
+            <a:r>
+              <a:rPr lang="en-US" sz="1600" b="1" dirty="0">
+                <a:solidFill>
+                  <a:srgbClr val="FFFFFF"/>
+                </a:solidFill>
+                <a:latin typeface="Arial" pitchFamily="34" charset="0"/>
+                <a:ea typeface="Arial" pitchFamily="34" charset="-122"/>
+                <a:cs typeface="Arial" pitchFamily="34" charset="-120"/>
+              </a:rPr>
+              <a:t>6</a:t>
+            </a:r>
+            <a:endParaRPr lang="en-US" sz="1600" dirty="0"/>
+          </a:p>
+        </p:txBody>
+      </p:sp>
+      <p:sp>
+        <p:nvSpPr>
+          <p:cNvPr id="23" name="Text 20"/>
+          <p:cNvSpPr/>
+          <p:nvPr/>
+        </p:nvSpPr>
+        <p:spPr>
+          <a:xfrm>
+            <a:off x="1234440" y="3794760"/>
+            <a:ext cx="10424160" cy="640080"/>
+          </a:xfrm>
+          <a:prstGeom prst="rect">
+            <a:avLst/>
+          </a:prstGeom>
+          <a:noFill/>
+          <a:ln/>
+        </p:spPr>
+        <p:txBody>
+          <a:bodyPr wrap="square" rtlCol="0" anchor="ctr"/>
+          <a:lstStyle/>
+          <a:p>
+            <a:pPr indent="0" marL="0">
+              <a:buNone/>
+            </a:pPr>
+            <a:r>
+              <a:rPr lang="en-US" sz="1800" b="1" dirty="0">
+                <a:solidFill>
+                  <a:srgbClr val="1B3A6B"/>
+                </a:solidFill>
+                <a:latin typeface="Arial" pitchFamily="34" charset="0"/>
+                <a:ea typeface="Arial" pitchFamily="34" charset="-122"/>
+                <a:cs typeface="Arial" pitchFamily="34" charset="-120"/>
+              </a:rPr>
+              <a:t>Em usina acima de 500 kW em geração compartilhada, deve-se evitar:</a:t>
+            </a:r>
+            <a:endParaRPr lang="en-US" sz="1800" dirty="0"/>
+          </a:p>
+        </p:txBody>
+      </p:sp>
+      <p:sp>
+        <p:nvSpPr>
+          <p:cNvPr id="24" name="Shape 21"/>
+          <p:cNvSpPr/>
+          <p:nvPr/>
+        </p:nvSpPr>
+        <p:spPr>
+          <a:xfrm>
+            <a:off x="548640" y="4572000"/>
+            <a:ext cx="2601468" cy="1463040"/>
+          </a:xfrm>
+          <a:prstGeom prst="roundRect">
+            <a:avLst>
+              <a:gd name="adj" fmla="val 5000"/>
+            </a:avLst>
+          </a:prstGeom>
+          <a:solidFill>
+            <a:srgbClr val="FFFFFF"/>
+          </a:solidFill>
+          <a:ln w="9525">
+            <a:solidFill>
+              <a:srgbClr val="D8E0EC"/>
+            </a:solidFill>
+            <a:prstDash val="solid"/>
+          </a:ln>
+        </p:spPr>
+      </p:sp>
+      <p:sp>
+        <p:nvSpPr>
+          <p:cNvPr id="25" name="Text 22"/>
+          <p:cNvSpPr/>
+          <p:nvPr/>
+        </p:nvSpPr>
+        <p:spPr>
+          <a:xfrm>
+            <a:off x="685800" y="4663440"/>
+            <a:ext cx="365760" cy="365760"/>
+          </a:xfrm>
+          <a:prstGeom prst="rect">
+            <a:avLst/>
+          </a:prstGeom>
+          <a:noFill/>
+          <a:ln/>
+        </p:spPr>
+        <p:txBody>
+          <a:bodyPr wrap="square" rtlCol="0" anchor="ctr"/>
+          <a:lstStyle/>
+          <a:p>
+            <a:pPr indent="0" marL="0">
+              <a:buNone/>
+            </a:pPr>
+            <a:r>
+              <a:rPr lang="en-US" sz="1400" b="1" dirty="0">
+                <a:solidFill>
+                  <a:srgbClr val="F7A23B"/>
+                </a:solidFill>
+                <a:latin typeface="Arial" pitchFamily="34" charset="0"/>
+                <a:ea typeface="Arial" pitchFamily="34" charset="-122"/>
+                <a:cs typeface="Arial" pitchFamily="34" charset="-120"/>
+              </a:rPr>
+              <a:t>A</a:t>
+            </a:r>
+            <a:endParaRPr lang="en-US" sz="1400" dirty="0"/>
+          </a:p>
+        </p:txBody>
+      </p:sp>
+      <p:sp>
+        <p:nvSpPr>
+          <p:cNvPr id="26" name="Text 23"/>
+          <p:cNvSpPr/>
+          <p:nvPr/>
+        </p:nvSpPr>
+        <p:spPr>
+          <a:xfrm>
+            <a:off x="685800" y="5029200"/>
+            <a:ext cx="2327148" cy="914400"/>
+          </a:xfrm>
+          <a:prstGeom prst="rect">
+            <a:avLst/>
+          </a:prstGeom>
+          <a:noFill/>
+          <a:ln/>
+        </p:spPr>
+        <p:txBody>
+          <a:bodyPr wrap="square" rtlCol="0" anchor="t"/>
+          <a:lstStyle/>
+          <a:p>
+            <a:pPr indent="0" marL="0">
+              <a:buNone/>
+            </a:pPr>
+            <a:r>
+              <a:rPr lang="en-US" sz="1500" dirty="0">
+                <a:solidFill>
+                  <a:srgbClr val="1F2937"/>
+                </a:solidFill>
+                <a:latin typeface="Arial" pitchFamily="34" charset="0"/>
+                <a:ea typeface="Arial" pitchFamily="34" charset="-122"/>
+                <a:cs typeface="Arial" pitchFamily="34" charset="-120"/>
+              </a:rPr>
+              <a:t>um participante com 25% ou mais dos créditos</a:t>
+            </a:r>
+            <a:endParaRPr lang="en-US" sz="1500" dirty="0"/>
+          </a:p>
+        </p:txBody>
+      </p:sp>
+      <p:sp>
+        <p:nvSpPr>
+          <p:cNvPr id="27" name="Shape 24"/>
+          <p:cNvSpPr/>
+          <p:nvPr/>
+        </p:nvSpPr>
+        <p:spPr>
+          <a:xfrm>
+            <a:off x="3378708" y="4572000"/>
+            <a:ext cx="2601468" cy="1463040"/>
+          </a:xfrm>
+          <a:prstGeom prst="roundRect">
+            <a:avLst>
+              <a:gd name="adj" fmla="val 5000"/>
+            </a:avLst>
+          </a:prstGeom>
+          <a:solidFill>
+            <a:srgbClr val="FFFFFF"/>
+          </a:solidFill>
+          <a:ln w="9525">
+            <a:solidFill>
+              <a:srgbClr val="D8E0EC"/>
+            </a:solidFill>
+            <a:prstDash val="solid"/>
+          </a:ln>
+        </p:spPr>
+      </p:sp>
+      <p:sp>
+        <p:nvSpPr>
+          <p:cNvPr id="28" name="Text 25"/>
+          <p:cNvSpPr/>
+          <p:nvPr/>
+        </p:nvSpPr>
+        <p:spPr>
+          <a:xfrm>
+            <a:off x="3515868" y="4663440"/>
+            <a:ext cx="365760" cy="365760"/>
+          </a:xfrm>
+          <a:prstGeom prst="rect">
+            <a:avLst/>
+          </a:prstGeom>
+          <a:noFill/>
+          <a:ln/>
+        </p:spPr>
+        <p:txBody>
+          <a:bodyPr wrap="square" rtlCol="0" anchor="ctr"/>
+          <a:lstStyle/>
+          <a:p>
+            <a:pPr indent="0" marL="0">
+              <a:buNone/>
+            </a:pPr>
+            <a:r>
+              <a:rPr lang="en-US" sz="1400" b="1" dirty="0">
+                <a:solidFill>
+                  <a:srgbClr val="F7A23B"/>
+                </a:solidFill>
+                <a:latin typeface="Arial" pitchFamily="34" charset="0"/>
+                <a:ea typeface="Arial" pitchFamily="34" charset="-122"/>
+                <a:cs typeface="Arial" pitchFamily="34" charset="-120"/>
+              </a:rPr>
+              <a:t>B</a:t>
+            </a:r>
+            <a:endParaRPr lang="en-US" sz="1400" dirty="0"/>
+          </a:p>
+        </p:txBody>
+      </p:sp>
+      <p:sp>
+        <p:nvSpPr>
+          <p:cNvPr id="29" name="Text 26"/>
+          <p:cNvSpPr/>
+          <p:nvPr/>
+        </p:nvSpPr>
+        <p:spPr>
+          <a:xfrm>
+            <a:off x="3515868" y="5029200"/>
+            <a:ext cx="2327148" cy="914400"/>
+          </a:xfrm>
+          <a:prstGeom prst="rect">
+            <a:avLst/>
+          </a:prstGeom>
+          <a:noFill/>
+          <a:ln/>
+        </p:spPr>
+        <p:txBody>
+          <a:bodyPr wrap="square" rtlCol="0" anchor="t"/>
+          <a:lstStyle/>
+          <a:p>
+            <a:pPr indent="0" marL="0">
+              <a:buNone/>
+            </a:pPr>
+            <a:r>
+              <a:rPr lang="en-US" sz="1500" dirty="0">
+                <a:solidFill>
+                  <a:srgbClr val="1F2937"/>
+                </a:solidFill>
+                <a:latin typeface="Arial" pitchFamily="34" charset="0"/>
+                <a:ea typeface="Arial" pitchFamily="34" charset="-122"/>
+                <a:cs typeface="Arial" pitchFamily="34" charset="-120"/>
+              </a:rPr>
+              <a:t>mais de 10 clientes</a:t>
+            </a:r>
+            <a:endParaRPr lang="en-US" sz="1500" dirty="0"/>
+          </a:p>
+        </p:txBody>
+      </p:sp>
+      <p:sp>
+        <p:nvSpPr>
+          <p:cNvPr id="30" name="Shape 27"/>
+          <p:cNvSpPr/>
+          <p:nvPr/>
+        </p:nvSpPr>
+        <p:spPr>
+          <a:xfrm>
+            <a:off x="6208776" y="4572000"/>
+            <a:ext cx="2601468" cy="1463040"/>
+          </a:xfrm>
+          <a:prstGeom prst="roundRect">
+            <a:avLst>
+              <a:gd name="adj" fmla="val 5000"/>
+            </a:avLst>
+          </a:prstGeom>
+          <a:solidFill>
+            <a:srgbClr val="FFFFFF"/>
+          </a:solidFill>
+          <a:ln w="9525">
+            <a:solidFill>
+              <a:srgbClr val="D8E0EC"/>
+            </a:solidFill>
+            <a:prstDash val="solid"/>
+          </a:ln>
+        </p:spPr>
+      </p:sp>
+      <p:sp>
+        <p:nvSpPr>
+          <p:cNvPr id="31" name="Text 28"/>
+          <p:cNvSpPr/>
+          <p:nvPr/>
+        </p:nvSpPr>
+        <p:spPr>
+          <a:xfrm>
+            <a:off x="6345936" y="4663440"/>
+            <a:ext cx="365760" cy="365760"/>
+          </a:xfrm>
+          <a:prstGeom prst="rect">
+            <a:avLst/>
+          </a:prstGeom>
+          <a:noFill/>
+          <a:ln/>
+        </p:spPr>
+        <p:txBody>
+          <a:bodyPr wrap="square" rtlCol="0" anchor="ctr"/>
+          <a:lstStyle/>
+          <a:p>
+            <a:pPr indent="0" marL="0">
+              <a:buNone/>
+            </a:pPr>
+            <a:r>
+              <a:rPr lang="en-US" sz="1400" b="1" dirty="0">
+                <a:solidFill>
+                  <a:srgbClr val="F7A23B"/>
+                </a:solidFill>
+                <a:latin typeface="Arial" pitchFamily="34" charset="0"/>
+                <a:ea typeface="Arial" pitchFamily="34" charset="-122"/>
+                <a:cs typeface="Arial" pitchFamily="34" charset="-120"/>
+              </a:rPr>
+              <a:t>C</a:t>
+            </a:r>
+            <a:endParaRPr lang="en-US" sz="1400" dirty="0"/>
+          </a:p>
+        </p:txBody>
+      </p:sp>
+      <p:sp>
+        <p:nvSpPr>
+          <p:cNvPr id="32" name="Text 29"/>
+          <p:cNvSpPr/>
+          <p:nvPr/>
+        </p:nvSpPr>
+        <p:spPr>
+          <a:xfrm>
+            <a:off x="6345936" y="5029200"/>
+            <a:ext cx="2327148" cy="914400"/>
+          </a:xfrm>
+          <a:prstGeom prst="rect">
+            <a:avLst/>
+          </a:prstGeom>
+          <a:noFill/>
+          <a:ln/>
+        </p:spPr>
+        <p:txBody>
+          <a:bodyPr wrap="square" rtlCol="0" anchor="t"/>
+          <a:lstStyle/>
+          <a:p>
+            <a:pPr indent="0" marL="0">
+              <a:buNone/>
+            </a:pPr>
+            <a:r>
+              <a:rPr lang="en-US" sz="1500" dirty="0">
+                <a:solidFill>
+                  <a:srgbClr val="1F2937"/>
+                </a:solidFill>
+                <a:latin typeface="Arial" pitchFamily="34" charset="0"/>
+                <a:ea typeface="Arial" pitchFamily="34" charset="-122"/>
+                <a:cs typeface="Arial" pitchFamily="34" charset="-120"/>
+              </a:rPr>
+              <a:t>clientes residenciais</a:t>
+            </a:r>
+            <a:endParaRPr lang="en-US" sz="1500" dirty="0"/>
+          </a:p>
+        </p:txBody>
+      </p:sp>
+      <p:sp>
+        <p:nvSpPr>
+          <p:cNvPr id="33" name="Shape 30"/>
+          <p:cNvSpPr/>
+          <p:nvPr/>
+        </p:nvSpPr>
+        <p:spPr>
+          <a:xfrm>
+            <a:off x="9038844" y="4572000"/>
+            <a:ext cx="2601468" cy="1463040"/>
+          </a:xfrm>
+          <a:prstGeom prst="roundRect">
+            <a:avLst>
+              <a:gd name="adj" fmla="val 5000"/>
+            </a:avLst>
+          </a:prstGeom>
+          <a:solidFill>
+            <a:srgbClr val="FFFFFF"/>
+          </a:solidFill>
+          <a:ln w="9525">
+            <a:solidFill>
+              <a:srgbClr val="D8E0EC"/>
+            </a:solidFill>
+            <a:prstDash val="solid"/>
+          </a:ln>
+        </p:spPr>
+      </p:sp>
+      <p:sp>
+        <p:nvSpPr>
+          <p:cNvPr id="34" name="Text 31"/>
+          <p:cNvSpPr/>
+          <p:nvPr/>
+        </p:nvSpPr>
+        <p:spPr>
+          <a:xfrm>
+            <a:off x="9176004" y="4663440"/>
+            <a:ext cx="365760" cy="365760"/>
+          </a:xfrm>
+          <a:prstGeom prst="rect">
+            <a:avLst/>
+          </a:prstGeom>
+          <a:noFill/>
+          <a:ln/>
+        </p:spPr>
+        <p:txBody>
+          <a:bodyPr wrap="square" rtlCol="0" anchor="ctr"/>
+          <a:lstStyle/>
+          <a:p>
+            <a:pPr indent="0" marL="0">
+              <a:buNone/>
+            </a:pPr>
+            <a:r>
+              <a:rPr lang="en-US" sz="1400" b="1" dirty="0">
+                <a:solidFill>
+                  <a:srgbClr val="F7A23B"/>
+                </a:solidFill>
+                <a:latin typeface="Arial" pitchFamily="34" charset="0"/>
+                <a:ea typeface="Arial" pitchFamily="34" charset="-122"/>
+                <a:cs typeface="Arial" pitchFamily="34" charset="-120"/>
+              </a:rPr>
+              <a:t>D</a:t>
+            </a:r>
+            <a:endParaRPr lang="en-US" sz="1400" dirty="0"/>
+          </a:p>
+        </p:txBody>
+      </p:sp>
+      <p:sp>
+        <p:nvSpPr>
+          <p:cNvPr id="35" name="Text 32"/>
+          <p:cNvSpPr/>
+          <p:nvPr/>
+        </p:nvSpPr>
+        <p:spPr>
+          <a:xfrm>
+            <a:off x="9176004" y="5029200"/>
+            <a:ext cx="2327148" cy="914400"/>
+          </a:xfrm>
+          <a:prstGeom prst="rect">
+            <a:avLst/>
+          </a:prstGeom>
+          <a:noFill/>
+          <a:ln/>
+        </p:spPr>
+        <p:txBody>
+          <a:bodyPr wrap="square" rtlCol="0" anchor="t"/>
+          <a:lstStyle/>
+          <a:p>
+            <a:pPr indent="0" marL="0">
+              <a:buNone/>
+            </a:pPr>
+            <a:r>
+              <a:rPr lang="en-US" sz="1500" dirty="0">
+                <a:solidFill>
+                  <a:srgbClr val="1F2937"/>
+                </a:solidFill>
+                <a:latin typeface="Arial" pitchFamily="34" charset="0"/>
+                <a:ea typeface="Arial" pitchFamily="34" charset="-122"/>
+                <a:cs typeface="Arial" pitchFamily="34" charset="-120"/>
+              </a:rPr>
+              <a:t>contratos de 12 meses</a:t>
+            </a:r>
+            <a:endParaRPr lang="en-US" sz="1500" dirty="0"/>
+          </a:p>
+        </p:txBody>
+      </p:sp>
+      <p:sp>
+        <p:nvSpPr>
+          <p:cNvPr id="25" name="Slide Number Placeholder 0"/>
+          <p:cNvSpPr>
+            <a:spLocks noGrp="1"/>
+          </p:cNvSpPr>
+          <p:nvPr>
+            <p:ph type="sldNum" sz="quarter" idx="4294967295"/>
+          </p:nvPr>
+        </p:nvSpPr>
+        <p:spPr>
+          <a:xfrm>
+            <a:off x="11292840" y="6556248"/>
+            <a:ext cx="548640" cy="256032"/>
+          </a:xfrm>
+          <a:prstGeom prst="rect">
+            <a:avLst/>
+          </a:prstGeom>
+          <a:extLst>
+            <a:ext uri="{C572A759-6A51-4108-AA02-DFA0A04FC94B}">
+              <ma14:wrappingTextBoxFlag xmlns:ma14="http://schemas.microsoft.com/office/mac/drawingml/2011/main" val="0"/>
+            </a:ext>
+          </a:extLst>
+        </p:spPr>
+        <p:txBody>
+          <a:bodyPr/>
+          <a:lstStyle>
+            <a:lvl1pPr>
+              <a:defRPr sz="900">
+                <a:solidFill>
+                  <a:srgbClr val="1B3A6B"/>
+                </a:solidFill>
+                <a:latin typeface="Arial"/>
+                <a:ea typeface="Arial"/>
+                <a:cs typeface="Arial"/>
+              </a:defRPr>
+            </a:lvl1pPr>
+          </a:lstStyle>
+          <a:p>
+            <a:pPr algn="r"/>
+            <a:fld id="{F7021451-1387-4CA6-816F-3879F97B5CBC}" type="slidenum">
+              <a:rPr b="1" lang="en-US"/>
+              <a:t>32</a:t>
+            </a:fld>
+            <a:endParaRPr lang="en-US"/>
+          </a:p>
+        </p:txBody>
+      </p:sp>
+    </p:spTree>
+  </p:cSld>
+  <p:clrMapOvr>
+    <a:masterClrMapping/>
+  </p:clrMapOvr>
+</p:sld>
+</file>
+
+<file path=ppt/slides/slide33.xml><?xml version="1.0" encoding="utf-8"?>
+<p:sld xmlns:a="http://schemas.openxmlformats.org/drawingml/2006/main" xmlns:r="http://schemas.openxmlformats.org/officeDocument/2006/relationships" xmlns:p="http://schemas.openxmlformats.org/presentationml/2006/main">
+  <p:cSld name="Slide 33">
+    <p:bg>
+      <p:bgPr>
+        <a:solidFill>
+          <a:srgbClr val="EEF3FA"/>
+        </a:solidFill>
+      </p:bgPr>
+    </p:bg>
+    <p:spTree>
+      <p:nvGrpSpPr>
+        <p:cNvPr id="1" name=""/>
+        <p:cNvGrpSpPr/>
+        <p:nvPr/>
+      </p:nvGrpSpPr>
+      <p:grpSpPr>
+        <a:xfrm>
+          <a:off x="0" y="0"/>
+          <a:ext cx="0" cy="0"/>
+          <a:chOff x="0" y="0"/>
+          <a:chExt cx="0" cy="0"/>
+        </a:xfrm>
+      </p:grpSpPr>
+      <p:sp>
+        <p:nvSpPr>
+          <p:cNvPr id="2" name="Shape 0"/>
+          <p:cNvSpPr/>
+          <p:nvPr/>
+        </p:nvSpPr>
+        <p:spPr>
+          <a:xfrm>
+            <a:off x="0" y="6510528"/>
+            <a:ext cx="12191695" cy="347472"/>
+          </a:xfrm>
+          <a:prstGeom prst="rect">
+            <a:avLst/>
+          </a:prstGeom>
+          <a:solidFill>
+            <a:srgbClr val="FFFFFF"/>
+          </a:solidFill>
+          <a:ln w="6350">
+            <a:solidFill>
+              <a:srgbClr val="D8E0EC"/>
+            </a:solidFill>
+            <a:prstDash val="solid"/>
+          </a:ln>
+        </p:spPr>
+      </p:sp>
+      <p:pic>
+        <p:nvPicPr>
+          <p:cNvPr id="3" name="Image 0" descr="/www/wwwroot/rexar/gdsolar/docs/curso/slides/assets/logo-gdsolar.png">    </p:cNvPr>
+          <p:cNvPicPr>
+            <a:picLocks noChangeAspect="1"/>
+          </p:cNvPicPr>
+          <p:nvPr/>
+        </p:nvPicPr>
+        <p:blipFill>
+          <a:blip r:embed="rId1"/>
+          <a:stretch>
+            <a:fillRect/>
+          </a:stretch>
+        </p:blipFill>
+        <p:spPr>
+          <a:xfrm>
+            <a:off x="548640" y="6547104"/>
+            <a:ext cx="274320" cy="274320"/>
+          </a:xfrm>
+          <a:prstGeom prst="rect">
+            <a:avLst/>
+          </a:prstGeom>
+        </p:spPr>
+      </p:pic>
+      <p:sp>
+        <p:nvSpPr>
+          <p:cNvPr id="4" name="Text 1"/>
+          <p:cNvSpPr/>
+          <p:nvPr/>
+        </p:nvSpPr>
+        <p:spPr>
+          <a:xfrm>
+            <a:off x="886968" y="6528816"/>
+            <a:ext cx="6400800" cy="310896"/>
+          </a:xfrm>
+          <a:prstGeom prst="rect">
+            <a:avLst/>
+          </a:prstGeom>
+          <a:noFill/>
+          <a:ln/>
+        </p:spPr>
+        <p:txBody>
+          <a:bodyPr wrap="square" rtlCol="0" anchor="ctr"/>
+          <a:lstStyle/>
+          <a:p>
+            <a:pPr indent="0" marL="0">
+              <a:buNone/>
+            </a:pPr>
+            <a:r>
+              <a:rPr lang="en-US" sz="900" b="1" dirty="0">
+                <a:solidFill>
+                  <a:srgbClr val="64748B"/>
+                </a:solidFill>
+                <a:latin typeface="Arial" pitchFamily="34" charset="0"/>
+                <a:ea typeface="Arial" pitchFamily="34" charset="-122"/>
+                <a:cs typeface="Arial" pitchFamily="34" charset="-120"/>
+              </a:rPr>
+              <a:t>GD Solar  ·  Formação em Energia por Assinatura</a:t>
+            </a:r>
+            <a:endParaRPr lang="en-US" sz="900" dirty="0"/>
+          </a:p>
+        </p:txBody>
+      </p:sp>
+      <p:sp>
+        <p:nvSpPr>
+          <p:cNvPr id="5" name="Text 2"/>
+          <p:cNvSpPr/>
+          <p:nvPr/>
+        </p:nvSpPr>
+        <p:spPr>
+          <a:xfrm>
+            <a:off x="7132320" y="6528816"/>
+            <a:ext cx="4023360" cy="310896"/>
+          </a:xfrm>
+          <a:prstGeom prst="rect">
+            <a:avLst/>
+          </a:prstGeom>
+          <a:noFill/>
+          <a:ln/>
+        </p:spPr>
+        <p:txBody>
+          <a:bodyPr wrap="square" rtlCol="0" anchor="ctr"/>
+          <a:lstStyle/>
+          <a:p>
+            <a:pPr algn="r" indent="0" marL="0">
+              <a:buNone/>
+            </a:pPr>
+            <a:r>
+              <a:rPr lang="en-US" sz="900" dirty="0">
+                <a:solidFill>
+                  <a:srgbClr val="64748B"/>
+                </a:solidFill>
+                <a:latin typeface="Arial" pitchFamily="34" charset="0"/>
+                <a:ea typeface="Arial" pitchFamily="34" charset="-122"/>
+                <a:cs typeface="Arial" pitchFamily="34" charset="-120"/>
+              </a:rPr>
+              <a:t>M6 · Teste rápido</a:t>
+            </a:r>
+            <a:endParaRPr lang="en-US" sz="900" dirty="0"/>
+          </a:p>
+        </p:txBody>
+      </p:sp>
+      <p:sp>
+        <p:nvSpPr>
+          <p:cNvPr id="6" name="Shape 3"/>
+          <p:cNvSpPr/>
+          <p:nvPr/>
+        </p:nvSpPr>
+        <p:spPr>
+          <a:xfrm>
+            <a:off x="548640" y="384048"/>
+            <a:ext cx="82296" cy="658368"/>
+          </a:xfrm>
+          <a:prstGeom prst="rect">
+            <a:avLst/>
+          </a:prstGeom>
+          <a:solidFill>
+            <a:srgbClr val="F7A23B"/>
+          </a:solidFill>
+          <a:ln/>
+        </p:spPr>
+      </p:sp>
+      <p:sp>
+        <p:nvSpPr>
+          <p:cNvPr id="7" name="Text 4"/>
+          <p:cNvSpPr/>
+          <p:nvPr/>
+        </p:nvSpPr>
+        <p:spPr>
+          <a:xfrm>
+            <a:off x="777240" y="292608"/>
+            <a:ext cx="10972800" cy="274320"/>
+          </a:xfrm>
+          <a:prstGeom prst="rect">
+            <a:avLst/>
+          </a:prstGeom>
+          <a:noFill/>
+          <a:ln/>
+        </p:spPr>
+        <p:txBody>
+          <a:bodyPr wrap="square" rtlCol="0" anchor="ctr"/>
+          <a:lstStyle/>
+          <a:p>
+            <a:pPr indent="0" marL="0">
+              <a:buNone/>
+            </a:pPr>
+            <a:r>
+              <a:rPr lang="en-US" sz="1000" b="1" spc="100" kern="0" dirty="0">
+                <a:solidFill>
+                  <a:srgbClr val="F7A23B"/>
+                </a:solidFill>
+                <a:latin typeface="Arial" pitchFamily="34" charset="0"/>
+                <a:ea typeface="Arial" pitchFamily="34" charset="-122"/>
+                <a:cs typeface="Arial" pitchFamily="34" charset="-120"/>
+              </a:rPr>
+              <a:t>CONFIRA SUAS RESPOSTAS</a:t>
+            </a:r>
+            <a:endParaRPr lang="en-US" sz="1000" dirty="0"/>
+          </a:p>
+        </p:txBody>
+      </p:sp>
+      <p:sp>
+        <p:nvSpPr>
+          <p:cNvPr id="8" name="Text 5"/>
+          <p:cNvSpPr/>
+          <p:nvPr/>
+        </p:nvSpPr>
+        <p:spPr>
+          <a:xfrm>
+            <a:off x="777240" y="530352"/>
+            <a:ext cx="10881360" cy="566928"/>
+          </a:xfrm>
+          <a:prstGeom prst="rect">
+            <a:avLst/>
+          </a:prstGeom>
+          <a:noFill/>
+          <a:ln/>
+        </p:spPr>
+        <p:txBody>
+          <a:bodyPr wrap="square" rtlCol="0" anchor="ctr">
+            <a:normAutofit/>
+          </a:bodyPr>
+          <a:lstStyle/>
+          <a:p>
+            <a:pPr indent="0" marL="0">
+              <a:buNone/>
+            </a:pPr>
+            <a:r>
+              <a:rPr lang="en-US" sz="2600" b="1" dirty="0">
+                <a:solidFill>
+                  <a:srgbClr val="1B3A6B"/>
+                </a:solidFill>
+                <a:latin typeface="Arial" pitchFamily="34" charset="0"/>
+                <a:ea typeface="Arial" pitchFamily="34" charset="-122"/>
+                <a:cs typeface="Arial" pitchFamily="34" charset="-120"/>
+              </a:rPr>
+              <a:t>Gabarito do teste rápido</a:t>
+            </a:r>
+            <a:endParaRPr lang="en-US" sz="2600" dirty="0"/>
+          </a:p>
+        </p:txBody>
+      </p:sp>
+      <p:sp>
+        <p:nvSpPr>
+          <p:cNvPr id="9" name="Shape 6"/>
+          <p:cNvSpPr/>
+          <p:nvPr/>
+        </p:nvSpPr>
+        <p:spPr>
+          <a:xfrm>
+            <a:off x="548640" y="1325880"/>
+            <a:ext cx="3544824" cy="2331720"/>
+          </a:xfrm>
+          <a:prstGeom prst="roundRect">
+            <a:avLst>
+              <a:gd name="adj" fmla="val 3137"/>
+            </a:avLst>
+          </a:prstGeom>
+          <a:solidFill>
+            <a:srgbClr val="FFFFFF"/>
+          </a:solidFill>
+          <a:ln w="9525">
+            <a:solidFill>
+              <a:srgbClr val="D8E0EC"/>
+            </a:solidFill>
+            <a:prstDash val="solid"/>
+          </a:ln>
+          <a:effectLst>
+            <a:outerShdw sx="100000" sy="100000" kx="0" ky="0" algn="bl" rotWithShape="0" blurRad="38100" dist="12700" dir="5400000">
+              <a:srgbClr val="000000">
+                <a:alpha val="8000"/>
+              </a:srgbClr>
+            </a:outerShdw>
+          </a:effectLst>
+        </p:spPr>
+      </p:sp>
+      <p:sp>
+        <p:nvSpPr>
+          <p:cNvPr id="10" name="Shape 7"/>
+          <p:cNvSpPr/>
+          <p:nvPr/>
+        </p:nvSpPr>
+        <p:spPr>
+          <a:xfrm>
+            <a:off x="731520" y="1508760"/>
+            <a:ext cx="457200" cy="457200"/>
+          </a:xfrm>
+          <a:prstGeom prst="ellipse">
+            <a:avLst/>
+          </a:prstGeom>
+          <a:solidFill>
+            <a:srgbClr val="1B3A6B"/>
+          </a:solidFill>
+          <a:ln/>
+        </p:spPr>
+      </p:sp>
+      <p:sp>
+        <p:nvSpPr>
+          <p:cNvPr id="11" name="Text 8"/>
+          <p:cNvSpPr/>
+          <p:nvPr/>
+        </p:nvSpPr>
+        <p:spPr>
+          <a:xfrm>
+            <a:off x="731520" y="1508760"/>
+            <a:ext cx="457200" cy="457200"/>
+          </a:xfrm>
+          <a:prstGeom prst="rect">
+            <a:avLst/>
+          </a:prstGeom>
+          <a:noFill/>
+          <a:ln/>
+        </p:spPr>
+        <p:txBody>
+          <a:bodyPr wrap="square" rtlCol="0" anchor="ctr"/>
+          <a:lstStyle/>
+          <a:p>
+            <a:pPr algn="ctr" indent="0" marL="0">
+              <a:buNone/>
+            </a:pPr>
+            <a:r>
+              <a:rPr lang="en-US" sz="1400" b="1" dirty="0">
+                <a:solidFill>
+                  <a:srgbClr val="FFFFFF"/>
+                </a:solidFill>
+                <a:latin typeface="Arial" pitchFamily="34" charset="0"/>
+                <a:ea typeface="Arial" pitchFamily="34" charset="-122"/>
+                <a:cs typeface="Arial" pitchFamily="34" charset="-120"/>
+              </a:rPr>
+              <a:t>1</a:t>
+            </a:r>
+            <a:endParaRPr lang="en-US" sz="1400" dirty="0"/>
+          </a:p>
+        </p:txBody>
+      </p:sp>
+      <p:sp>
+        <p:nvSpPr>
+          <p:cNvPr id="12" name="Text 9"/>
+          <p:cNvSpPr/>
+          <p:nvPr/>
+        </p:nvSpPr>
+        <p:spPr>
+          <a:xfrm>
+            <a:off x="1325880" y="1435608"/>
+            <a:ext cx="2630424" cy="2112264"/>
+          </a:xfrm>
+          <a:prstGeom prst="rect">
+            <a:avLst/>
+          </a:prstGeom>
+          <a:noFill/>
+          <a:ln/>
+        </p:spPr>
+        <p:txBody>
+          <a:bodyPr wrap="square" rtlCol="0" anchor="ctr">
+            <a:normAutofit/>
+          </a:bodyPr>
+          <a:lstStyle/>
+          <a:p>
+            <a:pPr indent="0" marL="0">
+              <a:buNone/>
+            </a:pPr>
+            <a:r>
+              <a:rPr lang="en-US" sz="1800" dirty="0">
+                <a:solidFill>
+                  <a:srgbClr val="1F2937"/>
+                </a:solidFill>
+                <a:latin typeface="Arial" pitchFamily="34" charset="0"/>
+                <a:ea typeface="Arial" pitchFamily="34" charset="-122"/>
+                <a:cs typeface="Arial" pitchFamily="34" charset="-120"/>
+              </a:rPr>
+              <a:t>A) Reequilíbrio/ajuste regulatório</a:t>
+            </a:r>
+            <a:endParaRPr lang="en-US" sz="1800" dirty="0"/>
+          </a:p>
+        </p:txBody>
+      </p:sp>
+      <p:sp>
+        <p:nvSpPr>
+          <p:cNvPr id="13" name="Shape 10"/>
+          <p:cNvSpPr/>
+          <p:nvPr/>
+        </p:nvSpPr>
+        <p:spPr>
+          <a:xfrm>
+            <a:off x="4322064" y="1325880"/>
+            <a:ext cx="3544824" cy="2331720"/>
+          </a:xfrm>
+          <a:prstGeom prst="roundRect">
+            <a:avLst>
+              <a:gd name="adj" fmla="val 3137"/>
+            </a:avLst>
+          </a:prstGeom>
+          <a:solidFill>
+            <a:srgbClr val="FFFFFF"/>
+          </a:solidFill>
+          <a:ln w="9525">
+            <a:solidFill>
+              <a:srgbClr val="D8E0EC"/>
+            </a:solidFill>
+            <a:prstDash val="solid"/>
+          </a:ln>
+          <a:effectLst>
+            <a:outerShdw sx="100000" sy="100000" kx="0" ky="0" algn="bl" rotWithShape="0" blurRad="38100" dist="12700" dir="5400000">
+              <a:srgbClr val="000000">
+                <a:alpha val="8000"/>
+              </a:srgbClr>
+            </a:outerShdw>
+          </a:effectLst>
+        </p:spPr>
+      </p:sp>
+      <p:sp>
+        <p:nvSpPr>
+          <p:cNvPr id="14" name="Shape 11"/>
+          <p:cNvSpPr/>
+          <p:nvPr/>
+        </p:nvSpPr>
+        <p:spPr>
+          <a:xfrm>
+            <a:off x="4504944" y="1508760"/>
+            <a:ext cx="457200" cy="457200"/>
+          </a:xfrm>
+          <a:prstGeom prst="ellipse">
+            <a:avLst/>
+          </a:prstGeom>
+          <a:solidFill>
+            <a:srgbClr val="F7A23B"/>
+          </a:solidFill>
+          <a:ln/>
+        </p:spPr>
+      </p:sp>
+      <p:sp>
+        <p:nvSpPr>
+          <p:cNvPr id="15" name="Text 12"/>
+          <p:cNvSpPr/>
+          <p:nvPr/>
+        </p:nvSpPr>
+        <p:spPr>
+          <a:xfrm>
+            <a:off x="4504944" y="1508760"/>
+            <a:ext cx="457200" cy="457200"/>
+          </a:xfrm>
+          <a:prstGeom prst="rect">
+            <a:avLst/>
+          </a:prstGeom>
+          <a:noFill/>
+          <a:ln/>
+        </p:spPr>
+        <p:txBody>
+          <a:bodyPr wrap="square" rtlCol="0" anchor="ctr"/>
+          <a:lstStyle/>
+          <a:p>
+            <a:pPr algn="ctr" indent="0" marL="0">
+              <a:buNone/>
+            </a:pPr>
+            <a:r>
+              <a:rPr lang="en-US" sz="1400" b="1" dirty="0">
+                <a:solidFill>
+                  <a:srgbClr val="FFFFFF"/>
+                </a:solidFill>
+                <a:latin typeface="Arial" pitchFamily="34" charset="0"/>
+                <a:ea typeface="Arial" pitchFamily="34" charset="-122"/>
+                <a:cs typeface="Arial" pitchFamily="34" charset="-120"/>
+              </a:rPr>
+              <a:t>2</a:t>
+            </a:r>
+            <a:endParaRPr lang="en-US" sz="1400" dirty="0"/>
+          </a:p>
+        </p:txBody>
+      </p:sp>
+      <p:sp>
+        <p:nvSpPr>
+          <p:cNvPr id="16" name="Text 13"/>
+          <p:cNvSpPr/>
+          <p:nvPr/>
+        </p:nvSpPr>
+        <p:spPr>
+          <a:xfrm>
+            <a:off x="5099304" y="1435608"/>
+            <a:ext cx="2630424" cy="2112264"/>
+          </a:xfrm>
+          <a:prstGeom prst="rect">
+            <a:avLst/>
+          </a:prstGeom>
+          <a:noFill/>
+          <a:ln/>
+        </p:spPr>
+        <p:txBody>
+          <a:bodyPr wrap="square" rtlCol="0" anchor="ctr">
+            <a:normAutofit/>
+          </a:bodyPr>
+          <a:lstStyle/>
+          <a:p>
+            <a:pPr indent="0" marL="0">
+              <a:buNone/>
+            </a:pPr>
+            <a:r>
+              <a:rPr lang="en-US" sz="1800" dirty="0">
+                <a:solidFill>
+                  <a:srgbClr val="1F2937"/>
+                </a:solidFill>
+                <a:latin typeface="Arial" pitchFamily="34" charset="0"/>
+                <a:ea typeface="Arial" pitchFamily="34" charset="-122"/>
+                <a:cs typeface="Arial" pitchFamily="34" charset="-120"/>
+              </a:rPr>
+              <a:t>A) execução de contrato</a:t>
+            </a:r>
+            <a:endParaRPr lang="en-US" sz="1800" dirty="0"/>
+          </a:p>
+        </p:txBody>
+      </p:sp>
+      <p:sp>
+        <p:nvSpPr>
+          <p:cNvPr id="17" name="Shape 14"/>
+          <p:cNvSpPr/>
+          <p:nvPr/>
+        </p:nvSpPr>
+        <p:spPr>
+          <a:xfrm>
+            <a:off x="8095488" y="1325880"/>
+            <a:ext cx="3544824" cy="2331720"/>
+          </a:xfrm>
+          <a:prstGeom prst="roundRect">
+            <a:avLst>
+              <a:gd name="adj" fmla="val 3137"/>
+            </a:avLst>
+          </a:prstGeom>
+          <a:solidFill>
+            <a:srgbClr val="FFFFFF"/>
+          </a:solidFill>
+          <a:ln w="9525">
+            <a:solidFill>
+              <a:srgbClr val="D8E0EC"/>
+            </a:solidFill>
+            <a:prstDash val="solid"/>
+          </a:ln>
+          <a:effectLst>
+            <a:outerShdw sx="100000" sy="100000" kx="0" ky="0" algn="bl" rotWithShape="0" blurRad="38100" dist="12700" dir="5400000">
+              <a:srgbClr val="000000">
+                <a:alpha val="8000"/>
+              </a:srgbClr>
+            </a:outerShdw>
+          </a:effectLst>
+        </p:spPr>
+      </p:sp>
+      <p:sp>
+        <p:nvSpPr>
+          <p:cNvPr id="18" name="Shape 15"/>
+          <p:cNvSpPr/>
+          <p:nvPr/>
+        </p:nvSpPr>
+        <p:spPr>
+          <a:xfrm>
+            <a:off x="8278368" y="1508760"/>
+            <a:ext cx="457200" cy="457200"/>
+          </a:xfrm>
+          <a:prstGeom prst="ellipse">
+            <a:avLst/>
+          </a:prstGeom>
+          <a:solidFill>
+            <a:srgbClr val="1B3A6B"/>
+          </a:solidFill>
+          <a:ln/>
+        </p:spPr>
+      </p:sp>
+      <p:sp>
+        <p:nvSpPr>
+          <p:cNvPr id="19" name="Text 16"/>
+          <p:cNvSpPr/>
+          <p:nvPr/>
+        </p:nvSpPr>
+        <p:spPr>
+          <a:xfrm>
+            <a:off x="8278368" y="1508760"/>
+            <a:ext cx="457200" cy="457200"/>
+          </a:xfrm>
+          <a:prstGeom prst="rect">
+            <a:avLst/>
+          </a:prstGeom>
+          <a:noFill/>
+          <a:ln/>
+        </p:spPr>
+        <p:txBody>
+          <a:bodyPr wrap="square" rtlCol="0" anchor="ctr"/>
+          <a:lstStyle/>
+          <a:p>
+            <a:pPr algn="ctr" indent="0" marL="0">
+              <a:buNone/>
+            </a:pPr>
+            <a:r>
+              <a:rPr lang="en-US" sz="1400" b="1" dirty="0">
+                <a:solidFill>
+                  <a:srgbClr val="FFFFFF"/>
+                </a:solidFill>
+                <a:latin typeface="Arial" pitchFamily="34" charset="0"/>
+                <a:ea typeface="Arial" pitchFamily="34" charset="-122"/>
+                <a:cs typeface="Arial" pitchFamily="34" charset="-120"/>
+              </a:rPr>
+              <a:t>3</a:t>
+            </a:r>
+            <a:endParaRPr lang="en-US" sz="1400" dirty="0"/>
+          </a:p>
+        </p:txBody>
+      </p:sp>
+      <p:sp>
+        <p:nvSpPr>
+          <p:cNvPr id="20" name="Text 17"/>
+          <p:cNvSpPr/>
+          <p:nvPr/>
+        </p:nvSpPr>
+        <p:spPr>
+          <a:xfrm>
+            <a:off x="8872728" y="1435608"/>
+            <a:ext cx="2630424" cy="2112264"/>
+          </a:xfrm>
+          <a:prstGeom prst="rect">
+            <a:avLst/>
+          </a:prstGeom>
+          <a:noFill/>
+          <a:ln/>
+        </p:spPr>
+        <p:txBody>
+          <a:bodyPr wrap="square" rtlCol="0" anchor="ctr">
+            <a:normAutofit/>
+          </a:bodyPr>
+          <a:lstStyle/>
+          <a:p>
+            <a:pPr indent="0" marL="0">
+              <a:buNone/>
+            </a:pPr>
+            <a:r>
+              <a:rPr lang="en-US" sz="1800" dirty="0">
+                <a:solidFill>
+                  <a:srgbClr val="1F2937"/>
+                </a:solidFill>
+                <a:latin typeface="Arial" pitchFamily="34" charset="0"/>
+                <a:ea typeface="Arial" pitchFamily="34" charset="-122"/>
+                <a:cs typeface="Arial" pitchFamily="34" charset="-120"/>
+              </a:rPr>
+              <a:t>A) precisa ser atualizada na distribuidora</a:t>
+            </a:r>
+            <a:endParaRPr lang="en-US" sz="1800" dirty="0"/>
+          </a:p>
+        </p:txBody>
+      </p:sp>
+      <p:sp>
+        <p:nvSpPr>
+          <p:cNvPr id="21" name="Shape 18"/>
+          <p:cNvSpPr/>
+          <p:nvPr/>
+        </p:nvSpPr>
+        <p:spPr>
+          <a:xfrm>
+            <a:off x="548640" y="3886200"/>
+            <a:ext cx="3544824" cy="2331720"/>
+          </a:xfrm>
+          <a:prstGeom prst="roundRect">
+            <a:avLst>
+              <a:gd name="adj" fmla="val 3137"/>
+            </a:avLst>
+          </a:prstGeom>
+          <a:solidFill>
+            <a:srgbClr val="FFFFFF"/>
+          </a:solidFill>
+          <a:ln w="9525">
+            <a:solidFill>
+              <a:srgbClr val="D8E0EC"/>
+            </a:solidFill>
+            <a:prstDash val="solid"/>
+          </a:ln>
+          <a:effectLst>
+            <a:outerShdw sx="100000" sy="100000" kx="0" ky="0" algn="bl" rotWithShape="0" blurRad="38100" dist="12700" dir="5400000">
+              <a:srgbClr val="000000">
+                <a:alpha val="8000"/>
+              </a:srgbClr>
+            </a:outerShdw>
+          </a:effectLst>
+        </p:spPr>
+      </p:sp>
+      <p:sp>
+        <p:nvSpPr>
+          <p:cNvPr id="22" name="Shape 19"/>
+          <p:cNvSpPr/>
+          <p:nvPr/>
+        </p:nvSpPr>
+        <p:spPr>
+          <a:xfrm>
+            <a:off x="731520" y="4069080"/>
+            <a:ext cx="457200" cy="457200"/>
+          </a:xfrm>
+          <a:prstGeom prst="ellipse">
+            <a:avLst/>
+          </a:prstGeom>
+          <a:solidFill>
+            <a:srgbClr val="F7A23B"/>
+          </a:solidFill>
+          <a:ln/>
+        </p:spPr>
+      </p:sp>
+      <p:sp>
+        <p:nvSpPr>
+          <p:cNvPr id="23" name="Text 20"/>
+          <p:cNvSpPr/>
+          <p:nvPr/>
+        </p:nvSpPr>
+        <p:spPr>
+          <a:xfrm>
+            <a:off x="731520" y="4069080"/>
+            <a:ext cx="457200" cy="457200"/>
+          </a:xfrm>
+          <a:prstGeom prst="rect">
+            <a:avLst/>
+          </a:prstGeom>
+          <a:noFill/>
+          <a:ln/>
+        </p:spPr>
+        <p:txBody>
+          <a:bodyPr wrap="square" rtlCol="0" anchor="ctr"/>
+          <a:lstStyle/>
+          <a:p>
+            <a:pPr algn="ctr" indent="0" marL="0">
+              <a:buNone/>
+            </a:pPr>
+            <a:r>
+              <a:rPr lang="en-US" sz="1400" b="1" dirty="0">
+                <a:solidFill>
+                  <a:srgbClr val="FFFFFF"/>
+                </a:solidFill>
+                <a:latin typeface="Arial" pitchFamily="34" charset="0"/>
+                <a:ea typeface="Arial" pitchFamily="34" charset="-122"/>
+                <a:cs typeface="Arial" pitchFamily="34" charset="-120"/>
+              </a:rPr>
+              <a:t>4</a:t>
+            </a:r>
+            <a:endParaRPr lang="en-US" sz="1400" dirty="0"/>
+          </a:p>
+        </p:txBody>
+      </p:sp>
+      <p:sp>
+        <p:nvSpPr>
+          <p:cNvPr id="24" name="Text 21"/>
+          <p:cNvSpPr/>
+          <p:nvPr/>
+        </p:nvSpPr>
+        <p:spPr>
+          <a:xfrm>
+            <a:off x="1325880" y="3995928"/>
+            <a:ext cx="2630424" cy="2112264"/>
+          </a:xfrm>
+          <a:prstGeom prst="rect">
+            <a:avLst/>
+          </a:prstGeom>
+          <a:noFill/>
+          <a:ln/>
+        </p:spPr>
+        <p:txBody>
+          <a:bodyPr wrap="square" rtlCol="0" anchor="ctr">
+            <a:normAutofit/>
+          </a:bodyPr>
+          <a:lstStyle/>
+          <a:p>
+            <a:pPr indent="0" marL="0">
+              <a:buNone/>
+            </a:pPr>
+            <a:r>
+              <a:rPr lang="en-US" sz="1800" dirty="0">
+                <a:solidFill>
+                  <a:srgbClr val="1F2937"/>
+                </a:solidFill>
+                <a:latin typeface="Arial" pitchFamily="34" charset="0"/>
+                <a:ea typeface="Arial" pitchFamily="34" charset="-122"/>
+                <a:cs typeface="Arial" pitchFamily="34" charset="-120"/>
+              </a:rPr>
+              <a:t>C) Não, recusa o vínculo</a:t>
+            </a:r>
+            <a:endParaRPr lang="en-US" sz="1800" dirty="0"/>
+          </a:p>
+        </p:txBody>
+      </p:sp>
+      <p:sp>
+        <p:nvSpPr>
+          <p:cNvPr id="25" name="Shape 22"/>
+          <p:cNvSpPr/>
+          <p:nvPr/>
+        </p:nvSpPr>
+        <p:spPr>
+          <a:xfrm>
+            <a:off x="4322064" y="3886200"/>
+            <a:ext cx="3544824" cy="2331720"/>
+          </a:xfrm>
+          <a:prstGeom prst="roundRect">
+            <a:avLst>
+              <a:gd name="adj" fmla="val 3137"/>
+            </a:avLst>
+          </a:prstGeom>
+          <a:solidFill>
+            <a:srgbClr val="FFFFFF"/>
+          </a:solidFill>
+          <a:ln w="9525">
+            <a:solidFill>
+              <a:srgbClr val="D8E0EC"/>
+            </a:solidFill>
+            <a:prstDash val="solid"/>
+          </a:ln>
+          <a:effectLst>
+            <a:outerShdw sx="100000" sy="100000" kx="0" ky="0" algn="bl" rotWithShape="0" blurRad="38100" dist="12700" dir="5400000">
+              <a:srgbClr val="000000">
+                <a:alpha val="8000"/>
+              </a:srgbClr>
+            </a:outerShdw>
+          </a:effectLst>
+        </p:spPr>
+      </p:sp>
+      <p:sp>
+        <p:nvSpPr>
+          <p:cNvPr id="26" name="Shape 23"/>
+          <p:cNvSpPr/>
+          <p:nvPr/>
+        </p:nvSpPr>
+        <p:spPr>
+          <a:xfrm>
+            <a:off x="4504944" y="4069080"/>
+            <a:ext cx="457200" cy="457200"/>
+          </a:xfrm>
+          <a:prstGeom prst="ellipse">
+            <a:avLst/>
+          </a:prstGeom>
+          <a:solidFill>
+            <a:srgbClr val="1B3A6B"/>
+          </a:solidFill>
+          <a:ln/>
+        </p:spPr>
+      </p:sp>
+      <p:sp>
+        <p:nvSpPr>
+          <p:cNvPr id="27" name="Text 24"/>
+          <p:cNvSpPr/>
+          <p:nvPr/>
+        </p:nvSpPr>
+        <p:spPr>
+          <a:xfrm>
+            <a:off x="4504944" y="4069080"/>
+            <a:ext cx="457200" cy="457200"/>
+          </a:xfrm>
+          <a:prstGeom prst="rect">
+            <a:avLst/>
+          </a:prstGeom>
+          <a:noFill/>
+          <a:ln/>
+        </p:spPr>
+        <p:txBody>
+          <a:bodyPr wrap="square" rtlCol="0" anchor="ctr"/>
+          <a:lstStyle/>
+          <a:p>
+            <a:pPr algn="ctr" indent="0" marL="0">
+              <a:buNone/>
+            </a:pPr>
+            <a:r>
+              <a:rPr lang="en-US" sz="1400" b="1" dirty="0">
+                <a:solidFill>
+                  <a:srgbClr val="FFFFFF"/>
+                </a:solidFill>
+                <a:latin typeface="Arial" pitchFamily="34" charset="0"/>
+                <a:ea typeface="Arial" pitchFamily="34" charset="-122"/>
+                <a:cs typeface="Arial" pitchFamily="34" charset="-120"/>
+              </a:rPr>
+              <a:t>5</a:t>
+            </a:r>
+            <a:endParaRPr lang="en-US" sz="1400" dirty="0"/>
+          </a:p>
+        </p:txBody>
+      </p:sp>
+      <p:sp>
+        <p:nvSpPr>
+          <p:cNvPr id="28" name="Text 25"/>
+          <p:cNvSpPr/>
+          <p:nvPr/>
+        </p:nvSpPr>
+        <p:spPr>
+          <a:xfrm>
+            <a:off x="5099304" y="3995928"/>
+            <a:ext cx="2630424" cy="2112264"/>
+          </a:xfrm>
+          <a:prstGeom prst="rect">
+            <a:avLst/>
+          </a:prstGeom>
+          <a:noFill/>
+          <a:ln/>
+        </p:spPr>
+        <p:txBody>
+          <a:bodyPr wrap="square" rtlCol="0" anchor="ctr">
+            <a:normAutofit/>
+          </a:bodyPr>
+          <a:lstStyle/>
+          <a:p>
+            <a:pPr indent="0" marL="0">
+              <a:buNone/>
+            </a:pPr>
+            <a:r>
+              <a:rPr lang="en-US" sz="1800" dirty="0">
+                <a:solidFill>
+                  <a:srgbClr val="1F2937"/>
+                </a:solidFill>
+                <a:latin typeface="Arial" pitchFamily="34" charset="0"/>
+                <a:ea typeface="Arial" pitchFamily="34" charset="-122"/>
+                <a:cs typeface="Arial" pitchFamily="34" charset="-120"/>
+              </a:rPr>
+              <a:t>-) </a:t>
+            </a:r>
+            <a:endParaRPr lang="en-US" sz="1800" dirty="0"/>
+          </a:p>
+        </p:txBody>
+      </p:sp>
+      <p:sp>
+        <p:nvSpPr>
+          <p:cNvPr id="29" name="Shape 26"/>
+          <p:cNvSpPr/>
+          <p:nvPr/>
+        </p:nvSpPr>
+        <p:spPr>
+          <a:xfrm>
+            <a:off x="8095488" y="3886200"/>
+            <a:ext cx="3544824" cy="2331720"/>
+          </a:xfrm>
+          <a:prstGeom prst="roundRect">
+            <a:avLst>
+              <a:gd name="adj" fmla="val 3137"/>
+            </a:avLst>
+          </a:prstGeom>
+          <a:solidFill>
+            <a:srgbClr val="FFFFFF"/>
+          </a:solidFill>
+          <a:ln w="9525">
+            <a:solidFill>
+              <a:srgbClr val="D8E0EC"/>
+            </a:solidFill>
+            <a:prstDash val="solid"/>
+          </a:ln>
+          <a:effectLst>
+            <a:outerShdw sx="100000" sy="100000" kx="0" ky="0" algn="bl" rotWithShape="0" blurRad="38100" dist="12700" dir="5400000">
+              <a:srgbClr val="000000">
+                <a:alpha val="8000"/>
+              </a:srgbClr>
+            </a:outerShdw>
+          </a:effectLst>
+        </p:spPr>
+      </p:sp>
+      <p:sp>
+        <p:nvSpPr>
+          <p:cNvPr id="30" name="Shape 27"/>
+          <p:cNvSpPr/>
+          <p:nvPr/>
+        </p:nvSpPr>
+        <p:spPr>
+          <a:xfrm>
+            <a:off x="8278368" y="4069080"/>
+            <a:ext cx="457200" cy="457200"/>
+          </a:xfrm>
+          <a:prstGeom prst="ellipse">
+            <a:avLst/>
+          </a:prstGeom>
+          <a:solidFill>
+            <a:srgbClr val="F7A23B"/>
+          </a:solidFill>
+          <a:ln/>
+        </p:spPr>
+      </p:sp>
+      <p:sp>
+        <p:nvSpPr>
+          <p:cNvPr id="31" name="Text 28"/>
+          <p:cNvSpPr/>
+          <p:nvPr/>
+        </p:nvSpPr>
+        <p:spPr>
+          <a:xfrm>
+            <a:off x="8278368" y="4069080"/>
+            <a:ext cx="457200" cy="457200"/>
+          </a:xfrm>
+          <a:prstGeom prst="rect">
+            <a:avLst/>
+          </a:prstGeom>
+          <a:noFill/>
+          <a:ln/>
+        </p:spPr>
+        <p:txBody>
+          <a:bodyPr wrap="square" rtlCol="0" anchor="ctr"/>
+          <a:lstStyle/>
+          <a:p>
+            <a:pPr algn="ctr" indent="0" marL="0">
+              <a:buNone/>
+            </a:pPr>
+            <a:r>
+              <a:rPr lang="en-US" sz="1400" b="1" dirty="0">
+                <a:solidFill>
+                  <a:srgbClr val="FFFFFF"/>
+                </a:solidFill>
+                <a:latin typeface="Arial" pitchFamily="34" charset="0"/>
+                <a:ea typeface="Arial" pitchFamily="34" charset="-122"/>
+                <a:cs typeface="Arial" pitchFamily="34" charset="-120"/>
+              </a:rPr>
+              <a:t>6</a:t>
+            </a:r>
+            <a:endParaRPr lang="en-US" sz="1400" dirty="0"/>
+          </a:p>
+        </p:txBody>
+      </p:sp>
+      <p:sp>
+        <p:nvSpPr>
+          <p:cNvPr id="32" name="Text 29"/>
+          <p:cNvSpPr/>
+          <p:nvPr/>
+        </p:nvSpPr>
+        <p:spPr>
+          <a:xfrm>
+            <a:off x="8872728" y="3995928"/>
+            <a:ext cx="2630424" cy="2112264"/>
+          </a:xfrm>
+          <a:prstGeom prst="rect">
+            <a:avLst/>
+          </a:prstGeom>
+          <a:noFill/>
+          <a:ln/>
+        </p:spPr>
+        <p:txBody>
+          <a:bodyPr wrap="square" rtlCol="0" anchor="ctr">
+            <a:normAutofit/>
+          </a:bodyPr>
+          <a:lstStyle/>
+          <a:p>
+            <a:pPr indent="0" marL="0">
+              <a:buNone/>
+            </a:pPr>
+            <a:r>
+              <a:rPr lang="en-US" sz="1800" dirty="0">
+                <a:solidFill>
+                  <a:srgbClr val="1F2937"/>
+                </a:solidFill>
+                <a:latin typeface="Arial" pitchFamily="34" charset="0"/>
+                <a:ea typeface="Arial" pitchFamily="34" charset="-122"/>
+                <a:cs typeface="Arial" pitchFamily="34" charset="-120"/>
+              </a:rPr>
+              <a:t>A) um participante com 25% ou mais dos créditos</a:t>
+            </a:r>
+            <a:endParaRPr lang="en-US" sz="1800" dirty="0"/>
+          </a:p>
+        </p:txBody>
+      </p:sp>
+      <p:sp>
+        <p:nvSpPr>
+          <p:cNvPr id="25" name="Slide Number Placeholder 0"/>
+          <p:cNvSpPr>
+            <a:spLocks noGrp="1"/>
+          </p:cNvSpPr>
+          <p:nvPr>
+            <p:ph type="sldNum" sz="quarter" idx="4294967295"/>
+          </p:nvPr>
+        </p:nvSpPr>
+        <p:spPr>
+          <a:xfrm>
+            <a:off x="11292840" y="6556248"/>
+            <a:ext cx="548640" cy="256032"/>
+          </a:xfrm>
+          <a:prstGeom prst="rect">
+            <a:avLst/>
+          </a:prstGeom>
+          <a:extLst>
+            <a:ext uri="{C572A759-6A51-4108-AA02-DFA0A04FC94B}">
+              <ma14:wrappingTextBoxFlag xmlns:ma14="http://schemas.microsoft.com/office/mac/drawingml/2011/main" val="0"/>
+            </a:ext>
+          </a:extLst>
+        </p:spPr>
+        <p:txBody>
+          <a:bodyPr/>
+          <a:lstStyle>
+            <a:lvl1pPr>
+              <a:defRPr sz="900">
+                <a:solidFill>
+                  <a:srgbClr val="1B3A6B"/>
+                </a:solidFill>
+                <a:latin typeface="Arial"/>
+                <a:ea typeface="Arial"/>
+                <a:cs typeface="Arial"/>
+              </a:defRPr>
+            </a:lvl1pPr>
+          </a:lstStyle>
+          <a:p>
+            <a:pPr algn="r"/>
+            <a:fld id="{F7021451-1387-4CA6-816F-3879F97B5CBC}" type="slidenum">
+              <a:rPr b="1" lang="en-US"/>
+              <a:t>33</a:t>
+            </a:fld>
+            <a:endParaRPr lang="en-US"/>
+          </a:p>
+        </p:txBody>
+      </p:sp>
+    </p:spTree>
+  </p:cSld>
+  <p:clrMapOvr>
+    <a:masterClrMapping/>
+  </p:clrMapOvr>
+</p:sld>
+</file>
+
+<file path=ppt/slides/slide34.xml><?xml version="1.0" encoding="utf-8"?>
+<p:sld xmlns:a="http://schemas.openxmlformats.org/drawingml/2006/main" xmlns:r="http://schemas.openxmlformats.org/officeDocument/2006/relationships" xmlns:p="http://schemas.openxmlformats.org/presentationml/2006/main">
+  <p:cSld name="Slide 34">
+    <p:bg>
+      <p:bgPr>
+        <a:solidFill>
+          <a:srgbClr val="F6F8FB"/>
+        </a:solidFill>
+      </p:bgPr>
+    </p:bg>
+    <p:spTree>
+      <p:nvGrpSpPr>
+        <p:cNvPr id="1" name=""/>
+        <p:cNvGrpSpPr/>
+        <p:nvPr/>
+      </p:nvGrpSpPr>
+      <p:grpSpPr>
+        <a:xfrm>
+          <a:off x="0" y="0"/>
+          <a:ext cx="0" cy="0"/>
+          <a:chOff x="0" y="0"/>
+          <a:chExt cx="0" cy="0"/>
+        </a:xfrm>
+      </p:grpSpPr>
+      <p:sp>
+        <p:nvSpPr>
+          <p:cNvPr id="2" name="Shape 0"/>
+          <p:cNvSpPr/>
+          <p:nvPr/>
+        </p:nvSpPr>
+        <p:spPr>
+          <a:xfrm>
+            <a:off x="0" y="6510528"/>
+            <a:ext cx="12191695" cy="347472"/>
+          </a:xfrm>
+          <a:prstGeom prst="rect">
+            <a:avLst/>
+          </a:prstGeom>
+          <a:solidFill>
+            <a:srgbClr val="FFFFFF"/>
+          </a:solidFill>
+          <a:ln w="6350">
+            <a:solidFill>
+              <a:srgbClr val="D8E0EC"/>
+            </a:solidFill>
+            <a:prstDash val="solid"/>
+          </a:ln>
+        </p:spPr>
+      </p:sp>
+      <p:pic>
+        <p:nvPicPr>
+          <p:cNvPr id="3" name="Image 0" descr="/www/wwwroot/rexar/gdsolar/docs/curso/slides/assets/logo-gdsolar.png">    </p:cNvPr>
+          <p:cNvPicPr>
+            <a:picLocks noChangeAspect="1"/>
+          </p:cNvPicPr>
+          <p:nvPr/>
+        </p:nvPicPr>
+        <p:blipFill>
+          <a:blip r:embed="rId1"/>
+          <a:stretch>
+            <a:fillRect/>
+          </a:stretch>
+        </p:blipFill>
+        <p:spPr>
+          <a:xfrm>
+            <a:off x="548640" y="6547104"/>
+            <a:ext cx="274320" cy="274320"/>
+          </a:xfrm>
+          <a:prstGeom prst="rect">
+            <a:avLst/>
+          </a:prstGeom>
+        </p:spPr>
+      </p:pic>
+      <p:sp>
+        <p:nvSpPr>
+          <p:cNvPr id="4" name="Text 1"/>
+          <p:cNvSpPr/>
+          <p:nvPr/>
+        </p:nvSpPr>
+        <p:spPr>
+          <a:xfrm>
+            <a:off x="886968" y="6528816"/>
+            <a:ext cx="6400800" cy="310896"/>
+          </a:xfrm>
+          <a:prstGeom prst="rect">
+            <a:avLst/>
+          </a:prstGeom>
+          <a:noFill/>
+          <a:ln/>
+        </p:spPr>
+        <p:txBody>
+          <a:bodyPr wrap="square" rtlCol="0" anchor="ctr"/>
+          <a:lstStyle/>
+          <a:p>
+            <a:pPr indent="0" marL="0">
+              <a:buNone/>
+            </a:pPr>
+            <a:r>
+              <a:rPr lang="en-US" sz="900" b="1" dirty="0">
+                <a:solidFill>
+                  <a:srgbClr val="64748B"/>
+                </a:solidFill>
+                <a:latin typeface="Arial" pitchFamily="34" charset="0"/>
+                <a:ea typeface="Arial" pitchFamily="34" charset="-122"/>
+                <a:cs typeface="Arial" pitchFamily="34" charset="-120"/>
+              </a:rPr>
+              <a:t>GD Solar  ·  Formação em Energia por Assinatura</a:t>
+            </a:r>
+            <a:endParaRPr lang="en-US" sz="900" dirty="0"/>
+          </a:p>
+        </p:txBody>
+      </p:sp>
+      <p:sp>
+        <p:nvSpPr>
+          <p:cNvPr id="5" name="Text 2"/>
+          <p:cNvSpPr/>
+          <p:nvPr/>
+        </p:nvSpPr>
+        <p:spPr>
+          <a:xfrm>
+            <a:off x="7132320" y="6528816"/>
+            <a:ext cx="4023360" cy="310896"/>
+          </a:xfrm>
+          <a:prstGeom prst="rect">
+            <a:avLst/>
+          </a:prstGeom>
+          <a:noFill/>
+          <a:ln/>
+        </p:spPr>
+        <p:txBody>
+          <a:bodyPr wrap="square" rtlCol="0" anchor="ctr"/>
+          <a:lstStyle/>
+          <a:p>
+            <a:pPr algn="r" indent="0" marL="0">
+              <a:buNone/>
+            </a:pPr>
+            <a:r>
+              <a:rPr lang="en-US" sz="900" dirty="0">
+                <a:solidFill>
+                  <a:srgbClr val="64748B"/>
+                </a:solidFill>
+                <a:latin typeface="Arial" pitchFamily="34" charset="0"/>
+                <a:ea typeface="Arial" pitchFamily="34" charset="-122"/>
+                <a:cs typeface="Arial" pitchFamily="34" charset="-120"/>
+              </a:rPr>
+              <a:t>M6 · Fechamento</a:t>
+            </a:r>
+            <a:endParaRPr lang="en-US" sz="900" dirty="0"/>
+          </a:p>
+        </p:txBody>
+      </p:sp>
+      <p:sp>
+        <p:nvSpPr>
+          <p:cNvPr id="6" name="Shape 3"/>
+          <p:cNvSpPr/>
+          <p:nvPr/>
+        </p:nvSpPr>
+        <p:spPr>
+          <a:xfrm>
+            <a:off x="548640" y="384048"/>
+            <a:ext cx="82296" cy="658368"/>
+          </a:xfrm>
+          <a:prstGeom prst="rect">
+            <a:avLst/>
+          </a:prstGeom>
+          <a:solidFill>
+            <a:srgbClr val="F7A23B"/>
+          </a:solidFill>
+          <a:ln/>
+        </p:spPr>
+      </p:sp>
+      <p:sp>
+        <p:nvSpPr>
+          <p:cNvPr id="7" name="Text 4"/>
+          <p:cNvSpPr/>
+          <p:nvPr/>
+        </p:nvSpPr>
+        <p:spPr>
+          <a:xfrm>
+            <a:off x="777240" y="292608"/>
+            <a:ext cx="10972800" cy="274320"/>
+          </a:xfrm>
+          <a:prstGeom prst="rect">
+            <a:avLst/>
+          </a:prstGeom>
+          <a:noFill/>
+          <a:ln/>
+        </p:spPr>
+        <p:txBody>
+          <a:bodyPr wrap="square" rtlCol="0" anchor="ctr"/>
+          <a:lstStyle/>
+          <a:p>
+            <a:pPr indent="0" marL="0">
+              <a:buNone/>
+            </a:pPr>
+            <a:r>
+              <a:rPr lang="en-US" sz="1000" b="1" spc="100" kern="0" dirty="0">
+                <a:solidFill>
+                  <a:srgbClr val="F7A23B"/>
+                </a:solidFill>
+                <a:latin typeface="Arial" pitchFamily="34" charset="0"/>
+                <a:ea typeface="Arial" pitchFamily="34" charset="-122"/>
+                <a:cs typeface="Arial" pitchFamily="34" charset="-120"/>
+              </a:rPr>
+              <a:t>FECHAMENTO DO MÓDULO</a:t>
+            </a:r>
+            <a:endParaRPr lang="en-US" sz="1000" dirty="0"/>
+          </a:p>
+        </p:txBody>
+      </p:sp>
+      <p:sp>
+        <p:nvSpPr>
+          <p:cNvPr id="8" name="Text 5"/>
+          <p:cNvSpPr/>
+          <p:nvPr/>
+        </p:nvSpPr>
+        <p:spPr>
+          <a:xfrm>
+            <a:off x="777240" y="530352"/>
+            <a:ext cx="10881360" cy="566928"/>
+          </a:xfrm>
+          <a:prstGeom prst="rect">
+            <a:avLst/>
+          </a:prstGeom>
+          <a:noFill/>
+          <a:ln/>
+        </p:spPr>
+        <p:txBody>
+          <a:bodyPr wrap="square" rtlCol="0" anchor="ctr">
+            <a:normAutofit/>
+          </a:bodyPr>
+          <a:lstStyle/>
+          <a:p>
+            <a:pPr indent="0" marL="0">
+              <a:buNone/>
+            </a:pPr>
+            <a:r>
+              <a:rPr lang="en-US" sz="2600" b="1" dirty="0">
+                <a:solidFill>
+                  <a:srgbClr val="1B3A6B"/>
+                </a:solidFill>
+                <a:latin typeface="Arial" pitchFamily="34" charset="0"/>
+                <a:ea typeface="Arial" pitchFamily="34" charset="-122"/>
+                <a:cs typeface="Arial" pitchFamily="34" charset="-120"/>
+              </a:rPr>
+              <a:t>Pratique e entregue</a:t>
+            </a:r>
+            <a:endParaRPr lang="en-US" sz="2600" dirty="0"/>
+          </a:p>
+        </p:txBody>
+      </p:sp>
+      <p:sp>
+        <p:nvSpPr>
+          <p:cNvPr id="9" name="Text 6"/>
+          <p:cNvSpPr/>
+          <p:nvPr/>
+        </p:nvSpPr>
+        <p:spPr>
+          <a:xfrm>
+            <a:off x="548640" y="1325880"/>
+            <a:ext cx="5394960" cy="411480"/>
+          </a:xfrm>
+          <a:prstGeom prst="rect">
+            <a:avLst/>
+          </a:prstGeom>
+          <a:noFill/>
+          <a:ln/>
+        </p:spPr>
+        <p:txBody>
+          <a:bodyPr wrap="square" rtlCol="0" anchor="ctr"/>
+          <a:lstStyle/>
+          <a:p>
+            <a:pPr indent="0" marL="0">
+              <a:buNone/>
+            </a:pPr>
+            <a:r>
+              <a:rPr lang="en-US" sz="1600" b="1" dirty="0">
+                <a:solidFill>
+                  <a:srgbClr val="1B3A6B"/>
+                </a:solidFill>
+                <a:latin typeface="Arial" pitchFamily="34" charset="0"/>
+                <a:ea typeface="Arial" pitchFamily="34" charset="-122"/>
+                <a:cs typeface="Arial" pitchFamily="34" charset="-120"/>
+              </a:rPr>
+              <a:t>Exercícios</a:t>
+            </a:r>
+            <a:endParaRPr lang="en-US" sz="1600" dirty="0"/>
+          </a:p>
+        </p:txBody>
+      </p:sp>
+      <p:sp>
+        <p:nvSpPr>
+          <p:cNvPr id="10" name="Text 7"/>
+          <p:cNvSpPr/>
+          <p:nvPr/>
+        </p:nvSpPr>
+        <p:spPr>
+          <a:xfrm>
+            <a:off x="548640" y="1783080"/>
+            <a:ext cx="5394960" cy="4480560"/>
+          </a:xfrm>
+          <a:prstGeom prst="rect">
+            <a:avLst/>
+          </a:prstGeom>
+          <a:noFill/>
+          <a:ln/>
+        </p:spPr>
+        <p:txBody>
+          <a:bodyPr wrap="square" rtlCol="0" anchor="t">
+            <a:normAutofit/>
+          </a:bodyPr>
+          <a:lstStyle/>
+          <a:p>
+            <a:pPr indent="0" marL="0">
+              <a:spcAft>
+                <a:spcPts val="800"/>
+              </a:spcAft>
+              <a:buNone/>
+            </a:pPr>
+            <a:r>
+              <a:rPr lang="en-US" sz="1600" dirty="0">
+                <a:solidFill>
+                  <a:srgbClr val="1F2937"/>
+                </a:solidFill>
+                <a:latin typeface="Arial" pitchFamily="34" charset="0"/>
+                <a:ea typeface="Arial" pitchFamily="34" charset="-122"/>
+                <a:cs typeface="Arial" pitchFamily="34" charset="-120"/>
+              </a:rPr>
+              <a:t>1. Usina com 60.000 kWh disponíveis; já alocados 55.300 kWh. Um cliente pede 5.000 kWh. O que acontece na plataforma e o que você faz?</a:t>
+            </a:r>
+            <a:endParaRPr lang="en-US" sz="1600" dirty="0"/>
+          </a:p>
+          <a:p>
+            <a:pPr indent="0" marL="0">
+              <a:spcAft>
+                <a:spcPts val="800"/>
+              </a:spcAft>
+              <a:buNone/>
+            </a:pPr>
+            <a:r>
+              <a:rPr lang="en-US" sz="1600" dirty="0">
+                <a:solidFill>
+                  <a:srgbClr val="1F2937"/>
+                </a:solidFill>
+                <a:latin typeface="Arial" pitchFamily="34" charset="0"/>
+                <a:ea typeface="Arial" pitchFamily="34" charset="-122"/>
+                <a:cs typeface="Arial" pitchFamily="34" charset="-120"/>
+              </a:rPr>
+              <a:t>2. Cliente sai em março. Quais são os três passos operacionais?</a:t>
+            </a:r>
+            <a:endParaRPr lang="en-US" sz="1600" dirty="0"/>
+          </a:p>
+          <a:p>
+            <a:pPr indent="0" marL="0">
+              <a:spcAft>
+                <a:spcPts val="800"/>
+              </a:spcAft>
+              <a:buNone/>
+            </a:pPr>
+            <a:r>
+              <a:rPr lang="en-US" sz="1600" dirty="0">
+                <a:solidFill>
+                  <a:srgbClr val="1F2937"/>
+                </a:solidFill>
+                <a:latin typeface="Arial" pitchFamily="34" charset="0"/>
+                <a:ea typeface="Arial" pitchFamily="34" charset="-122"/>
+                <a:cs typeface="Arial" pitchFamily="34" charset="-120"/>
+              </a:rPr>
+              <a:t>3. Liste os dados pessoais que a sua operação coleta e a finalidade de cada um.</a:t>
+            </a:r>
+            <a:endParaRPr lang="en-US" sz="1600" dirty="0"/>
+          </a:p>
+        </p:txBody>
+      </p:sp>
+      <p:sp>
+        <p:nvSpPr>
+          <p:cNvPr id="11" name="Shape 8"/>
+          <p:cNvSpPr/>
+          <p:nvPr/>
+        </p:nvSpPr>
+        <p:spPr>
+          <a:xfrm>
+            <a:off x="6172200" y="1325880"/>
+            <a:ext cx="5468112" cy="4937760"/>
+          </a:xfrm>
+          <a:prstGeom prst="roundRect">
+            <a:avLst>
+              <a:gd name="adj" fmla="val 1852"/>
+            </a:avLst>
+          </a:prstGeom>
+          <a:solidFill>
+            <a:srgbClr val="1B3A6B"/>
+          </a:solidFill>
+          <a:ln/>
+        </p:spPr>
+      </p:sp>
+      <p:sp>
+        <p:nvSpPr>
+          <p:cNvPr id="12" name="Text 9"/>
+          <p:cNvSpPr/>
+          <p:nvPr/>
+        </p:nvSpPr>
+        <p:spPr>
+          <a:xfrm>
+            <a:off x="6492240" y="1554480"/>
+            <a:ext cx="4828032" cy="4480560"/>
+          </a:xfrm>
+          <a:prstGeom prst="rect">
+            <a:avLst/>
+          </a:prstGeom>
+          <a:noFill/>
+          <a:ln/>
+        </p:spPr>
+        <p:txBody>
+          <a:bodyPr wrap="square" rtlCol="0" anchor="t">
+            <a:normAutofit/>
+          </a:bodyPr>
+          <a:lstStyle/>
+          <a:p>
+            <a:pPr indent="0" marL="0">
+              <a:buNone/>
+            </a:pPr>
+            <a:r>
+              <a:rPr lang="en-US" sz="1300" b="1" spc="100" kern="0" dirty="0">
+                <a:solidFill>
+                  <a:srgbClr val="F7A23B"/>
+                </a:solidFill>
+                <a:latin typeface="Arial" pitchFamily="34" charset="0"/>
+                <a:ea typeface="Arial" pitchFamily="34" charset="-122"/>
+                <a:cs typeface="Arial" pitchFamily="34" charset="-120"/>
+              </a:rPr>
+              <a:t>ENTREGÁVEL DO MÓDULO
+</a:t>
+            </a:r>
+            <a:pPr indent="0" marL="0">
+              <a:buNone/>
+            </a:pPr>
+            <a:r>
+              <a:rPr lang="en-US" sz="1600" dirty="0">
+                <a:solidFill>
+                  <a:srgbClr val="FFFFFF"/>
+                </a:solidFill>
+                <a:latin typeface="Arial" pitchFamily="34" charset="0"/>
+                <a:ea typeface="Arial" pitchFamily="34" charset="-122"/>
+                <a:cs typeface="Arial" pitchFamily="34" charset="-120"/>
+              </a:rPr>
+              <a:t>Usina alocada: os 5 clientes do M5 com contrato emitido, vínculo com a usina e convite enviado, mais 10 clientes adicionais (carregados pelo "checkpoint do M6" do laboratório ou cadastrados manualmente) até ocupar 90–98% da energia disponível, com nenhum cliente acima de 25% e a planilha de rateio pronta para a distribuidora.</a:t>
+            </a:r>
+            <a:endParaRPr lang="en-US" sz="1300" dirty="0"/>
+          </a:p>
+        </p:txBody>
+      </p:sp>
+      <p:sp>
+        <p:nvSpPr>
+          <p:cNvPr id="25" name="Slide Number Placeholder 0"/>
+          <p:cNvSpPr>
+            <a:spLocks noGrp="1"/>
+          </p:cNvSpPr>
+          <p:nvPr>
+            <p:ph type="sldNum" sz="quarter" idx="4294967295"/>
+          </p:nvPr>
+        </p:nvSpPr>
+        <p:spPr>
+          <a:xfrm>
+            <a:off x="11292840" y="6556248"/>
+            <a:ext cx="548640" cy="256032"/>
+          </a:xfrm>
+          <a:prstGeom prst="rect">
+            <a:avLst/>
+          </a:prstGeom>
+          <a:extLst>
+            <a:ext uri="{C572A759-6A51-4108-AA02-DFA0A04FC94B}">
+              <ma14:wrappingTextBoxFlag xmlns:ma14="http://schemas.microsoft.com/office/mac/drawingml/2011/main" val="0"/>
+            </a:ext>
+          </a:extLst>
+        </p:spPr>
+        <p:txBody>
+          <a:bodyPr/>
+          <a:lstStyle>
+            <a:lvl1pPr>
+              <a:defRPr sz="900">
+                <a:solidFill>
+                  <a:srgbClr val="1B3A6B"/>
+                </a:solidFill>
+                <a:latin typeface="Arial"/>
+                <a:ea typeface="Arial"/>
+                <a:cs typeface="Arial"/>
+              </a:defRPr>
+            </a:lvl1pPr>
+          </a:lstStyle>
+          <a:p>
+            <a:pPr algn="r"/>
+            <a:fld id="{F7021451-1387-4CA6-816F-3879F97B5CBC}" type="slidenum">
+              <a:rPr b="1" lang="en-US"/>
+              <a:t>34</a:t>
             </a:fld>
             <a:endParaRPr lang="en-US"/>
           </a:p>
@@ -18470,7 +24758,7 @@
         <p:spPr>
           <a:xfrm>
             <a:off x="548640" y="1325880"/>
-            <a:ext cx="5486400" cy="4937760"/>
+            <a:ext cx="5486400" cy="3977640"/>
           </a:xfrm>
           <a:prstGeom prst="rect">
             <a:avLst/>
@@ -18594,7 +24882,7 @@
         <p:spPr>
           <a:xfrm>
             <a:off x="6263640" y="1325880"/>
-            <a:ext cx="5486400" cy="4937760"/>
+            <a:ext cx="5486400" cy="3977640"/>
           </a:xfrm>
           <a:prstGeom prst="rect">
             <a:avLst/>
@@ -18706,6 +24994,92 @@
               <a:t>10. Dados pessoais (LGPD) e comunicação</a:t>
             </a:r>
             <a:endParaRPr lang="en-US" sz="1800" dirty="0"/>
+          </a:p>
+        </p:txBody>
+      </p:sp>
+      <p:sp>
+        <p:nvSpPr>
+          <p:cNvPr id="11" name="Shape 8"/>
+          <p:cNvSpPr/>
+          <p:nvPr/>
+        </p:nvSpPr>
+        <p:spPr>
+          <a:xfrm>
+            <a:off x="548640" y="5413248"/>
+            <a:ext cx="11091672" cy="868680"/>
+          </a:xfrm>
+          <a:prstGeom prst="roundRect">
+            <a:avLst>
+              <a:gd name="adj" fmla="val 8421"/>
+            </a:avLst>
+          </a:prstGeom>
+          <a:solidFill>
+            <a:srgbClr val="EEF3FA"/>
+          </a:solidFill>
+          <a:ln w="6350">
+            <a:solidFill>
+              <a:srgbClr val="D8E0EC"/>
+            </a:solidFill>
+            <a:prstDash val="solid"/>
+          </a:ln>
+        </p:spPr>
+      </p:sp>
+      <p:sp>
+        <p:nvSpPr>
+          <p:cNvPr id="12" name="Shape 9"/>
+          <p:cNvSpPr/>
+          <p:nvPr/>
+        </p:nvSpPr>
+        <p:spPr>
+          <a:xfrm>
+            <a:off x="548640" y="5413248"/>
+            <a:ext cx="91440" cy="868680"/>
+          </a:xfrm>
+          <a:prstGeom prst="rect">
+            <a:avLst/>
+          </a:prstGeom>
+          <a:solidFill>
+            <a:srgbClr val="F7A23B"/>
+          </a:solidFill>
+          <a:ln/>
+        </p:spPr>
+      </p:sp>
+      <p:sp>
+        <p:nvSpPr>
+          <p:cNvPr id="13" name="Text 10"/>
+          <p:cNvSpPr/>
+          <p:nvPr/>
+        </p:nvSpPr>
+        <p:spPr>
+          <a:xfrm>
+            <a:off x="777240" y="5458968"/>
+            <a:ext cx="10744200" cy="777240"/>
+          </a:xfrm>
+          <a:prstGeom prst="rect">
+            <a:avLst/>
+          </a:prstGeom>
+          <a:noFill/>
+          <a:ln/>
+        </p:spPr>
+        <p:txBody>
+          <a:bodyPr wrap="square" rtlCol="0" anchor="ctr"/>
+          <a:lstStyle/>
+          <a:p>
+            <a:pPr indent="0" marL="0">
+              <a:buNone/>
+            </a:pPr>
+            <a:r>
+              <a:rPr lang="en-US" sz="1500" dirty="0">
+                <a:solidFill>
+                  <a:srgbClr val="1F2937"/>
+                </a:solidFill>
+                <a:latin typeface="Arial" pitchFamily="34" charset="0"/>
+                <a:ea typeface="Arial" pitchFamily="34" charset="-122"/>
+                <a:cs typeface="Arial" pitchFamily="34" charset="-120"/>
+              </a:rPr>
+              <a:t>Das dez cláusulas da tela, três evitam a maioria dos conflitos: a fórmula do valor mensal com um exemplo, o cancelamento com aviso prévio e o reequilíbrio em caso de mudança regulatória.</a:t>
+            </a:r>
+            <a:endParaRPr lang="en-US" sz="1500" dirty="0"/>
           </a:p>
         </p:txBody>
       </p:sp>
@@ -19025,7 +25399,7 @@
         <p:spPr>
           <a:xfrm>
             <a:off x="548640" y="1325880"/>
-            <a:ext cx="3544824" cy="4892040"/>
+            <a:ext cx="3544824" cy="3977640"/>
           </a:xfrm>
           <a:prstGeom prst="roundRect">
             <a:avLst>
@@ -19118,7 +25492,7 @@
         <p:spPr>
           <a:xfrm>
             <a:off x="1325880" y="1435608"/>
-            <a:ext cx="2630424" cy="4672584"/>
+            <a:ext cx="2630424" cy="3758184"/>
           </a:xfrm>
           <a:prstGeom prst="rect">
             <a:avLst/>
@@ -19159,7 +25533,7 @@
         <p:spPr>
           <a:xfrm>
             <a:off x="4322064" y="1325880"/>
-            <a:ext cx="3544824" cy="4892040"/>
+            <a:ext cx="3544824" cy="3977640"/>
           </a:xfrm>
           <a:prstGeom prst="roundRect">
             <a:avLst>
@@ -19252,7 +25626,7 @@
         <p:spPr>
           <a:xfrm>
             <a:off x="5099304" y="1435608"/>
-            <a:ext cx="2630424" cy="4672584"/>
+            <a:ext cx="2630424" cy="3758184"/>
           </a:xfrm>
           <a:prstGeom prst="rect">
             <a:avLst/>
@@ -19293,7 +25667,7 @@
         <p:spPr>
           <a:xfrm>
             <a:off x="8095488" y="1325880"/>
-            <a:ext cx="3544824" cy="4892040"/>
+            <a:ext cx="3544824" cy="3977640"/>
           </a:xfrm>
           <a:prstGeom prst="roundRect">
             <a:avLst>
@@ -19386,7 +25760,7 @@
         <p:spPr>
           <a:xfrm>
             <a:off x="8872728" y="1435608"/>
-            <a:ext cx="2630424" cy="4672584"/>
+            <a:ext cx="2630424" cy="3758184"/>
           </a:xfrm>
           <a:prstGeom prst="rect">
             <a:avLst/>
@@ -19415,6 +25789,92 @@
               <a:t>Assinatura eletrônica com trilha de auditoria</a:t>
             </a:r>
             <a:endParaRPr lang="en-US" sz="1800" dirty="0"/>
+          </a:p>
+        </p:txBody>
+      </p:sp>
+      <p:sp>
+        <p:nvSpPr>
+          <p:cNvPr id="21" name="Shape 18"/>
+          <p:cNvSpPr/>
+          <p:nvPr/>
+        </p:nvSpPr>
+        <p:spPr>
+          <a:xfrm>
+            <a:off x="548640" y="5413248"/>
+            <a:ext cx="11091672" cy="868680"/>
+          </a:xfrm>
+          <a:prstGeom prst="roundRect">
+            <a:avLst>
+              <a:gd name="adj" fmla="val 8421"/>
+            </a:avLst>
+          </a:prstGeom>
+          <a:solidFill>
+            <a:srgbClr val="EEF3FA"/>
+          </a:solidFill>
+          <a:ln w="6350">
+            <a:solidFill>
+              <a:srgbClr val="D8E0EC"/>
+            </a:solidFill>
+            <a:prstDash val="solid"/>
+          </a:ln>
+        </p:spPr>
+      </p:sp>
+      <p:sp>
+        <p:nvSpPr>
+          <p:cNvPr id="22" name="Shape 19"/>
+          <p:cNvSpPr/>
+          <p:nvPr/>
+        </p:nvSpPr>
+        <p:spPr>
+          <a:xfrm>
+            <a:off x="548640" y="5413248"/>
+            <a:ext cx="91440" cy="868680"/>
+          </a:xfrm>
+          <a:prstGeom prst="rect">
+            <a:avLst/>
+          </a:prstGeom>
+          <a:solidFill>
+            <a:srgbClr val="F7A23B"/>
+          </a:solidFill>
+          <a:ln/>
+        </p:spPr>
+      </p:sp>
+      <p:sp>
+        <p:nvSpPr>
+          <p:cNvPr id="23" name="Text 20"/>
+          <p:cNvSpPr/>
+          <p:nvPr/>
+        </p:nvSpPr>
+        <p:spPr>
+          <a:xfrm>
+            <a:off x="777240" y="5458968"/>
+            <a:ext cx="10744200" cy="777240"/>
+          </a:xfrm>
+          <a:prstGeom prst="rect">
+            <a:avLst/>
+          </a:prstGeom>
+          <a:noFill/>
+          <a:ln/>
+        </p:spPr>
+        <p:txBody>
+          <a:bodyPr wrap="square" rtlCol="0" anchor="ctr"/>
+          <a:lstStyle/>
+          <a:p>
+            <a:pPr indent="0" marL="0">
+              <a:buNone/>
+            </a:pPr>
+            <a:r>
+              <a:rPr lang="en-US" sz="1500" dirty="0">
+                <a:solidFill>
+                  <a:srgbClr val="1F2937"/>
+                </a:solidFill>
+                <a:latin typeface="Arial" pitchFamily="34" charset="0"/>
+                <a:ea typeface="Arial" pitchFamily="34" charset="-122"/>
+                <a:cs typeface="Arial" pitchFamily="34" charset="-120"/>
+              </a:rPr>
+              <a:t>Use assinatura eletrônica e guarde os documentos organizados por cliente.</a:t>
+            </a:r>
+            <a:endParaRPr lang="en-US" sz="1500" dirty="0"/>
           </a:p>
         </p:txBody>
       </p:sp>
@@ -22340,6 +28800,92 @@
       </p:graphicFrame>
       <p:sp>
         <p:nvSpPr>
+          <p:cNvPr id="10" name="Shape 6"/>
+          <p:cNvSpPr/>
+          <p:nvPr/>
+        </p:nvSpPr>
+        <p:spPr>
+          <a:xfrm>
+            <a:off x="548640" y="5413248"/>
+            <a:ext cx="11091672" cy="868680"/>
+          </a:xfrm>
+          <a:prstGeom prst="roundRect">
+            <a:avLst>
+              <a:gd name="adj" fmla="val 8421"/>
+            </a:avLst>
+          </a:prstGeom>
+          <a:solidFill>
+            <a:srgbClr val="EEF3FA"/>
+          </a:solidFill>
+          <a:ln w="6350">
+            <a:solidFill>
+              <a:srgbClr val="D8E0EC"/>
+            </a:solidFill>
+            <a:prstDash val="solid"/>
+          </a:ln>
+        </p:spPr>
+      </p:sp>
+      <p:sp>
+        <p:nvSpPr>
+          <p:cNvPr id="11" name="Shape 7"/>
+          <p:cNvSpPr/>
+          <p:nvPr/>
+        </p:nvSpPr>
+        <p:spPr>
+          <a:xfrm>
+            <a:off x="548640" y="5413248"/>
+            <a:ext cx="91440" cy="868680"/>
+          </a:xfrm>
+          <a:prstGeom prst="rect">
+            <a:avLst/>
+          </a:prstGeom>
+          <a:solidFill>
+            <a:srgbClr val="F7A23B"/>
+          </a:solidFill>
+          <a:ln/>
+        </p:spPr>
+      </p:sp>
+      <p:sp>
+        <p:nvSpPr>
+          <p:cNvPr id="12" name="Text 8"/>
+          <p:cNvSpPr/>
+          <p:nvPr/>
+        </p:nvSpPr>
+        <p:spPr>
+          <a:xfrm>
+            <a:off x="777240" y="5458968"/>
+            <a:ext cx="10744200" cy="777240"/>
+          </a:xfrm>
+          <a:prstGeom prst="rect">
+            <a:avLst/>
+          </a:prstGeom>
+          <a:noFill/>
+          <a:ln/>
+        </p:spPr>
+        <p:txBody>
+          <a:bodyPr wrap="square" rtlCol="0" anchor="ctr"/>
+          <a:lstStyle/>
+          <a:p>
+            <a:pPr indent="0" marL="0">
+              <a:buNone/>
+            </a:pPr>
+            <a:r>
+              <a:rPr lang="en-US" sz="1500" dirty="0">
+                <a:solidFill>
+                  <a:srgbClr val="1F2937"/>
+                </a:solidFill>
+                <a:latin typeface="Arial" pitchFamily="34" charset="0"/>
+                <a:ea typeface="Arial" pitchFamily="34" charset="-122"/>
+                <a:cs typeface="Arial" pitchFamily="34" charset="-120"/>
+              </a:rPr>
+              <a:t>Colete só o necessário, com finalidade clara, como mostra a tabela.</a:t>
+            </a:r>
+            <a:endParaRPr lang="en-US" sz="1500" dirty="0"/>
+          </a:p>
+        </p:txBody>
+      </p:sp>
+      <p:sp>
+        <p:nvSpPr>
           <p:cNvPr id="25" name="Slide Number Placeholder 0"/>
           <p:cNvSpPr>
             <a:spLocks noGrp="1"/>
